--- a/AI竞赛讲解_手机银行核心业务_优化版_v10.pptx
+++ b/AI竞赛讲解_手机银行核心业务_优化版_v10.pptx
@@ -1,30 +1,30 @@
 
 <file path=ppt/presentation.xml><?xml version="1.0" encoding="utf-8"?>
-<p:presentation xmlns:a="http://schemas.openxmlformats.org/drawingml/2006/main" xmlns:r="http://schemas.openxmlformats.org/officeDocument/2006/relationships" xmlns:p="http://schemas.openxmlformats.org/presentationml/2006/main" saveSubsetFonts="1" autoCompressPictures="0">
+<p:presentation xmlns:a="http://schemas.openxmlformats.org/drawingml/2006/main" xmlns:r="http://schemas.openxmlformats.org/officeDocument/2006/relationships" xmlns:p="http://schemas.openxmlformats.org/presentationml/2006/main" autoCompressPictures="0">
   <p:sldMasterIdLst>
     <p:sldMasterId id="2147483648" r:id="rId1"/>
   </p:sldMasterIdLst>
+  <p:notesMasterIdLst>
+    <p:notesMasterId r:id="rId4"/>
+  </p:notesMasterIdLst>
   <p:sldIdLst>
-    <p:sldId id="256" r:id="rId2"/>
-    <p:sldId id="257" r:id="rId3"/>
-    <p:sldId id="258" r:id="rId4"/>
-    <p:sldId id="259" r:id="rId5"/>
-    <p:sldId id="260" r:id="rId6"/>
-    <p:sldId id="261" r:id="rId7"/>
-    <p:sldId id="262" r:id="rId8"/>
-    <p:sldId id="263" r:id="rId9"/>
-    <p:sldId id="264" r:id="rId10"/>
-    <p:sldId id="265" r:id="rId11"/>
-    <p:sldId id="266" r:id="rId12"/>
-    <p:sldId id="267" r:id="rId13"/>
-    <p:sldId id="268" r:id="rId14"/>
-    <p:sldId id="269" r:id="rId15"/>
+    <p:sldId id="256" r:id="rId3"/>
+    <p:sldId id="257" r:id="rId5"/>
+    <p:sldId id="258" r:id="rId6"/>
+    <p:sldId id="259" r:id="rId7"/>
+    <p:sldId id="260" r:id="rId8"/>
+    <p:sldId id="261" r:id="rId9"/>
+    <p:sldId id="262" r:id="rId10"/>
+    <p:sldId id="263" r:id="rId11"/>
+    <p:sldId id="264" r:id="rId12"/>
+    <p:sldId id="265" r:id="rId13"/>
+    <p:sldId id="266" r:id="rId14"/>
+    <p:sldId id="267" r:id="rId15"/>
+    <p:sldId id="268" r:id="rId16"/>
+    <p:sldId id="269" r:id="rId17"/>
   </p:sldIdLst>
-  <p:notesMasterIdLst>
-    <p:notesMasterId r:id="rId16"/>
-  </p:notesMasterIdLst>
-  <p:sldSz cx="12188952" cy="6858000"/>
-  <p:notesSz cx="6858000" cy="12188952"/>
+  <p:sldSz cx="12188825" cy="6858000"/>
+  <p:notesSz cx="6858000" cy="12188825"/>
   <p:defaultTextStyle>
     <a:lvl1pPr marL="0" algn="l" defTabSz="914400" rtl="0" eaLnBrk="1" latinLnBrk="0" hangingPunct="1">
       <a:defRPr sz="1800" kern="1200">
@@ -202,7 +202,6 @@
           <a:p>
             <a:fld id="{5282F153-3F37-0F45-9E97-73ACFA13230C}" type="datetimeFigureOut">
               <a:rPr lang="en-US"/>
-              <a:t>7/23/19</a:t>
             </a:fld>
             <a:endParaRPr lang="en-US"/>
           </a:p>
@@ -269,6 +268,7 @@
               <a:rPr lang="en-US"/>
               <a:t>Click to edit Master text styles</a:t>
             </a:r>
+            <a:endParaRPr lang="en-US"/>
           </a:p>
           <a:p>
             <a:pPr lvl="1"/>
@@ -276,6 +276,7 @@
               <a:rPr lang="en-US"/>
               <a:t>Second level</a:t>
             </a:r>
+            <a:endParaRPr lang="en-US"/>
           </a:p>
           <a:p>
             <a:pPr lvl="2"/>
@@ -283,6 +284,7 @@
               <a:rPr lang="en-US"/>
               <a:t>Third level</a:t>
             </a:r>
+            <a:endParaRPr lang="en-US"/>
           </a:p>
           <a:p>
             <a:pPr lvl="3"/>
@@ -290,6 +292,7 @@
               <a:rPr lang="en-US"/>
               <a:t>Fourth level</a:t>
             </a:r>
+            <a:endParaRPr lang="en-US"/>
           </a:p>
           <a:p>
             <a:pPr lvl="4"/>
@@ -297,6 +300,7 @@
               <a:rPr lang="en-US"/>
               <a:t>Fifth level</a:t>
             </a:r>
+            <a:endParaRPr lang="en-US"/>
           </a:p>
         </p:txBody>
       </p:sp>
@@ -360,18 +364,12 @@
           <a:p>
             <a:fld id="{CE5E9CC1-C706-0F49-92D6-E571CC5EEA8F}" type="slidenum">
               <a:rPr lang="en-US"/>
-              <a:t>‹#›</a:t>
             </a:fld>
             <a:endParaRPr lang="en-US"/>
           </a:p>
         </p:txBody>
       </p:sp>
     </p:spTree>
-    <p:extLst>
-      <p:ext uri="{BB962C8B-B14F-4D97-AF65-F5344CB8AC3E}">
-        <p14:creationId xmlns:p14="http://schemas.microsoft.com/office/powerpoint/2010/main" val="1024086991"/>
-      </p:ext>
-    </p:extLst>
   </p:cSld>
   <p:clrMap bg1="lt1" tx1="dk1" bg2="lt2" tx2="dk2" accent1="accent1" accent2="accent2" accent3="accent3" accent4="accent4" accent5="accent5" accent6="accent6" hlink="hlink" folHlink="folHlink"/>
   <p:notesStyle>
@@ -540,18 +538,12 @@
           <a:p>
             <a:fld id="{F7021451-1387-4CA6-816F-3879F97B5CBC}" type="slidenum">
               <a:rPr lang="en-US"/>
-              <a:t>1</a:t>
             </a:fld>
             <a:endParaRPr lang="en-US"/>
           </a:p>
         </p:txBody>
       </p:sp>
     </p:spTree>
-    <p:extLst>
-      <p:ext uri="{BB962C8B-B14F-4D97-AF65-F5344CB8AC3E}">
-        <p14:creationId xmlns:p14="http://schemas.microsoft.com/office/powerpoint/2010/main" val="1024086991"/>
-      </p:ext>
-    </p:extLst>
   </p:cSld>
   <p:clrMapOvr>
     <a:masterClrMapping/>
@@ -628,18 +620,12 @@
           <a:p>
             <a:fld id="{F7021451-1387-4CA6-816F-3879F97B5CBC}" type="slidenum">
               <a:rPr lang="en-US"/>
-              <a:t>10</a:t>
             </a:fld>
             <a:endParaRPr lang="en-US"/>
           </a:p>
         </p:txBody>
       </p:sp>
     </p:spTree>
-    <p:extLst>
-      <p:ext uri="{BB962C8B-B14F-4D97-AF65-F5344CB8AC3E}">
-        <p14:creationId xmlns:p14="http://schemas.microsoft.com/office/powerpoint/2010/main" val="1024086991"/>
-      </p:ext>
-    </p:extLst>
   </p:cSld>
   <p:clrMapOvr>
     <a:masterClrMapping/>
@@ -716,18 +702,12 @@
           <a:p>
             <a:fld id="{F7021451-1387-4CA6-816F-3879F97B5CBC}" type="slidenum">
               <a:rPr lang="en-US"/>
-              <a:t>11</a:t>
             </a:fld>
             <a:endParaRPr lang="en-US"/>
           </a:p>
         </p:txBody>
       </p:sp>
     </p:spTree>
-    <p:extLst>
-      <p:ext uri="{BB962C8B-B14F-4D97-AF65-F5344CB8AC3E}">
-        <p14:creationId xmlns:p14="http://schemas.microsoft.com/office/powerpoint/2010/main" val="1024086991"/>
-      </p:ext>
-    </p:extLst>
   </p:cSld>
   <p:clrMapOvr>
     <a:masterClrMapping/>
@@ -804,18 +784,12 @@
           <a:p>
             <a:fld id="{F7021451-1387-4CA6-816F-3879F97B5CBC}" type="slidenum">
               <a:rPr lang="en-US"/>
-              <a:t>12</a:t>
             </a:fld>
             <a:endParaRPr lang="en-US"/>
           </a:p>
         </p:txBody>
       </p:sp>
     </p:spTree>
-    <p:extLst>
-      <p:ext uri="{BB962C8B-B14F-4D97-AF65-F5344CB8AC3E}">
-        <p14:creationId xmlns:p14="http://schemas.microsoft.com/office/powerpoint/2010/main" val="1024086991"/>
-      </p:ext>
-    </p:extLst>
   </p:cSld>
   <p:clrMapOvr>
     <a:masterClrMapping/>
@@ -892,18 +866,12 @@
           <a:p>
             <a:fld id="{F7021451-1387-4CA6-816F-3879F97B5CBC}" type="slidenum">
               <a:rPr lang="en-US"/>
-              <a:t>13</a:t>
             </a:fld>
             <a:endParaRPr lang="en-US"/>
           </a:p>
         </p:txBody>
       </p:sp>
     </p:spTree>
-    <p:extLst>
-      <p:ext uri="{BB962C8B-B14F-4D97-AF65-F5344CB8AC3E}">
-        <p14:creationId xmlns:p14="http://schemas.microsoft.com/office/powerpoint/2010/main" val="1024086991"/>
-      </p:ext>
-    </p:extLst>
   </p:cSld>
   <p:clrMapOvr>
     <a:masterClrMapping/>
@@ -980,18 +948,12 @@
           <a:p>
             <a:fld id="{F7021451-1387-4CA6-816F-3879F97B5CBC}" type="slidenum">
               <a:rPr lang="en-US"/>
-              <a:t>14</a:t>
             </a:fld>
             <a:endParaRPr lang="en-US"/>
           </a:p>
         </p:txBody>
       </p:sp>
     </p:spTree>
-    <p:extLst>
-      <p:ext uri="{BB962C8B-B14F-4D97-AF65-F5344CB8AC3E}">
-        <p14:creationId xmlns:p14="http://schemas.microsoft.com/office/powerpoint/2010/main" val="1024086991"/>
-      </p:ext>
-    </p:extLst>
   </p:cSld>
   <p:clrMapOvr>
     <a:masterClrMapping/>
@@ -1068,18 +1030,12 @@
           <a:p>
             <a:fld id="{F7021451-1387-4CA6-816F-3879F97B5CBC}" type="slidenum">
               <a:rPr lang="en-US"/>
-              <a:t>2</a:t>
             </a:fld>
             <a:endParaRPr lang="en-US"/>
           </a:p>
         </p:txBody>
       </p:sp>
     </p:spTree>
-    <p:extLst>
-      <p:ext uri="{BB962C8B-B14F-4D97-AF65-F5344CB8AC3E}">
-        <p14:creationId xmlns:p14="http://schemas.microsoft.com/office/powerpoint/2010/main" val="1024086991"/>
-      </p:ext>
-    </p:extLst>
   </p:cSld>
   <p:clrMapOvr>
     <a:masterClrMapping/>
@@ -1156,18 +1112,12 @@
           <a:p>
             <a:fld id="{F7021451-1387-4CA6-816F-3879F97B5CBC}" type="slidenum">
               <a:rPr lang="en-US"/>
-              <a:t>3</a:t>
             </a:fld>
             <a:endParaRPr lang="en-US"/>
           </a:p>
         </p:txBody>
       </p:sp>
     </p:spTree>
-    <p:extLst>
-      <p:ext uri="{BB962C8B-B14F-4D97-AF65-F5344CB8AC3E}">
-        <p14:creationId xmlns:p14="http://schemas.microsoft.com/office/powerpoint/2010/main" val="1024086991"/>
-      </p:ext>
-    </p:extLst>
   </p:cSld>
   <p:clrMapOvr>
     <a:masterClrMapping/>
@@ -1244,18 +1194,12 @@
           <a:p>
             <a:fld id="{F7021451-1387-4CA6-816F-3879F97B5CBC}" type="slidenum">
               <a:rPr lang="en-US"/>
-              <a:t>4</a:t>
             </a:fld>
             <a:endParaRPr lang="en-US"/>
           </a:p>
         </p:txBody>
       </p:sp>
     </p:spTree>
-    <p:extLst>
-      <p:ext uri="{BB962C8B-B14F-4D97-AF65-F5344CB8AC3E}">
-        <p14:creationId xmlns:p14="http://schemas.microsoft.com/office/powerpoint/2010/main" val="1024086991"/>
-      </p:ext>
-    </p:extLst>
   </p:cSld>
   <p:clrMapOvr>
     <a:masterClrMapping/>
@@ -1332,18 +1276,12 @@
           <a:p>
             <a:fld id="{F7021451-1387-4CA6-816F-3879F97B5CBC}" type="slidenum">
               <a:rPr lang="en-US"/>
-              <a:t>5</a:t>
             </a:fld>
             <a:endParaRPr lang="en-US"/>
           </a:p>
         </p:txBody>
       </p:sp>
     </p:spTree>
-    <p:extLst>
-      <p:ext uri="{BB962C8B-B14F-4D97-AF65-F5344CB8AC3E}">
-        <p14:creationId xmlns:p14="http://schemas.microsoft.com/office/powerpoint/2010/main" val="1024086991"/>
-      </p:ext>
-    </p:extLst>
   </p:cSld>
   <p:clrMapOvr>
     <a:masterClrMapping/>
@@ -1420,18 +1358,12 @@
           <a:p>
             <a:fld id="{F7021451-1387-4CA6-816F-3879F97B5CBC}" type="slidenum">
               <a:rPr lang="en-US"/>
-              <a:t>6</a:t>
             </a:fld>
             <a:endParaRPr lang="en-US"/>
           </a:p>
         </p:txBody>
       </p:sp>
     </p:spTree>
-    <p:extLst>
-      <p:ext uri="{BB962C8B-B14F-4D97-AF65-F5344CB8AC3E}">
-        <p14:creationId xmlns:p14="http://schemas.microsoft.com/office/powerpoint/2010/main" val="1024086991"/>
-      </p:ext>
-    </p:extLst>
   </p:cSld>
   <p:clrMapOvr>
     <a:masterClrMapping/>
@@ -1508,18 +1440,12 @@
           <a:p>
             <a:fld id="{F7021451-1387-4CA6-816F-3879F97B5CBC}" type="slidenum">
               <a:rPr lang="en-US"/>
-              <a:t>7</a:t>
             </a:fld>
             <a:endParaRPr lang="en-US"/>
           </a:p>
         </p:txBody>
       </p:sp>
     </p:spTree>
-    <p:extLst>
-      <p:ext uri="{BB962C8B-B14F-4D97-AF65-F5344CB8AC3E}">
-        <p14:creationId xmlns:p14="http://schemas.microsoft.com/office/powerpoint/2010/main" val="1024086991"/>
-      </p:ext>
-    </p:extLst>
   </p:cSld>
   <p:clrMapOvr>
     <a:masterClrMapping/>
@@ -1596,18 +1522,12 @@
           <a:p>
             <a:fld id="{F7021451-1387-4CA6-816F-3879F97B5CBC}" type="slidenum">
               <a:rPr lang="en-US"/>
-              <a:t>8</a:t>
             </a:fld>
             <a:endParaRPr lang="en-US"/>
           </a:p>
         </p:txBody>
       </p:sp>
     </p:spTree>
-    <p:extLst>
-      <p:ext uri="{BB962C8B-B14F-4D97-AF65-F5344CB8AC3E}">
-        <p14:creationId xmlns:p14="http://schemas.microsoft.com/office/powerpoint/2010/main" val="1024086991"/>
-      </p:ext>
-    </p:extLst>
   </p:cSld>
   <p:clrMapOvr>
     <a:masterClrMapping/>
@@ -1684,18 +1604,12 @@
           <a:p>
             <a:fld id="{F7021451-1387-4CA6-816F-3879F97B5CBC}" type="slidenum">
               <a:rPr lang="en-US"/>
-              <a:t>9</a:t>
             </a:fld>
             <a:endParaRPr lang="en-US"/>
           </a:p>
         </p:txBody>
       </p:sp>
     </p:spTree>
-    <p:extLst>
-      <p:ext uri="{BB962C8B-B14F-4D97-AF65-F5344CB8AC3E}">
-        <p14:creationId xmlns:p14="http://schemas.microsoft.com/office/powerpoint/2010/main" val="1024086991"/>
-      </p:ext>
-    </p:extLst>
   </p:cSld>
   <p:clrMapOvr>
     <a:masterClrMapping/>
@@ -1736,6 +1650,11 @@
 <file path=ppt/slideMasters/slideMaster1.xml><?xml version="1.0" encoding="utf-8"?>
 <p:sldMaster xmlns:a="http://schemas.openxmlformats.org/drawingml/2006/main" xmlns:r="http://schemas.openxmlformats.org/officeDocument/2006/relationships" xmlns:p="http://schemas.openxmlformats.org/presentationml/2006/main">
   <p:cSld>
+    <p:bg>
+      <p:bgRef idx="1001">
+        <a:schemeClr val="bg1"/>
+      </p:bgRef>
+    </p:bg>
     <p:spTree>
       <p:nvGrpSpPr>
         <p:cNvPr id="1" name=""/>
@@ -1779,7 +1698,7 @@
         <a:spcBef>
           <a:spcPct val="20000"/>
         </a:spcBef>
-        <a:buFont typeface="Arial" pitchFamily="34" charset="0"/>
+        <a:buFont typeface="Arial" panose="020B0604020202020204" pitchFamily="34" charset="0"/>
         <a:buChar char="•"/>
         <a:defRPr sz="3200" kern="1200">
           <a:solidFill>
@@ -1794,7 +1713,7 @@
         <a:spcBef>
           <a:spcPct val="20000"/>
         </a:spcBef>
-        <a:buFont typeface="Arial" pitchFamily="34" charset="0"/>
+        <a:buFont typeface="Arial" panose="020B0604020202020204" pitchFamily="34" charset="0"/>
         <a:buChar char="–"/>
         <a:defRPr sz="2800" kern="1200">
           <a:solidFill>
@@ -1809,7 +1728,7 @@
         <a:spcBef>
           <a:spcPct val="20000"/>
         </a:spcBef>
-        <a:buFont typeface="Arial" pitchFamily="34" charset="0"/>
+        <a:buFont typeface="Arial" panose="020B0604020202020204" pitchFamily="34" charset="0"/>
         <a:buChar char="•"/>
         <a:defRPr sz="2400" kern="1200">
           <a:solidFill>
@@ -1824,7 +1743,7 @@
         <a:spcBef>
           <a:spcPct val="20000"/>
         </a:spcBef>
-        <a:buFont typeface="Arial" pitchFamily="34" charset="0"/>
+        <a:buFont typeface="Arial" panose="020B0604020202020204" pitchFamily="34" charset="0"/>
         <a:buChar char="–"/>
         <a:defRPr sz="2000" kern="1200">
           <a:solidFill>
@@ -1839,7 +1758,7 @@
         <a:spcBef>
           <a:spcPct val="20000"/>
         </a:spcBef>
-        <a:buFont typeface="Arial" pitchFamily="34" charset="0"/>
+        <a:buFont typeface="Arial" panose="020B0604020202020204" pitchFamily="34" charset="0"/>
         <a:buChar char="»"/>
         <a:defRPr sz="2000" kern="1200">
           <a:solidFill>
@@ -1854,7 +1773,7 @@
         <a:spcBef>
           <a:spcPct val="20000"/>
         </a:spcBef>
-        <a:buFont typeface="Arial" pitchFamily="34" charset="0"/>
+        <a:buFont typeface="Arial" panose="020B0604020202020204" pitchFamily="34" charset="0"/>
         <a:buChar char="•"/>
         <a:defRPr sz="2000" kern="1200">
           <a:solidFill>
@@ -1869,7 +1788,7 @@
         <a:spcBef>
           <a:spcPct val="20000"/>
         </a:spcBef>
-        <a:buFont typeface="Arial" pitchFamily="34" charset="0"/>
+        <a:buFont typeface="Arial" panose="020B0604020202020204" pitchFamily="34" charset="0"/>
         <a:buChar char="•"/>
         <a:defRPr sz="2000" kern="1200">
           <a:solidFill>
@@ -1884,7 +1803,7 @@
         <a:spcBef>
           <a:spcPct val="20000"/>
         </a:spcBef>
-        <a:buFont typeface="Arial" pitchFamily="34" charset="0"/>
+        <a:buFont typeface="Arial" panose="020B0604020202020204" pitchFamily="34" charset="0"/>
         <a:buChar char="•"/>
         <a:defRPr sz="2000" kern="1200">
           <a:solidFill>
@@ -1899,7 +1818,7 @@
         <a:spcBef>
           <a:spcPct val="20000"/>
         </a:spcBef>
-        <a:buFont typeface="Arial" pitchFamily="34" charset="0"/>
+        <a:buFont typeface="Arial" panose="020B0604020202020204" pitchFamily="34" charset="0"/>
         <a:buChar char="•"/>
         <a:defRPr sz="2000" kern="1200">
           <a:solidFill>
@@ -2012,12 +1931,13 @@
 
 <file path=ppt/slides/slide1.xml><?xml version="1.0" encoding="utf-8"?>
 <p:sld xmlns:a="http://schemas.openxmlformats.org/drawingml/2006/main" xmlns:r="http://schemas.openxmlformats.org/officeDocument/2006/relationships" xmlns:p="http://schemas.openxmlformats.org/presentationml/2006/main">
-  <p:cSld name="Slide 1">
+  <p:cSld>
     <p:bg>
       <p:bgPr>
         <a:solidFill>
           <a:srgbClr val="1A3A5C"/>
         </a:solidFill>
+        <a:effectLst/>
       </p:bgPr>
     </p:bg>
     <p:spTree>
@@ -2051,7 +1971,6 @@
           <a:solidFill>
             <a:srgbClr val="4A90E2"/>
           </a:solidFill>
-          <a:ln/>
         </p:spPr>
       </p:sp>
       <p:sp>
@@ -2069,13 +1988,12 @@
             <a:avLst/>
           </a:prstGeom>
           <a:noFill/>
-          <a:ln/>
-        </p:spPr>
-        <p:txBody>
-          <a:bodyPr wrap="square" rtlCol="0" anchor="ctr"/>
-          <a:lstStyle/>
-          <a:p>
-            <a:pPr algn="ctr" indent="0" marL="0">
+        </p:spPr>
+        <p:txBody>
+          <a:bodyPr wrap="square" rtlCol="0" anchor="ctr"/>
+          <a:lstStyle/>
+          <a:p>
+            <a:pPr marL="0" indent="0" algn="ctr">
               <a:buNone/>
             </a:pPr>
             <a:r>
@@ -2083,9 +2001,9 @@
                 <a:solidFill>
                   <a:srgbClr val="FFFFFF"/>
                 </a:solidFill>
-                <a:latin typeface="Arial" pitchFamily="34" charset="0"/>
-                <a:ea typeface="Arial" pitchFamily="34" charset="-122"/>
-                <a:cs typeface="Arial" pitchFamily="34" charset="-120"/>
+                <a:latin typeface="Arial" panose="020B0604020202020204" pitchFamily="34" charset="0"/>
+                <a:ea typeface="Arial" panose="020B0604020202020204" pitchFamily="34" charset="-122"/>
+                <a:cs typeface="Arial" panose="020B0604020202020204" pitchFamily="34" charset="-120"/>
               </a:rPr>
               <a:t>源于竞赛，不止于竞赛</a:t>
             </a:r>
@@ -2108,13 +2026,12 @@
             <a:avLst/>
           </a:prstGeom>
           <a:noFill/>
-          <a:ln/>
-        </p:spPr>
-        <p:txBody>
-          <a:bodyPr wrap="square" rtlCol="0" anchor="ctr"/>
-          <a:lstStyle/>
-          <a:p>
-            <a:pPr algn="ctr" indent="0" marL="0">
+        </p:spPr>
+        <p:txBody>
+          <a:bodyPr wrap="square" rtlCol="0" anchor="ctr"/>
+          <a:lstStyle/>
+          <a:p>
+            <a:pPr marL="0" indent="0" algn="ctr">
               <a:buNone/>
             </a:pPr>
             <a:r>
@@ -2122,9 +2039,9 @@
                 <a:solidFill>
                   <a:srgbClr val="FFFFFF"/>
                 </a:solidFill>
-                <a:latin typeface="Arial" pitchFamily="34" charset="0"/>
-                <a:ea typeface="Arial" pitchFamily="34" charset="-122"/>
-                <a:cs typeface="Arial" pitchFamily="34" charset="-120"/>
+                <a:latin typeface="Arial" panose="020B0604020202020204" pitchFamily="34" charset="0"/>
+                <a:ea typeface="Arial" panose="020B0604020202020204" pitchFamily="34" charset="-122"/>
+                <a:cs typeface="Arial" panose="020B0604020202020204" pitchFamily="34" charset="-120"/>
               </a:rPr>
               <a:t>AI原生研发的认知跃迁</a:t>
             </a:r>
@@ -2149,7 +2066,6 @@
           <a:solidFill>
             <a:srgbClr val="4A90E2"/>
           </a:solidFill>
-          <a:ln/>
         </p:spPr>
       </p:sp>
       <p:sp>
@@ -2167,13 +2083,12 @@
             <a:avLst/>
           </a:prstGeom>
           <a:noFill/>
-          <a:ln/>
-        </p:spPr>
-        <p:txBody>
-          <a:bodyPr wrap="square" rtlCol="0" anchor="ctr"/>
-          <a:lstStyle/>
-          <a:p>
-            <a:pPr algn="ctr" indent="0" marL="0">
+        </p:spPr>
+        <p:txBody>
+          <a:bodyPr wrap="square" rtlCol="0" anchor="ctr"/>
+          <a:lstStyle/>
+          <a:p>
+            <a:pPr marL="0" indent="0" algn="ctr">
               <a:buNone/>
             </a:pPr>
             <a:r>
@@ -2181,9 +2096,9 @@
                 <a:solidFill>
                   <a:srgbClr val="AABBCC"/>
                 </a:solidFill>
-                <a:latin typeface="Arial" pitchFamily="34" charset="0"/>
-                <a:ea typeface="Arial" pitchFamily="34" charset="-122"/>
-                <a:cs typeface="Arial" pitchFamily="34" charset="-120"/>
+                <a:latin typeface="Arial" panose="020B0604020202020204" pitchFamily="34" charset="0"/>
+                <a:ea typeface="Arial" panose="020B0604020202020204" pitchFamily="34" charset="-122"/>
+                <a:cs typeface="Arial" panose="020B0604020202020204" pitchFamily="34" charset="-120"/>
               </a:rPr>
               <a:t>以手机银行为载体的调教实录</a:t>
             </a:r>
@@ -2206,13 +2121,12 @@
             <a:avLst/>
           </a:prstGeom>
           <a:noFill/>
-          <a:ln/>
-        </p:spPr>
-        <p:txBody>
-          <a:bodyPr wrap="square" rtlCol="0" anchor="ctr"/>
-          <a:lstStyle/>
-          <a:p>
-            <a:pPr algn="ctr" indent="0" marL="0">
+        </p:spPr>
+        <p:txBody>
+          <a:bodyPr wrap="square" rtlCol="0" anchor="ctr"/>
+          <a:lstStyle/>
+          <a:p>
+            <a:pPr marL="0" indent="0" algn="ctr">
               <a:buNone/>
             </a:pPr>
             <a:r>
@@ -2220,9 +2134,9 @@
                 <a:solidFill>
                   <a:srgbClr val="8899AA"/>
                 </a:solidFill>
-                <a:latin typeface="Arial" pitchFamily="34" charset="0"/>
-                <a:ea typeface="Arial" pitchFamily="34" charset="-122"/>
-                <a:cs typeface="Arial" pitchFamily="34" charset="-120"/>
+                <a:latin typeface="Arial" panose="020B0604020202020204" pitchFamily="34" charset="0"/>
+                <a:ea typeface="Arial" panose="020B0604020202020204" pitchFamily="34" charset="-122"/>
+                <a:cs typeface="Arial" panose="020B0604020202020204" pitchFamily="34" charset="-120"/>
               </a:rPr>
               <a:t>手机银行核心业务系统 · 项目展示</a:t>
             </a:r>
@@ -2240,12 +2154,13 @@
 
 <file path=ppt/slides/slide10.xml><?xml version="1.0" encoding="utf-8"?>
 <p:sld xmlns:a="http://schemas.openxmlformats.org/drawingml/2006/main" xmlns:r="http://schemas.openxmlformats.org/officeDocument/2006/relationships" xmlns:p="http://schemas.openxmlformats.org/presentationml/2006/main">
-  <p:cSld name="Slide 10">
+  <p:cSld>
     <p:bg>
       <p:bgPr>
         <a:solidFill>
           <a:srgbClr val="FFFFFF"/>
         </a:solidFill>
+        <a:effectLst/>
       </p:bgPr>
     </p:bg>
     <p:spTree>
@@ -2279,7 +2194,6 @@
           <a:solidFill>
             <a:srgbClr val="4A90E2"/>
           </a:solidFill>
-          <a:ln/>
         </p:spPr>
       </p:sp>
       <p:sp>
@@ -2297,13 +2211,12 @@
             <a:avLst/>
           </a:prstGeom>
           <a:noFill/>
-          <a:ln/>
-        </p:spPr>
-        <p:txBody>
-          <a:bodyPr wrap="square" rtlCol="0" anchor="ctr"/>
-          <a:lstStyle/>
-          <a:p>
-            <a:pPr indent="0" marL="0">
+        </p:spPr>
+        <p:txBody>
+          <a:bodyPr wrap="square" rtlCol="0" anchor="ctr"/>
+          <a:lstStyle/>
+          <a:p>
+            <a:pPr marL="0" indent="0">
               <a:buNone/>
             </a:pPr>
             <a:r>
@@ -2311,9 +2224,9 @@
                 <a:solidFill>
                   <a:srgbClr val="2C3E50"/>
                 </a:solidFill>
-                <a:latin typeface="Arial" pitchFamily="34" charset="0"/>
-                <a:ea typeface="Arial" pitchFamily="34" charset="-122"/>
-                <a:cs typeface="Arial" pitchFamily="34" charset="-120"/>
+                <a:latin typeface="Arial" panose="020B0604020202020204" pitchFamily="34" charset="0"/>
+                <a:ea typeface="Arial" panose="020B0604020202020204" pitchFamily="34" charset="-122"/>
+                <a:cs typeface="Arial" panose="020B0604020202020204" pitchFamily="34" charset="-120"/>
               </a:rPr>
               <a:t>真实挑战</a:t>
             </a:r>
@@ -2336,13 +2249,12 @@
             <a:avLst/>
           </a:prstGeom>
           <a:noFill/>
-          <a:ln/>
-        </p:spPr>
-        <p:txBody>
-          <a:bodyPr wrap="square" rtlCol="0" anchor="ctr"/>
-          <a:lstStyle/>
-          <a:p>
-            <a:pPr algn="r" indent="0" marL="0">
+        </p:spPr>
+        <p:txBody>
+          <a:bodyPr wrap="square" rtlCol="0" anchor="ctr"/>
+          <a:lstStyle/>
+          <a:p>
+            <a:pPr marL="0" indent="0" algn="r">
               <a:buNone/>
             </a:pPr>
             <a:r>
@@ -2350,9 +2262,9 @@
                 <a:solidFill>
                   <a:srgbClr val="7F8C8D"/>
                 </a:solidFill>
-                <a:latin typeface="Arial" pitchFamily="34" charset="0"/>
-                <a:ea typeface="Arial" pitchFamily="34" charset="-122"/>
-                <a:cs typeface="Arial" pitchFamily="34" charset="-120"/>
+                <a:latin typeface="Arial" panose="020B0604020202020204" pitchFamily="34" charset="0"/>
+                <a:ea typeface="Arial" panose="020B0604020202020204" pitchFamily="34" charset="-122"/>
+                <a:cs typeface="Arial" panose="020B0604020202020204" pitchFamily="34" charset="-120"/>
               </a:rPr>
               <a:t>调教中踩过的坑</a:t>
             </a:r>
@@ -2377,7 +2289,6 @@
           <a:solidFill>
             <a:srgbClr val="4A90E2"/>
           </a:solidFill>
-          <a:ln/>
         </p:spPr>
       </p:sp>
       <p:sp>
@@ -2422,7 +2333,6 @@
           <a:solidFill>
             <a:srgbClr val="4A90E2"/>
           </a:solidFill>
-          <a:ln/>
         </p:spPr>
       </p:sp>
       <p:sp>
@@ -2440,13 +2350,12 @@
             <a:avLst/>
           </a:prstGeom>
           <a:noFill/>
-          <a:ln/>
-        </p:spPr>
-        <p:txBody>
-          <a:bodyPr wrap="square" rtlCol="0" anchor="ctr"/>
-          <a:lstStyle/>
-          <a:p>
-            <a:pPr algn="ctr" indent="0" marL="0">
+        </p:spPr>
+        <p:txBody>
+          <a:bodyPr wrap="square" rtlCol="0" anchor="ctr"/>
+          <a:lstStyle/>
+          <a:p>
+            <a:pPr marL="0" indent="0" algn="ctr">
               <a:buNone/>
             </a:pPr>
             <a:r>
@@ -2454,9 +2363,9 @@
                 <a:solidFill>
                   <a:srgbClr val="FFFFFF"/>
                 </a:solidFill>
-                <a:latin typeface="Arial" pitchFamily="34" charset="0"/>
-                <a:ea typeface="Arial" pitchFamily="34" charset="-122"/>
-                <a:cs typeface="Arial" pitchFamily="34" charset="-120"/>
+                <a:latin typeface="Arial" panose="020B0604020202020204" pitchFamily="34" charset="0"/>
+                <a:ea typeface="Arial" panose="020B0604020202020204" pitchFamily="34" charset="-122"/>
+                <a:cs typeface="Arial" panose="020B0604020202020204" pitchFamily="34" charset="-120"/>
               </a:rPr>
               <a:t>A AI意图识别精度</a:t>
             </a:r>
@@ -2479,13 +2388,12 @@
             <a:avLst/>
           </a:prstGeom>
           <a:noFill/>
-          <a:ln/>
-        </p:spPr>
-        <p:txBody>
-          <a:bodyPr wrap="square" rtlCol="0" anchor="ctr"/>
-          <a:lstStyle/>
-          <a:p>
-            <a:pPr indent="0" marL="0">
+        </p:spPr>
+        <p:txBody>
+          <a:bodyPr wrap="square" rtlCol="0" anchor="ctr"/>
+          <a:lstStyle/>
+          <a:p>
+            <a:pPr marL="0" indent="0">
               <a:buNone/>
             </a:pPr>
             <a:r>
@@ -2493,9 +2401,9 @@
                 <a:solidFill>
                   <a:srgbClr val="E74C3C"/>
                 </a:solidFill>
-                <a:latin typeface="Arial" pitchFamily="34" charset="0"/>
-                <a:ea typeface="Arial" pitchFamily="34" charset="-122"/>
-                <a:cs typeface="Arial" pitchFamily="34" charset="-120"/>
+                <a:latin typeface="Arial" panose="020B0604020202020204" pitchFamily="34" charset="0"/>
+                <a:ea typeface="Arial" panose="020B0604020202020204" pitchFamily="34" charset="-122"/>
+                <a:cs typeface="Arial" panose="020B0604020202020204" pitchFamily="34" charset="-120"/>
               </a:rPr>
               <a:t>挑战</a:t>
             </a:r>
@@ -2520,7 +2428,6 @@
           <a:solidFill>
             <a:srgbClr val="FDEDEC"/>
           </a:solidFill>
-          <a:ln/>
         </p:spPr>
       </p:sp>
       <p:sp>
@@ -2538,13 +2445,12 @@
             <a:avLst/>
           </a:prstGeom>
           <a:noFill/>
-          <a:ln/>
         </p:spPr>
         <p:txBody>
           <a:bodyPr wrap="square" rtlCol="0" anchor="t"/>
           <a:lstStyle/>
           <a:p>
-            <a:pPr indent="0" marL="0">
+            <a:pPr marL="0" indent="0">
               <a:lnSpc>
                 <a:spcPct val="140000"/>
               </a:lnSpc>
@@ -2555,9 +2461,9 @@
                 <a:solidFill>
                   <a:srgbClr val="34495E"/>
                 </a:solidFill>
-                <a:latin typeface="Arial" pitchFamily="34" charset="0"/>
-                <a:ea typeface="Arial" pitchFamily="34" charset="-122"/>
-                <a:cs typeface="Arial" pitchFamily="34" charset="-120"/>
+                <a:latin typeface="Arial" panose="020B0604020202020204" pitchFamily="34" charset="0"/>
+                <a:ea typeface="Arial" panose="020B0604020202020204" pitchFamily="34" charset="-122"/>
+                <a:cs typeface="Arial" panose="020B0604020202020204" pitchFamily="34" charset="-120"/>
               </a:rPr>
               <a:t>用户说“查余额”、“看看我还有多少钱”、“我卡里还有多少”——同一个意图，三种表达。写了5版正则、试了8组关键词，第9版才覆盖90%的输入。最难的不是让AI理解，而是穷举人类可能的所有说法。</a:t>
             </a:r>
@@ -2580,13 +2486,12 @@
             <a:avLst/>
           </a:prstGeom>
           <a:noFill/>
-          <a:ln/>
-        </p:spPr>
-        <p:txBody>
-          <a:bodyPr wrap="square" rtlCol="0" anchor="ctr"/>
-          <a:lstStyle/>
-          <a:p>
-            <a:pPr indent="0" marL="0">
+        </p:spPr>
+        <p:txBody>
+          <a:bodyPr wrap="square" rtlCol="0" anchor="ctr"/>
+          <a:lstStyle/>
+          <a:p>
+            <a:pPr marL="0" indent="0">
               <a:buNone/>
             </a:pPr>
             <a:r>
@@ -2594,9 +2499,9 @@
                 <a:solidFill>
                   <a:srgbClr val="27AE60"/>
                 </a:solidFill>
-                <a:latin typeface="Arial" pitchFamily="34" charset="0"/>
-                <a:ea typeface="Arial" pitchFamily="34" charset="-122"/>
-                <a:cs typeface="Arial" pitchFamily="34" charset="-120"/>
+                <a:latin typeface="Arial" panose="020B0604020202020204" pitchFamily="34" charset="0"/>
+                <a:ea typeface="Arial" panose="020B0604020202020204" pitchFamily="34" charset="-122"/>
+                <a:cs typeface="Arial" panose="020B0604020202020204" pitchFamily="34" charset="-120"/>
               </a:rPr>
               <a:t>应对</a:t>
             </a:r>
@@ -2621,7 +2526,6 @@
           <a:solidFill>
             <a:srgbClr val="E8F8F5"/>
           </a:solidFill>
-          <a:ln/>
         </p:spPr>
       </p:sp>
       <p:sp>
@@ -2639,13 +2543,12 @@
             <a:avLst/>
           </a:prstGeom>
           <a:noFill/>
-          <a:ln/>
         </p:spPr>
         <p:txBody>
           <a:bodyPr wrap="square" rtlCol="0" anchor="t"/>
           <a:lstStyle/>
           <a:p>
-            <a:pPr indent="0" marL="0">
+            <a:pPr marL="0" indent="0">
               <a:lnSpc>
                 <a:spcPct val="130000"/>
               </a:lnSpc>
@@ -2656,9 +2559,9 @@
                 <a:solidFill>
                   <a:srgbClr val="34495E"/>
                 </a:solidFill>
-                <a:latin typeface="Arial" pitchFamily="34" charset="0"/>
-                <a:ea typeface="Arial" pitchFamily="34" charset="-122"/>
-                <a:cs typeface="Arial" pitchFamily="34" charset="-120"/>
+                <a:latin typeface="Arial" panose="020B0604020202020204" pitchFamily="34" charset="0"/>
+                <a:ea typeface="Arial" panose="020B0604020202020204" pitchFamily="34" charset="-122"/>
+                <a:cs typeface="Arial" panose="020B0604020202020204" pitchFamily="34" charset="-120"/>
               </a:rPr>
               <a:t>关键词+正则双模式匹配 + LLM兜底。边界case逐一补充到场景库，每新增一个表达即刻更新文档。</a:t>
             </a:r>
@@ -2708,7 +2611,6 @@
           <a:solidFill>
             <a:srgbClr val="E67E22"/>
           </a:solidFill>
-          <a:ln/>
         </p:spPr>
       </p:sp>
       <p:sp>
@@ -2726,13 +2628,12 @@
             <a:avLst/>
           </a:prstGeom>
           <a:noFill/>
-          <a:ln/>
-        </p:spPr>
-        <p:txBody>
-          <a:bodyPr wrap="square" rtlCol="0" anchor="ctr"/>
-          <a:lstStyle/>
-          <a:p>
-            <a:pPr algn="ctr" indent="0" marL="0">
+        </p:spPr>
+        <p:txBody>
+          <a:bodyPr wrap="square" rtlCol="0" anchor="ctr"/>
+          <a:lstStyle/>
+          <a:p>
+            <a:pPr marL="0" indent="0" algn="ctr">
               <a:buNone/>
             </a:pPr>
             <a:r>
@@ -2740,9 +2641,9 @@
                 <a:solidFill>
                   <a:srgbClr val="FFFFFF"/>
                 </a:solidFill>
-                <a:latin typeface="Arial" pitchFamily="34" charset="0"/>
-                <a:ea typeface="Arial" pitchFamily="34" charset="-122"/>
-                <a:cs typeface="Arial" pitchFamily="34" charset="-120"/>
+                <a:latin typeface="Arial" panose="020B0604020202020204" pitchFamily="34" charset="0"/>
+                <a:ea typeface="Arial" panose="020B0604020202020204" pitchFamily="34" charset="-122"/>
+                <a:cs typeface="Arial" panose="020B0604020202020204" pitchFamily="34" charset="-120"/>
               </a:rPr>
               <a:t>B AI代码的业务校验</a:t>
             </a:r>
@@ -2765,13 +2666,12 @@
             <a:avLst/>
           </a:prstGeom>
           <a:noFill/>
-          <a:ln/>
-        </p:spPr>
-        <p:txBody>
-          <a:bodyPr wrap="square" rtlCol="0" anchor="ctr"/>
-          <a:lstStyle/>
-          <a:p>
-            <a:pPr indent="0" marL="0">
+        </p:spPr>
+        <p:txBody>
+          <a:bodyPr wrap="square" rtlCol="0" anchor="ctr"/>
+          <a:lstStyle/>
+          <a:p>
+            <a:pPr marL="0" indent="0">
               <a:buNone/>
             </a:pPr>
             <a:r>
@@ -2779,9 +2679,9 @@
                 <a:solidFill>
                   <a:srgbClr val="E74C3C"/>
                 </a:solidFill>
-                <a:latin typeface="Arial" pitchFamily="34" charset="0"/>
-                <a:ea typeface="Arial" pitchFamily="34" charset="-122"/>
-                <a:cs typeface="Arial" pitchFamily="34" charset="-120"/>
+                <a:latin typeface="Arial" panose="020B0604020202020204" pitchFamily="34" charset="0"/>
+                <a:ea typeface="Arial" panose="020B0604020202020204" pitchFamily="34" charset="-122"/>
+                <a:cs typeface="Arial" panose="020B0604020202020204" pitchFamily="34" charset="-120"/>
               </a:rPr>
               <a:t>挑战</a:t>
             </a:r>
@@ -2806,7 +2706,6 @@
           <a:solidFill>
             <a:srgbClr val="FDEDEC"/>
           </a:solidFill>
-          <a:ln/>
         </p:spPr>
       </p:sp>
       <p:sp>
@@ -2817,20 +2716,19 @@
         </p:nvSpPr>
         <p:spPr>
           <a:xfrm>
-            <a:off x="4663440" y="2240280"/>
+            <a:off x="4663440" y="2148840"/>
             <a:ext cx="3017520" cy="1188720"/>
           </a:xfrm>
           <a:prstGeom prst="rect">
             <a:avLst/>
           </a:prstGeom>
           <a:noFill/>
-          <a:ln/>
         </p:spPr>
         <p:txBody>
           <a:bodyPr wrap="square" rtlCol="0" anchor="t"/>
           <a:lstStyle/>
           <a:p>
-            <a:pPr indent="0" marL="0">
+            <a:pPr marL="0" indent="0">
               <a:lnSpc>
                 <a:spcPct val="140000"/>
               </a:lnSpc>
@@ -2841,11 +2739,55 @@
                 <a:solidFill>
                   <a:srgbClr val="34495E"/>
                 </a:solidFill>
-                <a:latin typeface="Arial" pitchFamily="34" charset="0"/>
-                <a:ea typeface="Arial" pitchFamily="34" charset="-122"/>
-                <a:cs typeface="Arial" pitchFamily="34" charset="-120"/>
-              </a:rPr>
-              <a:t>转账100元，数据库存了100.00——AI按用户输入的字面值存储，逻辑上没毛病。但银行系统里，转账是支出，支出必须为负。代码语法完美、注释齐全、单元测试通过——正因如此，这个bug在第一轮review时完全没人发现。修复只花了一分钟：加了个.negate()。但找到它花了半天——因为我们一直默认AI的代码是对的。</a:t>
+                <a:latin typeface="Arial" panose="020B0604020202020204" pitchFamily="34" charset="0"/>
+                <a:ea typeface="Arial" panose="020B0604020202020204" pitchFamily="34" charset="-122"/>
+                <a:cs typeface="Arial" panose="020B0604020202020204" pitchFamily="34" charset="-120"/>
+              </a:rPr>
+              <a:t>转账100元，数据库存了100.00</a:t>
+            </a:r>
+            <a:r>
+              <a:rPr lang="zh-CN" altLang="en-US" sz="1000" dirty="0">
+                <a:solidFill>
+                  <a:srgbClr val="34495E"/>
+                </a:solidFill>
+                <a:latin typeface="Arial" panose="020B0604020202020204" pitchFamily="34" charset="0"/>
+                <a:ea typeface="宋体" panose="02010600030101010101" pitchFamily="2" charset="-122"/>
+                <a:cs typeface="Arial" panose="020B0604020202020204" pitchFamily="34" charset="-120"/>
+              </a:rPr>
+              <a:t>，</a:t>
+            </a:r>
+            <a:r>
+              <a:rPr lang="en-US" sz="1000" dirty="0">
+                <a:solidFill>
+                  <a:srgbClr val="34495E"/>
+                </a:solidFill>
+                <a:latin typeface="Arial" panose="020B0604020202020204" pitchFamily="34" charset="0"/>
+                <a:ea typeface="Arial" panose="020B0604020202020204" pitchFamily="34" charset="-122"/>
+                <a:cs typeface="Arial" panose="020B0604020202020204" pitchFamily="34" charset="-120"/>
+              </a:rPr>
+              <a:t>AI按用户输入的字面值存储，逻辑上没毛病。但银行系统里，转账是支出，支出必须为负。代码语法完美、注释齐全、单元测试通过</a:t>
+            </a:r>
+            <a:r>
+              <a:rPr lang="zh-CN" altLang="en-US" sz="1000" dirty="0">
+                <a:solidFill>
+                  <a:srgbClr val="34495E"/>
+                </a:solidFill>
+                <a:latin typeface="Arial" panose="020B0604020202020204" pitchFamily="34" charset="0"/>
+                <a:ea typeface="宋体" panose="02010600030101010101" pitchFamily="2" charset="-122"/>
+                <a:cs typeface="Arial" panose="020B0604020202020204" pitchFamily="34" charset="-120"/>
+              </a:rPr>
+              <a:t>。</a:t>
+            </a:r>
+            <a:r>
+              <a:rPr lang="en-US" sz="1000" dirty="0">
+                <a:solidFill>
+                  <a:srgbClr val="34495E"/>
+                </a:solidFill>
+                <a:latin typeface="Arial" panose="020B0604020202020204" pitchFamily="34" charset="0"/>
+                <a:ea typeface="Arial" panose="020B0604020202020204" pitchFamily="34" charset="-122"/>
+                <a:cs typeface="Arial" panose="020B0604020202020204" pitchFamily="34" charset="-120"/>
+              </a:rPr>
+              <a:t>正因如此，这个bug在第一轮review时完全没人发现。修复只花了一分钟：加了个.negate()。但找到它花了半天——因为我们一直默认AI的代码是对的。</a:t>
             </a:r>
             <a:endParaRPr lang="en-US" sz="1000" dirty="0"/>
           </a:p>
@@ -2866,13 +2808,12 @@
             <a:avLst/>
           </a:prstGeom>
           <a:noFill/>
-          <a:ln/>
-        </p:spPr>
-        <p:txBody>
-          <a:bodyPr wrap="square" rtlCol="0" anchor="ctr"/>
-          <a:lstStyle/>
-          <a:p>
-            <a:pPr indent="0" marL="0">
+        </p:spPr>
+        <p:txBody>
+          <a:bodyPr wrap="square" rtlCol="0" anchor="ctr"/>
+          <a:lstStyle/>
+          <a:p>
+            <a:pPr marL="0" indent="0">
               <a:buNone/>
             </a:pPr>
             <a:r>
@@ -2880,9 +2821,9 @@
                 <a:solidFill>
                   <a:srgbClr val="27AE60"/>
                 </a:solidFill>
-                <a:latin typeface="Arial" pitchFamily="34" charset="0"/>
-                <a:ea typeface="Arial" pitchFamily="34" charset="-122"/>
-                <a:cs typeface="Arial" pitchFamily="34" charset="-120"/>
+                <a:latin typeface="Arial" panose="020B0604020202020204" pitchFamily="34" charset="0"/>
+                <a:ea typeface="Arial" panose="020B0604020202020204" pitchFamily="34" charset="-122"/>
+                <a:cs typeface="Arial" panose="020B0604020202020204" pitchFamily="34" charset="-120"/>
               </a:rPr>
               <a:t>应对</a:t>
             </a:r>
@@ -2907,7 +2848,6 @@
           <a:solidFill>
             <a:srgbClr val="E8F8F5"/>
           </a:solidFill>
-          <a:ln/>
         </p:spPr>
       </p:sp>
       <p:sp>
@@ -2925,13 +2865,12 @@
             <a:avLst/>
           </a:prstGeom>
           <a:noFill/>
-          <a:ln/>
         </p:spPr>
         <p:txBody>
           <a:bodyPr wrap="square" rtlCol="0" anchor="t"/>
           <a:lstStyle/>
           <a:p>
-            <a:pPr indent="0" marL="0">
+            <a:pPr marL="0" indent="0">
               <a:lnSpc>
                 <a:spcPct val="130000"/>
               </a:lnSpc>
@@ -2942,9 +2881,9 @@
                 <a:solidFill>
                   <a:srgbClr val="34495E"/>
                 </a:solidFill>
-                <a:latin typeface="Arial" pitchFamily="34" charset="0"/>
-                <a:ea typeface="Arial" pitchFamily="34" charset="-122"/>
-                <a:cs typeface="Arial" pitchFamily="34" charset="-120"/>
+                <a:latin typeface="Arial" panose="020B0604020202020204" pitchFamily="34" charset="0"/>
+                <a:ea typeface="Arial" panose="020B0604020202020204" pitchFamily="34" charset="-122"/>
+                <a:cs typeface="Arial" panose="020B0604020202020204" pitchFamily="34" charset="-120"/>
               </a:rPr>
               <a:t>建立业务校验清单：金额方向→字段精度→分类规则。核心原则：AI代码越漂亮，审查越要警惕语义错误。每发现一个语义bug，同步更新校验清单。</a:t>
             </a:r>
@@ -2994,7 +2933,6 @@
           <a:solidFill>
             <a:srgbClr val="E74C3C"/>
           </a:solidFill>
-          <a:ln/>
         </p:spPr>
       </p:sp>
       <p:sp>
@@ -3012,13 +2950,12 @@
             <a:avLst/>
           </a:prstGeom>
           <a:noFill/>
-          <a:ln/>
-        </p:spPr>
-        <p:txBody>
-          <a:bodyPr wrap="square" rtlCol="0" anchor="ctr"/>
-          <a:lstStyle/>
-          <a:p>
-            <a:pPr algn="ctr" indent="0" marL="0">
+        </p:spPr>
+        <p:txBody>
+          <a:bodyPr wrap="square" rtlCol="0" anchor="ctr"/>
+          <a:lstStyle/>
+          <a:p>
+            <a:pPr marL="0" indent="0" algn="ctr">
               <a:buNone/>
             </a:pPr>
             <a:r>
@@ -3026,9 +2963,9 @@
                 <a:solidFill>
                   <a:srgbClr val="FFFFFF"/>
                 </a:solidFill>
-                <a:latin typeface="Arial" pitchFamily="34" charset="0"/>
-                <a:ea typeface="Arial" pitchFamily="34" charset="-122"/>
-                <a:cs typeface="Arial" pitchFamily="34" charset="-120"/>
+                <a:latin typeface="Arial" panose="020B0604020202020204" pitchFamily="34" charset="0"/>
+                <a:ea typeface="Arial" panose="020B0604020202020204" pitchFamily="34" charset="-122"/>
+                <a:cs typeface="Arial" panose="020B0604020202020204" pitchFamily="34" charset="-120"/>
               </a:rPr>
               <a:t>C 前后端契约对齐</a:t>
             </a:r>
@@ -3051,13 +2988,12 @@
             <a:avLst/>
           </a:prstGeom>
           <a:noFill/>
-          <a:ln/>
-        </p:spPr>
-        <p:txBody>
-          <a:bodyPr wrap="square" rtlCol="0" anchor="ctr"/>
-          <a:lstStyle/>
-          <a:p>
-            <a:pPr indent="0" marL="0">
+        </p:spPr>
+        <p:txBody>
+          <a:bodyPr wrap="square" rtlCol="0" anchor="ctr"/>
+          <a:lstStyle/>
+          <a:p>
+            <a:pPr marL="0" indent="0">
               <a:buNone/>
             </a:pPr>
             <a:r>
@@ -3065,9 +3001,9 @@
                 <a:solidFill>
                   <a:srgbClr val="E74C3C"/>
                 </a:solidFill>
-                <a:latin typeface="Arial" pitchFamily="34" charset="0"/>
-                <a:ea typeface="Arial" pitchFamily="34" charset="-122"/>
-                <a:cs typeface="Arial" pitchFamily="34" charset="-120"/>
+                <a:latin typeface="Arial" panose="020B0604020202020204" pitchFamily="34" charset="0"/>
+                <a:ea typeface="Arial" panose="020B0604020202020204" pitchFamily="34" charset="-122"/>
+                <a:cs typeface="Arial" panose="020B0604020202020204" pitchFamily="34" charset="-120"/>
               </a:rPr>
               <a:t>挑战</a:t>
             </a:r>
@@ -3092,7 +3028,6 @@
           <a:solidFill>
             <a:srgbClr val="FDEDEC"/>
           </a:solidFill>
-          <a:ln/>
         </p:spPr>
       </p:sp>
       <p:sp>
@@ -3110,13 +3045,12 @@
             <a:avLst/>
           </a:prstGeom>
           <a:noFill/>
-          <a:ln/>
         </p:spPr>
         <p:txBody>
           <a:bodyPr wrap="square" rtlCol="0" anchor="t"/>
           <a:lstStyle/>
           <a:p>
-            <a:pPr indent="0" marL="0">
+            <a:pPr marL="0" indent="0">
               <a:lnSpc>
                 <a:spcPct val="140000"/>
               </a:lnSpc>
@@ -3127,9 +3061,9 @@
                 <a:solidFill>
                   <a:srgbClr val="34495E"/>
                 </a:solidFill>
-                <a:latin typeface="Arial" pitchFamily="34" charset="0"/>
-                <a:ea typeface="Arial" pitchFamily="34" charset="-122"/>
-                <a:cs typeface="Arial" pitchFamily="34" charset="-120"/>
+                <a:latin typeface="Arial" panose="020B0604020202020204" pitchFamily="34" charset="0"/>
+                <a:ea typeface="Arial" panose="020B0604020202020204" pitchFamily="34" charset="-122"/>
+                <a:cs typeface="Arial" panose="020B0604020202020204" pitchFamily="34" charset="-120"/>
               </a:rPr>
               <a:t>后端暴露/api/transactions，前端请求/api/transaction——差一个s。后端叫bankName，前端传bank_name。AI前端和AI后端是两段独立的生成，没有共同记忆。每个接口路径、参数名、响应结构都需要人工对齐，只能一个一个找，费时还容易漏。</a:t>
             </a:r>
@@ -3152,13 +3086,12 @@
             <a:avLst/>
           </a:prstGeom>
           <a:noFill/>
-          <a:ln/>
-        </p:spPr>
-        <p:txBody>
-          <a:bodyPr wrap="square" rtlCol="0" anchor="ctr"/>
-          <a:lstStyle/>
-          <a:p>
-            <a:pPr indent="0" marL="0">
+        </p:spPr>
+        <p:txBody>
+          <a:bodyPr wrap="square" rtlCol="0" anchor="ctr"/>
+          <a:lstStyle/>
+          <a:p>
+            <a:pPr marL="0" indent="0">
               <a:buNone/>
             </a:pPr>
             <a:r>
@@ -3166,9 +3099,9 @@
                 <a:solidFill>
                   <a:srgbClr val="27AE60"/>
                 </a:solidFill>
-                <a:latin typeface="Arial" pitchFamily="34" charset="0"/>
-                <a:ea typeface="Arial" pitchFamily="34" charset="-122"/>
-                <a:cs typeface="Arial" pitchFamily="34" charset="-120"/>
+                <a:latin typeface="Arial" panose="020B0604020202020204" pitchFamily="34" charset="0"/>
+                <a:ea typeface="Arial" panose="020B0604020202020204" pitchFamily="34" charset="-122"/>
+                <a:cs typeface="Arial" panose="020B0604020202020204" pitchFamily="34" charset="-120"/>
               </a:rPr>
               <a:t>应对</a:t>
             </a:r>
@@ -3193,7 +3126,6 @@
           <a:solidFill>
             <a:srgbClr val="E8F8F5"/>
           </a:solidFill>
-          <a:ln/>
         </p:spPr>
       </p:sp>
       <p:sp>
@@ -3211,13 +3143,12 @@
             <a:avLst/>
           </a:prstGeom>
           <a:noFill/>
-          <a:ln/>
         </p:spPr>
         <p:txBody>
           <a:bodyPr wrap="square" rtlCol="0" anchor="t"/>
           <a:lstStyle/>
           <a:p>
-            <a:pPr indent="0" marL="0">
+            <a:pPr marL="0" indent="0">
               <a:lnSpc>
                 <a:spcPct val="130000"/>
               </a:lnSpc>
@@ -3228,9 +3159,9 @@
                 <a:solidFill>
                   <a:srgbClr val="34495E"/>
                 </a:solidFill>
-                <a:latin typeface="Arial" pitchFamily="34" charset="0"/>
-                <a:ea typeface="Arial" pitchFamily="34" charset="-122"/>
-                <a:cs typeface="Arial" pitchFamily="34" charset="-120"/>
+                <a:latin typeface="Arial" panose="020B0604020202020204" pitchFamily="34" charset="0"/>
+                <a:ea typeface="Arial" panose="020B0604020202020204" pitchFamily="34" charset="-122"/>
+                <a:cs typeface="Arial" panose="020B0604020202020204" pitchFamily="34" charset="-120"/>
               </a:rPr>
               <a:t>抽象ReqBase统一请求规范，前后端AI共享同一份契约模板。新增接口时必须先更新契约文档，再分别生成前端和后端代码。</a:t>
             </a:r>
@@ -3278,13 +3209,12 @@
             <a:avLst/>
           </a:prstGeom>
           <a:noFill/>
-          <a:ln/>
-        </p:spPr>
-        <p:txBody>
-          <a:bodyPr wrap="square" rtlCol="0" anchor="ctr"/>
-          <a:lstStyle/>
-          <a:p>
-            <a:pPr algn="ctr" indent="0" marL="0">
+        </p:spPr>
+        <p:txBody>
+          <a:bodyPr wrap="square" rtlCol="0" anchor="ctr"/>
+          <a:lstStyle/>
+          <a:p>
+            <a:pPr marL="0" indent="0" algn="ctr">
               <a:buNone/>
             </a:pPr>
             <a:r>
@@ -3292,9 +3222,9 @@
                 <a:solidFill>
                   <a:srgbClr val="1A5276"/>
                 </a:solidFill>
-                <a:latin typeface="Arial" pitchFamily="34" charset="0"/>
-                <a:ea typeface="Arial" pitchFamily="34" charset="-122"/>
-                <a:cs typeface="Arial" pitchFamily="34" charset="-120"/>
+                <a:latin typeface="Arial" panose="020B0604020202020204" pitchFamily="34" charset="0"/>
+                <a:ea typeface="Arial" panose="020B0604020202020204" pitchFamily="34" charset="-122"/>
+                <a:cs typeface="Arial" panose="020B0604020202020204" pitchFamily="34" charset="-120"/>
               </a:rPr>
               <a:t>真实数据：成功调教1个意图，平均失败3-4次描述尝试。AI代码越漂亮，越需要警惕业务语义错误。</a:t>
             </a:r>
@@ -3317,13 +3247,12 @@
             <a:avLst/>
           </a:prstGeom>
           <a:noFill/>
-          <a:ln/>
-        </p:spPr>
-        <p:txBody>
-          <a:bodyPr wrap="square" rtlCol="0" anchor="ctr"/>
-          <a:lstStyle/>
-          <a:p>
-            <a:pPr algn="r" indent="0" marL="0">
+        </p:spPr>
+        <p:txBody>
+          <a:bodyPr wrap="square" rtlCol="0" anchor="ctr"/>
+          <a:lstStyle/>
+          <a:p>
+            <a:pPr marL="0" indent="0" algn="r">
               <a:buNone/>
             </a:pPr>
             <a:r>
@@ -3331,9 +3260,9 @@
                 <a:solidFill>
                   <a:srgbClr val="7F8C8D"/>
                 </a:solidFill>
-                <a:latin typeface="Arial" pitchFamily="34" charset="0"/>
-                <a:ea typeface="Arial" pitchFamily="34" charset="-122"/>
-                <a:cs typeface="Arial" pitchFamily="34" charset="-120"/>
+                <a:latin typeface="Arial" panose="020B0604020202020204" pitchFamily="34" charset="0"/>
+                <a:ea typeface="Arial" panose="020B0604020202020204" pitchFamily="34" charset="-122"/>
+                <a:cs typeface="Arial" panose="020B0604020202020204" pitchFamily="34" charset="-120"/>
               </a:rPr>
               <a:t>▸ 接下来：挑战之后沉淀的认知升级</a:t>
             </a:r>
@@ -3356,13 +3285,12 @@
             <a:avLst/>
           </a:prstGeom>
           <a:noFill/>
-          <a:ln/>
-        </p:spPr>
-        <p:txBody>
-          <a:bodyPr wrap="square" rtlCol="0" anchor="ctr"/>
-          <a:lstStyle/>
-          <a:p>
-            <a:pPr algn="l" indent="0" marL="0">
+        </p:spPr>
+        <p:txBody>
+          <a:bodyPr wrap="square" rtlCol="0" anchor="ctr"/>
+          <a:lstStyle/>
+          <a:p>
+            <a:pPr marL="0" indent="0" algn="l">
               <a:buNone/>
             </a:pPr>
             <a:r>
@@ -3370,9 +3298,9 @@
                 <a:solidFill>
                   <a:srgbClr val="4A90E2"/>
                 </a:solidFill>
-                <a:latin typeface="Arial" pitchFamily="34" charset="0"/>
-                <a:ea typeface="Arial" pitchFamily="34" charset="-122"/>
-                <a:cs typeface="Arial" pitchFamily="34" charset="-120"/>
+                <a:latin typeface="Arial" panose="020B0604020202020204" pitchFamily="34" charset="0"/>
+                <a:ea typeface="Arial" panose="020B0604020202020204" pitchFamily="34" charset="-122"/>
+                <a:cs typeface="Arial" panose="020B0604020202020204" pitchFamily="34" charset="-120"/>
               </a:rPr>
               <a:t>→</a:t>
             </a:r>
@@ -3390,12 +3318,13 @@
 
 <file path=ppt/slides/slide11.xml><?xml version="1.0" encoding="utf-8"?>
 <p:sld xmlns:a="http://schemas.openxmlformats.org/drawingml/2006/main" xmlns:r="http://schemas.openxmlformats.org/officeDocument/2006/relationships" xmlns:p="http://schemas.openxmlformats.org/presentationml/2006/main">
-  <p:cSld name="Slide 11">
+  <p:cSld>
     <p:bg>
       <p:bgPr>
         <a:solidFill>
           <a:srgbClr val="FFFFFF"/>
         </a:solidFill>
+        <a:effectLst/>
       </p:bgPr>
     </p:bg>
     <p:spTree>
@@ -3429,7 +3358,6 @@
           <a:solidFill>
             <a:srgbClr val="4A90E2"/>
           </a:solidFill>
-          <a:ln/>
         </p:spPr>
       </p:sp>
       <p:sp>
@@ -3447,13 +3375,12 @@
             <a:avLst/>
           </a:prstGeom>
           <a:noFill/>
-          <a:ln/>
-        </p:spPr>
-        <p:txBody>
-          <a:bodyPr wrap="square" rtlCol="0" anchor="ctr"/>
-          <a:lstStyle/>
-          <a:p>
-            <a:pPr indent="0" marL="0">
+        </p:spPr>
+        <p:txBody>
+          <a:bodyPr wrap="square" rtlCol="0" anchor="ctr"/>
+          <a:lstStyle/>
+          <a:p>
+            <a:pPr marL="0" indent="0">
               <a:buNone/>
             </a:pPr>
             <a:r>
@@ -3461,9 +3388,9 @@
                 <a:solidFill>
                   <a:srgbClr val="2C3E50"/>
                 </a:solidFill>
-                <a:latin typeface="Arial" pitchFamily="34" charset="0"/>
-                <a:ea typeface="Arial" pitchFamily="34" charset="-122"/>
-                <a:cs typeface="Arial" pitchFamily="34" charset="-120"/>
+                <a:latin typeface="Arial" panose="020B0604020202020204" pitchFamily="34" charset="0"/>
+                <a:ea typeface="Arial" panose="020B0604020202020204" pitchFamily="34" charset="-122"/>
+                <a:cs typeface="Arial" panose="020B0604020202020204" pitchFamily="34" charset="-120"/>
               </a:rPr>
               <a:t>认知升级</a:t>
             </a:r>
@@ -3486,13 +3413,12 @@
             <a:avLst/>
           </a:prstGeom>
           <a:noFill/>
-          <a:ln/>
-        </p:spPr>
-        <p:txBody>
-          <a:bodyPr wrap="square" rtlCol="0" anchor="ctr"/>
-          <a:lstStyle/>
-          <a:p>
-            <a:pPr algn="r" indent="0" marL="0">
+        </p:spPr>
+        <p:txBody>
+          <a:bodyPr wrap="square" rtlCol="0" anchor="ctr"/>
+          <a:lstStyle/>
+          <a:p>
+            <a:pPr marL="0" indent="0" algn="r">
               <a:buNone/>
             </a:pPr>
             <a:r>
@@ -3500,9 +3426,9 @@
                 <a:solidFill>
                   <a:srgbClr val="7F8C8D"/>
                 </a:solidFill>
-                <a:latin typeface="Arial" pitchFamily="34" charset="0"/>
-                <a:ea typeface="Arial" pitchFamily="34" charset="-122"/>
-                <a:cs typeface="Arial" pitchFamily="34" charset="-120"/>
+                <a:latin typeface="Arial" panose="020B0604020202020204" pitchFamily="34" charset="0"/>
+                <a:ea typeface="Arial" panose="020B0604020202020204" pitchFamily="34" charset="-122"/>
+                <a:cs typeface="Arial" panose="020B0604020202020204" pitchFamily="34" charset="-120"/>
               </a:rPr>
               <a:t>四条递进的重新理解</a:t>
             </a:r>
@@ -3527,7 +3453,6 @@
           <a:solidFill>
             <a:srgbClr val="4A90E2"/>
           </a:solidFill>
-          <a:ln/>
         </p:spPr>
       </p:sp>
       <p:sp>
@@ -3547,7 +3472,6 @@
           <a:solidFill>
             <a:srgbClr val="4A90E2"/>
           </a:solidFill>
-          <a:ln/>
         </p:spPr>
       </p:sp>
       <p:sp>
@@ -3565,13 +3489,12 @@
             <a:avLst/>
           </a:prstGeom>
           <a:noFill/>
-          <a:ln/>
-        </p:spPr>
-        <p:txBody>
-          <a:bodyPr wrap="square" rtlCol="0" anchor="ctr"/>
-          <a:lstStyle/>
-          <a:p>
-            <a:pPr algn="ctr" indent="0" marL="0">
+        </p:spPr>
+        <p:txBody>
+          <a:bodyPr wrap="square" rtlCol="0" anchor="ctr"/>
+          <a:lstStyle/>
+          <a:p>
+            <a:pPr marL="0" indent="0" algn="ctr">
               <a:buNone/>
             </a:pPr>
             <a:r>
@@ -3579,9 +3502,9 @@
                 <a:solidFill>
                   <a:srgbClr val="FFFFFF"/>
                 </a:solidFill>
-                <a:latin typeface="Arial" pitchFamily="34" charset="0"/>
-                <a:ea typeface="Arial" pitchFamily="34" charset="-122"/>
-                <a:cs typeface="Arial" pitchFamily="34" charset="-120"/>
+                <a:latin typeface="Arial" panose="020B0604020202020204" pitchFamily="34" charset="0"/>
+                <a:ea typeface="Arial" panose="020B0604020202020204" pitchFamily="34" charset="-122"/>
+                <a:cs typeface="Arial" panose="020B0604020202020204" pitchFamily="34" charset="-120"/>
               </a:rPr>
               <a:t>1</a:t>
             </a:r>
@@ -3604,13 +3527,12 @@
             <a:avLst/>
           </a:prstGeom>
           <a:noFill/>
-          <a:ln/>
-        </p:spPr>
-        <p:txBody>
-          <a:bodyPr wrap="square" rtlCol="0" anchor="ctr"/>
-          <a:lstStyle/>
-          <a:p>
-            <a:pPr indent="0" marL="0">
+        </p:spPr>
+        <p:txBody>
+          <a:bodyPr wrap="square" rtlCol="0" anchor="ctr"/>
+          <a:lstStyle/>
+          <a:p>
+            <a:pPr marL="0" indent="0">
               <a:buNone/>
             </a:pPr>
             <a:r>
@@ -3618,9 +3540,9 @@
                 <a:solidFill>
                   <a:srgbClr val="2C3E50"/>
                 </a:solidFill>
-                <a:latin typeface="Arial" pitchFamily="34" charset="0"/>
-                <a:ea typeface="Arial" pitchFamily="34" charset="-122"/>
-                <a:cs typeface="Arial" pitchFamily="34" charset="-120"/>
+                <a:latin typeface="Arial" panose="020B0604020202020204" pitchFamily="34" charset="0"/>
+                <a:ea typeface="Arial" panose="020B0604020202020204" pitchFamily="34" charset="-122"/>
+                <a:cs typeface="Arial" panose="020B0604020202020204" pitchFamily="34" charset="-120"/>
               </a:rPr>
               <a:t>从「代码是产物」到「文档是产物」</a:t>
             </a:r>
@@ -3645,7 +3567,6 @@
           <a:solidFill>
             <a:srgbClr val="D5D8DC"/>
           </a:solidFill>
-          <a:ln/>
         </p:spPr>
       </p:sp>
       <p:sp>
@@ -3663,13 +3584,12 @@
             <a:avLst/>
           </a:prstGeom>
           <a:noFill/>
-          <a:ln/>
         </p:spPr>
         <p:txBody>
           <a:bodyPr wrap="square" rtlCol="0" anchor="t"/>
           <a:lstStyle/>
           <a:p>
-            <a:pPr indent="0" marL="0">
+            <a:pPr marL="0" indent="0">
               <a:buNone/>
             </a:pPr>
             <a:r>
@@ -3677,9 +3597,9 @@
                 <a:solidFill>
                   <a:srgbClr val="34495E"/>
                 </a:solidFill>
-                <a:latin typeface="Arial" pitchFamily="34" charset="0"/>
-                <a:ea typeface="Arial" pitchFamily="34" charset="-122"/>
-                <a:cs typeface="Arial" pitchFamily="34" charset="-120"/>
+                <a:latin typeface="Arial" panose="020B0604020202020204" pitchFamily="34" charset="0"/>
+                <a:ea typeface="Arial" panose="020B0604020202020204" pitchFamily="34" charset="-122"/>
+                <a:cs typeface="Arial" panose="020B0604020202020204" pitchFamily="34" charset="-120"/>
               </a:rPr>
               <a:t>代码变更是文档变更的编译结果。文档质量决定代码质量。</a:t>
             </a:r>
@@ -3704,7 +3624,6 @@
           <a:solidFill>
             <a:srgbClr val="4A90E2"/>
           </a:solidFill>
-          <a:ln/>
         </p:spPr>
       </p:sp>
       <p:sp>
@@ -3722,13 +3641,12 @@
             <a:avLst/>
           </a:prstGeom>
           <a:noFill/>
-          <a:ln/>
-        </p:spPr>
-        <p:txBody>
-          <a:bodyPr wrap="square" rtlCol="0" anchor="ctr"/>
-          <a:lstStyle/>
-          <a:p>
-            <a:pPr algn="ctr" indent="0" marL="0">
+        </p:spPr>
+        <p:txBody>
+          <a:bodyPr wrap="square" rtlCol="0" anchor="ctr"/>
+          <a:lstStyle/>
+          <a:p>
+            <a:pPr marL="0" indent="0" algn="ctr">
               <a:buNone/>
             </a:pPr>
             <a:r>
@@ -3736,9 +3654,9 @@
                 <a:solidFill>
                   <a:srgbClr val="FFFFFF"/>
                 </a:solidFill>
-                <a:latin typeface="Arial" pitchFamily="34" charset="0"/>
-                <a:ea typeface="Arial" pitchFamily="34" charset="-122"/>
-                <a:cs typeface="Arial" pitchFamily="34" charset="-120"/>
+                <a:latin typeface="Arial" panose="020B0604020202020204" pitchFamily="34" charset="0"/>
+                <a:ea typeface="Arial" panose="020B0604020202020204" pitchFamily="34" charset="-122"/>
+                <a:cs typeface="Arial" panose="020B0604020202020204" pitchFamily="34" charset="-120"/>
               </a:rPr>
               <a:t>2</a:t>
             </a:r>
@@ -3761,13 +3679,12 @@
             <a:avLst/>
           </a:prstGeom>
           <a:noFill/>
-          <a:ln/>
-        </p:spPr>
-        <p:txBody>
-          <a:bodyPr wrap="square" rtlCol="0" anchor="ctr"/>
-          <a:lstStyle/>
-          <a:p>
-            <a:pPr indent="0" marL="0">
+        </p:spPr>
+        <p:txBody>
+          <a:bodyPr wrap="square" rtlCol="0" anchor="ctr"/>
+          <a:lstStyle/>
+          <a:p>
+            <a:pPr marL="0" indent="0">
               <a:buNone/>
             </a:pPr>
             <a:r>
@@ -3775,9 +3692,9 @@
                 <a:solidFill>
                   <a:srgbClr val="2C3E50"/>
                 </a:solidFill>
-                <a:latin typeface="Arial" pitchFamily="34" charset="0"/>
-                <a:ea typeface="Arial" pitchFamily="34" charset="-122"/>
-                <a:cs typeface="Arial" pitchFamily="34" charset="-120"/>
+                <a:latin typeface="Arial" panose="020B0604020202020204" pitchFamily="34" charset="0"/>
+                <a:ea typeface="Arial" panose="020B0604020202020204" pitchFamily="34" charset="-122"/>
+                <a:cs typeface="Arial" panose="020B0604020202020204" pitchFamily="34" charset="-120"/>
               </a:rPr>
               <a:t>从「AI写代码」到「AI理解业务」</a:t>
             </a:r>
@@ -3802,7 +3719,6 @@
           <a:solidFill>
             <a:srgbClr val="D5D8DC"/>
           </a:solidFill>
-          <a:ln/>
         </p:spPr>
       </p:sp>
       <p:sp>
@@ -3820,13 +3736,12 @@
             <a:avLst/>
           </a:prstGeom>
           <a:noFill/>
-          <a:ln/>
         </p:spPr>
         <p:txBody>
           <a:bodyPr wrap="square" rtlCol="0" anchor="t"/>
           <a:lstStyle/>
           <a:p>
-            <a:pPr indent="0" marL="0">
+            <a:pPr marL="0" indent="0">
               <a:buNone/>
             </a:pPr>
             <a:r>
@@ -3834,9 +3749,9 @@
                 <a:solidFill>
                   <a:srgbClr val="34495E"/>
                 </a:solidFill>
-                <a:latin typeface="Arial" pitchFamily="34" charset="0"/>
-                <a:ea typeface="Arial" pitchFamily="34" charset="-122"/>
-                <a:cs typeface="Arial" pitchFamily="34" charset="-120"/>
+                <a:latin typeface="Arial" panose="020B0604020202020204" pitchFamily="34" charset="0"/>
+                <a:ea typeface="Arial" panose="020B0604020202020204" pitchFamily="34" charset="-122"/>
+                <a:cs typeface="Arial" panose="020B0604020202020204" pitchFamily="34" charset="-120"/>
               </a:rPr>
               <a:t>AI最强的不是生成代码，而是理解文档后生成代码。关键在文档写得对。</a:t>
             </a:r>
@@ -3861,7 +3776,6 @@
           <a:solidFill>
             <a:srgbClr val="4A90E2"/>
           </a:solidFill>
-          <a:ln/>
         </p:spPr>
       </p:sp>
       <p:sp>
@@ -3879,13 +3793,12 @@
             <a:avLst/>
           </a:prstGeom>
           <a:noFill/>
-          <a:ln/>
-        </p:spPr>
-        <p:txBody>
-          <a:bodyPr wrap="square" rtlCol="0" anchor="ctr"/>
-          <a:lstStyle/>
-          <a:p>
-            <a:pPr algn="ctr" indent="0" marL="0">
+        </p:spPr>
+        <p:txBody>
+          <a:bodyPr wrap="square" rtlCol="0" anchor="ctr"/>
+          <a:lstStyle/>
+          <a:p>
+            <a:pPr marL="0" indent="0" algn="ctr">
               <a:buNone/>
             </a:pPr>
             <a:r>
@@ -3893,9 +3806,9 @@
                 <a:solidFill>
                   <a:srgbClr val="FFFFFF"/>
                 </a:solidFill>
-                <a:latin typeface="Arial" pitchFamily="34" charset="0"/>
-                <a:ea typeface="Arial" pitchFamily="34" charset="-122"/>
-                <a:cs typeface="Arial" pitchFamily="34" charset="-120"/>
+                <a:latin typeface="Arial" panose="020B0604020202020204" pitchFamily="34" charset="0"/>
+                <a:ea typeface="Arial" panose="020B0604020202020204" pitchFamily="34" charset="-122"/>
+                <a:cs typeface="Arial" panose="020B0604020202020204" pitchFamily="34" charset="-120"/>
               </a:rPr>
               <a:t>3</a:t>
             </a:r>
@@ -3918,13 +3831,12 @@
             <a:avLst/>
           </a:prstGeom>
           <a:noFill/>
-          <a:ln/>
-        </p:spPr>
-        <p:txBody>
-          <a:bodyPr wrap="square" rtlCol="0" anchor="ctr"/>
-          <a:lstStyle/>
-          <a:p>
-            <a:pPr indent="0" marL="0">
+        </p:spPr>
+        <p:txBody>
+          <a:bodyPr wrap="square" rtlCol="0" anchor="ctr"/>
+          <a:lstStyle/>
+          <a:p>
+            <a:pPr marL="0" indent="0">
               <a:buNone/>
             </a:pPr>
             <a:r>
@@ -3932,9 +3844,9 @@
                 <a:solidFill>
                   <a:srgbClr val="2C3E50"/>
                 </a:solidFill>
-                <a:latin typeface="Arial" pitchFamily="34" charset="0"/>
-                <a:ea typeface="Arial" pitchFamily="34" charset="-122"/>
-                <a:cs typeface="Arial" pitchFamily="34" charset="-120"/>
+                <a:latin typeface="Arial" panose="020B0604020202020204" pitchFamily="34" charset="0"/>
+                <a:ea typeface="Arial" panose="020B0604020202020204" pitchFamily="34" charset="-122"/>
+                <a:cs typeface="Arial" panose="020B0604020202020204" pitchFamily="34" charset="-120"/>
               </a:rPr>
               <a:t>从「编码能力」到「规格表达能力」</a:t>
             </a:r>
@@ -3959,7 +3871,6 @@
           <a:solidFill>
             <a:srgbClr val="D5D8DC"/>
           </a:solidFill>
-          <a:ln/>
         </p:spPr>
       </p:sp>
       <p:sp>
@@ -3977,13 +3888,12 @@
             <a:avLst/>
           </a:prstGeom>
           <a:noFill/>
-          <a:ln/>
         </p:spPr>
         <p:txBody>
           <a:bodyPr wrap="square" rtlCol="0" anchor="t"/>
           <a:lstStyle/>
           <a:p>
-            <a:pPr indent="0" marL="0">
+            <a:pPr marL="0" indent="0">
               <a:buNone/>
             </a:pPr>
             <a:r>
@@ -3991,9 +3901,9 @@
                 <a:solidFill>
                   <a:srgbClr val="34495E"/>
                 </a:solidFill>
-                <a:latin typeface="Arial" pitchFamily="34" charset="0"/>
-                <a:ea typeface="Arial" pitchFamily="34" charset="-122"/>
-                <a:cs typeface="Arial" pitchFamily="34" charset="-120"/>
+                <a:latin typeface="Arial" panose="020B0604020202020204" pitchFamily="34" charset="0"/>
+                <a:ea typeface="Arial" panose="020B0604020202020204" pitchFamily="34" charset="-122"/>
+                <a:cs typeface="Arial" panose="020B0604020202020204" pitchFamily="34" charset="-120"/>
               </a:rPr>
               <a:t>最有价值的不是写代码的速度，而是把业务规则精确描述给AI的能力。</a:t>
             </a:r>
@@ -4018,7 +3928,6 @@
           <a:solidFill>
             <a:srgbClr val="4A90E2"/>
           </a:solidFill>
-          <a:ln/>
         </p:spPr>
       </p:sp>
       <p:sp>
@@ -4036,13 +3945,12 @@
             <a:avLst/>
           </a:prstGeom>
           <a:noFill/>
-          <a:ln/>
-        </p:spPr>
-        <p:txBody>
-          <a:bodyPr wrap="square" rtlCol="0" anchor="ctr"/>
-          <a:lstStyle/>
-          <a:p>
-            <a:pPr algn="ctr" indent="0" marL="0">
+        </p:spPr>
+        <p:txBody>
+          <a:bodyPr wrap="square" rtlCol="0" anchor="ctr"/>
+          <a:lstStyle/>
+          <a:p>
+            <a:pPr marL="0" indent="0" algn="ctr">
               <a:buNone/>
             </a:pPr>
             <a:r>
@@ -4050,9 +3958,9 @@
                 <a:solidFill>
                   <a:srgbClr val="FFFFFF"/>
                 </a:solidFill>
-                <a:latin typeface="Arial" pitchFamily="34" charset="0"/>
-                <a:ea typeface="Arial" pitchFamily="34" charset="-122"/>
-                <a:cs typeface="Arial" pitchFamily="34" charset="-120"/>
+                <a:latin typeface="Arial" panose="020B0604020202020204" pitchFamily="34" charset="0"/>
+                <a:ea typeface="Arial" panose="020B0604020202020204" pitchFamily="34" charset="-122"/>
+                <a:cs typeface="Arial" panose="020B0604020202020204" pitchFamily="34" charset="-120"/>
               </a:rPr>
               <a:t>4</a:t>
             </a:r>
@@ -4075,13 +3983,12 @@
             <a:avLst/>
           </a:prstGeom>
           <a:noFill/>
-          <a:ln/>
-        </p:spPr>
-        <p:txBody>
-          <a:bodyPr wrap="square" rtlCol="0" anchor="ctr"/>
-          <a:lstStyle/>
-          <a:p>
-            <a:pPr indent="0" marL="0">
+        </p:spPr>
+        <p:txBody>
+          <a:bodyPr wrap="square" rtlCol="0" anchor="ctr"/>
+          <a:lstStyle/>
+          <a:p>
+            <a:pPr marL="0" indent="0">
               <a:buNone/>
             </a:pPr>
             <a:r>
@@ -4089,9 +3996,9 @@
                 <a:solidFill>
                   <a:srgbClr val="2C3E50"/>
                 </a:solidFill>
-                <a:latin typeface="Arial" pitchFamily="34" charset="0"/>
-                <a:ea typeface="Arial" pitchFamily="34" charset="-122"/>
-                <a:cs typeface="Arial" pitchFamily="34" charset="-120"/>
+                <a:latin typeface="Arial" panose="020B0604020202020204" pitchFamily="34" charset="0"/>
+                <a:ea typeface="Arial" panose="020B0604020202020204" pitchFamily="34" charset="-122"/>
+                <a:cs typeface="Arial" panose="020B0604020202020204" pitchFamily="34" charset="-120"/>
               </a:rPr>
               <a:t>从「把代码写对」到「让AI理解对」</a:t>
             </a:r>
@@ -4116,7 +4023,6 @@
           <a:solidFill>
             <a:srgbClr val="D5D8DC"/>
           </a:solidFill>
-          <a:ln/>
         </p:spPr>
       </p:sp>
       <p:sp>
@@ -4134,13 +4040,12 @@
             <a:avLst/>
           </a:prstGeom>
           <a:noFill/>
-          <a:ln/>
         </p:spPr>
         <p:txBody>
           <a:bodyPr wrap="square" rtlCol="0" anchor="t"/>
           <a:lstStyle/>
           <a:p>
-            <a:pPr indent="0" marL="0">
+            <a:pPr marL="0" indent="0">
               <a:buNone/>
             </a:pPr>
             <a:r>
@@ -4148,9 +4053,9 @@
                 <a:solidFill>
                   <a:srgbClr val="34495E"/>
                 </a:solidFill>
-                <a:latin typeface="Arial" pitchFamily="34" charset="0"/>
-                <a:ea typeface="Arial" pitchFamily="34" charset="-122"/>
-                <a:cs typeface="Arial" pitchFamily="34" charset="-120"/>
+                <a:latin typeface="Arial" panose="020B0604020202020204" pitchFamily="34" charset="0"/>
+                <a:ea typeface="Arial" panose="020B0604020202020204" pitchFamily="34" charset="-122"/>
+                <a:cs typeface="Arial" panose="020B0604020202020204" pitchFamily="34" charset="-120"/>
               </a:rPr>
               <a:t>未来核心竞争力：不是你会写什么，而是你能否让AI正确理解你要什么。</a:t>
             </a:r>
@@ -4198,13 +4103,12 @@
             <a:avLst/>
           </a:prstGeom>
           <a:noFill/>
-          <a:ln/>
-        </p:spPr>
-        <p:txBody>
-          <a:bodyPr wrap="square" rtlCol="0" anchor="ctr"/>
-          <a:lstStyle/>
-          <a:p>
-            <a:pPr algn="ctr" indent="0" marL="0">
+        </p:spPr>
+        <p:txBody>
+          <a:bodyPr wrap="square" rtlCol="0" anchor="ctr"/>
+          <a:lstStyle/>
+          <a:p>
+            <a:pPr marL="0" indent="0" algn="ctr">
               <a:buNone/>
             </a:pPr>
             <a:r>
@@ -4212,9 +4116,9 @@
                 <a:solidFill>
                   <a:srgbClr val="1A5276"/>
                 </a:solidFill>
-                <a:latin typeface="Arial" pitchFamily="34" charset="0"/>
-                <a:ea typeface="Arial" pitchFamily="34" charset="-122"/>
-                <a:cs typeface="Arial" pitchFamily="34" charset="-120"/>
+                <a:latin typeface="Arial" panose="020B0604020202020204" pitchFamily="34" charset="0"/>
+                <a:ea typeface="Arial" panose="020B0604020202020204" pitchFamily="34" charset="-122"/>
+                <a:cs typeface="Arial" panose="020B0604020202020204" pitchFamily="34" charset="-120"/>
               </a:rPr>
               <a:t>AI能写近90%的代码——但剩下的10%的架构决策和业务理解，才是你不可替代的价值。</a:t>
             </a:r>
@@ -4237,13 +4141,12 @@
             <a:avLst/>
           </a:prstGeom>
           <a:noFill/>
-          <a:ln/>
-        </p:spPr>
-        <p:txBody>
-          <a:bodyPr wrap="square" rtlCol="0" anchor="ctr"/>
-          <a:lstStyle/>
-          <a:p>
-            <a:pPr algn="r" indent="0" marL="0">
+        </p:spPr>
+        <p:txBody>
+          <a:bodyPr wrap="square" rtlCol="0" anchor="ctr"/>
+          <a:lstStyle/>
+          <a:p>
+            <a:pPr marL="0" indent="0" algn="r">
               <a:buNone/>
             </a:pPr>
             <a:r>
@@ -4251,9 +4154,9 @@
                 <a:solidFill>
                   <a:srgbClr val="7F8C8D"/>
                 </a:solidFill>
-                <a:latin typeface="Arial" pitchFamily="34" charset="0"/>
-                <a:ea typeface="Arial" pitchFamily="34" charset="-122"/>
-                <a:cs typeface="Arial" pitchFamily="34" charset="-120"/>
+                <a:latin typeface="Arial" panose="020B0604020202020204" pitchFamily="34" charset="0"/>
+                <a:ea typeface="Arial" panose="020B0604020202020204" pitchFamily="34" charset="-122"/>
+                <a:cs typeface="Arial" panose="020B0604020202020204" pitchFamily="34" charset="-120"/>
               </a:rPr>
               <a:t>▸ 接下来：量化成果与数据验证</a:t>
             </a:r>
@@ -4276,13 +4179,12 @@
             <a:avLst/>
           </a:prstGeom>
           <a:noFill/>
-          <a:ln/>
-        </p:spPr>
-        <p:txBody>
-          <a:bodyPr wrap="square" rtlCol="0" anchor="ctr"/>
-          <a:lstStyle/>
-          <a:p>
-            <a:pPr algn="l" indent="0" marL="0">
+        </p:spPr>
+        <p:txBody>
+          <a:bodyPr wrap="square" rtlCol="0" anchor="ctr"/>
+          <a:lstStyle/>
+          <a:p>
+            <a:pPr marL="0" indent="0" algn="l">
               <a:buNone/>
             </a:pPr>
             <a:r>
@@ -4290,9 +4192,9 @@
                 <a:solidFill>
                   <a:srgbClr val="4A90E2"/>
                 </a:solidFill>
-                <a:latin typeface="Arial" pitchFamily="34" charset="0"/>
-                <a:ea typeface="Arial" pitchFamily="34" charset="-122"/>
-                <a:cs typeface="Arial" pitchFamily="34" charset="-120"/>
+                <a:latin typeface="Arial" panose="020B0604020202020204" pitchFamily="34" charset="0"/>
+                <a:ea typeface="Arial" panose="020B0604020202020204" pitchFamily="34" charset="-122"/>
+                <a:cs typeface="Arial" panose="020B0604020202020204" pitchFamily="34" charset="-120"/>
               </a:rPr>
               <a:t>→</a:t>
             </a:r>
@@ -4310,12 +4212,13 @@
 
 <file path=ppt/slides/slide12.xml><?xml version="1.0" encoding="utf-8"?>
 <p:sld xmlns:a="http://schemas.openxmlformats.org/drawingml/2006/main" xmlns:r="http://schemas.openxmlformats.org/officeDocument/2006/relationships" xmlns:p="http://schemas.openxmlformats.org/presentationml/2006/main">
-  <p:cSld name="Slide 12">
+  <p:cSld>
     <p:bg>
       <p:bgPr>
         <a:solidFill>
           <a:srgbClr val="FFFFFF"/>
         </a:solidFill>
+        <a:effectLst/>
       </p:bgPr>
     </p:bg>
     <p:spTree>
@@ -4349,7 +4252,6 @@
           <a:solidFill>
             <a:srgbClr val="4A90E2"/>
           </a:solidFill>
-          <a:ln/>
         </p:spPr>
       </p:sp>
       <p:sp>
@@ -4367,13 +4269,12 @@
             <a:avLst/>
           </a:prstGeom>
           <a:noFill/>
-          <a:ln/>
-        </p:spPr>
-        <p:txBody>
-          <a:bodyPr wrap="square" rtlCol="0" anchor="ctr"/>
-          <a:lstStyle/>
-          <a:p>
-            <a:pPr indent="0" marL="0">
+        </p:spPr>
+        <p:txBody>
+          <a:bodyPr wrap="square" rtlCol="0" anchor="ctr"/>
+          <a:lstStyle/>
+          <a:p>
+            <a:pPr marL="0" indent="0">
               <a:buNone/>
             </a:pPr>
             <a:r>
@@ -4381,9 +4282,9 @@
                 <a:solidFill>
                   <a:srgbClr val="2C3E50"/>
                 </a:solidFill>
-                <a:latin typeface="Arial" pitchFamily="34" charset="0"/>
-                <a:ea typeface="Arial" pitchFamily="34" charset="-122"/>
-                <a:cs typeface="Arial" pitchFamily="34" charset="-120"/>
+                <a:latin typeface="Arial" panose="020B0604020202020204" pitchFamily="34" charset="0"/>
+                <a:ea typeface="Arial" panose="020B0604020202020204" pitchFamily="34" charset="-122"/>
+                <a:cs typeface="Arial" panose="020B0604020202020204" pitchFamily="34" charset="-120"/>
               </a:rPr>
               <a:t>成果数据</a:t>
             </a:r>
@@ -4406,13 +4307,12 @@
             <a:avLst/>
           </a:prstGeom>
           <a:noFill/>
-          <a:ln/>
-        </p:spPr>
-        <p:txBody>
-          <a:bodyPr wrap="square" rtlCol="0" anchor="ctr"/>
-          <a:lstStyle/>
-          <a:p>
-            <a:pPr algn="r" indent="0" marL="0">
+        </p:spPr>
+        <p:txBody>
+          <a:bodyPr wrap="square" rtlCol="0" anchor="ctr"/>
+          <a:lstStyle/>
+          <a:p>
+            <a:pPr marL="0" indent="0" algn="r">
               <a:buNone/>
             </a:pPr>
             <a:r>
@@ -4420,9 +4320,9 @@
                 <a:solidFill>
                   <a:srgbClr val="7F8C8D"/>
                 </a:solidFill>
-                <a:latin typeface="Arial" pitchFamily="34" charset="0"/>
-                <a:ea typeface="Arial" pitchFamily="34" charset="-122"/>
-                <a:cs typeface="Arial" pitchFamily="34" charset="-120"/>
+                <a:latin typeface="Arial" panose="020B0604020202020204" pitchFamily="34" charset="0"/>
+                <a:ea typeface="Arial" panose="020B0604020202020204" pitchFamily="34" charset="-122"/>
+                <a:cs typeface="Arial" panose="020B0604020202020204" pitchFamily="34" charset="-120"/>
               </a:rPr>
               <a:t>量化验证</a:t>
             </a:r>
@@ -4447,7 +4347,6 @@
           <a:solidFill>
             <a:srgbClr val="4A90E2"/>
           </a:solidFill>
-          <a:ln/>
         </p:spPr>
       </p:sp>
       <p:sp>
@@ -4492,7 +4391,6 @@
           <a:solidFill>
             <a:srgbClr val="4A90E2"/>
           </a:solidFill>
-          <a:ln/>
         </p:spPr>
       </p:sp>
       <p:sp>
@@ -4510,13 +4408,12 @@
             <a:avLst/>
           </a:prstGeom>
           <a:noFill/>
-          <a:ln/>
-        </p:spPr>
-        <p:txBody>
-          <a:bodyPr wrap="square" rtlCol="0" anchor="ctr"/>
-          <a:lstStyle/>
-          <a:p>
-            <a:pPr algn="ctr" indent="0" marL="0">
+        </p:spPr>
+        <p:txBody>
+          <a:bodyPr wrap="square" rtlCol="0" anchor="ctr"/>
+          <a:lstStyle/>
+          <a:p>
+            <a:pPr marL="0" indent="0" algn="ctr">
               <a:buNone/>
             </a:pPr>
             <a:r>
@@ -4524,9 +4421,9 @@
                 <a:solidFill>
                   <a:srgbClr val="4A90E2"/>
                 </a:solidFill>
-                <a:latin typeface="Arial" pitchFamily="34" charset="0"/>
-                <a:ea typeface="Arial" pitchFamily="34" charset="-122"/>
-                <a:cs typeface="Arial" pitchFamily="34" charset="-120"/>
+                <a:latin typeface="Arial" panose="020B0604020202020204" pitchFamily="34" charset="0"/>
+                <a:ea typeface="Arial" panose="020B0604020202020204" pitchFamily="34" charset="-122"/>
+                <a:cs typeface="Arial" panose="020B0604020202020204" pitchFamily="34" charset="-120"/>
               </a:rPr>
               <a:t>30+</a:t>
             </a:r>
@@ -4549,13 +4446,12 @@
             <a:avLst/>
           </a:prstGeom>
           <a:noFill/>
-          <a:ln/>
-        </p:spPr>
-        <p:txBody>
-          <a:bodyPr wrap="square" rtlCol="0" anchor="ctr"/>
-          <a:lstStyle/>
-          <a:p>
-            <a:pPr algn="ctr" indent="0" marL="0">
+        </p:spPr>
+        <p:txBody>
+          <a:bodyPr wrap="square" rtlCol="0" anchor="ctr"/>
+          <a:lstStyle/>
+          <a:p>
+            <a:pPr marL="0" indent="0" algn="ctr">
               <a:buNone/>
             </a:pPr>
             <a:r>
@@ -4563,9 +4459,9 @@
                 <a:solidFill>
                   <a:srgbClr val="2C3E50"/>
                 </a:solidFill>
-                <a:latin typeface="Arial" pitchFamily="34" charset="0"/>
-                <a:ea typeface="Arial" pitchFamily="34" charset="-122"/>
-                <a:cs typeface="Arial" pitchFamily="34" charset="-120"/>
+                <a:latin typeface="Arial" panose="020B0604020202020204" pitchFamily="34" charset="0"/>
+                <a:ea typeface="Arial" panose="020B0604020202020204" pitchFamily="34" charset="-122"/>
+                <a:cs typeface="Arial" panose="020B0604020202020204" pitchFamily="34" charset="-120"/>
               </a:rPr>
               <a:t>API接口</a:t>
             </a:r>
@@ -4588,13 +4484,12 @@
             <a:avLst/>
           </a:prstGeom>
           <a:noFill/>
-          <a:ln/>
-        </p:spPr>
-        <p:txBody>
-          <a:bodyPr wrap="square" rtlCol="0" anchor="ctr"/>
-          <a:lstStyle/>
-          <a:p>
-            <a:pPr algn="ctr" indent="0" marL="0">
+        </p:spPr>
+        <p:txBody>
+          <a:bodyPr wrap="square" rtlCol="0" anchor="ctr"/>
+          <a:lstStyle/>
+          <a:p>
+            <a:pPr marL="0" indent="0" algn="ctr">
               <a:buNone/>
             </a:pPr>
             <a:r>
@@ -4602,9 +4497,9 @@
                 <a:solidFill>
                   <a:srgbClr val="7F8C8D"/>
                 </a:solidFill>
-                <a:latin typeface="Arial" pitchFamily="34" charset="0"/>
-                <a:ea typeface="Arial" pitchFamily="34" charset="-122"/>
-                <a:cs typeface="Arial" pitchFamily="34" charset="-120"/>
+                <a:latin typeface="Arial" panose="020B0604020202020204" pitchFamily="34" charset="0"/>
+                <a:ea typeface="Arial" panose="020B0604020202020204" pitchFamily="34" charset="-122"/>
+                <a:cs typeface="Arial" panose="020B0604020202020204" pitchFamily="34" charset="-120"/>
               </a:rPr>
               <a:t>P0/P1全部场景覆盖</a:t>
             </a:r>
@@ -4654,7 +4549,6 @@
           <a:solidFill>
             <a:srgbClr val="27AE60"/>
           </a:solidFill>
-          <a:ln/>
         </p:spPr>
       </p:sp>
       <p:sp>
@@ -4672,13 +4566,12 @@
             <a:avLst/>
           </a:prstGeom>
           <a:noFill/>
-          <a:ln/>
-        </p:spPr>
-        <p:txBody>
-          <a:bodyPr wrap="square" rtlCol="0" anchor="ctr"/>
-          <a:lstStyle/>
-          <a:p>
-            <a:pPr algn="ctr" indent="0" marL="0">
+        </p:spPr>
+        <p:txBody>
+          <a:bodyPr wrap="square" rtlCol="0" anchor="ctr"/>
+          <a:lstStyle/>
+          <a:p>
+            <a:pPr marL="0" indent="0" algn="ctr">
               <a:buNone/>
             </a:pPr>
             <a:r>
@@ -4686,9 +4579,9 @@
                 <a:solidFill>
                   <a:srgbClr val="27AE60"/>
                 </a:solidFill>
-                <a:latin typeface="Arial" pitchFamily="34" charset="0"/>
-                <a:ea typeface="Arial" pitchFamily="34" charset="-122"/>
-                <a:cs typeface="Arial" pitchFamily="34" charset="-120"/>
+                <a:latin typeface="Arial" panose="020B0604020202020204" pitchFamily="34" charset="0"/>
+                <a:ea typeface="Arial" panose="020B0604020202020204" pitchFamily="34" charset="-122"/>
+                <a:cs typeface="Arial" panose="020B0604020202020204" pitchFamily="34" charset="-120"/>
               </a:rPr>
               <a:t>8</a:t>
             </a:r>
@@ -4711,13 +4604,12 @@
             <a:avLst/>
           </a:prstGeom>
           <a:noFill/>
-          <a:ln/>
-        </p:spPr>
-        <p:txBody>
-          <a:bodyPr wrap="square" rtlCol="0" anchor="ctr"/>
-          <a:lstStyle/>
-          <a:p>
-            <a:pPr algn="ctr" indent="0" marL="0">
+        </p:spPr>
+        <p:txBody>
+          <a:bodyPr wrap="square" rtlCol="0" anchor="ctr"/>
+          <a:lstStyle/>
+          <a:p>
+            <a:pPr marL="0" indent="0" algn="ctr">
               <a:buNone/>
             </a:pPr>
             <a:r>
@@ -4725,9 +4617,9 @@
                 <a:solidFill>
                   <a:srgbClr val="2C3E50"/>
                 </a:solidFill>
-                <a:latin typeface="Arial" pitchFamily="34" charset="0"/>
-                <a:ea typeface="Arial" pitchFamily="34" charset="-122"/>
-                <a:cs typeface="Arial" pitchFamily="34" charset="-120"/>
+                <a:latin typeface="Arial" panose="020B0604020202020204" pitchFamily="34" charset="0"/>
+                <a:ea typeface="Arial" panose="020B0604020202020204" pitchFamily="34" charset="-122"/>
+                <a:cs typeface="Arial" panose="020B0604020202020204" pitchFamily="34" charset="-120"/>
               </a:rPr>
               <a:t>数据库表</a:t>
             </a:r>
@@ -4750,13 +4642,12 @@
             <a:avLst/>
           </a:prstGeom>
           <a:noFill/>
-          <a:ln/>
-        </p:spPr>
-        <p:txBody>
-          <a:bodyPr wrap="square" rtlCol="0" anchor="ctr"/>
-          <a:lstStyle/>
-          <a:p>
-            <a:pPr algn="ctr" indent="0" marL="0">
+        </p:spPr>
+        <p:txBody>
+          <a:bodyPr wrap="square" rtlCol="0" anchor="ctr"/>
+          <a:lstStyle/>
+          <a:p>
+            <a:pPr marL="0" indent="0" algn="ctr">
               <a:buNone/>
             </a:pPr>
             <a:r>
@@ -4764,9 +4655,9 @@
                 <a:solidFill>
                   <a:srgbClr val="7F8C8D"/>
                 </a:solidFill>
-                <a:latin typeface="Arial" pitchFamily="34" charset="0"/>
-                <a:ea typeface="Arial" pitchFamily="34" charset="-122"/>
-                <a:cs typeface="Arial" pitchFamily="34" charset="-120"/>
+                <a:latin typeface="Arial" panose="020B0604020202020204" pitchFamily="34" charset="0"/>
+                <a:ea typeface="Arial" panose="020B0604020202020204" pitchFamily="34" charset="-122"/>
+                <a:cs typeface="Arial" panose="020B0604020202020204" pitchFamily="34" charset="-120"/>
               </a:rPr>
               <a:t>后端全部场景覆盖</a:t>
             </a:r>
@@ -4816,7 +4707,6 @@
           <a:solidFill>
             <a:srgbClr val="E67E22"/>
           </a:solidFill>
-          <a:ln/>
         </p:spPr>
       </p:sp>
       <p:sp>
@@ -4834,13 +4724,12 @@
             <a:avLst/>
           </a:prstGeom>
           <a:noFill/>
-          <a:ln/>
-        </p:spPr>
-        <p:txBody>
-          <a:bodyPr wrap="square" rtlCol="0" anchor="ctr"/>
-          <a:lstStyle/>
-          <a:p>
-            <a:pPr algn="ctr" indent="0" marL="0">
+        </p:spPr>
+        <p:txBody>
+          <a:bodyPr wrap="square" rtlCol="0" anchor="ctr"/>
+          <a:lstStyle/>
+          <a:p>
+            <a:pPr marL="0" indent="0" algn="ctr">
               <a:buNone/>
             </a:pPr>
             <a:r>
@@ -4848,9 +4737,9 @@
                 <a:solidFill>
                   <a:srgbClr val="E67E22"/>
                 </a:solidFill>
-                <a:latin typeface="Arial" pitchFamily="34" charset="0"/>
-                <a:ea typeface="Arial" pitchFamily="34" charset="-122"/>
-                <a:cs typeface="Arial" pitchFamily="34" charset="-120"/>
+                <a:latin typeface="Arial" panose="020B0604020202020204" pitchFamily="34" charset="0"/>
+                <a:ea typeface="Arial" panose="020B0604020202020204" pitchFamily="34" charset="-122"/>
+                <a:cs typeface="Arial" panose="020B0604020202020204" pitchFamily="34" charset="-120"/>
               </a:rPr>
               <a:t>24</a:t>
             </a:r>
@@ -4873,13 +4762,12 @@
             <a:avLst/>
           </a:prstGeom>
           <a:noFill/>
-          <a:ln/>
-        </p:spPr>
-        <p:txBody>
-          <a:bodyPr wrap="square" rtlCol="0" anchor="ctr"/>
-          <a:lstStyle/>
-          <a:p>
-            <a:pPr algn="ctr" indent="0" marL="0">
+        </p:spPr>
+        <p:txBody>
+          <a:bodyPr wrap="square" rtlCol="0" anchor="ctr"/>
+          <a:lstStyle/>
+          <a:p>
+            <a:pPr marL="0" indent="0" algn="ctr">
               <a:buNone/>
             </a:pPr>
             <a:r>
@@ -4887,9 +4775,9 @@
                 <a:solidFill>
                   <a:srgbClr val="2C3E50"/>
                 </a:solidFill>
-                <a:latin typeface="Arial" pitchFamily="34" charset="0"/>
-                <a:ea typeface="Arial" pitchFamily="34" charset="-122"/>
-                <a:cs typeface="Arial" pitchFamily="34" charset="-120"/>
+                <a:latin typeface="Arial" panose="020B0604020202020204" pitchFamily="34" charset="0"/>
+                <a:ea typeface="Arial" panose="020B0604020202020204" pitchFamily="34" charset="-122"/>
+                <a:cs typeface="Arial" panose="020B0604020202020204" pitchFamily="34" charset="-120"/>
               </a:rPr>
               <a:t>前端页面</a:t>
             </a:r>
@@ -4912,13 +4800,12 @@
             <a:avLst/>
           </a:prstGeom>
           <a:noFill/>
-          <a:ln/>
-        </p:spPr>
-        <p:txBody>
-          <a:bodyPr wrap="square" rtlCol="0" anchor="ctr"/>
-          <a:lstStyle/>
-          <a:p>
-            <a:pPr algn="ctr" indent="0" marL="0">
+        </p:spPr>
+        <p:txBody>
+          <a:bodyPr wrap="square" rtlCol="0" anchor="ctr"/>
+          <a:lstStyle/>
+          <a:p>
+            <a:pPr marL="0" indent="0" algn="ctr">
               <a:buNone/>
             </a:pPr>
             <a:r>
@@ -4926,9 +4813,9 @@
                 <a:solidFill>
                   <a:srgbClr val="7F8C8D"/>
                 </a:solidFill>
-                <a:latin typeface="Arial" pitchFamily="34" charset="0"/>
-                <a:ea typeface="Arial" pitchFamily="34" charset="-122"/>
-                <a:cs typeface="Arial" pitchFamily="34" charset="-120"/>
+                <a:latin typeface="Arial" panose="020B0604020202020204" pitchFamily="34" charset="0"/>
+                <a:ea typeface="Arial" panose="020B0604020202020204" pitchFamily="34" charset="-122"/>
+                <a:cs typeface="Arial" panose="020B0604020202020204" pitchFamily="34" charset="-120"/>
               </a:rPr>
               <a:t>完整覆盖MVP全部场景</a:t>
             </a:r>
@@ -4978,7 +4865,6 @@
           <a:solidFill>
             <a:srgbClr val="8E44AD"/>
           </a:solidFill>
-          <a:ln/>
         </p:spPr>
       </p:sp>
       <p:sp>
@@ -4996,13 +4882,12 @@
             <a:avLst/>
           </a:prstGeom>
           <a:noFill/>
-          <a:ln/>
-        </p:spPr>
-        <p:txBody>
-          <a:bodyPr wrap="square" rtlCol="0" anchor="ctr"/>
-          <a:lstStyle/>
-          <a:p>
-            <a:pPr algn="ctr" indent="0" marL="0">
+        </p:spPr>
+        <p:txBody>
+          <a:bodyPr wrap="square" rtlCol="0" anchor="ctr"/>
+          <a:lstStyle/>
+          <a:p>
+            <a:pPr marL="0" indent="0" algn="ctr">
               <a:buNone/>
             </a:pPr>
             <a:r>
@@ -5010,9 +4895,9 @@
                 <a:solidFill>
                   <a:srgbClr val="8E44AD"/>
                 </a:solidFill>
-                <a:latin typeface="Arial" pitchFamily="34" charset="0"/>
-                <a:ea typeface="Arial" pitchFamily="34" charset="-122"/>
-                <a:cs typeface="Arial" pitchFamily="34" charset="-120"/>
+                <a:latin typeface="Arial" panose="020B0604020202020204" pitchFamily="34" charset="0"/>
+                <a:ea typeface="Arial" panose="020B0604020202020204" pitchFamily="34" charset="-122"/>
+                <a:cs typeface="Arial" panose="020B0604020202020204" pitchFamily="34" charset="-120"/>
               </a:rPr>
               <a:t>7</a:t>
             </a:r>
@@ -5035,13 +4920,12 @@
             <a:avLst/>
           </a:prstGeom>
           <a:noFill/>
-          <a:ln/>
-        </p:spPr>
-        <p:txBody>
-          <a:bodyPr wrap="square" rtlCol="0" anchor="ctr"/>
-          <a:lstStyle/>
-          <a:p>
-            <a:pPr algn="ctr" indent="0" marL="0">
+        </p:spPr>
+        <p:txBody>
+          <a:bodyPr wrap="square" rtlCol="0" anchor="ctr"/>
+          <a:lstStyle/>
+          <a:p>
+            <a:pPr marL="0" indent="0" algn="ctr">
               <a:buNone/>
             </a:pPr>
             <a:r>
@@ -5049,9 +4933,9 @@
                 <a:solidFill>
                   <a:srgbClr val="2C3E50"/>
                 </a:solidFill>
-                <a:latin typeface="Arial" pitchFamily="34" charset="0"/>
-                <a:ea typeface="Arial" pitchFamily="34" charset="-122"/>
-                <a:cs typeface="Arial" pitchFamily="34" charset="-120"/>
+                <a:latin typeface="Arial" panose="020B0604020202020204" pitchFamily="34" charset="0"/>
+                <a:ea typeface="Arial" panose="020B0604020202020204" pitchFamily="34" charset="-122"/>
+                <a:cs typeface="Arial" panose="020B0604020202020204" pitchFamily="34" charset="-120"/>
               </a:rPr>
               <a:t>专业文档</a:t>
             </a:r>
@@ -5074,13 +4958,12 @@
             <a:avLst/>
           </a:prstGeom>
           <a:noFill/>
-          <a:ln/>
-        </p:spPr>
-        <p:txBody>
-          <a:bodyPr wrap="square" rtlCol="0" anchor="ctr"/>
-          <a:lstStyle/>
-          <a:p>
-            <a:pPr algn="ctr" indent="0" marL="0">
+        </p:spPr>
+        <p:txBody>
+          <a:bodyPr wrap="square" rtlCol="0" anchor="ctr"/>
+          <a:lstStyle/>
+          <a:p>
+            <a:pPr marL="0" indent="0" algn="ctr">
               <a:buNone/>
             </a:pPr>
             <a:r>
@@ -5088,9 +4971,9 @@
                 <a:solidFill>
                   <a:srgbClr val="7F8C8D"/>
                 </a:solidFill>
-                <a:latin typeface="Arial" pitchFamily="34" charset="0"/>
-                <a:ea typeface="Arial" pitchFamily="34" charset="-122"/>
-                <a:cs typeface="Arial" pitchFamily="34" charset="-120"/>
+                <a:latin typeface="Arial" panose="020B0604020202020204" pitchFamily="34" charset="0"/>
+                <a:ea typeface="Arial" panose="020B0604020202020204" pitchFamily="34" charset="-122"/>
+                <a:cs typeface="Arial" panose="020B0604020202020204" pitchFamily="34" charset="-120"/>
               </a:rPr>
               <a:t>全流程文档驱动体现</a:t>
             </a:r>
@@ -5140,7 +5023,6 @@
           <a:solidFill>
             <a:srgbClr val="E74C3C"/>
           </a:solidFill>
-          <a:ln/>
         </p:spPr>
       </p:sp>
       <p:sp>
@@ -5158,13 +5040,12 @@
             <a:avLst/>
           </a:prstGeom>
           <a:noFill/>
-          <a:ln/>
-        </p:spPr>
-        <p:txBody>
-          <a:bodyPr wrap="square" rtlCol="0" anchor="ctr"/>
-          <a:lstStyle/>
-          <a:p>
-            <a:pPr algn="ctr" indent="0" marL="0">
+        </p:spPr>
+        <p:txBody>
+          <a:bodyPr wrap="square" rtlCol="0" anchor="ctr"/>
+          <a:lstStyle/>
+          <a:p>
+            <a:pPr marL="0" indent="0" algn="ctr">
               <a:buNone/>
             </a:pPr>
             <a:r>
@@ -5172,9 +5053,9 @@
                 <a:solidFill>
                   <a:srgbClr val="E74C3C"/>
                 </a:solidFill>
-                <a:latin typeface="Arial" pitchFamily="34" charset="0"/>
-                <a:ea typeface="Arial" pitchFamily="34" charset="-122"/>
-                <a:cs typeface="Arial" pitchFamily="34" charset="-120"/>
+                <a:latin typeface="Arial" panose="020B0604020202020204" pitchFamily="34" charset="0"/>
+                <a:ea typeface="Arial" panose="020B0604020202020204" pitchFamily="34" charset="-122"/>
+                <a:cs typeface="Arial" panose="020B0604020202020204" pitchFamily="34" charset="-120"/>
               </a:rPr>
               <a:t>~90%</a:t>
             </a:r>
@@ -5197,13 +5078,12 @@
             <a:avLst/>
           </a:prstGeom>
           <a:noFill/>
-          <a:ln/>
-        </p:spPr>
-        <p:txBody>
-          <a:bodyPr wrap="square" rtlCol="0" anchor="ctr"/>
-          <a:lstStyle/>
-          <a:p>
-            <a:pPr algn="ctr" indent="0" marL="0">
+        </p:spPr>
+        <p:txBody>
+          <a:bodyPr wrap="square" rtlCol="0" anchor="ctr"/>
+          <a:lstStyle/>
+          <a:p>
+            <a:pPr marL="0" indent="0" algn="ctr">
               <a:buNone/>
             </a:pPr>
             <a:r>
@@ -5211,9 +5091,9 @@
                 <a:solidFill>
                   <a:srgbClr val="2C3E50"/>
                 </a:solidFill>
-                <a:latin typeface="Arial" pitchFamily="34" charset="0"/>
-                <a:ea typeface="Arial" pitchFamily="34" charset="-122"/>
-                <a:cs typeface="Arial" pitchFamily="34" charset="-120"/>
+                <a:latin typeface="Arial" panose="020B0604020202020204" pitchFamily="34" charset="0"/>
+                <a:ea typeface="Arial" panose="020B0604020202020204" pitchFamily="34" charset="-122"/>
+                <a:cs typeface="Arial" panose="020B0604020202020204" pitchFamily="34" charset="-120"/>
               </a:rPr>
               <a:t>代码AI生成率</a:t>
             </a:r>
@@ -5236,13 +5116,12 @@
             <a:avLst/>
           </a:prstGeom>
           <a:noFill/>
-          <a:ln/>
-        </p:spPr>
-        <p:txBody>
-          <a:bodyPr wrap="square" rtlCol="0" anchor="ctr"/>
-          <a:lstStyle/>
-          <a:p>
-            <a:pPr algn="ctr" indent="0" marL="0">
+        </p:spPr>
+        <p:txBody>
+          <a:bodyPr wrap="square" rtlCol="0" anchor="ctr"/>
+          <a:lstStyle/>
+          <a:p>
+            <a:pPr marL="0" indent="0" algn="ctr">
               <a:buNone/>
             </a:pPr>
             <a:r>
@@ -5250,9 +5129,9 @@
                 <a:solidFill>
                   <a:srgbClr val="7F8C8D"/>
                 </a:solidFill>
-                <a:latin typeface="Arial" pitchFamily="34" charset="0"/>
-                <a:ea typeface="Arial" pitchFamily="34" charset="-122"/>
-                <a:cs typeface="Arial" pitchFamily="34" charset="-120"/>
+                <a:latin typeface="Arial" panose="020B0604020202020204" pitchFamily="34" charset="0"/>
+                <a:ea typeface="Arial" panose="020B0604020202020204" pitchFamily="34" charset="-122"/>
+                <a:cs typeface="Arial" panose="020B0604020202020204" pitchFamily="34" charset="-120"/>
               </a:rPr>
               <a:t>人工聚焦架构与决策</a:t>
             </a:r>
@@ -5302,7 +5181,6 @@
           <a:solidFill>
             <a:srgbClr val="1A5276"/>
           </a:solidFill>
-          <a:ln/>
         </p:spPr>
       </p:sp>
       <p:sp>
@@ -5320,13 +5198,12 @@
             <a:avLst/>
           </a:prstGeom>
           <a:noFill/>
-          <a:ln/>
-        </p:spPr>
-        <p:txBody>
-          <a:bodyPr wrap="square" rtlCol="0" anchor="ctr"/>
-          <a:lstStyle/>
-          <a:p>
-            <a:pPr algn="ctr" indent="0" marL="0">
+        </p:spPr>
+        <p:txBody>
+          <a:bodyPr wrap="square" rtlCol="0" anchor="ctr"/>
+          <a:lstStyle/>
+          <a:p>
+            <a:pPr marL="0" indent="0" algn="ctr">
               <a:buNone/>
             </a:pPr>
             <a:r>
@@ -5334,9 +5211,9 @@
                 <a:solidFill>
                   <a:srgbClr val="1A5276"/>
                 </a:solidFill>
-                <a:latin typeface="Arial" pitchFamily="34" charset="0"/>
-                <a:ea typeface="Arial" pitchFamily="34" charset="-122"/>
-                <a:cs typeface="Arial" pitchFamily="34" charset="-120"/>
+                <a:latin typeface="Arial" panose="020B0604020202020204" pitchFamily="34" charset="0"/>
+                <a:ea typeface="Arial" panose="020B0604020202020204" pitchFamily="34" charset="-122"/>
+                <a:cs typeface="Arial" panose="020B0604020202020204" pitchFamily="34" charset="-120"/>
               </a:rPr>
               <a:t>3</a:t>
             </a:r>
@@ -5359,13 +5236,12 @@
             <a:avLst/>
           </a:prstGeom>
           <a:noFill/>
-          <a:ln/>
-        </p:spPr>
-        <p:txBody>
-          <a:bodyPr wrap="square" rtlCol="0" anchor="ctr"/>
-          <a:lstStyle/>
-          <a:p>
-            <a:pPr algn="ctr" indent="0" marL="0">
+        </p:spPr>
+        <p:txBody>
+          <a:bodyPr wrap="square" rtlCol="0" anchor="ctr"/>
+          <a:lstStyle/>
+          <a:p>
+            <a:pPr marL="0" indent="0" algn="ctr">
               <a:buNone/>
             </a:pPr>
             <a:r>
@@ -5373,9 +5249,9 @@
                 <a:solidFill>
                   <a:srgbClr val="2C3E50"/>
                 </a:solidFill>
-                <a:latin typeface="Arial" pitchFamily="34" charset="0"/>
-                <a:ea typeface="Arial" pitchFamily="34" charset="-122"/>
-                <a:cs typeface="Arial" pitchFamily="34" charset="-120"/>
+                <a:latin typeface="Arial" panose="020B0604020202020204" pitchFamily="34" charset="0"/>
+                <a:ea typeface="Arial" panose="020B0604020202020204" pitchFamily="34" charset="-122"/>
+                <a:cs typeface="Arial" panose="020B0604020202020204" pitchFamily="34" charset="-120"/>
               </a:rPr>
               <a:t>MCP Skill</a:t>
             </a:r>
@@ -5398,13 +5274,12 @@
             <a:avLst/>
           </a:prstGeom>
           <a:noFill/>
-          <a:ln/>
-        </p:spPr>
-        <p:txBody>
-          <a:bodyPr wrap="square" rtlCol="0" anchor="ctr"/>
-          <a:lstStyle/>
-          <a:p>
-            <a:pPr algn="ctr" indent="0" marL="0">
+        </p:spPr>
+        <p:txBody>
+          <a:bodyPr wrap="square" rtlCol="0" anchor="ctr"/>
+          <a:lstStyle/>
+          <a:p>
+            <a:pPr marL="0" indent="0" algn="ctr">
               <a:buNone/>
             </a:pPr>
             <a:r>
@@ -5412,9 +5287,9 @@
                 <a:solidFill>
                   <a:srgbClr val="7F8C8D"/>
                 </a:solidFill>
-                <a:latin typeface="Arial" pitchFamily="34" charset="0"/>
-                <a:ea typeface="Arial" pitchFamily="34" charset="-122"/>
-                <a:cs typeface="Arial" pitchFamily="34" charset="-120"/>
+                <a:latin typeface="Arial" panose="020B0604020202020204" pitchFamily="34" charset="0"/>
+                <a:ea typeface="Arial" panose="020B0604020202020204" pitchFamily="34" charset="-122"/>
+                <a:cs typeface="Arial" panose="020B0604020202020204" pitchFamily="34" charset="-120"/>
               </a:rPr>
               <a:t>意图推理与执行解耦</a:t>
             </a:r>
@@ -5424,7 +5299,7 @@
       </p:sp>
       <p:pic>
         <p:nvPicPr>
-          <p:cNvPr id="36" name="Image 0" descr="F:\code\bank\bank\screenshots\home.png">    </p:cNvPr>
+          <p:cNvPr id="36" name="Image 0" descr="F:\code\bank\bank\screenshots\home.png"/>
           <p:cNvPicPr>
             <a:picLocks noChangeAspect="1"/>
           </p:cNvPicPr>
@@ -5432,8 +5307,10 @@
         </p:nvPicPr>
         <p:blipFill>
           <a:blip r:embed="rId1"/>
-          <a:srcRect l="0" r="0" t="0" b="0"/>
-          <a:stretch/>
+          <a:srcRect/>
+          <a:stretch>
+            <a:fillRect/>
+          </a:stretch>
         </p:blipFill>
         <p:spPr>
           <a:xfrm>
@@ -5447,7 +5324,7 @@
       </p:pic>
       <p:pic>
         <p:nvPicPr>
-          <p:cNvPr id="37" name="Image 1" descr="F:\code\bank\bank\screenshots\ai-transaction.png">    </p:cNvPr>
+          <p:cNvPr id="37" name="Image 1" descr="F:\code\bank\bank\screenshots\ai-transaction.png"/>
           <p:cNvPicPr>
             <a:picLocks noChangeAspect="1"/>
           </p:cNvPicPr>
@@ -5455,8 +5332,10 @@
         </p:nvPicPr>
         <p:blipFill>
           <a:blip r:embed="rId2"/>
-          <a:srcRect l="0" r="0" t="0" b="0"/>
-          <a:stretch/>
+          <a:srcRect/>
+          <a:stretch>
+            <a:fillRect/>
+          </a:stretch>
         </p:blipFill>
         <p:spPr>
           <a:xfrm>
@@ -5470,7 +5349,7 @@
       </p:pic>
       <p:pic>
         <p:nvPicPr>
-          <p:cNvPr id="38" name="Image 2" descr="F:\code\bank\bank\screenshots\consumption-analysis.png">    </p:cNvPr>
+          <p:cNvPr id="38" name="Image 2" descr="F:\code\bank\bank\screenshots\consumption-analysis.png"/>
           <p:cNvPicPr>
             <a:picLocks noChangeAspect="1"/>
           </p:cNvPicPr>
@@ -5478,8 +5357,10 @@
         </p:nvPicPr>
         <p:blipFill>
           <a:blip r:embed="rId3"/>
-          <a:srcRect l="0" r="0" t="0" b="0"/>
-          <a:stretch/>
+          <a:srcRect/>
+          <a:stretch>
+            <a:fillRect/>
+          </a:stretch>
         </p:blipFill>
         <p:spPr>
           <a:xfrm>
@@ -5506,13 +5387,12 @@
             <a:avLst/>
           </a:prstGeom>
           <a:noFill/>
-          <a:ln/>
-        </p:spPr>
-        <p:txBody>
-          <a:bodyPr wrap="square" rtlCol="0" anchor="ctr"/>
-          <a:lstStyle/>
-          <a:p>
-            <a:pPr indent="0" marL="0">
+        </p:spPr>
+        <p:txBody>
+          <a:bodyPr wrap="square" rtlCol="0" anchor="ctr"/>
+          <a:lstStyle/>
+          <a:p>
+            <a:pPr marL="0" indent="0">
               <a:buNone/>
             </a:pPr>
             <a:r>
@@ -5520,9 +5400,9 @@
                 <a:solidFill>
                   <a:srgbClr val="7F8C8D"/>
                 </a:solidFill>
-                <a:latin typeface="Arial" pitchFamily="34" charset="0"/>
-                <a:ea typeface="Arial" pitchFamily="34" charset="-122"/>
-                <a:cs typeface="Arial" pitchFamily="34" charset="-120"/>
+                <a:latin typeface="Arial" panose="020B0604020202020204" pitchFamily="34" charset="0"/>
+                <a:ea typeface="Arial" panose="020B0604020202020204" pitchFamily="34" charset="-122"/>
+                <a:cs typeface="Arial" panose="020B0604020202020204" pitchFamily="34" charset="-120"/>
               </a:rPr>
               <a:t>数据来源证据：左起=AI对话截图 / 消费分析截图 / 首页截图</a:t>
             </a:r>
@@ -5570,13 +5450,12 @@
             <a:avLst/>
           </a:prstGeom>
           <a:noFill/>
-          <a:ln/>
-        </p:spPr>
-        <p:txBody>
-          <a:bodyPr wrap="square" rtlCol="0" anchor="ctr"/>
-          <a:lstStyle/>
-          <a:p>
-            <a:pPr algn="ctr" indent="0" marL="0">
+        </p:spPr>
+        <p:txBody>
+          <a:bodyPr wrap="square" rtlCol="0" anchor="ctr"/>
+          <a:lstStyle/>
+          <a:p>
+            <a:pPr marL="0" indent="0" algn="ctr">
               <a:buNone/>
             </a:pPr>
             <a:r>
@@ -5584,9 +5463,9 @@
                 <a:solidFill>
                   <a:srgbClr val="1A5276"/>
                 </a:solidFill>
-                <a:latin typeface="Arial" pitchFamily="34" charset="0"/>
-                <a:ea typeface="Arial" pitchFamily="34" charset="-122"/>
-                <a:cs typeface="Arial" pitchFamily="34" charset="-120"/>
+                <a:latin typeface="Arial" panose="020B0604020202020204" pitchFamily="34" charset="0"/>
+                <a:ea typeface="Arial" panose="020B0604020202020204" pitchFamily="34" charset="-122"/>
+                <a:cs typeface="Arial" panose="020B0604020202020204" pitchFamily="34" charset="-120"/>
               </a:rPr>
               <a:t>从需求到上线，全流程文档驱动，最终产出可用产品。每个数据背后都有真实截图作为证据。</a:t>
             </a:r>
@@ -5609,13 +5488,12 @@
             <a:avLst/>
           </a:prstGeom>
           <a:noFill/>
-          <a:ln/>
-        </p:spPr>
-        <p:txBody>
-          <a:bodyPr wrap="square" rtlCol="0" anchor="ctr"/>
-          <a:lstStyle/>
-          <a:p>
-            <a:pPr algn="r" indent="0" marL="0">
+        </p:spPr>
+        <p:txBody>
+          <a:bodyPr wrap="square" rtlCol="0" anchor="ctr"/>
+          <a:lstStyle/>
+          <a:p>
+            <a:pPr marL="0" indent="0" algn="r">
               <a:buNone/>
             </a:pPr>
             <a:r>
@@ -5623,9 +5501,9 @@
                 <a:solidFill>
                   <a:srgbClr val="7F8C8D"/>
                 </a:solidFill>
-                <a:latin typeface="Arial" pitchFamily="34" charset="0"/>
-                <a:ea typeface="Arial" pitchFamily="34" charset="-122"/>
-                <a:cs typeface="Arial" pitchFamily="34" charset="-120"/>
+                <a:latin typeface="Arial" panose="020B0604020202020204" pitchFamily="34" charset="0"/>
+                <a:ea typeface="Arial" panose="020B0604020202020204" pitchFamily="34" charset="-122"/>
+                <a:cs typeface="Arial" panose="020B0604020202020204" pitchFamily="34" charset="-120"/>
               </a:rPr>
               <a:t>▸ 接下来：回归本源</a:t>
             </a:r>
@@ -5648,13 +5526,12 @@
             <a:avLst/>
           </a:prstGeom>
           <a:noFill/>
-          <a:ln/>
-        </p:spPr>
-        <p:txBody>
-          <a:bodyPr wrap="square" rtlCol="0" anchor="ctr"/>
-          <a:lstStyle/>
-          <a:p>
-            <a:pPr algn="l" indent="0" marL="0">
+        </p:spPr>
+        <p:txBody>
+          <a:bodyPr wrap="square" rtlCol="0" anchor="ctr"/>
+          <a:lstStyle/>
+          <a:p>
+            <a:pPr marL="0" indent="0" algn="l">
               <a:buNone/>
             </a:pPr>
             <a:r>
@@ -5662,9 +5539,9 @@
                 <a:solidFill>
                   <a:srgbClr val="4A90E2"/>
                 </a:solidFill>
-                <a:latin typeface="Arial" pitchFamily="34" charset="0"/>
-                <a:ea typeface="Arial" pitchFamily="34" charset="-122"/>
-                <a:cs typeface="Arial" pitchFamily="34" charset="-120"/>
+                <a:latin typeface="Arial" panose="020B0604020202020204" pitchFamily="34" charset="0"/>
+                <a:ea typeface="Arial" panose="020B0604020202020204" pitchFamily="34" charset="-122"/>
+                <a:cs typeface="Arial" panose="020B0604020202020204" pitchFamily="34" charset="-120"/>
               </a:rPr>
               <a:t>→</a:t>
             </a:r>
@@ -5682,12 +5559,13 @@
 
 <file path=ppt/slides/slide13.xml><?xml version="1.0" encoding="utf-8"?>
 <p:sld xmlns:a="http://schemas.openxmlformats.org/drawingml/2006/main" xmlns:r="http://schemas.openxmlformats.org/officeDocument/2006/relationships" xmlns:p="http://schemas.openxmlformats.org/presentationml/2006/main">
-  <p:cSld name="Slide 13">
+  <p:cSld>
     <p:bg>
       <p:bgPr>
         <a:solidFill>
           <a:srgbClr val="1A3A5C"/>
         </a:solidFill>
+        <a:effectLst/>
       </p:bgPr>
     </p:bg>
     <p:spTree>
@@ -5721,7 +5599,6 @@
           <a:solidFill>
             <a:srgbClr val="4A90E2"/>
           </a:solidFill>
-          <a:ln/>
         </p:spPr>
       </p:sp>
       <p:sp>
@@ -5739,13 +5616,12 @@
             <a:avLst/>
           </a:prstGeom>
           <a:noFill/>
-          <a:ln/>
-        </p:spPr>
-        <p:txBody>
-          <a:bodyPr wrap="square" rtlCol="0" anchor="ctr"/>
-          <a:lstStyle/>
-          <a:p>
-            <a:pPr algn="ctr" indent="0" marL="0">
+        </p:spPr>
+        <p:txBody>
+          <a:bodyPr wrap="square" rtlCol="0" anchor="ctr"/>
+          <a:lstStyle/>
+          <a:p>
+            <a:pPr marL="0" indent="0" algn="ctr">
               <a:buNone/>
             </a:pPr>
             <a:r>
@@ -5753,9 +5629,9 @@
                 <a:solidFill>
                   <a:srgbClr val="FFFFFF"/>
                 </a:solidFill>
-                <a:latin typeface="Arial" pitchFamily="34" charset="0"/>
-                <a:ea typeface="Arial" pitchFamily="34" charset="-122"/>
-                <a:cs typeface="Arial" pitchFamily="34" charset="-120"/>
+                <a:latin typeface="Arial" panose="020B0604020202020204" pitchFamily="34" charset="0"/>
+                <a:ea typeface="Arial" panose="020B0604020202020204" pitchFamily="34" charset="-122"/>
+                <a:cs typeface="Arial" panose="020B0604020202020204" pitchFamily="34" charset="-120"/>
               </a:rPr>
               <a:t>以前我们学习写代码</a:t>
             </a:r>
@@ -5778,13 +5654,12 @@
             <a:avLst/>
           </a:prstGeom>
           <a:noFill/>
-          <a:ln/>
-        </p:spPr>
-        <p:txBody>
-          <a:bodyPr wrap="square" rtlCol="0" anchor="ctr"/>
-          <a:lstStyle/>
-          <a:p>
-            <a:pPr algn="ctr" indent="0" marL="0">
+        </p:spPr>
+        <p:txBody>
+          <a:bodyPr wrap="square" rtlCol="0" anchor="ctr"/>
+          <a:lstStyle/>
+          <a:p>
+            <a:pPr marL="0" indent="0" algn="ctr">
               <a:buNone/>
             </a:pPr>
             <a:r>
@@ -5792,9 +5667,9 @@
                 <a:solidFill>
                   <a:srgbClr val="FFFFFF"/>
                 </a:solidFill>
-                <a:latin typeface="Arial" pitchFamily="34" charset="0"/>
-                <a:ea typeface="Arial" pitchFamily="34" charset="-122"/>
-                <a:cs typeface="Arial" pitchFamily="34" charset="-120"/>
+                <a:latin typeface="Arial" panose="020B0604020202020204" pitchFamily="34" charset="0"/>
+                <a:ea typeface="Arial" panose="020B0604020202020204" pitchFamily="34" charset="-122"/>
+                <a:cs typeface="Arial" panose="020B0604020202020204" pitchFamily="34" charset="-120"/>
               </a:rPr>
               <a:t>让计算机理解我们的逻辑</a:t>
             </a:r>
@@ -5819,7 +5694,6 @@
           <a:solidFill>
             <a:srgbClr val="4A90E2"/>
           </a:solidFill>
-          <a:ln/>
         </p:spPr>
       </p:sp>
       <p:sp>
@@ -5837,13 +5711,12 @@
             <a:avLst/>
           </a:prstGeom>
           <a:noFill/>
-          <a:ln/>
-        </p:spPr>
-        <p:txBody>
-          <a:bodyPr wrap="square" rtlCol="0" anchor="ctr"/>
-          <a:lstStyle/>
-          <a:p>
-            <a:pPr algn="ctr" indent="0" marL="0">
+        </p:spPr>
+        <p:txBody>
+          <a:bodyPr wrap="square" rtlCol="0" anchor="ctr"/>
+          <a:lstStyle/>
+          <a:p>
+            <a:pPr marL="0" indent="0" algn="ctr">
               <a:buNone/>
             </a:pPr>
             <a:r>
@@ -5851,9 +5724,9 @@
                 <a:solidFill>
                   <a:srgbClr val="FFFFFF"/>
                 </a:solidFill>
-                <a:latin typeface="Arial" pitchFamily="34" charset="0"/>
-                <a:ea typeface="Arial" pitchFamily="34" charset="-122"/>
-                <a:cs typeface="Arial" pitchFamily="34" charset="-120"/>
+                <a:latin typeface="Arial" panose="020B0604020202020204" pitchFamily="34" charset="0"/>
+                <a:ea typeface="Arial" panose="020B0604020202020204" pitchFamily="34" charset="-122"/>
+                <a:cs typeface="Arial" panose="020B0604020202020204" pitchFamily="34" charset="-120"/>
               </a:rPr>
               <a:t>现在我们学习写文档</a:t>
             </a:r>
@@ -5876,13 +5749,12 @@
             <a:avLst/>
           </a:prstGeom>
           <a:noFill/>
-          <a:ln/>
-        </p:spPr>
-        <p:txBody>
-          <a:bodyPr wrap="square" rtlCol="0" anchor="ctr"/>
-          <a:lstStyle/>
-          <a:p>
-            <a:pPr algn="ctr" indent="0" marL="0">
+        </p:spPr>
+        <p:txBody>
+          <a:bodyPr wrap="square" rtlCol="0" anchor="ctr"/>
+          <a:lstStyle/>
+          <a:p>
+            <a:pPr marL="0" indent="0" algn="ctr">
               <a:buNone/>
             </a:pPr>
             <a:r>
@@ -5890,9 +5762,9 @@
                 <a:solidFill>
                   <a:srgbClr val="4A90E2"/>
                 </a:solidFill>
-                <a:latin typeface="Arial" pitchFamily="34" charset="0"/>
-                <a:ea typeface="Arial" pitchFamily="34" charset="-122"/>
-                <a:cs typeface="Arial" pitchFamily="34" charset="-120"/>
+                <a:latin typeface="Arial" panose="020B0604020202020204" pitchFamily="34" charset="0"/>
+                <a:ea typeface="Arial" panose="020B0604020202020204" pitchFamily="34" charset="-122"/>
+                <a:cs typeface="Arial" panose="020B0604020202020204" pitchFamily="34" charset="-120"/>
               </a:rPr>
               <a:t>让AI理解我们的业务</a:t>
             </a:r>
@@ -5915,13 +5787,12 @@
             <a:avLst/>
           </a:prstGeom>
           <a:noFill/>
-          <a:ln/>
-        </p:spPr>
-        <p:txBody>
-          <a:bodyPr wrap="square" rtlCol="0" anchor="ctr"/>
-          <a:lstStyle/>
-          <a:p>
-            <a:pPr algn="ctr" indent="0" marL="0">
+        </p:spPr>
+        <p:txBody>
+          <a:bodyPr wrap="square" rtlCol="0" anchor="ctr"/>
+          <a:lstStyle/>
+          <a:p>
+            <a:pPr marL="0" indent="0" algn="ctr">
               <a:buNone/>
             </a:pPr>
             <a:r>
@@ -5929,9 +5800,9 @@
                 <a:solidFill>
                   <a:srgbClr val="8899AA"/>
                 </a:solidFill>
-                <a:latin typeface="Arial" pitchFamily="34" charset="0"/>
-                <a:ea typeface="Arial" pitchFamily="34" charset="-122"/>
-                <a:cs typeface="Arial" pitchFamily="34" charset="-120"/>
+                <a:latin typeface="Arial" panose="020B0604020202020204" pitchFamily="34" charset="0"/>
+                <a:ea typeface="Arial" panose="020B0604020202020204" pitchFamily="34" charset="-122"/>
+                <a:cs typeface="Arial" panose="020B0604020202020204" pitchFamily="34" charset="-120"/>
               </a:rPr>
               <a:t>源于竞赛，不止于竞赛</a:t>
             </a:r>
@@ -5956,7 +5827,6 @@
           <a:solidFill>
             <a:srgbClr val="4A90E2"/>
           </a:solidFill>
-          <a:ln/>
         </p:spPr>
       </p:sp>
     </p:spTree>
@@ -5969,12 +5839,13 @@
 
 <file path=ppt/slides/slide14.xml><?xml version="1.0" encoding="utf-8"?>
 <p:sld xmlns:a="http://schemas.openxmlformats.org/drawingml/2006/main" xmlns:r="http://schemas.openxmlformats.org/officeDocument/2006/relationships" xmlns:p="http://schemas.openxmlformats.org/presentationml/2006/main">
-  <p:cSld name="Slide 14">
+  <p:cSld>
     <p:bg>
       <p:bgPr>
         <a:solidFill>
           <a:srgbClr val="1A3A5C"/>
         </a:solidFill>
+        <a:effectLst/>
       </p:bgPr>
     </p:bg>
     <p:spTree>
@@ -6008,7 +5879,6 @@
           <a:solidFill>
             <a:srgbClr val="4A90E2"/>
           </a:solidFill>
-          <a:ln/>
         </p:spPr>
       </p:sp>
       <p:sp>
@@ -6026,13 +5896,12 @@
             <a:avLst/>
           </a:prstGeom>
           <a:noFill/>
-          <a:ln/>
-        </p:spPr>
-        <p:txBody>
-          <a:bodyPr wrap="square" rtlCol="0" anchor="ctr"/>
-          <a:lstStyle/>
-          <a:p>
-            <a:pPr algn="ctr" indent="0" marL="0">
+        </p:spPr>
+        <p:txBody>
+          <a:bodyPr wrap="square" rtlCol="0" anchor="ctr"/>
+          <a:lstStyle/>
+          <a:p>
+            <a:pPr marL="0" indent="0" algn="ctr">
               <a:buNone/>
             </a:pPr>
             <a:r>
@@ -6040,9 +5909,9 @@
                 <a:solidFill>
                   <a:srgbClr val="FFFFFF"/>
                 </a:solidFill>
-                <a:latin typeface="Arial" pitchFamily="34" charset="0"/>
-                <a:ea typeface="Arial" pitchFamily="34" charset="-122"/>
-                <a:cs typeface="Arial" pitchFamily="34" charset="-120"/>
+                <a:latin typeface="Arial" panose="020B0604020202020204" pitchFamily="34" charset="0"/>
+                <a:ea typeface="Arial" panose="020B0604020202020204" pitchFamily="34" charset="-122"/>
+                <a:cs typeface="Arial" panose="020B0604020202020204" pitchFamily="34" charset="-120"/>
               </a:rPr>
               <a:t>感谢聆听</a:t>
             </a:r>
@@ -6067,7 +5936,6 @@
           <a:solidFill>
             <a:srgbClr val="4A90E2"/>
           </a:solidFill>
-          <a:ln/>
         </p:spPr>
       </p:sp>
       <p:sp>
@@ -6085,13 +5953,12 @@
             <a:avLst/>
           </a:prstGeom>
           <a:noFill/>
-          <a:ln/>
-        </p:spPr>
-        <p:txBody>
-          <a:bodyPr wrap="square" rtlCol="0" anchor="ctr"/>
-          <a:lstStyle/>
-          <a:p>
-            <a:pPr algn="ctr" indent="0" marL="0">
+        </p:spPr>
+        <p:txBody>
+          <a:bodyPr wrap="square" rtlCol="0" anchor="ctr"/>
+          <a:lstStyle/>
+          <a:p>
+            <a:pPr marL="0" indent="0" algn="ctr">
               <a:buNone/>
             </a:pPr>
             <a:r>
@@ -6099,9 +5966,9 @@
                 <a:solidFill>
                   <a:srgbClr val="8899AA"/>
                 </a:solidFill>
-                <a:latin typeface="Arial" pitchFamily="34" charset="0"/>
-                <a:ea typeface="Arial" pitchFamily="34" charset="-122"/>
-                <a:cs typeface="Arial" pitchFamily="34" charset="-120"/>
+                <a:latin typeface="Arial" panose="020B0604020202020204" pitchFamily="34" charset="0"/>
+                <a:ea typeface="Arial" panose="020B0604020202020204" pitchFamily="34" charset="-122"/>
+                <a:cs typeface="Arial" panose="020B0604020202020204" pitchFamily="34" charset="-120"/>
               </a:rPr>
               <a:t>源于竞赛，不止于竞赛</a:t>
             </a:r>
@@ -6124,13 +5991,12 @@
             <a:avLst/>
           </a:prstGeom>
           <a:noFill/>
-          <a:ln/>
-        </p:spPr>
-        <p:txBody>
-          <a:bodyPr wrap="square" rtlCol="0" anchor="ctr"/>
-          <a:lstStyle/>
-          <a:p>
-            <a:pPr algn="ctr" indent="0" marL="0">
+        </p:spPr>
+        <p:txBody>
+          <a:bodyPr wrap="square" rtlCol="0" anchor="ctr"/>
+          <a:lstStyle/>
+          <a:p>
+            <a:pPr marL="0" indent="0" algn="ctr">
               <a:buNone/>
             </a:pPr>
             <a:r>
@@ -6138,9 +6004,9 @@
                 <a:solidFill>
                   <a:srgbClr val="8899AA"/>
                 </a:solidFill>
-                <a:latin typeface="Arial" pitchFamily="34" charset="0"/>
-                <a:ea typeface="Arial" pitchFamily="34" charset="-122"/>
-                <a:cs typeface="Arial" pitchFamily="34" charset="-120"/>
+                <a:latin typeface="Arial" panose="020B0604020202020204" pitchFamily="34" charset="0"/>
+                <a:ea typeface="Arial" panose="020B0604020202020204" pitchFamily="34" charset="-122"/>
+                <a:cs typeface="Arial" panose="020B0604020202020204" pitchFamily="34" charset="-120"/>
               </a:rPr>
               <a:t>手机银行核心业务系统 · AI原生研发实践</a:t>
             </a:r>
@@ -6165,7 +6031,6 @@
           <a:solidFill>
             <a:srgbClr val="4A90E2"/>
           </a:solidFill>
-          <a:ln/>
         </p:spPr>
       </p:sp>
     </p:spTree>
@@ -6178,12 +6043,13 @@
 
 <file path=ppt/slides/slide2.xml><?xml version="1.0" encoding="utf-8"?>
 <p:sld xmlns:a="http://schemas.openxmlformats.org/drawingml/2006/main" xmlns:r="http://schemas.openxmlformats.org/officeDocument/2006/relationships" xmlns:p="http://schemas.openxmlformats.org/presentationml/2006/main">
-  <p:cSld name="Slide 2">
+  <p:cSld>
     <p:bg>
       <p:bgPr>
         <a:solidFill>
           <a:srgbClr val="FFFFFF"/>
         </a:solidFill>
+        <a:effectLst/>
       </p:bgPr>
     </p:bg>
     <p:spTree>
@@ -6215,13 +6081,12 @@
             <a:avLst/>
           </a:prstGeom>
           <a:noFill/>
-          <a:ln/>
-        </p:spPr>
-        <p:txBody>
-          <a:bodyPr wrap="square" rtlCol="0" anchor="ctr"/>
-          <a:lstStyle/>
-          <a:p>
-            <a:pPr algn="ctr" indent="0" marL="0">
+        </p:spPr>
+        <p:txBody>
+          <a:bodyPr wrap="square" rtlCol="0" anchor="ctr"/>
+          <a:lstStyle/>
+          <a:p>
+            <a:pPr marL="0" indent="0" algn="ctr">
               <a:buNone/>
             </a:pPr>
             <a:r>
@@ -6229,9 +6094,9 @@
                 <a:solidFill>
                   <a:srgbClr val="E74C3C"/>
                 </a:solidFill>
-                <a:latin typeface="Arial" pitchFamily="34" charset="0"/>
-                <a:ea typeface="Arial" pitchFamily="34" charset="-122"/>
-                <a:cs typeface="Arial" pitchFamily="34" charset="-120"/>
+                <a:latin typeface="Arial" panose="020B0604020202020204" pitchFamily="34" charset="0"/>
+                <a:ea typeface="Arial" panose="020B0604020202020204" pitchFamily="34" charset="-122"/>
+                <a:cs typeface="Arial" panose="020B0604020202020204" pitchFamily="34" charset="-120"/>
               </a:rPr>
               <a:t>200字功能描述，两周构建一个银行系统</a:t>
             </a:r>
@@ -6254,13 +6119,12 @@
             <a:avLst/>
           </a:prstGeom>
           <a:noFill/>
-          <a:ln/>
-        </p:spPr>
-        <p:txBody>
-          <a:bodyPr wrap="square" rtlCol="0" anchor="ctr"/>
-          <a:lstStyle/>
-          <a:p>
-            <a:pPr algn="ctr" indent="0" marL="0">
+        </p:spPr>
+        <p:txBody>
+          <a:bodyPr wrap="square" rtlCol="0" anchor="ctr"/>
+          <a:lstStyle/>
+          <a:p>
+            <a:pPr marL="0" indent="0" algn="ctr">
               <a:buNone/>
             </a:pPr>
             <a:r>
@@ -6268,9 +6132,9 @@
                 <a:solidFill>
                   <a:srgbClr val="2C3E50"/>
                 </a:solidFill>
-                <a:latin typeface="Arial" pitchFamily="34" charset="0"/>
-                <a:ea typeface="Arial" pitchFamily="34" charset="-122"/>
-                <a:cs typeface="Arial" pitchFamily="34" charset="-120"/>
+                <a:latin typeface="Arial" panose="020B0604020202020204" pitchFamily="34" charset="0"/>
+                <a:ea typeface="Arial" panose="020B0604020202020204" pitchFamily="34" charset="-122"/>
+                <a:cs typeface="Arial" panose="020B0604020202020204" pitchFamily="34" charset="-120"/>
               </a:rPr>
               <a:t>让AI扮演五个角色生成七份文档——但我们发现了一个有趣的悖论</a:t>
             </a:r>
@@ -6318,13 +6182,12 @@
             <a:avLst/>
           </a:prstGeom>
           <a:noFill/>
-          <a:ln/>
-        </p:spPr>
-        <p:txBody>
-          <a:bodyPr wrap="square" rtlCol="0" anchor="ctr"/>
-          <a:lstStyle/>
-          <a:p>
-            <a:pPr algn="ctr" indent="0" marL="0">
+        </p:spPr>
+        <p:txBody>
+          <a:bodyPr wrap="square" rtlCol="0" anchor="ctr"/>
+          <a:lstStyle/>
+          <a:p>
+            <a:pPr marL="0" indent="0" algn="ctr">
               <a:lnSpc>
                 <a:spcPct val="140000"/>
               </a:lnSpc>
@@ -6335,16 +6198,16 @@
                 <a:solidFill>
                   <a:srgbClr val="E74C3C"/>
                 </a:solidFill>
-                <a:latin typeface="Arial" pitchFamily="34" charset="0"/>
-                <a:ea typeface="Arial" pitchFamily="34" charset="-122"/>
-                <a:cs typeface="Arial" pitchFamily="34" charset="-120"/>
+                <a:latin typeface="Arial" panose="020B0604020202020204" pitchFamily="34" charset="0"/>
+                <a:ea typeface="Arial" panose="020B0604020202020204" pitchFamily="34" charset="-122"/>
+                <a:cs typeface="Arial" panose="020B0604020202020204" pitchFamily="34" charset="-120"/>
               </a:rPr>
               <a:t>AI写的代码语法完美、测试通过——</a:t>
             </a:r>
             <a:endParaRPr lang="en-US" sz="2000" dirty="0"/>
           </a:p>
           <a:p>
-            <a:pPr algn="ctr" indent="0" marL="0">
+            <a:pPr marL="0" indent="0" algn="ctr">
               <a:lnSpc>
                 <a:spcPct val="140000"/>
               </a:lnSpc>
@@ -6355,9 +6218,9 @@
                 <a:solidFill>
                   <a:srgbClr val="E74C3C"/>
                 </a:solidFill>
-                <a:latin typeface="Arial" pitchFamily="34" charset="0"/>
-                <a:ea typeface="Arial" pitchFamily="34" charset="-122"/>
-                <a:cs typeface="Arial" pitchFamily="34" charset="-120"/>
+                <a:latin typeface="Arial" panose="020B0604020202020204" pitchFamily="34" charset="0"/>
+                <a:ea typeface="Arial" panose="020B0604020202020204" pitchFamily="34" charset="-122"/>
+                <a:cs typeface="Arial" panose="020B0604020202020204" pitchFamily="34" charset="-120"/>
               </a:rPr>
               <a:t>但业务语义的偏差，恰恰因为太完美而更难发现</a:t>
             </a:r>
@@ -6405,13 +6268,12 @@
             <a:avLst/>
           </a:prstGeom>
           <a:noFill/>
-          <a:ln/>
-        </p:spPr>
-        <p:txBody>
-          <a:bodyPr wrap="square" rtlCol="0" anchor="ctr"/>
-          <a:lstStyle/>
-          <a:p>
-            <a:pPr algn="ctr" indent="0" marL="0">
+        </p:spPr>
+        <p:txBody>
+          <a:bodyPr wrap="square" rtlCol="0" anchor="ctr"/>
+          <a:lstStyle/>
+          <a:p>
+            <a:pPr marL="0" indent="0" algn="ctr">
               <a:buNone/>
             </a:pPr>
             <a:r>
@@ -6419,9 +6281,9 @@
                 <a:solidFill>
                   <a:srgbClr val="1A5276"/>
                 </a:solidFill>
-                <a:latin typeface="Arial" pitchFamily="34" charset="0"/>
-                <a:ea typeface="Arial" pitchFamily="34" charset="-122"/>
-                <a:cs typeface="Arial" pitchFamily="34" charset="-120"/>
+                <a:latin typeface="Arial" panose="020B0604020202020204" pitchFamily="34" charset="0"/>
+                <a:ea typeface="Arial" panose="020B0604020202020204" pitchFamily="34" charset="-122"/>
+                <a:cs typeface="Arial" panose="020B0604020202020204" pitchFamily="34" charset="-120"/>
               </a:rPr>
               <a:t>不是代码的问题——是AI理解业务的方式需要重新设计</a:t>
             </a:r>
@@ -6444,13 +6306,12 @@
             <a:avLst/>
           </a:prstGeom>
           <a:noFill/>
-          <a:ln/>
-        </p:spPr>
-        <p:txBody>
-          <a:bodyPr wrap="square" rtlCol="0" anchor="ctr"/>
-          <a:lstStyle/>
-          <a:p>
-            <a:pPr algn="r" indent="0" marL="0">
+        </p:spPr>
+        <p:txBody>
+          <a:bodyPr wrap="square" rtlCol="0" anchor="ctr"/>
+          <a:lstStyle/>
+          <a:p>
+            <a:pPr marL="0" indent="0" algn="r">
               <a:buNone/>
             </a:pPr>
             <a:r>
@@ -6458,9 +6319,9 @@
                 <a:solidFill>
                   <a:srgbClr val="7F8C8D"/>
                 </a:solidFill>
-                <a:latin typeface="Arial" pitchFamily="34" charset="0"/>
-                <a:ea typeface="Arial" pitchFamily="34" charset="-122"/>
-                <a:cs typeface="Arial" pitchFamily="34" charset="-120"/>
+                <a:latin typeface="Arial" panose="020B0604020202020204" pitchFamily="34" charset="0"/>
+                <a:ea typeface="Arial" panose="020B0604020202020204" pitchFamily="34" charset="-122"/>
+                <a:cs typeface="Arial" panose="020B0604020202020204" pitchFamily="34" charset="-120"/>
               </a:rPr>
               <a:t>▸ 接下来：先看我们用这套方法构建了什么</a:t>
             </a:r>
@@ -6483,13 +6344,12 @@
             <a:avLst/>
           </a:prstGeom>
           <a:noFill/>
-          <a:ln/>
-        </p:spPr>
-        <p:txBody>
-          <a:bodyPr wrap="square" rtlCol="0" anchor="ctr"/>
-          <a:lstStyle/>
-          <a:p>
-            <a:pPr algn="l" indent="0" marL="0">
+        </p:spPr>
+        <p:txBody>
+          <a:bodyPr wrap="square" rtlCol="0" anchor="ctr"/>
+          <a:lstStyle/>
+          <a:p>
+            <a:pPr marL="0" indent="0" algn="l">
               <a:buNone/>
             </a:pPr>
             <a:r>
@@ -6497,9 +6357,9 @@
                 <a:solidFill>
                   <a:srgbClr val="4A90E2"/>
                 </a:solidFill>
-                <a:latin typeface="Arial" pitchFamily="34" charset="0"/>
-                <a:ea typeface="Arial" pitchFamily="34" charset="-122"/>
-                <a:cs typeface="Arial" pitchFamily="34" charset="-120"/>
+                <a:latin typeface="Arial" panose="020B0604020202020204" pitchFamily="34" charset="0"/>
+                <a:ea typeface="Arial" panose="020B0604020202020204" pitchFamily="34" charset="-122"/>
+                <a:cs typeface="Arial" panose="020B0604020202020204" pitchFamily="34" charset="-120"/>
               </a:rPr>
               <a:t>→</a:t>
             </a:r>
@@ -6517,12 +6377,13 @@
 
 <file path=ppt/slides/slide3.xml><?xml version="1.0" encoding="utf-8"?>
 <p:sld xmlns:a="http://schemas.openxmlformats.org/drawingml/2006/main" xmlns:r="http://schemas.openxmlformats.org/officeDocument/2006/relationships" xmlns:p="http://schemas.openxmlformats.org/presentationml/2006/main">
-  <p:cSld name="Slide 3">
+  <p:cSld>
     <p:bg>
       <p:bgPr>
         <a:solidFill>
           <a:srgbClr val="FFFFFF"/>
         </a:solidFill>
+        <a:effectLst/>
       </p:bgPr>
     </p:bg>
     <p:spTree>
@@ -6556,7 +6417,6 @@
           <a:solidFill>
             <a:srgbClr val="4A90E2"/>
           </a:solidFill>
-          <a:ln/>
         </p:spPr>
       </p:sp>
       <p:sp>
@@ -6574,13 +6434,12 @@
             <a:avLst/>
           </a:prstGeom>
           <a:noFill/>
-          <a:ln/>
-        </p:spPr>
-        <p:txBody>
-          <a:bodyPr wrap="square" rtlCol="0" anchor="ctr"/>
-          <a:lstStyle/>
-          <a:p>
-            <a:pPr indent="0" marL="0">
+        </p:spPr>
+        <p:txBody>
+          <a:bodyPr wrap="square" rtlCol="0" anchor="ctr"/>
+          <a:lstStyle/>
+          <a:p>
+            <a:pPr marL="0" indent="0">
               <a:buNone/>
             </a:pPr>
             <a:r>
@@ -6588,9 +6447,9 @@
                 <a:solidFill>
                   <a:srgbClr val="2C3E50"/>
                 </a:solidFill>
-                <a:latin typeface="Arial" pitchFamily="34" charset="0"/>
-                <a:ea typeface="Arial" pitchFamily="34" charset="-122"/>
-                <a:cs typeface="Arial" pitchFamily="34" charset="-120"/>
+                <a:latin typeface="Arial" panose="020B0604020202020204" pitchFamily="34" charset="0"/>
+                <a:ea typeface="Arial" panose="020B0604020202020204" pitchFamily="34" charset="-122"/>
+                <a:cs typeface="Arial" panose="020B0604020202020204" pitchFamily="34" charset="-120"/>
               </a:rPr>
               <a:t>功能全景</a:t>
             </a:r>
@@ -6613,13 +6472,12 @@
             <a:avLst/>
           </a:prstGeom>
           <a:noFill/>
-          <a:ln/>
-        </p:spPr>
-        <p:txBody>
-          <a:bodyPr wrap="square" rtlCol="0" anchor="ctr"/>
-          <a:lstStyle/>
-          <a:p>
-            <a:pPr algn="r" indent="0" marL="0">
+        </p:spPr>
+        <p:txBody>
+          <a:bodyPr wrap="square" rtlCol="0" anchor="ctr"/>
+          <a:lstStyle/>
+          <a:p>
+            <a:pPr marL="0" indent="0" algn="r">
               <a:buNone/>
             </a:pPr>
             <a:r>
@@ -6627,9 +6485,9 @@
                 <a:solidFill>
                   <a:srgbClr val="7F8C8D"/>
                 </a:solidFill>
-                <a:latin typeface="Arial" pitchFamily="34" charset="0"/>
-                <a:ea typeface="Arial" pitchFamily="34" charset="-122"/>
-                <a:cs typeface="Arial" pitchFamily="34" charset="-120"/>
+                <a:latin typeface="Arial" panose="020B0604020202020204" pitchFamily="34" charset="0"/>
+                <a:ea typeface="Arial" panose="020B0604020202020204" pitchFamily="34" charset="-122"/>
+                <a:cs typeface="Arial" panose="020B0604020202020204" pitchFamily="34" charset="-120"/>
               </a:rPr>
               <a:t>手机银行核心系统实景</a:t>
             </a:r>
@@ -6654,12 +6512,11 @@
           <a:solidFill>
             <a:srgbClr val="4A90E2"/>
           </a:solidFill>
-          <a:ln/>
         </p:spPr>
       </p:sp>
       <p:pic>
         <p:nvPicPr>
-          <p:cNvPr id="6" name="Image 0" descr="F:\code\bank\bank\screenshots\home.png">    </p:cNvPr>
+          <p:cNvPr id="6" name="Image 0" descr="F:\code\bank\bank\screenshots\home.png"/>
           <p:cNvPicPr>
             <a:picLocks noChangeAspect="1"/>
           </p:cNvPicPr>
@@ -6667,8 +6524,10 @@
         </p:nvPicPr>
         <p:blipFill>
           <a:blip r:embed="rId1"/>
-          <a:srcRect l="0" r="0" t="0" b="0"/>
-          <a:stretch/>
+          <a:srcRect/>
+          <a:stretch>
+            <a:fillRect/>
+          </a:stretch>
         </p:blipFill>
         <p:spPr>
           <a:xfrm>
@@ -6722,7 +6581,6 @@
           <a:solidFill>
             <a:srgbClr val="4A90E2"/>
           </a:solidFill>
-          <a:ln/>
         </p:spPr>
       </p:sp>
       <p:sp>
@@ -6740,13 +6598,12 @@
             <a:avLst/>
           </a:prstGeom>
           <a:noFill/>
-          <a:ln/>
-        </p:spPr>
-        <p:txBody>
-          <a:bodyPr wrap="square" rtlCol="0" anchor="ctr"/>
-          <a:lstStyle/>
-          <a:p>
-            <a:pPr algn="ctr" indent="0" marL="0">
+        </p:spPr>
+        <p:txBody>
+          <a:bodyPr wrap="square" rtlCol="0" anchor="ctr"/>
+          <a:lstStyle/>
+          <a:p>
+            <a:pPr marL="0" indent="0" algn="ctr">
               <a:buNone/>
             </a:pPr>
             <a:r>
@@ -6754,9 +6611,9 @@
                 <a:solidFill>
                   <a:srgbClr val="FFFFFF"/>
                 </a:solidFill>
-                <a:latin typeface="Arial" pitchFamily="34" charset="0"/>
-                <a:ea typeface="Arial" pitchFamily="34" charset="-122"/>
-                <a:cs typeface="Arial" pitchFamily="34" charset="-120"/>
+                <a:latin typeface="Arial" panose="020B0604020202020204" pitchFamily="34" charset="0"/>
+                <a:ea typeface="Arial" panose="020B0604020202020204" pitchFamily="34" charset="-122"/>
+                <a:cs typeface="Arial" panose="020B0604020202020204" pitchFamily="34" charset="-120"/>
               </a:rPr>
               <a:t>①</a:t>
             </a:r>
@@ -6779,13 +6636,12 @@
             <a:avLst/>
           </a:prstGeom>
           <a:noFill/>
-          <a:ln/>
-        </p:spPr>
-        <p:txBody>
-          <a:bodyPr wrap="square" rtlCol="0" anchor="ctr"/>
-          <a:lstStyle/>
-          <a:p>
-            <a:pPr indent="0" marL="0">
+        </p:spPr>
+        <p:txBody>
+          <a:bodyPr wrap="square" rtlCol="0" anchor="ctr"/>
+          <a:lstStyle/>
+          <a:p>
+            <a:pPr marL="0" indent="0">
               <a:buNone/>
             </a:pPr>
             <a:r>
@@ -6793,9 +6649,9 @@
                 <a:solidFill>
                   <a:srgbClr val="2C3E50"/>
                 </a:solidFill>
-                <a:latin typeface="Arial" pitchFamily="34" charset="0"/>
-                <a:ea typeface="Arial" pitchFamily="34" charset="-122"/>
-                <a:cs typeface="Arial" pitchFamily="34" charset="-120"/>
+                <a:latin typeface="Arial" panose="020B0604020202020204" pitchFamily="34" charset="0"/>
+                <a:ea typeface="Arial" panose="020B0604020202020204" pitchFamily="34" charset="-122"/>
+                <a:cs typeface="Arial" panose="020B0604020202020204" pitchFamily="34" charset="-120"/>
               </a:rPr>
               <a:t>总资产实时查看</a:t>
             </a:r>
@@ -6818,13 +6674,12 @@
             <a:avLst/>
           </a:prstGeom>
           <a:noFill/>
-          <a:ln/>
         </p:spPr>
         <p:txBody>
           <a:bodyPr wrap="square" rtlCol="0" anchor="t"/>
           <a:lstStyle/>
           <a:p>
-            <a:pPr indent="0" marL="0">
+            <a:pPr marL="0" indent="0">
               <a:buNone/>
             </a:pPr>
             <a:r>
@@ -6832,9 +6687,9 @@
                 <a:solidFill>
                   <a:srgbClr val="34495E"/>
                 </a:solidFill>
-                <a:latin typeface="Arial" pitchFamily="34" charset="0"/>
-                <a:ea typeface="Arial" pitchFamily="34" charset="-122"/>
-                <a:cs typeface="Arial" pitchFamily="34" charset="-120"/>
+                <a:latin typeface="Arial" panose="020B0604020202020204" pitchFamily="34" charset="0"/>
+                <a:ea typeface="Arial" panose="020B0604020202020204" pitchFamily="34" charset="-122"/>
+                <a:cs typeface="Arial" panose="020B0604020202020204" pitchFamily="34" charset="-120"/>
               </a:rPr>
               <a:t>实时账户余额，正负号区分收支方向</a:t>
             </a:r>
@@ -6884,7 +6739,6 @@
           <a:solidFill>
             <a:srgbClr val="27AE60"/>
           </a:solidFill>
-          <a:ln/>
         </p:spPr>
       </p:sp>
       <p:sp>
@@ -6902,13 +6756,12 @@
             <a:avLst/>
           </a:prstGeom>
           <a:noFill/>
-          <a:ln/>
-        </p:spPr>
-        <p:txBody>
-          <a:bodyPr wrap="square" rtlCol="0" anchor="ctr"/>
-          <a:lstStyle/>
-          <a:p>
-            <a:pPr algn="ctr" indent="0" marL="0">
+        </p:spPr>
+        <p:txBody>
+          <a:bodyPr wrap="square" rtlCol="0" anchor="ctr"/>
+          <a:lstStyle/>
+          <a:p>
+            <a:pPr marL="0" indent="0" algn="ctr">
               <a:buNone/>
             </a:pPr>
             <a:r>
@@ -6916,9 +6769,9 @@
                 <a:solidFill>
                   <a:srgbClr val="FFFFFF"/>
                 </a:solidFill>
-                <a:latin typeface="Arial" pitchFamily="34" charset="0"/>
-                <a:ea typeface="Arial" pitchFamily="34" charset="-122"/>
-                <a:cs typeface="Arial" pitchFamily="34" charset="-120"/>
+                <a:latin typeface="Arial" panose="020B0604020202020204" pitchFamily="34" charset="0"/>
+                <a:ea typeface="Arial" panose="020B0604020202020204" pitchFamily="34" charset="-122"/>
+                <a:cs typeface="Arial" panose="020B0604020202020204" pitchFamily="34" charset="-120"/>
               </a:rPr>
               <a:t>②</a:t>
             </a:r>
@@ -6941,13 +6794,12 @@
             <a:avLst/>
           </a:prstGeom>
           <a:noFill/>
-          <a:ln/>
-        </p:spPr>
-        <p:txBody>
-          <a:bodyPr wrap="square" rtlCol="0" anchor="ctr"/>
-          <a:lstStyle/>
-          <a:p>
-            <a:pPr indent="0" marL="0">
+        </p:spPr>
+        <p:txBody>
+          <a:bodyPr wrap="square" rtlCol="0" anchor="ctr"/>
+          <a:lstStyle/>
+          <a:p>
+            <a:pPr marL="0" indent="0">
               <a:buNone/>
             </a:pPr>
             <a:r>
@@ -6955,9 +6807,9 @@
                 <a:solidFill>
                   <a:srgbClr val="2C3E50"/>
                 </a:solidFill>
-                <a:latin typeface="Arial" pitchFamily="34" charset="0"/>
-                <a:ea typeface="Arial" pitchFamily="34" charset="-122"/>
-                <a:cs typeface="Arial" pitchFamily="34" charset="-120"/>
+                <a:latin typeface="Arial" panose="020B0604020202020204" pitchFamily="34" charset="0"/>
+                <a:ea typeface="Arial" panose="020B0604020202020204" pitchFamily="34" charset="-122"/>
+                <a:cs typeface="Arial" panose="020B0604020202020204" pitchFamily="34" charset="-120"/>
               </a:rPr>
               <a:t>5大快捷功能</a:t>
             </a:r>
@@ -6980,13 +6832,12 @@
             <a:avLst/>
           </a:prstGeom>
           <a:noFill/>
-          <a:ln/>
         </p:spPr>
         <p:txBody>
           <a:bodyPr wrap="square" rtlCol="0" anchor="t"/>
           <a:lstStyle/>
           <a:p>
-            <a:pPr indent="0" marL="0">
+            <a:pPr marL="0" indent="0">
               <a:buNone/>
             </a:pPr>
             <a:r>
@@ -6994,9 +6845,9 @@
                 <a:solidFill>
                   <a:srgbClr val="34495E"/>
                 </a:solidFill>
-                <a:latin typeface="Arial" pitchFamily="34" charset="0"/>
-                <a:ea typeface="Arial" pitchFamily="34" charset="-122"/>
-                <a:cs typeface="Arial" pitchFamily="34" charset="-120"/>
+                <a:latin typeface="Arial" panose="020B0604020202020204" pitchFamily="34" charset="0"/>
+                <a:ea typeface="Arial" panose="020B0604020202020204" pitchFamily="34" charset="-122"/>
+                <a:cs typeface="Arial" panose="020B0604020202020204" pitchFamily="34" charset="-120"/>
               </a:rPr>
               <a:t>转账、交易记录、生活缴费、银行卡、安全中心</a:t>
             </a:r>
@@ -7046,7 +6897,6 @@
           <a:solidFill>
             <a:srgbClr val="E67E22"/>
           </a:solidFill>
-          <a:ln/>
         </p:spPr>
       </p:sp>
       <p:sp>
@@ -7064,13 +6914,12 @@
             <a:avLst/>
           </a:prstGeom>
           <a:noFill/>
-          <a:ln/>
-        </p:spPr>
-        <p:txBody>
-          <a:bodyPr wrap="square" rtlCol="0" anchor="ctr"/>
-          <a:lstStyle/>
-          <a:p>
-            <a:pPr algn="ctr" indent="0" marL="0">
+        </p:spPr>
+        <p:txBody>
+          <a:bodyPr wrap="square" rtlCol="0" anchor="ctr"/>
+          <a:lstStyle/>
+          <a:p>
+            <a:pPr marL="0" indent="0" algn="ctr">
               <a:buNone/>
             </a:pPr>
             <a:r>
@@ -7078,9 +6927,9 @@
                 <a:solidFill>
                   <a:srgbClr val="FFFFFF"/>
                 </a:solidFill>
-                <a:latin typeface="Arial" pitchFamily="34" charset="0"/>
-                <a:ea typeface="Arial" pitchFamily="34" charset="-122"/>
-                <a:cs typeface="Arial" pitchFamily="34" charset="-120"/>
+                <a:latin typeface="Arial" panose="020B0604020202020204" pitchFamily="34" charset="0"/>
+                <a:ea typeface="Arial" panose="020B0604020202020204" pitchFamily="34" charset="-122"/>
+                <a:cs typeface="Arial" panose="020B0604020202020204" pitchFamily="34" charset="-120"/>
               </a:rPr>
               <a:t>③</a:t>
             </a:r>
@@ -7103,13 +6952,12 @@
             <a:avLst/>
           </a:prstGeom>
           <a:noFill/>
-          <a:ln/>
-        </p:spPr>
-        <p:txBody>
-          <a:bodyPr wrap="square" rtlCol="0" anchor="ctr"/>
-          <a:lstStyle/>
-          <a:p>
-            <a:pPr indent="0" marL="0">
+        </p:spPr>
+        <p:txBody>
+          <a:bodyPr wrap="square" rtlCol="0" anchor="ctr"/>
+          <a:lstStyle/>
+          <a:p>
+            <a:pPr marL="0" indent="0">
               <a:buNone/>
             </a:pPr>
             <a:r>
@@ -7117,9 +6965,9 @@
                 <a:solidFill>
                   <a:srgbClr val="2C3E50"/>
                 </a:solidFill>
-                <a:latin typeface="Arial" pitchFamily="34" charset="0"/>
-                <a:ea typeface="Arial" pitchFamily="34" charset="-122"/>
-                <a:cs typeface="Arial" pitchFamily="34" charset="-120"/>
+                <a:latin typeface="Arial" panose="020B0604020202020204" pitchFamily="34" charset="0"/>
+                <a:ea typeface="Arial" panose="020B0604020202020204" pitchFamily="34" charset="-122"/>
+                <a:cs typeface="Arial" panose="020B0604020202020204" pitchFamily="34" charset="-120"/>
               </a:rPr>
               <a:t>AI能力集成入口</a:t>
             </a:r>
@@ -7142,13 +6990,12 @@
             <a:avLst/>
           </a:prstGeom>
           <a:noFill/>
-          <a:ln/>
         </p:spPr>
         <p:txBody>
           <a:bodyPr wrap="square" rtlCol="0" anchor="t"/>
           <a:lstStyle/>
           <a:p>
-            <a:pPr indent="0" marL="0">
+            <a:pPr marL="0" indent="0">
               <a:buNone/>
             </a:pPr>
             <a:r>
@@ -7156,9 +7003,9 @@
                 <a:solidFill>
                   <a:srgbClr val="34495E"/>
                 </a:solidFill>
-                <a:latin typeface="Arial" pitchFamily="34" charset="0"/>
-                <a:ea typeface="Arial" pitchFamily="34" charset="-122"/>
-                <a:cs typeface="Arial" pitchFamily="34" charset="-120"/>
+                <a:latin typeface="Arial" panose="020B0604020202020204" pitchFamily="34" charset="0"/>
+                <a:ea typeface="Arial" panose="020B0604020202020204" pitchFamily="34" charset="-122"/>
+                <a:cs typeface="Arial" panose="020B0604020202020204" pitchFamily="34" charset="-120"/>
               </a:rPr>
               <a:t>AI助手+消费分析两大AI核心能力一键进入</a:t>
             </a:r>
@@ -7183,7 +7030,6 @@
           <a:solidFill>
             <a:srgbClr val="EBF5FB"/>
           </a:solidFill>
-          <a:ln/>
         </p:spPr>
       </p:sp>
       <p:sp>
@@ -7201,13 +7047,12 @@
             <a:avLst/>
           </a:prstGeom>
           <a:noFill/>
-          <a:ln/>
-        </p:spPr>
-        <p:txBody>
-          <a:bodyPr wrap="square" rtlCol="0" anchor="ctr"/>
-          <a:lstStyle/>
-          <a:p>
-            <a:pPr algn="ctr" indent="0" marL="0">
+        </p:spPr>
+        <p:txBody>
+          <a:bodyPr wrap="square" rtlCol="0" anchor="ctr"/>
+          <a:lstStyle/>
+          <a:p>
+            <a:pPr marL="0" indent="0" algn="ctr">
               <a:buNone/>
             </a:pPr>
             <a:r>
@@ -7215,9 +7060,9 @@
                 <a:solidFill>
                   <a:srgbClr val="1A5276"/>
                 </a:solidFill>
-                <a:latin typeface="Arial" pitchFamily="34" charset="0"/>
-                <a:ea typeface="Arial" pitchFamily="34" charset="-122"/>
-                <a:cs typeface="Arial" pitchFamily="34" charset="-120"/>
+                <a:latin typeface="Arial" panose="020B0604020202020204" pitchFamily="34" charset="0"/>
+                <a:ea typeface="Arial" panose="020B0604020202020204" pitchFamily="34" charset="-122"/>
+                <a:cs typeface="Arial" panose="020B0604020202020204" pitchFamily="34" charset="-120"/>
               </a:rPr>
               <a:t>10大功能模块 · 30+ API接口 · 24页前端 · 全部AI原生研发完成</a:t>
             </a:r>
@@ -7240,13 +7085,12 @@
             <a:avLst/>
           </a:prstGeom>
           <a:noFill/>
-          <a:ln/>
-        </p:spPr>
-        <p:txBody>
-          <a:bodyPr wrap="square" rtlCol="0" anchor="ctr"/>
-          <a:lstStyle/>
-          <a:p>
-            <a:pPr algn="r" indent="0" marL="0">
+        </p:spPr>
+        <p:txBody>
+          <a:bodyPr wrap="square" rtlCol="0" anchor="ctr"/>
+          <a:lstStyle/>
+          <a:p>
+            <a:pPr marL="0" indent="0" algn="r">
               <a:buNone/>
             </a:pPr>
             <a:r>
@@ -7254,9 +7098,9 @@
                 <a:solidFill>
                   <a:srgbClr val="7F8C8D"/>
                 </a:solidFill>
-                <a:latin typeface="Arial" pitchFamily="34" charset="0"/>
-                <a:ea typeface="Arial" pitchFamily="34" charset="-122"/>
-                <a:cs typeface="Arial" pitchFamily="34" charset="-120"/>
+                <a:latin typeface="Arial" panose="020B0604020202020204" pitchFamily="34" charset="0"/>
+                <a:ea typeface="Arial" panose="020B0604020202020204" pitchFamily="34" charset="-122"/>
+                <a:cs typeface="Arial" panose="020B0604020202020204" pitchFamily="34" charset="-120"/>
               </a:rPr>
               <a:t>▸ 接下来：支撑这些能力的技术核心——MCP-Skill</a:t>
             </a:r>
@@ -7279,13 +7123,12 @@
             <a:avLst/>
           </a:prstGeom>
           <a:noFill/>
-          <a:ln/>
-        </p:spPr>
-        <p:txBody>
-          <a:bodyPr wrap="square" rtlCol="0" anchor="ctr"/>
-          <a:lstStyle/>
-          <a:p>
-            <a:pPr algn="l" indent="0" marL="0">
+        </p:spPr>
+        <p:txBody>
+          <a:bodyPr wrap="square" rtlCol="0" anchor="ctr"/>
+          <a:lstStyle/>
+          <a:p>
+            <a:pPr marL="0" indent="0" algn="l">
               <a:buNone/>
             </a:pPr>
             <a:r>
@@ -7293,9 +7136,9 @@
                 <a:solidFill>
                   <a:srgbClr val="4A90E2"/>
                 </a:solidFill>
-                <a:latin typeface="Arial" pitchFamily="34" charset="0"/>
-                <a:ea typeface="Arial" pitchFamily="34" charset="-122"/>
-                <a:cs typeface="Arial" pitchFamily="34" charset="-120"/>
+                <a:latin typeface="Arial" panose="020B0604020202020204" pitchFamily="34" charset="0"/>
+                <a:ea typeface="Arial" panose="020B0604020202020204" pitchFamily="34" charset="-122"/>
+                <a:cs typeface="Arial" panose="020B0604020202020204" pitchFamily="34" charset="-120"/>
               </a:rPr>
               <a:t>→</a:t>
             </a:r>
@@ -7313,12 +7156,13 @@
 
 <file path=ppt/slides/slide4.xml><?xml version="1.0" encoding="utf-8"?>
 <p:sld xmlns:a="http://schemas.openxmlformats.org/drawingml/2006/main" xmlns:r="http://schemas.openxmlformats.org/officeDocument/2006/relationships" xmlns:p="http://schemas.openxmlformats.org/presentationml/2006/main">
-  <p:cSld name="Slide 4">
+  <p:cSld>
     <p:bg>
       <p:bgPr>
         <a:solidFill>
           <a:srgbClr val="FFFFFF"/>
         </a:solidFill>
+        <a:effectLst/>
       </p:bgPr>
     </p:bg>
     <p:spTree>
@@ -7352,7 +7196,6 @@
           <a:solidFill>
             <a:srgbClr val="4A90E2"/>
           </a:solidFill>
-          <a:ln/>
         </p:spPr>
       </p:sp>
       <p:sp>
@@ -7370,13 +7213,12 @@
             <a:avLst/>
           </a:prstGeom>
           <a:noFill/>
-          <a:ln/>
-        </p:spPr>
-        <p:txBody>
-          <a:bodyPr wrap="square" rtlCol="0" anchor="ctr"/>
-          <a:lstStyle/>
-          <a:p>
-            <a:pPr indent="0" marL="0">
+        </p:spPr>
+        <p:txBody>
+          <a:bodyPr wrap="square" rtlCol="0" anchor="ctr"/>
+          <a:lstStyle/>
+          <a:p>
+            <a:pPr marL="0" indent="0">
               <a:buNone/>
             </a:pPr>
             <a:r>
@@ -7384,9 +7226,9 @@
                 <a:solidFill>
                   <a:srgbClr val="2C3E50"/>
                 </a:solidFill>
-                <a:latin typeface="Arial" pitchFamily="34" charset="0"/>
-                <a:ea typeface="Arial" pitchFamily="34" charset="-122"/>
-                <a:cs typeface="Arial" pitchFamily="34" charset="-120"/>
+                <a:latin typeface="Arial" panose="020B0604020202020204" pitchFamily="34" charset="0"/>
+                <a:ea typeface="Arial" panose="020B0604020202020204" pitchFamily="34" charset="-122"/>
+                <a:cs typeface="Arial" panose="020B0604020202020204" pitchFamily="34" charset="-120"/>
               </a:rPr>
               <a:t>MCP-Skill核心创新</a:t>
             </a:r>
@@ -7409,13 +7251,12 @@
             <a:avLst/>
           </a:prstGeom>
           <a:noFill/>
-          <a:ln/>
-        </p:spPr>
-        <p:txBody>
-          <a:bodyPr wrap="square" rtlCol="0" anchor="ctr"/>
-          <a:lstStyle/>
-          <a:p>
-            <a:pPr algn="r" indent="0" marL="0">
+        </p:spPr>
+        <p:txBody>
+          <a:bodyPr wrap="square" rtlCol="0" anchor="ctr"/>
+          <a:lstStyle/>
+          <a:p>
+            <a:pPr marL="0" indent="0" algn="r">
               <a:buNone/>
             </a:pPr>
             <a:r>
@@ -7423,9 +7264,9 @@
                 <a:solidFill>
                   <a:srgbClr val="7F8C8D"/>
                 </a:solidFill>
-                <a:latin typeface="Arial" pitchFamily="34" charset="0"/>
-                <a:ea typeface="Arial" pitchFamily="34" charset="-122"/>
-                <a:cs typeface="Arial" pitchFamily="34" charset="-120"/>
+                <a:latin typeface="Arial" panose="020B0604020202020204" pitchFamily="34" charset="0"/>
+                <a:ea typeface="Arial" panose="020B0604020202020204" pitchFamily="34" charset="-122"/>
+                <a:cs typeface="Arial" panose="020B0604020202020204" pitchFamily="34" charset="-120"/>
               </a:rPr>
               <a:t>让AI安全操作银行系统的架构</a:t>
             </a:r>
@@ -7450,7 +7291,6 @@
           <a:solidFill>
             <a:srgbClr val="4A90E2"/>
           </a:solidFill>
-          <a:ln/>
         </p:spPr>
       </p:sp>
       <p:sp>
@@ -7470,7 +7310,6 @@
           <a:solidFill>
             <a:srgbClr val="EBF5FB"/>
           </a:solidFill>
-          <a:ln/>
         </p:spPr>
       </p:sp>
       <p:sp>
@@ -7488,13 +7327,12 @@
             <a:avLst/>
           </a:prstGeom>
           <a:noFill/>
-          <a:ln/>
-        </p:spPr>
-        <p:txBody>
-          <a:bodyPr wrap="square" rtlCol="0" anchor="ctr"/>
-          <a:lstStyle/>
-          <a:p>
-            <a:pPr algn="ctr" indent="0" marL="0">
+        </p:spPr>
+        <p:txBody>
+          <a:bodyPr wrap="square" rtlCol="0" anchor="ctr"/>
+          <a:lstStyle/>
+          <a:p>
+            <a:pPr marL="0" indent="0" algn="ctr">
               <a:buNone/>
             </a:pPr>
             <a:r>
@@ -7502,9 +7340,9 @@
                 <a:solidFill>
                   <a:srgbClr val="2C3E50"/>
                 </a:solidFill>
-                <a:latin typeface="Arial" pitchFamily="34" charset="0"/>
-                <a:ea typeface="Arial" pitchFamily="34" charset="-122"/>
-                <a:cs typeface="Arial" pitchFamily="34" charset="-120"/>
+                <a:latin typeface="Arial" panose="020B0604020202020204" pitchFamily="34" charset="0"/>
+                <a:ea typeface="Arial" panose="020B0604020202020204" pitchFamily="34" charset="-122"/>
+                <a:cs typeface="Arial" panose="020B0604020202020204" pitchFamily="34" charset="-120"/>
               </a:rPr>
               <a:t>请求流程</a:t>
             </a:r>
@@ -7554,7 +7392,6 @@
           <a:solidFill>
             <a:srgbClr val="4A90E2"/>
           </a:solidFill>
-          <a:ln/>
         </p:spPr>
       </p:sp>
       <p:sp>
@@ -7572,13 +7409,12 @@
             <a:avLst/>
           </a:prstGeom>
           <a:noFill/>
-          <a:ln/>
-        </p:spPr>
-        <p:txBody>
-          <a:bodyPr wrap="square" rtlCol="0" anchor="ctr"/>
-          <a:lstStyle/>
-          <a:p>
-            <a:pPr indent="0" marL="0">
+        </p:spPr>
+        <p:txBody>
+          <a:bodyPr wrap="square" rtlCol="0" anchor="ctr"/>
+          <a:lstStyle/>
+          <a:p>
+            <a:pPr marL="0" indent="0">
               <a:buNone/>
             </a:pPr>
             <a:r>
@@ -7586,9 +7422,9 @@
                 <a:solidFill>
                   <a:srgbClr val="4A90E2"/>
                 </a:solidFill>
-                <a:latin typeface="Arial" pitchFamily="34" charset="0"/>
-                <a:ea typeface="Arial" pitchFamily="34" charset="-122"/>
-                <a:cs typeface="Arial" pitchFamily="34" charset="-120"/>
+                <a:latin typeface="Arial" panose="020B0604020202020204" pitchFamily="34" charset="0"/>
+                <a:ea typeface="Arial" panose="020B0604020202020204" pitchFamily="34" charset="-122"/>
+                <a:cs typeface="Arial" panose="020B0604020202020204" pitchFamily="34" charset="-120"/>
               </a:rPr>
               <a:t>用户输入</a:t>
             </a:r>
@@ -7611,13 +7447,12 @@
             <a:avLst/>
           </a:prstGeom>
           <a:noFill/>
-          <a:ln/>
-        </p:spPr>
-        <p:txBody>
-          <a:bodyPr wrap="square" rtlCol="0" anchor="ctr"/>
-          <a:lstStyle/>
-          <a:p>
-            <a:pPr indent="0" marL="0">
+        </p:spPr>
+        <p:txBody>
+          <a:bodyPr wrap="square" rtlCol="0" anchor="ctr"/>
+          <a:lstStyle/>
+          <a:p>
+            <a:pPr marL="0" indent="0">
               <a:buNone/>
             </a:pPr>
             <a:r>
@@ -7625,9 +7460,9 @@
                 <a:solidFill>
                   <a:srgbClr val="34495E"/>
                 </a:solidFill>
-                <a:latin typeface="Arial" pitchFamily="34" charset="0"/>
-                <a:ea typeface="Arial" pitchFamily="34" charset="-122"/>
-                <a:cs typeface="Arial" pitchFamily="34" charset="-120"/>
+                <a:latin typeface="Arial" panose="020B0604020202020204" pitchFamily="34" charset="0"/>
+                <a:ea typeface="Arial" panose="020B0604020202020204" pitchFamily="34" charset="-122"/>
+                <a:cs typeface="Arial" panose="020B0604020202020204" pitchFamily="34" charset="-120"/>
               </a:rPr>
               <a:t>“帮我转账给张三一百块”</a:t>
             </a:r>
@@ -7650,13 +7485,12 @@
             <a:avLst/>
           </a:prstGeom>
           <a:noFill/>
-          <a:ln/>
-        </p:spPr>
-        <p:txBody>
-          <a:bodyPr wrap="square" rtlCol="0" anchor="ctr"/>
-          <a:lstStyle/>
-          <a:p>
-            <a:pPr algn="ctr" indent="0" marL="0">
+        </p:spPr>
+        <p:txBody>
+          <a:bodyPr wrap="square" rtlCol="0" anchor="ctr"/>
+          <a:lstStyle/>
+          <a:p>
+            <a:pPr marL="0" indent="0" algn="ctr">
               <a:buNone/>
             </a:pPr>
             <a:r>
@@ -7664,9 +7498,9 @@
                 <a:solidFill>
                   <a:srgbClr val="7F8C8D"/>
                 </a:solidFill>
-                <a:latin typeface="Arial" pitchFamily="34" charset="0"/>
-                <a:ea typeface="Arial" pitchFamily="34" charset="-122"/>
-                <a:cs typeface="Arial" pitchFamily="34" charset="-120"/>
+                <a:latin typeface="Arial" panose="020B0604020202020204" pitchFamily="34" charset="0"/>
+                <a:ea typeface="Arial" panose="020B0604020202020204" pitchFamily="34" charset="-122"/>
+                <a:cs typeface="Arial" panose="020B0604020202020204" pitchFamily="34" charset="-120"/>
               </a:rPr>
               <a:t>↓</a:t>
             </a:r>
@@ -7716,7 +7550,6 @@
           <a:solidFill>
             <a:srgbClr val="E67E22"/>
           </a:solidFill>
-          <a:ln/>
         </p:spPr>
       </p:sp>
       <p:sp>
@@ -7734,13 +7567,12 @@
             <a:avLst/>
           </a:prstGeom>
           <a:noFill/>
-          <a:ln/>
-        </p:spPr>
-        <p:txBody>
-          <a:bodyPr wrap="square" rtlCol="0" anchor="ctr"/>
-          <a:lstStyle/>
-          <a:p>
-            <a:pPr indent="0" marL="0">
+        </p:spPr>
+        <p:txBody>
+          <a:bodyPr wrap="square" rtlCol="0" anchor="ctr"/>
+          <a:lstStyle/>
+          <a:p>
+            <a:pPr marL="0" indent="0">
               <a:buNone/>
             </a:pPr>
             <a:r>
@@ -7748,9 +7580,9 @@
                 <a:solidFill>
                   <a:srgbClr val="E67E22"/>
                 </a:solidFill>
-                <a:latin typeface="Arial" pitchFamily="34" charset="0"/>
-                <a:ea typeface="Arial" pitchFamily="34" charset="-122"/>
-                <a:cs typeface="Arial" pitchFamily="34" charset="-120"/>
+                <a:latin typeface="Arial" panose="020B0604020202020204" pitchFamily="34" charset="0"/>
+                <a:ea typeface="Arial" panose="020B0604020202020204" pitchFamily="34" charset="-122"/>
+                <a:cs typeface="Arial" panose="020B0604020202020204" pitchFamily="34" charset="-120"/>
               </a:rPr>
               <a:t>意图识别层</a:t>
             </a:r>
@@ -7773,13 +7605,12 @@
             <a:avLst/>
           </a:prstGeom>
           <a:noFill/>
-          <a:ln/>
-        </p:spPr>
-        <p:txBody>
-          <a:bodyPr wrap="square" rtlCol="0" anchor="ctr"/>
-          <a:lstStyle/>
-          <a:p>
-            <a:pPr indent="0" marL="0">
+        </p:spPr>
+        <p:txBody>
+          <a:bodyPr wrap="square" rtlCol="0" anchor="ctr"/>
+          <a:lstStyle/>
+          <a:p>
+            <a:pPr marL="0" indent="0">
               <a:buNone/>
             </a:pPr>
             <a:r>
@@ -7787,9 +7618,9 @@
                 <a:solidFill>
                   <a:srgbClr val="34495E"/>
                 </a:solidFill>
-                <a:latin typeface="Arial" pitchFamily="34" charset="0"/>
-                <a:ea typeface="Arial" pitchFamily="34" charset="-122"/>
-                <a:cs typeface="Arial" pitchFamily="34" charset="-120"/>
+                <a:latin typeface="Arial" panose="020B0604020202020204" pitchFamily="34" charset="0"/>
+                <a:ea typeface="Arial" panose="020B0604020202020204" pitchFamily="34" charset="-122"/>
+                <a:cs typeface="Arial" panose="020B0604020202020204" pitchFamily="34" charset="-120"/>
               </a:rPr>
               <a:t>LLM理解自然语言 → 检索匹配Skill库</a:t>
             </a:r>
@@ -7812,13 +7643,12 @@
             <a:avLst/>
           </a:prstGeom>
           <a:noFill/>
-          <a:ln/>
-        </p:spPr>
-        <p:txBody>
-          <a:bodyPr wrap="square" rtlCol="0" anchor="ctr"/>
-          <a:lstStyle/>
-          <a:p>
-            <a:pPr algn="ctr" indent="0" marL="0">
+        </p:spPr>
+        <p:txBody>
+          <a:bodyPr wrap="square" rtlCol="0" anchor="ctr"/>
+          <a:lstStyle/>
+          <a:p>
+            <a:pPr marL="0" indent="0" algn="ctr">
               <a:buNone/>
             </a:pPr>
             <a:r>
@@ -7826,9 +7656,9 @@
                 <a:solidFill>
                   <a:srgbClr val="7F8C8D"/>
                 </a:solidFill>
-                <a:latin typeface="Arial" pitchFamily="34" charset="0"/>
-                <a:ea typeface="Arial" pitchFamily="34" charset="-122"/>
-                <a:cs typeface="Arial" pitchFamily="34" charset="-120"/>
+                <a:latin typeface="Arial" panose="020B0604020202020204" pitchFamily="34" charset="0"/>
+                <a:ea typeface="Arial" panose="020B0604020202020204" pitchFamily="34" charset="-122"/>
+                <a:cs typeface="Arial" panose="020B0604020202020204" pitchFamily="34" charset="-120"/>
               </a:rPr>
               <a:t>↓</a:t>
             </a:r>
@@ -7878,7 +7708,6 @@
           <a:solidFill>
             <a:srgbClr val="E74C3C"/>
           </a:solidFill>
-          <a:ln/>
         </p:spPr>
       </p:sp>
       <p:sp>
@@ -7896,13 +7725,12 @@
             <a:avLst/>
           </a:prstGeom>
           <a:noFill/>
-          <a:ln/>
-        </p:spPr>
-        <p:txBody>
-          <a:bodyPr wrap="square" rtlCol="0" anchor="ctr"/>
-          <a:lstStyle/>
-          <a:p>
-            <a:pPr indent="0" marL="0">
+        </p:spPr>
+        <p:txBody>
+          <a:bodyPr wrap="square" rtlCol="0" anchor="ctr"/>
+          <a:lstStyle/>
+          <a:p>
+            <a:pPr marL="0" indent="0">
               <a:buNone/>
             </a:pPr>
             <a:r>
@@ -7910,9 +7738,9 @@
                 <a:solidFill>
                   <a:srgbClr val="E74C3C"/>
                 </a:solidFill>
-                <a:latin typeface="Arial" pitchFamily="34" charset="0"/>
-                <a:ea typeface="Arial" pitchFamily="34" charset="-122"/>
-                <a:cs typeface="Arial" pitchFamily="34" charset="-120"/>
+                <a:latin typeface="Arial" panose="020B0604020202020204" pitchFamily="34" charset="0"/>
+                <a:ea typeface="Arial" panose="020B0604020202020204" pitchFamily="34" charset="-122"/>
+                <a:cs typeface="Arial" panose="020B0604020202020204" pitchFamily="34" charset="-120"/>
               </a:rPr>
               <a:t>Skill路由引擎</a:t>
             </a:r>
@@ -7935,13 +7763,12 @@
             <a:avLst/>
           </a:prstGeom>
           <a:noFill/>
-          <a:ln/>
-        </p:spPr>
-        <p:txBody>
-          <a:bodyPr wrap="square" rtlCol="0" anchor="ctr"/>
-          <a:lstStyle/>
-          <a:p>
-            <a:pPr indent="0" marL="0">
+        </p:spPr>
+        <p:txBody>
+          <a:bodyPr wrap="square" rtlCol="0" anchor="ctr"/>
+          <a:lstStyle/>
+          <a:p>
+            <a:pPr marL="0" indent="0">
               <a:buNone/>
             </a:pPr>
             <a:r>
@@ -7949,9 +7776,9 @@
                 <a:solidFill>
                   <a:srgbClr val="34495E"/>
                 </a:solidFill>
-                <a:latin typeface="Arial" pitchFamily="34" charset="0"/>
-                <a:ea typeface="Arial" pitchFamily="34" charset="-122"/>
-                <a:cs typeface="Arial" pitchFamily="34" charset="-120"/>
+                <a:latin typeface="Arial" panose="020B0604020202020204" pitchFamily="34" charset="0"/>
+                <a:ea typeface="Arial" panose="020B0604020202020204" pitchFamily="34" charset="-122"/>
+                <a:cs typeface="Arial" panose="020B0604020202020204" pitchFamily="34" charset="-120"/>
               </a:rPr>
               <a:t>呼叫后端API，安全级别校验（QUERY/执行两阶段）</a:t>
             </a:r>
@@ -7974,13 +7801,12 @@
             <a:avLst/>
           </a:prstGeom>
           <a:noFill/>
-          <a:ln/>
-        </p:spPr>
-        <p:txBody>
-          <a:bodyPr wrap="square" rtlCol="0" anchor="ctr"/>
-          <a:lstStyle/>
-          <a:p>
-            <a:pPr algn="ctr" indent="0" marL="0">
+        </p:spPr>
+        <p:txBody>
+          <a:bodyPr wrap="square" rtlCol="0" anchor="ctr"/>
+          <a:lstStyle/>
+          <a:p>
+            <a:pPr marL="0" indent="0" algn="ctr">
               <a:buNone/>
             </a:pPr>
             <a:r>
@@ -7988,9 +7814,9 @@
                 <a:solidFill>
                   <a:srgbClr val="7F8C8D"/>
                 </a:solidFill>
-                <a:latin typeface="Arial" pitchFamily="34" charset="0"/>
-                <a:ea typeface="Arial" pitchFamily="34" charset="-122"/>
-                <a:cs typeface="Arial" pitchFamily="34" charset="-120"/>
+                <a:latin typeface="Arial" panose="020B0604020202020204" pitchFamily="34" charset="0"/>
+                <a:ea typeface="Arial" panose="020B0604020202020204" pitchFamily="34" charset="-122"/>
+                <a:cs typeface="Arial" panose="020B0604020202020204" pitchFamily="34" charset="-120"/>
               </a:rPr>
               <a:t>↓</a:t>
             </a:r>
@@ -8040,7 +7866,6 @@
           <a:solidFill>
             <a:srgbClr val="27AE60"/>
           </a:solidFill>
-          <a:ln/>
         </p:spPr>
       </p:sp>
       <p:sp>
@@ -8058,13 +7883,12 @@
             <a:avLst/>
           </a:prstGeom>
           <a:noFill/>
-          <a:ln/>
-        </p:spPr>
-        <p:txBody>
-          <a:bodyPr wrap="square" rtlCol="0" anchor="ctr"/>
-          <a:lstStyle/>
-          <a:p>
-            <a:pPr indent="0" marL="0">
+        </p:spPr>
+        <p:txBody>
+          <a:bodyPr wrap="square" rtlCol="0" anchor="ctr"/>
+          <a:lstStyle/>
+          <a:p>
+            <a:pPr marL="0" indent="0">
               <a:buNone/>
             </a:pPr>
             <a:r>
@@ -8072,9 +7896,9 @@
                 <a:solidFill>
                   <a:srgbClr val="27AE60"/>
                 </a:solidFill>
-                <a:latin typeface="Arial" pitchFamily="34" charset="0"/>
-                <a:ea typeface="Arial" pitchFamily="34" charset="-122"/>
-                <a:cs typeface="Arial" pitchFamily="34" charset="-120"/>
+                <a:latin typeface="Arial" panose="020B0604020202020204" pitchFamily="34" charset="0"/>
+                <a:ea typeface="Arial" panose="020B0604020202020204" pitchFamily="34" charset="-122"/>
+                <a:cs typeface="Arial" panose="020B0604020202020204" pitchFamily="34" charset="-120"/>
               </a:rPr>
               <a:t>业务执行层</a:t>
             </a:r>
@@ -8097,13 +7921,12 @@
             <a:avLst/>
           </a:prstGeom>
           <a:noFill/>
-          <a:ln/>
-        </p:spPr>
-        <p:txBody>
-          <a:bodyPr wrap="square" rtlCol="0" anchor="ctr"/>
-          <a:lstStyle/>
-          <a:p>
-            <a:pPr indent="0" marL="0">
+        </p:spPr>
+        <p:txBody>
+          <a:bodyPr wrap="square" rtlCol="0" anchor="ctr"/>
+          <a:lstStyle/>
+          <a:p>
+            <a:pPr marL="0" indent="0">
               <a:buNone/>
             </a:pPr>
             <a:r>
@@ -8111,9 +7934,9 @@
                 <a:solidFill>
                   <a:srgbClr val="34495E"/>
                 </a:solidFill>
-                <a:latin typeface="Arial" pitchFamily="34" charset="0"/>
-                <a:ea typeface="Arial" pitchFamily="34" charset="-122"/>
-                <a:cs typeface="Arial" pitchFamily="34" charset="-120"/>
+                <a:latin typeface="Arial" panose="020B0604020202020204" pitchFamily="34" charset="0"/>
+                <a:ea typeface="Arial" panose="020B0604020202020204" pitchFamily="34" charset="-122"/>
+                <a:cs typeface="Arial" panose="020B0604020202020204" pitchFamily="34" charset="-120"/>
               </a:rPr>
               <a:t>后端Service执行操作，结构化返回（回复+数据+导航）</a:t>
             </a:r>
@@ -8136,13 +7959,12 @@
             <a:avLst/>
           </a:prstGeom>
           <a:noFill/>
-          <a:ln/>
-        </p:spPr>
-        <p:txBody>
-          <a:bodyPr wrap="square" rtlCol="0" anchor="ctr"/>
-          <a:lstStyle/>
-          <a:p>
-            <a:pPr indent="0" marL="0">
+        </p:spPr>
+        <p:txBody>
+          <a:bodyPr wrap="square" rtlCol="0" anchor="ctr"/>
+          <a:lstStyle/>
+          <a:p>
+            <a:pPr marL="0" indent="0">
               <a:buNone/>
             </a:pPr>
             <a:r>
@@ -8150,9 +7972,9 @@
                 <a:solidFill>
                   <a:srgbClr val="2C3E50"/>
                 </a:solidFill>
-                <a:latin typeface="Arial" pitchFamily="34" charset="0"/>
-                <a:ea typeface="Arial" pitchFamily="34" charset="-122"/>
-                <a:cs typeface="Arial" pitchFamily="34" charset="-120"/>
+                <a:latin typeface="Arial" panose="020B0604020202020204" pitchFamily="34" charset="0"/>
+                <a:ea typeface="Arial" panose="020B0604020202020204" pitchFamily="34" charset="-122"/>
+                <a:cs typeface="Arial" panose="020B0604020202020204" pitchFamily="34" charset="-120"/>
               </a:rPr>
               <a:t>四大核心特性</a:t>
             </a:r>
@@ -8202,7 +8024,6 @@
           <a:solidFill>
             <a:srgbClr val="4A90E2"/>
           </a:solidFill>
-          <a:ln/>
         </p:spPr>
       </p:sp>
       <p:sp>
@@ -8220,13 +8041,12 @@
             <a:avLst/>
           </a:prstGeom>
           <a:noFill/>
-          <a:ln/>
-        </p:spPr>
-        <p:txBody>
-          <a:bodyPr wrap="square" rtlCol="0" anchor="ctr"/>
-          <a:lstStyle/>
-          <a:p>
-            <a:pPr algn="ctr" indent="0" marL="0">
+        </p:spPr>
+        <p:txBody>
+          <a:bodyPr wrap="square" rtlCol="0" anchor="ctr"/>
+          <a:lstStyle/>
+          <a:p>
+            <a:pPr marL="0" indent="0" algn="ctr">
               <a:buNone/>
             </a:pPr>
             <a:r>
@@ -8234,9 +8054,9 @@
                 <a:solidFill>
                   <a:srgbClr val="FFFFFF"/>
                 </a:solidFill>
-                <a:latin typeface="Arial" pitchFamily="34" charset="0"/>
-                <a:ea typeface="Arial" pitchFamily="34" charset="-122"/>
-                <a:cs typeface="Arial" pitchFamily="34" charset="-120"/>
+                <a:latin typeface="Arial" panose="020B0604020202020204" pitchFamily="34" charset="0"/>
+                <a:ea typeface="Arial" panose="020B0604020202020204" pitchFamily="34" charset="-122"/>
+                <a:cs typeface="Arial" panose="020B0604020202020204" pitchFamily="34" charset="-120"/>
               </a:rPr>
               <a:t>01</a:t>
             </a:r>
@@ -8259,13 +8079,12 @@
             <a:avLst/>
           </a:prstGeom>
           <a:noFill/>
-          <a:ln/>
-        </p:spPr>
-        <p:txBody>
-          <a:bodyPr wrap="square" rtlCol="0" anchor="ctr"/>
-          <a:lstStyle/>
-          <a:p>
-            <a:pPr indent="0" marL="0">
+        </p:spPr>
+        <p:txBody>
+          <a:bodyPr wrap="square" rtlCol="0" anchor="ctr"/>
+          <a:lstStyle/>
+          <a:p>
+            <a:pPr marL="0" indent="0">
               <a:buNone/>
             </a:pPr>
             <a:r>
@@ -8273,9 +8092,9 @@
                 <a:solidFill>
                   <a:srgbClr val="2C3E50"/>
                 </a:solidFill>
-                <a:latin typeface="Arial" pitchFamily="34" charset="0"/>
-                <a:ea typeface="Arial" pitchFamily="34" charset="-122"/>
-                <a:cs typeface="Arial" pitchFamily="34" charset="-120"/>
+                <a:latin typeface="Arial" panose="020B0604020202020204" pitchFamily="34" charset="0"/>
+                <a:ea typeface="Arial" panose="020B0604020202020204" pitchFamily="34" charset="-122"/>
+                <a:cs typeface="Arial" panose="020B0604020202020204" pitchFamily="34" charset="-120"/>
               </a:rPr>
               <a:t>标准化接口 + 动态注册</a:t>
             </a:r>
@@ -8298,13 +8117,12 @@
             <a:avLst/>
           </a:prstGeom>
           <a:noFill/>
-          <a:ln/>
         </p:spPr>
         <p:txBody>
           <a:bodyPr wrap="square" rtlCol="0" anchor="t"/>
           <a:lstStyle/>
           <a:p>
-            <a:pPr indent="0" marL="0">
+            <a:pPr marL="0" indent="0">
               <a:lnSpc>
                 <a:spcPct val="120000"/>
               </a:lnSpc>
@@ -8315,9 +8133,9 @@
                 <a:solidFill>
                   <a:srgbClr val="34495E"/>
                 </a:solidFill>
-                <a:latin typeface="Arial" pitchFamily="34" charset="0"/>
-                <a:ea typeface="Arial" pitchFamily="34" charset="-122"/>
-                <a:cs typeface="Arial" pitchFamily="34" charset="-120"/>
+                <a:latin typeface="Arial" panose="020B0604020202020204" pitchFamily="34" charset="0"/>
+                <a:ea typeface="Arial" panose="020B0604020202020204" pitchFamily="34" charset="-122"/>
+                <a:cs typeface="Arial" panose="020B0604020202020204" pitchFamily="34" charset="-120"/>
               </a:rPr>
               <a:t>每个SKill统一标准，可动态注册和卸载，新增能力无需重启系统。</a:t>
             </a:r>
@@ -8367,7 +8185,6 @@
           <a:solidFill>
             <a:srgbClr val="4A90E2"/>
           </a:solidFill>
-          <a:ln/>
         </p:spPr>
       </p:sp>
       <p:sp>
@@ -8385,13 +8202,12 @@
             <a:avLst/>
           </a:prstGeom>
           <a:noFill/>
-          <a:ln/>
-        </p:spPr>
-        <p:txBody>
-          <a:bodyPr wrap="square" rtlCol="0" anchor="ctr"/>
-          <a:lstStyle/>
-          <a:p>
-            <a:pPr algn="ctr" indent="0" marL="0">
+        </p:spPr>
+        <p:txBody>
+          <a:bodyPr wrap="square" rtlCol="0" anchor="ctr"/>
+          <a:lstStyle/>
+          <a:p>
+            <a:pPr marL="0" indent="0" algn="ctr">
               <a:buNone/>
             </a:pPr>
             <a:r>
@@ -8399,9 +8215,9 @@
                 <a:solidFill>
                   <a:srgbClr val="FFFFFF"/>
                 </a:solidFill>
-                <a:latin typeface="Arial" pitchFamily="34" charset="0"/>
-                <a:ea typeface="Arial" pitchFamily="34" charset="-122"/>
-                <a:cs typeface="Arial" pitchFamily="34" charset="-120"/>
+                <a:latin typeface="Arial" panose="020B0604020202020204" pitchFamily="34" charset="0"/>
+                <a:ea typeface="Arial" panose="020B0604020202020204" pitchFamily="34" charset="-122"/>
+                <a:cs typeface="Arial" panose="020B0604020202020204" pitchFamily="34" charset="-120"/>
               </a:rPr>
               <a:t>02</a:t>
             </a:r>
@@ -8424,13 +8240,12 @@
             <a:avLst/>
           </a:prstGeom>
           <a:noFill/>
-          <a:ln/>
-        </p:spPr>
-        <p:txBody>
-          <a:bodyPr wrap="square" rtlCol="0" anchor="ctr"/>
-          <a:lstStyle/>
-          <a:p>
-            <a:pPr indent="0" marL="0">
+        </p:spPr>
+        <p:txBody>
+          <a:bodyPr wrap="square" rtlCol="0" anchor="ctr"/>
+          <a:lstStyle/>
+          <a:p>
+            <a:pPr marL="0" indent="0">
               <a:buNone/>
             </a:pPr>
             <a:r>
@@ -8438,9 +8253,9 @@
                 <a:solidFill>
                   <a:srgbClr val="2C3E50"/>
                 </a:solidFill>
-                <a:latin typeface="Arial" pitchFamily="34" charset="0"/>
-                <a:ea typeface="Arial" pitchFamily="34" charset="-122"/>
-                <a:cs typeface="Arial" pitchFamily="34" charset="-120"/>
+                <a:latin typeface="Arial" panose="020B0604020202020204" pitchFamily="34" charset="0"/>
+                <a:ea typeface="Arial" panose="020B0604020202020204" pitchFamily="34" charset="-122"/>
+                <a:cs typeface="Arial" panose="020B0604020202020204" pitchFamily="34" charset="-120"/>
               </a:rPr>
               <a:t>安全分级：QUERY / 执行两阶段</a:t>
             </a:r>
@@ -8463,13 +8278,12 @@
             <a:avLst/>
           </a:prstGeom>
           <a:noFill/>
-          <a:ln/>
         </p:spPr>
         <p:txBody>
           <a:bodyPr wrap="square" rtlCol="0" anchor="t"/>
           <a:lstStyle/>
           <a:p>
-            <a:pPr indent="0" marL="0">
+            <a:pPr marL="0" indent="0">
               <a:lnSpc>
                 <a:spcPct val="120000"/>
               </a:lnSpc>
@@ -8480,9 +8294,9 @@
                 <a:solidFill>
                   <a:srgbClr val="34495E"/>
                 </a:solidFill>
-                <a:latin typeface="Arial" pitchFamily="34" charset="0"/>
-                <a:ea typeface="Arial" pitchFamily="34" charset="-122"/>
-                <a:cs typeface="Arial" pitchFamily="34" charset="-120"/>
+                <a:latin typeface="Arial" panose="020B0604020202020204" pitchFamily="34" charset="0"/>
+                <a:ea typeface="Arial" panose="020B0604020202020204" pitchFamily="34" charset="-122"/>
+                <a:cs typeface="Arial" panose="020B0604020202020204" pitchFamily="34" charset="-120"/>
               </a:rPr>
               <a:t>查询操作自动放行，写入操作必须用户确认 + 防欺骗警告。</a:t>
             </a:r>
@@ -8532,7 +8346,6 @@
           <a:solidFill>
             <a:srgbClr val="4A90E2"/>
           </a:solidFill>
-          <a:ln/>
         </p:spPr>
       </p:sp>
       <p:sp>
@@ -8550,13 +8363,12 @@
             <a:avLst/>
           </a:prstGeom>
           <a:noFill/>
-          <a:ln/>
-        </p:spPr>
-        <p:txBody>
-          <a:bodyPr wrap="square" rtlCol="0" anchor="ctr"/>
-          <a:lstStyle/>
-          <a:p>
-            <a:pPr algn="ctr" indent="0" marL="0">
+        </p:spPr>
+        <p:txBody>
+          <a:bodyPr wrap="square" rtlCol="0" anchor="ctr"/>
+          <a:lstStyle/>
+          <a:p>
+            <a:pPr marL="0" indent="0" algn="ctr">
               <a:buNone/>
             </a:pPr>
             <a:r>
@@ -8564,9 +8376,9 @@
                 <a:solidFill>
                   <a:srgbClr val="FFFFFF"/>
                 </a:solidFill>
-                <a:latin typeface="Arial" pitchFamily="34" charset="0"/>
-                <a:ea typeface="Arial" pitchFamily="34" charset="-122"/>
-                <a:cs typeface="Arial" pitchFamily="34" charset="-120"/>
+                <a:latin typeface="Arial" panose="020B0604020202020204" pitchFamily="34" charset="0"/>
+                <a:ea typeface="Arial" panose="020B0604020202020204" pitchFamily="34" charset="-122"/>
+                <a:cs typeface="Arial" panose="020B0604020202020204" pitchFamily="34" charset="-120"/>
               </a:rPr>
               <a:t>03</a:t>
             </a:r>
@@ -8589,13 +8401,12 @@
             <a:avLst/>
           </a:prstGeom>
           <a:noFill/>
-          <a:ln/>
-        </p:spPr>
-        <p:txBody>
-          <a:bodyPr wrap="square" rtlCol="0" anchor="ctr"/>
-          <a:lstStyle/>
-          <a:p>
-            <a:pPr indent="0" marL="0">
+        </p:spPr>
+        <p:txBody>
+          <a:bodyPr wrap="square" rtlCol="0" anchor="ctr"/>
+          <a:lstStyle/>
+          <a:p>
+            <a:pPr marL="0" indent="0">
               <a:buNone/>
             </a:pPr>
             <a:r>
@@ -8603,9 +8414,9 @@
                 <a:solidFill>
                   <a:srgbClr val="2C3E50"/>
                 </a:solidFill>
-                <a:latin typeface="Arial" pitchFamily="34" charset="0"/>
-                <a:ea typeface="Arial" pitchFamily="34" charset="-122"/>
-                <a:cs typeface="Arial" pitchFamily="34" charset="-120"/>
+                <a:latin typeface="Arial" panose="020B0604020202020204" pitchFamily="34" charset="0"/>
+                <a:ea typeface="Arial" panose="020B0604020202020204" pitchFamily="34" charset="-122"/>
+                <a:cs typeface="Arial" panose="020B0604020202020204" pitchFamily="34" charset="-120"/>
               </a:rPr>
               <a:t>结构化返回：回复+数据+导航</a:t>
             </a:r>
@@ -8628,13 +8439,12 @@
             <a:avLst/>
           </a:prstGeom>
           <a:noFill/>
-          <a:ln/>
         </p:spPr>
         <p:txBody>
           <a:bodyPr wrap="square" rtlCol="0" anchor="t"/>
           <a:lstStyle/>
           <a:p>
-            <a:pPr indent="0" marL="0">
+            <a:pPr marL="0" indent="0">
               <a:lnSpc>
                 <a:spcPct val="120000"/>
               </a:lnSpc>
@@ -8645,9 +8455,9 @@
                 <a:solidFill>
                   <a:srgbClr val="34495E"/>
                 </a:solidFill>
-                <a:latin typeface="Arial" pitchFamily="34" charset="0"/>
-                <a:ea typeface="Arial" pitchFamily="34" charset="-122"/>
-                <a:cs typeface="Arial" pitchFamily="34" charset="-120"/>
+                <a:latin typeface="Arial" panose="020B0604020202020204" pitchFamily="34" charset="0"/>
+                <a:ea typeface="Arial" panose="020B0604020202020204" pitchFamily="34" charset="-122"/>
+                <a:cs typeface="Arial" panose="020B0604020202020204" pitchFamily="34" charset="-120"/>
               </a:rPr>
               <a:t>AI返回结构化对话+业务数据+结算页导航，前端自由渲染。</a:t>
             </a:r>
@@ -8697,7 +8507,6 @@
           <a:solidFill>
             <a:srgbClr val="4A90E2"/>
           </a:solidFill>
-          <a:ln/>
         </p:spPr>
       </p:sp>
       <p:sp>
@@ -8715,13 +8524,12 @@
             <a:avLst/>
           </a:prstGeom>
           <a:noFill/>
-          <a:ln/>
-        </p:spPr>
-        <p:txBody>
-          <a:bodyPr wrap="square" rtlCol="0" anchor="ctr"/>
-          <a:lstStyle/>
-          <a:p>
-            <a:pPr algn="ctr" indent="0" marL="0">
+        </p:spPr>
+        <p:txBody>
+          <a:bodyPr wrap="square" rtlCol="0" anchor="ctr"/>
+          <a:lstStyle/>
+          <a:p>
+            <a:pPr marL="0" indent="0" algn="ctr">
               <a:buNone/>
             </a:pPr>
             <a:r>
@@ -8729,9 +8537,9 @@
                 <a:solidFill>
                   <a:srgbClr val="FFFFFF"/>
                 </a:solidFill>
-                <a:latin typeface="Arial" pitchFamily="34" charset="0"/>
-                <a:ea typeface="Arial" pitchFamily="34" charset="-122"/>
-                <a:cs typeface="Arial" pitchFamily="34" charset="-120"/>
+                <a:latin typeface="Arial" panose="020B0604020202020204" pitchFamily="34" charset="0"/>
+                <a:ea typeface="Arial" panose="020B0604020202020204" pitchFamily="34" charset="-122"/>
+                <a:cs typeface="Arial" panose="020B0604020202020204" pitchFamily="34" charset="-120"/>
               </a:rPr>
               <a:t>04</a:t>
             </a:r>
@@ -8754,13 +8562,12 @@
             <a:avLst/>
           </a:prstGeom>
           <a:noFill/>
-          <a:ln/>
-        </p:spPr>
-        <p:txBody>
-          <a:bodyPr wrap="square" rtlCol="0" anchor="ctr"/>
-          <a:lstStyle/>
-          <a:p>
-            <a:pPr indent="0" marL="0">
+        </p:spPr>
+        <p:txBody>
+          <a:bodyPr wrap="square" rtlCol="0" anchor="ctr"/>
+          <a:lstStyle/>
+          <a:p>
+            <a:pPr marL="0" indent="0">
               <a:buNone/>
             </a:pPr>
             <a:r>
@@ -8768,9 +8575,9 @@
                 <a:solidFill>
                   <a:srgbClr val="2C3E50"/>
                 </a:solidFill>
-                <a:latin typeface="Arial" pitchFamily="34" charset="0"/>
-                <a:ea typeface="Arial" pitchFamily="34" charset="-122"/>
-                <a:cs typeface="Arial" pitchFamily="34" charset="-120"/>
+                <a:latin typeface="Arial" panose="020B0604020202020204" pitchFamily="34" charset="0"/>
+                <a:ea typeface="Arial" panose="020B0604020202020204" pitchFamily="34" charset="-122"/>
+                <a:cs typeface="Arial" panose="020B0604020202020204" pitchFamily="34" charset="-120"/>
               </a:rPr>
               <a:t>LLM无关设计：当前规则，未来可切换</a:t>
             </a:r>
@@ -8793,13 +8600,12 @@
             <a:avLst/>
           </a:prstGeom>
           <a:noFill/>
-          <a:ln/>
         </p:spPr>
         <p:txBody>
           <a:bodyPr wrap="square" rtlCol="0" anchor="t"/>
           <a:lstStyle/>
           <a:p>
-            <a:pPr indent="0" marL="0">
+            <a:pPr marL="0" indent="0">
               <a:lnSpc>
                 <a:spcPct val="120000"/>
               </a:lnSpc>
@@ -8810,9 +8616,9 @@
                 <a:solidFill>
                   <a:srgbClr val="34495E"/>
                 </a:solidFill>
-                <a:latin typeface="Arial" pitchFamily="34" charset="0"/>
-                <a:ea typeface="Arial" pitchFamily="34" charset="-122"/>
-                <a:cs typeface="Arial" pitchFamily="34" charset="-120"/>
+                <a:latin typeface="Arial" panose="020B0604020202020204" pitchFamily="34" charset="0"/>
+                <a:ea typeface="Arial" panose="020B0604020202020204" pitchFamily="34" charset="-122"/>
+                <a:cs typeface="Arial" panose="020B0604020202020204" pitchFamily="34" charset="-120"/>
               </a:rPr>
               <a:t>意图推理与业务执行解耦，可替换任何LLM而不影响业务逻辑。</a:t>
             </a:r>
@@ -8837,7 +8643,6 @@
           <a:solidFill>
             <a:srgbClr val="FFF8E1"/>
           </a:solidFill>
-          <a:ln/>
         </p:spPr>
       </p:sp>
       <p:sp>
@@ -8855,13 +8660,12 @@
             <a:avLst/>
           </a:prstGeom>
           <a:noFill/>
-          <a:ln/>
-        </p:spPr>
-        <p:txBody>
-          <a:bodyPr wrap="square" rtlCol="0" anchor="ctr"/>
-          <a:lstStyle/>
-          <a:p>
-            <a:pPr algn="ctr" indent="0" marL="0">
+        </p:spPr>
+        <p:txBody>
+          <a:bodyPr wrap="square" rtlCol="0" anchor="ctr"/>
+          <a:lstStyle/>
+          <a:p>
+            <a:pPr marL="0" indent="0" algn="ctr">
               <a:buNone/>
             </a:pPr>
             <a:r>
@@ -8869,9 +8673,9 @@
                 <a:solidFill>
                   <a:srgbClr val="8D6E63"/>
                 </a:solidFill>
-                <a:latin typeface="Arial" pitchFamily="34" charset="0"/>
-                <a:ea typeface="Arial" pitchFamily="34" charset="-122"/>
-                <a:cs typeface="Arial" pitchFamily="34" charset="-120"/>
+                <a:latin typeface="Arial" panose="020B0604020202020204" pitchFamily="34" charset="0"/>
+                <a:ea typeface="Arial" panose="020B0604020202020204" pitchFamily="34" charset="-122"/>
+                <a:cs typeface="Arial" panose="020B0604020202020204" pitchFamily="34" charset="-120"/>
               </a:rPr>
               <a:t>术语解释：MCP=Model Context Protocol（开放标准） | Skill=自研AI能力封装层 | MCP-Skill=解耦意图与执行的安全架构</a:t>
             </a:r>
@@ -8919,13 +8723,12 @@
             <a:avLst/>
           </a:prstGeom>
           <a:noFill/>
-          <a:ln/>
-        </p:spPr>
-        <p:txBody>
-          <a:bodyPr wrap="square" rtlCol="0" anchor="ctr"/>
-          <a:lstStyle/>
-          <a:p>
-            <a:pPr algn="ctr" indent="0" marL="0">
+        </p:spPr>
+        <p:txBody>
+          <a:bodyPr wrap="square" rtlCol="0" anchor="ctr"/>
+          <a:lstStyle/>
+          <a:p>
+            <a:pPr marL="0" indent="0" algn="ctr">
               <a:lnSpc>
                 <a:spcPct val="130000"/>
               </a:lnSpc>
@@ -8936,9 +8739,9 @@
                 <a:solidFill>
                   <a:srgbClr val="1A5276"/>
                 </a:solidFill>
-                <a:latin typeface="Arial" pitchFamily="34" charset="0"/>
-                <a:ea typeface="Arial" pitchFamily="34" charset="-122"/>
-                <a:cs typeface="Arial" pitchFamily="34" charset="-120"/>
+                <a:latin typeface="Arial" panose="020B0604020202020204" pitchFamily="34" charset="0"/>
+                <a:ea typeface="Arial" panose="020B0604020202020204" pitchFamily="34" charset="-122"/>
+                <a:cs typeface="Arial" panose="020B0604020202020204" pitchFamily="34" charset="-120"/>
               </a:rPr>
               <a:t>相比直接让LLM调用API：MCP-Skill多了安全分级校验、参数Schema校验、结构化返回契约——让业务操作可审计、可管控、可替换。这不是“用AI写代码”，这是“让AI安全地操作一个银行系统”。</a:t>
             </a:r>
@@ -8961,13 +8764,12 @@
             <a:avLst/>
           </a:prstGeom>
           <a:noFill/>
-          <a:ln/>
-        </p:spPr>
-        <p:txBody>
-          <a:bodyPr wrap="square" rtlCol="0" anchor="ctr"/>
-          <a:lstStyle/>
-          <a:p>
-            <a:pPr algn="r" indent="0" marL="0">
+        </p:spPr>
+        <p:txBody>
+          <a:bodyPr wrap="square" rtlCol="0" anchor="ctr"/>
+          <a:lstStyle/>
+          <a:p>
+            <a:pPr marL="0" indent="0" algn="r">
               <a:buNone/>
             </a:pPr>
             <a:r>
@@ -8975,9 +8777,9 @@
                 <a:solidFill>
                   <a:srgbClr val="7F8C8D"/>
                 </a:solidFill>
-                <a:latin typeface="Arial" pitchFamily="34" charset="0"/>
-                <a:ea typeface="Arial" pitchFamily="34" charset="-122"/>
-                <a:cs typeface="Arial" pitchFamily="34" charset="-120"/>
+                <a:latin typeface="Arial" panose="020B0604020202020204" pitchFamily="34" charset="0"/>
+                <a:ea typeface="Arial" panose="020B0604020202020204" pitchFamily="34" charset="-122"/>
+                <a:cs typeface="Arial" panose="020B0604020202020204" pitchFamily="34" charset="-120"/>
               </a:rPr>
               <a:t>▸ 接下来：AI创新三大能力的真实演示</a:t>
             </a:r>
@@ -9000,13 +8802,12 @@
             <a:avLst/>
           </a:prstGeom>
           <a:noFill/>
-          <a:ln/>
-        </p:spPr>
-        <p:txBody>
-          <a:bodyPr wrap="square" rtlCol="0" anchor="ctr"/>
-          <a:lstStyle/>
-          <a:p>
-            <a:pPr algn="l" indent="0" marL="0">
+        </p:spPr>
+        <p:txBody>
+          <a:bodyPr wrap="square" rtlCol="0" anchor="ctr"/>
+          <a:lstStyle/>
+          <a:p>
+            <a:pPr marL="0" indent="0" algn="l">
               <a:buNone/>
             </a:pPr>
             <a:r>
@@ -9014,9 +8815,9 @@
                 <a:solidFill>
                   <a:srgbClr val="4A90E2"/>
                 </a:solidFill>
-                <a:latin typeface="Arial" pitchFamily="34" charset="0"/>
-                <a:ea typeface="Arial" pitchFamily="34" charset="-122"/>
-                <a:cs typeface="Arial" pitchFamily="34" charset="-120"/>
+                <a:latin typeface="Arial" panose="020B0604020202020204" pitchFamily="34" charset="0"/>
+                <a:ea typeface="Arial" panose="020B0604020202020204" pitchFamily="34" charset="-122"/>
+                <a:cs typeface="Arial" panose="020B0604020202020204" pitchFamily="34" charset="-120"/>
               </a:rPr>
               <a:t>→</a:t>
             </a:r>
@@ -9034,12 +8835,13 @@
 
 <file path=ppt/slides/slide5.xml><?xml version="1.0" encoding="utf-8"?>
 <p:sld xmlns:a="http://schemas.openxmlformats.org/drawingml/2006/main" xmlns:r="http://schemas.openxmlformats.org/officeDocument/2006/relationships" xmlns:p="http://schemas.openxmlformats.org/presentationml/2006/main">
-  <p:cSld name="Slide 5">
+  <p:cSld>
     <p:bg>
       <p:bgPr>
         <a:solidFill>
           <a:srgbClr val="FFFFFF"/>
         </a:solidFill>
+        <a:effectLst/>
       </p:bgPr>
     </p:bg>
     <p:spTree>
@@ -9073,7 +8875,6 @@
           <a:solidFill>
             <a:srgbClr val="4A90E2"/>
           </a:solidFill>
-          <a:ln/>
         </p:spPr>
       </p:sp>
       <p:sp>
@@ -9091,13 +8892,12 @@
             <a:avLst/>
           </a:prstGeom>
           <a:noFill/>
-          <a:ln/>
-        </p:spPr>
-        <p:txBody>
-          <a:bodyPr wrap="square" rtlCol="0" anchor="ctr"/>
-          <a:lstStyle/>
-          <a:p>
-            <a:pPr indent="0" marL="0">
+        </p:spPr>
+        <p:txBody>
+          <a:bodyPr wrap="square" rtlCol="0" anchor="ctr"/>
+          <a:lstStyle/>
+          <a:p>
+            <a:pPr marL="0" indent="0">
               <a:buNone/>
             </a:pPr>
             <a:r>
@@ -9105,9 +8905,9 @@
                 <a:solidFill>
                   <a:srgbClr val="2C3E50"/>
                 </a:solidFill>
-                <a:latin typeface="Arial" pitchFamily="34" charset="0"/>
-                <a:ea typeface="Arial" pitchFamily="34" charset="-122"/>
-                <a:cs typeface="Arial" pitchFamily="34" charset="-120"/>
+                <a:latin typeface="Arial" panose="020B0604020202020204" pitchFamily="34" charset="0"/>
+                <a:ea typeface="Arial" panose="020B0604020202020204" pitchFamily="34" charset="-122"/>
+                <a:cs typeface="Arial" panose="020B0604020202020204" pitchFamily="34" charset="-120"/>
               </a:rPr>
               <a:t>AI创新能力</a:t>
             </a:r>
@@ -9130,13 +8930,12 @@
             <a:avLst/>
           </a:prstGeom>
           <a:noFill/>
-          <a:ln/>
-        </p:spPr>
-        <p:txBody>
-          <a:bodyPr wrap="square" rtlCol="0" anchor="ctr"/>
-          <a:lstStyle/>
-          <a:p>
-            <a:pPr algn="r" indent="0" marL="0">
+        </p:spPr>
+        <p:txBody>
+          <a:bodyPr wrap="square" rtlCol="0" anchor="ctr"/>
+          <a:lstStyle/>
+          <a:p>
+            <a:pPr marL="0" indent="0" algn="r">
               <a:buNone/>
             </a:pPr>
             <a:r>
@@ -9144,9 +8943,9 @@
                 <a:solidFill>
                   <a:srgbClr val="7F8C8D"/>
                 </a:solidFill>
-                <a:latin typeface="Arial" pitchFamily="34" charset="0"/>
-                <a:ea typeface="Arial" pitchFamily="34" charset="-122"/>
-                <a:cs typeface="Arial" pitchFamily="34" charset="-120"/>
+                <a:latin typeface="Arial" panose="020B0604020202020204" pitchFamily="34" charset="0"/>
+                <a:ea typeface="Arial" panose="020B0604020202020204" pitchFamily="34" charset="-122"/>
+                <a:cs typeface="Arial" panose="020B0604020202020204" pitchFamily="34" charset="-120"/>
               </a:rPr>
               <a:t>智能客服 · 消费分析 · 安全转账</a:t>
             </a:r>
@@ -9171,7 +8970,6 @@
           <a:solidFill>
             <a:srgbClr val="4A90E2"/>
           </a:solidFill>
-          <a:ln/>
         </p:spPr>
       </p:sp>
       <p:sp>
@@ -9216,7 +9014,6 @@
           <a:solidFill>
             <a:srgbClr val="4A90E2"/>
           </a:solidFill>
-          <a:ln/>
         </p:spPr>
       </p:sp>
       <p:sp>
@@ -9234,13 +9031,12 @@
             <a:avLst/>
           </a:prstGeom>
           <a:noFill/>
-          <a:ln/>
-        </p:spPr>
-        <p:txBody>
-          <a:bodyPr wrap="square" rtlCol="0" anchor="ctr"/>
-          <a:lstStyle/>
-          <a:p>
-            <a:pPr algn="ctr" indent="0" marL="0">
+        </p:spPr>
+        <p:txBody>
+          <a:bodyPr wrap="square" rtlCol="0" anchor="ctr"/>
+          <a:lstStyle/>
+          <a:p>
+            <a:pPr marL="0" indent="0" algn="ctr">
               <a:buNone/>
             </a:pPr>
             <a:r>
@@ -9248,9 +9044,9 @@
                 <a:solidFill>
                   <a:srgbClr val="4A90E2"/>
                 </a:solidFill>
-                <a:latin typeface="Arial" pitchFamily="34" charset="0"/>
-                <a:ea typeface="Arial" pitchFamily="34" charset="-122"/>
-                <a:cs typeface="Arial" pitchFamily="34" charset="-120"/>
+                <a:latin typeface="Arial" panose="020B0604020202020204" pitchFamily="34" charset="0"/>
+                <a:ea typeface="Arial" panose="020B0604020202020204" pitchFamily="34" charset="-122"/>
+                <a:cs typeface="Arial" panose="020B0604020202020204" pitchFamily="34" charset="-120"/>
               </a:rPr>
               <a:t>智能客服</a:t>
             </a:r>
@@ -9260,7 +9056,7 @@
       </p:sp>
       <p:pic>
         <p:nvPicPr>
-          <p:cNvPr id="9" name="Image 0" descr="F:\code\bank\bank\screenshots\ai-transaction.png">    </p:cNvPr>
+          <p:cNvPr id="9" name="Image 0" descr="F:\code\bank\bank\screenshots\ai-transaction.png"/>
           <p:cNvPicPr>
             <a:picLocks noChangeAspect="1"/>
           </p:cNvPicPr>
@@ -9268,8 +9064,10 @@
         </p:nvPicPr>
         <p:blipFill>
           <a:blip r:embed="rId1"/>
-          <a:srcRect l="0" r="0" t="0" b="0"/>
-          <a:stretch/>
+          <a:srcRect/>
+          <a:stretch>
+            <a:fillRect/>
+          </a:stretch>
         </p:blipFill>
         <p:spPr>
           <a:xfrm>
@@ -9296,13 +9094,12 @@
             <a:avLst/>
           </a:prstGeom>
           <a:noFill/>
-          <a:ln/>
-        </p:spPr>
-        <p:txBody>
-          <a:bodyPr wrap="square" rtlCol="0" anchor="ctr"/>
-          <a:lstStyle/>
-          <a:p>
-            <a:pPr algn="ctr" indent="0" marL="0">
+        </p:spPr>
+        <p:txBody>
+          <a:bodyPr wrap="square" rtlCol="0" anchor="ctr"/>
+          <a:lstStyle/>
+          <a:p>
+            <a:pPr marL="0" indent="0" algn="ctr">
               <a:buNone/>
             </a:pPr>
             <a:r>
@@ -9310,9 +9107,9 @@
                 <a:solidFill>
                   <a:srgbClr val="34495E"/>
                 </a:solidFill>
-                <a:latin typeface="Arial" pitchFamily="34" charset="0"/>
-                <a:ea typeface="Arial" pitchFamily="34" charset="-122"/>
-                <a:cs typeface="Arial" pitchFamily="34" charset="-120"/>
+                <a:latin typeface="Arial" panose="020B0604020202020204" pitchFamily="34" charset="0"/>
+                <a:ea typeface="Arial" panose="020B0604020202020204" pitchFamily="34" charset="-122"/>
+                <a:cs typeface="Arial" panose="020B0604020202020204" pitchFamily="34" charset="-120"/>
               </a:rPr>
               <a:t>自然语言→意图识别</a:t>
             </a:r>
@@ -9335,13 +9132,12 @@
             <a:avLst/>
           </a:prstGeom>
           <a:noFill/>
-          <a:ln/>
-        </p:spPr>
-        <p:txBody>
-          <a:bodyPr wrap="square" rtlCol="0" anchor="ctr"/>
-          <a:lstStyle/>
-          <a:p>
-            <a:pPr algn="ctr" indent="0" marL="0">
+        </p:spPr>
+        <p:txBody>
+          <a:bodyPr wrap="square" rtlCol="0" anchor="ctr"/>
+          <a:lstStyle/>
+          <a:p>
+            <a:pPr marL="0" indent="0" algn="ctr">
               <a:buNone/>
             </a:pPr>
             <a:r>
@@ -9349,9 +9145,9 @@
                 <a:solidFill>
                   <a:srgbClr val="34495E"/>
                 </a:solidFill>
-                <a:latin typeface="Arial" pitchFamily="34" charset="0"/>
-                <a:ea typeface="Arial" pitchFamily="34" charset="-122"/>
-                <a:cs typeface="Arial" pitchFamily="34" charset="-120"/>
+                <a:latin typeface="Arial" panose="020B0604020202020204" pitchFamily="34" charset="0"/>
+                <a:ea typeface="Arial" panose="020B0604020202020204" pitchFamily="34" charset="-122"/>
+                <a:cs typeface="Arial" panose="020B0604020202020204" pitchFamily="34" charset="-120"/>
               </a:rPr>
               <a:t>→ Skill路由→结构化返回</a:t>
             </a:r>
@@ -9401,7 +9197,6 @@
           <a:solidFill>
             <a:srgbClr val="E67E22"/>
           </a:solidFill>
-          <a:ln/>
         </p:spPr>
       </p:sp>
       <p:sp>
@@ -9419,13 +9214,12 @@
             <a:avLst/>
           </a:prstGeom>
           <a:noFill/>
-          <a:ln/>
-        </p:spPr>
-        <p:txBody>
-          <a:bodyPr wrap="square" rtlCol="0" anchor="ctr"/>
-          <a:lstStyle/>
-          <a:p>
-            <a:pPr algn="ctr" indent="0" marL="0">
+        </p:spPr>
+        <p:txBody>
+          <a:bodyPr wrap="square" rtlCol="0" anchor="ctr"/>
+          <a:lstStyle/>
+          <a:p>
+            <a:pPr marL="0" indent="0" algn="ctr">
               <a:buNone/>
             </a:pPr>
             <a:r>
@@ -9433,9 +9227,9 @@
                 <a:solidFill>
                   <a:srgbClr val="E67E22"/>
                 </a:solidFill>
-                <a:latin typeface="Arial" pitchFamily="34" charset="0"/>
-                <a:ea typeface="Arial" pitchFamily="34" charset="-122"/>
-                <a:cs typeface="Arial" pitchFamily="34" charset="-120"/>
+                <a:latin typeface="Arial" panose="020B0604020202020204" pitchFamily="34" charset="0"/>
+                <a:ea typeface="Arial" panose="020B0604020202020204" pitchFamily="34" charset="-122"/>
+                <a:cs typeface="Arial" panose="020B0604020202020204" pitchFamily="34" charset="-120"/>
               </a:rPr>
               <a:t>消费分析</a:t>
             </a:r>
@@ -9445,7 +9239,7 @@
       </p:sp>
       <p:pic>
         <p:nvPicPr>
-          <p:cNvPr id="15" name="Image 1" descr="F:\code\bank\bank\screenshots\consumption-analysis.png">    </p:cNvPr>
+          <p:cNvPr id="15" name="Image 1" descr="F:\code\bank\bank\screenshots\consumption-analysis.png"/>
           <p:cNvPicPr>
             <a:picLocks noChangeAspect="1"/>
           </p:cNvPicPr>
@@ -9453,8 +9247,10 @@
         </p:nvPicPr>
         <p:blipFill>
           <a:blip r:embed="rId2"/>
-          <a:srcRect l="0" r="0" t="0" b="0"/>
-          <a:stretch/>
+          <a:srcRect/>
+          <a:stretch>
+            <a:fillRect/>
+          </a:stretch>
         </p:blipFill>
         <p:spPr>
           <a:xfrm>
@@ -9481,13 +9277,12 @@
             <a:avLst/>
           </a:prstGeom>
           <a:noFill/>
-          <a:ln/>
-        </p:spPr>
-        <p:txBody>
-          <a:bodyPr wrap="square" rtlCol="0" anchor="ctr"/>
-          <a:lstStyle/>
-          <a:p>
-            <a:pPr algn="ctr" indent="0" marL="0">
+        </p:spPr>
+        <p:txBody>
+          <a:bodyPr wrap="square" rtlCol="0" anchor="ctr"/>
+          <a:lstStyle/>
+          <a:p>
+            <a:pPr marL="0" indent="0" algn="ctr">
               <a:buNone/>
             </a:pPr>
             <a:r>
@@ -9495,9 +9290,9 @@
                 <a:solidFill>
                   <a:srgbClr val="34495E"/>
                 </a:solidFill>
-                <a:latin typeface="Arial" pitchFamily="34" charset="0"/>
-                <a:ea typeface="Arial" pitchFamily="34" charset="-122"/>
-                <a:cs typeface="Arial" pitchFamily="34" charset="-120"/>
+                <a:latin typeface="Arial" panose="020B0604020202020204" pitchFamily="34" charset="0"/>
+                <a:ea typeface="Arial" panose="020B0604020202020204" pitchFamily="34" charset="-122"/>
+                <a:cs typeface="Arial" panose="020B0604020202020204" pitchFamily="34" charset="-120"/>
               </a:rPr>
               <a:t>10大分类·200+关键词</a:t>
             </a:r>
@@ -9520,13 +9315,12 @@
             <a:avLst/>
           </a:prstGeom>
           <a:noFill/>
-          <a:ln/>
-        </p:spPr>
-        <p:txBody>
-          <a:bodyPr wrap="square" rtlCol="0" anchor="ctr"/>
-          <a:lstStyle/>
-          <a:p>
-            <a:pPr algn="ctr" indent="0" marL="0">
+        </p:spPr>
+        <p:txBody>
+          <a:bodyPr wrap="square" rtlCol="0" anchor="ctr"/>
+          <a:lstStyle/>
+          <a:p>
+            <a:pPr marL="0" indent="0" algn="ctr">
               <a:buNone/>
             </a:pPr>
             <a:r>
@@ -9534,9 +9328,9 @@
                 <a:solidFill>
                   <a:srgbClr val="34495E"/>
                 </a:solidFill>
-                <a:latin typeface="Arial" pitchFamily="34" charset="0"/>
-                <a:ea typeface="Arial" pitchFamily="34" charset="-122"/>
-                <a:cs typeface="Arial" pitchFamily="34" charset="-120"/>
+                <a:latin typeface="Arial" panose="020B0604020202020204" pitchFamily="34" charset="0"/>
+                <a:ea typeface="Arial" panose="020B0604020202020204" pitchFamily="34" charset="-122"/>
+                <a:cs typeface="Arial" panose="020B0604020202020204" pitchFamily="34" charset="-120"/>
               </a:rPr>
               <a:t>AI自动分析·月度报告文案</a:t>
             </a:r>
@@ -9586,7 +9380,6 @@
           <a:solidFill>
             <a:srgbClr val="27AE60"/>
           </a:solidFill>
-          <a:ln/>
         </p:spPr>
       </p:sp>
       <p:sp>
@@ -9604,13 +9397,12 @@
             <a:avLst/>
           </a:prstGeom>
           <a:noFill/>
-          <a:ln/>
-        </p:spPr>
-        <p:txBody>
-          <a:bodyPr wrap="square" rtlCol="0" anchor="ctr"/>
-          <a:lstStyle/>
-          <a:p>
-            <a:pPr algn="ctr" indent="0" marL="0">
+        </p:spPr>
+        <p:txBody>
+          <a:bodyPr wrap="square" rtlCol="0" anchor="ctr"/>
+          <a:lstStyle/>
+          <a:p>
+            <a:pPr marL="0" indent="0" algn="ctr">
               <a:buNone/>
             </a:pPr>
             <a:r>
@@ -9618,9 +9410,9 @@
                 <a:solidFill>
                   <a:srgbClr val="27AE60"/>
                 </a:solidFill>
-                <a:latin typeface="Arial" pitchFamily="34" charset="0"/>
-                <a:ea typeface="Arial" pitchFamily="34" charset="-122"/>
-                <a:cs typeface="Arial" pitchFamily="34" charset="-120"/>
+                <a:latin typeface="Arial" panose="020B0604020202020204" pitchFamily="34" charset="0"/>
+                <a:ea typeface="Arial" panose="020B0604020202020204" pitchFamily="34" charset="-122"/>
+                <a:cs typeface="Arial" panose="020B0604020202020204" pitchFamily="34" charset="-120"/>
               </a:rPr>
               <a:t>安全转账</a:t>
             </a:r>
@@ -9630,7 +9422,7 @@
       </p:sp>
       <p:pic>
         <p:nvPicPr>
-          <p:cNvPr id="21" name="Image 2" descr="F:\code\bank\bank\screenshots\ai-transfer.png">    </p:cNvPr>
+          <p:cNvPr id="21" name="Image 2" descr="F:\code\bank\bank\screenshots\ai-transfer.png"/>
           <p:cNvPicPr>
             <a:picLocks noChangeAspect="1"/>
           </p:cNvPicPr>
@@ -9638,8 +9430,10 @@
         </p:nvPicPr>
         <p:blipFill>
           <a:blip r:embed="rId3"/>
-          <a:srcRect l="0" r="0" t="0" b="0"/>
-          <a:stretch/>
+          <a:srcRect/>
+          <a:stretch>
+            <a:fillRect/>
+          </a:stretch>
         </p:blipFill>
         <p:spPr>
           <a:xfrm>
@@ -9666,13 +9460,12 @@
             <a:avLst/>
           </a:prstGeom>
           <a:noFill/>
-          <a:ln/>
-        </p:spPr>
-        <p:txBody>
-          <a:bodyPr wrap="square" rtlCol="0" anchor="ctr"/>
-          <a:lstStyle/>
-          <a:p>
-            <a:pPr algn="ctr" indent="0" marL="0">
+        </p:spPr>
+        <p:txBody>
+          <a:bodyPr wrap="square" rtlCol="0" anchor="ctr"/>
+          <a:lstStyle/>
+          <a:p>
+            <a:pPr marL="0" indent="0" algn="ctr">
               <a:buNone/>
             </a:pPr>
             <a:r>
@@ -9680,9 +9473,9 @@
                 <a:solidFill>
                   <a:srgbClr val="34495E"/>
                 </a:solidFill>
-                <a:latin typeface="Arial" pitchFamily="34" charset="0"/>
-                <a:ea typeface="Arial" pitchFamily="34" charset="-122"/>
-                <a:cs typeface="Arial" pitchFamily="34" charset="-120"/>
+                <a:latin typeface="Arial" panose="020B0604020202020204" pitchFamily="34" charset="0"/>
+                <a:ea typeface="Arial" panose="020B0604020202020204" pitchFamily="34" charset="-122"/>
+                <a:cs typeface="Arial" panose="020B0604020202020204" pitchFamily="34" charset="-120"/>
               </a:rPr>
               <a:t>两阶段确认流程</a:t>
             </a:r>
@@ -9705,13 +9498,12 @@
             <a:avLst/>
           </a:prstGeom>
           <a:noFill/>
-          <a:ln/>
-        </p:spPr>
-        <p:txBody>
-          <a:bodyPr wrap="square" rtlCol="0" anchor="ctr"/>
-          <a:lstStyle/>
-          <a:p>
-            <a:pPr algn="ctr" indent="0" marL="0">
+        </p:spPr>
+        <p:txBody>
+          <a:bodyPr wrap="square" rtlCol="0" anchor="ctr"/>
+          <a:lstStyle/>
+          <a:p>
+            <a:pPr marL="0" indent="0" algn="ctr">
               <a:buNone/>
             </a:pPr>
             <a:r>
@@ -9719,9 +9511,9 @@
                 <a:solidFill>
                   <a:srgbClr val="34495E"/>
                 </a:solidFill>
-                <a:latin typeface="Arial" pitchFamily="34" charset="0"/>
-                <a:ea typeface="Arial" pitchFamily="34" charset="-122"/>
-                <a:cs typeface="Arial" pitchFamily="34" charset="-120"/>
+                <a:latin typeface="Arial" panose="020B0604020202020204" pitchFamily="34" charset="0"/>
+                <a:ea typeface="Arial" panose="020B0604020202020204" pitchFamily="34" charset="-122"/>
+                <a:cs typeface="Arial" panose="020B0604020202020204" pitchFamily="34" charset="-120"/>
               </a:rPr>
               <a:t>转账密码·防欺骗警告</a:t>
             </a:r>
@@ -9744,13 +9536,12 @@
             <a:avLst/>
           </a:prstGeom>
           <a:noFill/>
-          <a:ln/>
-        </p:spPr>
-        <p:txBody>
-          <a:bodyPr wrap="square" rtlCol="0" anchor="ctr"/>
-          <a:lstStyle/>
-          <a:p>
-            <a:pPr algn="ctr" indent="0" marL="0">
+        </p:spPr>
+        <p:txBody>
+          <a:bodyPr wrap="square" rtlCol="0" anchor="ctr"/>
+          <a:lstStyle/>
+          <a:p>
+            <a:pPr marL="0" indent="0" algn="ctr">
               <a:buNone/>
             </a:pPr>
             <a:r>
@@ -9758,9 +9549,9 @@
                 <a:solidFill>
                   <a:srgbClr val="7F8C8D"/>
                 </a:solidFill>
-                <a:latin typeface="Arial" pitchFamily="34" charset="0"/>
-                <a:ea typeface="Arial" pitchFamily="34" charset="-122"/>
-                <a:cs typeface="Arial" pitchFamily="34" charset="-120"/>
+                <a:latin typeface="Arial" panose="020B0604020202020204" pitchFamily="34" charset="0"/>
+                <a:ea typeface="Arial" panose="020B0604020202020204" pitchFamily="34" charset="-122"/>
+                <a:cs typeface="Arial" panose="020B0604020202020204" pitchFamily="34" charset="-120"/>
               </a:rPr>
               <a:t>※ 以上能力均基于自研MCP-Skill架构实现：大模型只负责理解与推理，业务操作通过Skill委托给后端API</a:t>
             </a:r>
@@ -9783,13 +9574,12 @@
             <a:avLst/>
           </a:prstGeom>
           <a:noFill/>
-          <a:ln/>
-        </p:spPr>
-        <p:txBody>
-          <a:bodyPr wrap="square" rtlCol="0" anchor="ctr"/>
-          <a:lstStyle/>
-          <a:p>
-            <a:pPr algn="r" indent="0" marL="0">
+        </p:spPr>
+        <p:txBody>
+          <a:bodyPr wrap="square" rtlCol="0" anchor="ctr"/>
+          <a:lstStyle/>
+          <a:p>
+            <a:pPr marL="0" indent="0" algn="r">
               <a:buNone/>
             </a:pPr>
             <a:r>
@@ -9797,9 +9587,9 @@
                 <a:solidFill>
                   <a:srgbClr val="7F8C8D"/>
                 </a:solidFill>
-                <a:latin typeface="Arial" pitchFamily="34" charset="0"/>
-                <a:ea typeface="Arial" pitchFamily="34" charset="-122"/>
-                <a:cs typeface="Arial" pitchFamily="34" charset="-120"/>
+                <a:latin typeface="Arial" panose="020B0604020202020204" pitchFamily="34" charset="0"/>
+                <a:ea typeface="Arial" panose="020B0604020202020204" pitchFamily="34" charset="-122"/>
+                <a:cs typeface="Arial" panose="020B0604020202020204" pitchFamily="34" charset="-120"/>
               </a:rPr>
               <a:t>▸ 接下来：这些能力为什么会被创造出来？</a:t>
             </a:r>
@@ -9822,13 +9612,12 @@
             <a:avLst/>
           </a:prstGeom>
           <a:noFill/>
-          <a:ln/>
-        </p:spPr>
-        <p:txBody>
-          <a:bodyPr wrap="square" rtlCol="0" anchor="ctr"/>
-          <a:lstStyle/>
-          <a:p>
-            <a:pPr algn="l" indent="0" marL="0">
+        </p:spPr>
+        <p:txBody>
+          <a:bodyPr wrap="square" rtlCol="0" anchor="ctr"/>
+          <a:lstStyle/>
+          <a:p>
+            <a:pPr marL="0" indent="0" algn="l">
               <a:buNone/>
             </a:pPr>
             <a:r>
@@ -9836,9 +9625,9 @@
                 <a:solidFill>
                   <a:srgbClr val="4A90E2"/>
                 </a:solidFill>
-                <a:latin typeface="Arial" pitchFamily="34" charset="0"/>
-                <a:ea typeface="Arial" pitchFamily="34" charset="-122"/>
-                <a:cs typeface="Arial" pitchFamily="34" charset="-120"/>
+                <a:latin typeface="Arial" panose="020B0604020202020204" pitchFamily="34" charset="0"/>
+                <a:ea typeface="Arial" panose="020B0604020202020204" pitchFamily="34" charset="-122"/>
+                <a:cs typeface="Arial" panose="020B0604020202020204" pitchFamily="34" charset="-120"/>
               </a:rPr>
               <a:t>→</a:t>
             </a:r>
@@ -9856,12 +9645,13 @@
 
 <file path=ppt/slides/slide6.xml><?xml version="1.0" encoding="utf-8"?>
 <p:sld xmlns:a="http://schemas.openxmlformats.org/drawingml/2006/main" xmlns:r="http://schemas.openxmlformats.org/officeDocument/2006/relationships" xmlns:p="http://schemas.openxmlformats.org/presentationml/2006/main">
-  <p:cSld name="Slide 6">
+  <p:cSld>
     <p:bg>
       <p:bgPr>
         <a:solidFill>
           <a:srgbClr val="FFFFFF"/>
         </a:solidFill>
+        <a:effectLst/>
       </p:bgPr>
     </p:bg>
     <p:spTree>
@@ -9895,7 +9685,6 @@
           <a:solidFill>
             <a:srgbClr val="4A90E2"/>
           </a:solidFill>
-          <a:ln/>
         </p:spPr>
       </p:sp>
       <p:sp>
@@ -9913,13 +9702,12 @@
             <a:avLst/>
           </a:prstGeom>
           <a:noFill/>
-          <a:ln/>
-        </p:spPr>
-        <p:txBody>
-          <a:bodyPr wrap="square" rtlCol="0" anchor="ctr"/>
-          <a:lstStyle/>
-          <a:p>
-            <a:pPr indent="0" marL="0">
+        </p:spPr>
+        <p:txBody>
+          <a:bodyPr wrap="square" rtlCol="0" anchor="ctr"/>
+          <a:lstStyle/>
+          <a:p>
+            <a:pPr marL="0" indent="0">
               <a:buNone/>
             </a:pPr>
             <a:r>
@@ -9927,9 +9715,9 @@
                 <a:solidFill>
                   <a:srgbClr val="2C3E50"/>
                 </a:solidFill>
-                <a:latin typeface="Arial" pitchFamily="34" charset="0"/>
-                <a:ea typeface="Arial" pitchFamily="34" charset="-122"/>
-                <a:cs typeface="Arial" pitchFamily="34" charset="-120"/>
+                <a:latin typeface="Arial" panose="020B0604020202020204" pitchFamily="34" charset="0"/>
+                <a:ea typeface="Arial" panose="020B0604020202020204" pitchFamily="34" charset="-122"/>
+                <a:cs typeface="Arial" panose="020B0604020202020204" pitchFamily="34" charset="-120"/>
               </a:rPr>
               <a:t>认知拐点</a:t>
             </a:r>
@@ -9952,13 +9740,12 @@
             <a:avLst/>
           </a:prstGeom>
           <a:noFill/>
-          <a:ln/>
-        </p:spPr>
-        <p:txBody>
-          <a:bodyPr wrap="square" rtlCol="0" anchor="ctr"/>
-          <a:lstStyle/>
-          <a:p>
-            <a:pPr algn="r" indent="0" marL="0">
+        </p:spPr>
+        <p:txBody>
+          <a:bodyPr wrap="square" rtlCol="0" anchor="ctr"/>
+          <a:lstStyle/>
+          <a:p>
+            <a:pPr marL="0" indent="0" algn="r">
               <a:buNone/>
             </a:pPr>
             <a:r>
@@ -9966,9 +9753,9 @@
                 <a:solidFill>
                   <a:srgbClr val="7F8C8D"/>
                 </a:solidFill>
-                <a:latin typeface="Arial" pitchFamily="34" charset="0"/>
-                <a:ea typeface="Arial" pitchFamily="34" charset="-122"/>
-                <a:cs typeface="Arial" pitchFamily="34" charset="-120"/>
+                <a:latin typeface="Arial" panose="020B0604020202020204" pitchFamily="34" charset="0"/>
+                <a:ea typeface="Arial" panose="020B0604020202020204" pitchFamily="34" charset="-122"/>
+                <a:cs typeface="Arial" panose="020B0604020202020204" pitchFamily="34" charset="-120"/>
               </a:rPr>
               <a:t>一次调教中的顿悟时刻</a:t>
             </a:r>
@@ -9993,7 +9780,6 @@
           <a:solidFill>
             <a:srgbClr val="4A90E2"/>
           </a:solidFill>
-          <a:ln/>
         </p:spPr>
       </p:sp>
       <p:sp>
@@ -10038,7 +9824,6 @@
           <a:solidFill>
             <a:srgbClr val="E74C3C"/>
           </a:solidFill>
-          <a:ln/>
         </p:spPr>
       </p:sp>
       <p:sp>
@@ -10056,13 +9841,12 @@
             <a:avLst/>
           </a:prstGeom>
           <a:noFill/>
-          <a:ln/>
-        </p:spPr>
-        <p:txBody>
-          <a:bodyPr wrap="square" rtlCol="0" anchor="ctr"/>
-          <a:lstStyle/>
-          <a:p>
-            <a:pPr indent="0" marL="0">
+        </p:spPr>
+        <p:txBody>
+          <a:bodyPr wrap="square" rtlCol="0" anchor="ctr"/>
+          <a:lstStyle/>
+          <a:p>
+            <a:pPr marL="0" indent="0">
               <a:buNone/>
             </a:pPr>
             <a:r>
@@ -10070,9 +9854,9 @@
                 <a:solidFill>
                   <a:srgbClr val="E74C3C"/>
                 </a:solidFill>
-                <a:latin typeface="Arial" pitchFamily="34" charset="0"/>
-                <a:ea typeface="Arial" pitchFamily="34" charset="-122"/>
-                <a:cs typeface="Arial" pitchFamily="34" charset="-120"/>
+                <a:latin typeface="Arial" panose="020B0604020202020204" pitchFamily="34" charset="0"/>
+                <a:ea typeface="Arial" panose="020B0604020202020204" pitchFamily="34" charset="-122"/>
+                <a:cs typeface="Arial" panose="020B0604020202020204" pitchFamily="34" charset="-120"/>
               </a:rPr>
               <a:t>Before：代码优先</a:t>
             </a:r>
@@ -10095,13 +9879,12 @@
             <a:avLst/>
           </a:prstGeom>
           <a:noFill/>
-          <a:ln/>
         </p:spPr>
         <p:txBody>
           <a:bodyPr wrap="square" rtlCol="0" anchor="t"/>
           <a:lstStyle/>
           <a:p>
-            <a:pPr indent="0" marL="0">
+            <a:pPr marL="0" indent="0">
               <a:lnSpc>
                 <a:spcPct val="160000"/>
               </a:lnSpc>
@@ -10112,16 +9895,16 @@
                 <a:solidFill>
                   <a:srgbClr val="34495E"/>
                 </a:solidFill>
-                <a:latin typeface="Arial" pitchFamily="34" charset="0"/>
-                <a:ea typeface="Arial" pitchFamily="34" charset="-122"/>
-                <a:cs typeface="Arial" pitchFamily="34" charset="-120"/>
+                <a:latin typeface="Arial" panose="020B0604020202020204" pitchFamily="34" charset="0"/>
+                <a:ea typeface="Arial" panose="020B0604020202020204" pitchFamily="34" charset="-122"/>
+                <a:cs typeface="Arial" panose="020B0604020202020204" pitchFamily="34" charset="-120"/>
               </a:rPr>
               <a:t>1. 拿到需求 → 让AI写代码</a:t>
             </a:r>
             <a:endParaRPr lang="en-US" sz="1200" dirty="0"/>
           </a:p>
           <a:p>
-            <a:pPr indent="0" marL="0">
+            <a:pPr marL="0" indent="0">
               <a:lnSpc>
                 <a:spcPct val="160000"/>
               </a:lnSpc>
@@ -10130,7 +9913,7 @@
             <a:endParaRPr lang="en-US" sz="1200" dirty="0"/>
           </a:p>
           <a:p>
-            <a:pPr indent="0" marL="0">
+            <a:pPr marL="0" indent="0">
               <a:lnSpc>
                 <a:spcPct val="160000"/>
               </a:lnSpc>
@@ -10141,16 +9924,16 @@
                 <a:solidFill>
                   <a:srgbClr val="34495E"/>
                 </a:solidFill>
-                <a:latin typeface="Arial" pitchFamily="34" charset="0"/>
-                <a:ea typeface="Arial" pitchFamily="34" charset="-122"/>
-                <a:cs typeface="Arial" pitchFamily="34" charset="-120"/>
+                <a:latin typeface="Arial" panose="020B0604020202020204" pitchFamily="34" charset="0"/>
+                <a:ea typeface="Arial" panose="020B0604020202020204" pitchFamily="34" charset="-122"/>
+                <a:cs typeface="Arial" panose="020B0604020202020204" pitchFamily="34" charset="-120"/>
               </a:rPr>
               <a:t>2. 出BUG → 直接改代码修复</a:t>
             </a:r>
             <a:endParaRPr lang="en-US" sz="1200" dirty="0"/>
           </a:p>
           <a:p>
-            <a:pPr indent="0" marL="0">
+            <a:pPr marL="0" indent="0">
               <a:lnSpc>
                 <a:spcPct val="160000"/>
               </a:lnSpc>
@@ -10159,7 +9942,7 @@
             <a:endParaRPr lang="en-US" sz="1200" dirty="0"/>
           </a:p>
           <a:p>
-            <a:pPr indent="0" marL="0">
+            <a:pPr marL="0" indent="0">
               <a:lnSpc>
                 <a:spcPct val="160000"/>
               </a:lnSpc>
@@ -10170,16 +9953,16 @@
                 <a:solidFill>
                   <a:srgbClr val="34495E"/>
                 </a:solidFill>
-                <a:latin typeface="Arial" pitchFamily="34" charset="0"/>
-                <a:ea typeface="Arial" pitchFamily="34" charset="-122"/>
-                <a:cs typeface="Arial" pitchFamily="34" charset="-120"/>
+                <a:latin typeface="Arial" panose="020B0604020202020204" pitchFamily="34" charset="0"/>
+                <a:ea typeface="Arial" panose="020B0604020202020204" pitchFamily="34" charset="-122"/>
+                <a:cs typeface="Arial" panose="020B0604020202020204" pitchFamily="34" charset="-120"/>
               </a:rPr>
               <a:t>3. 新需求 → AI重新生成</a:t>
             </a:r>
             <a:endParaRPr lang="en-US" sz="1200" dirty="0"/>
           </a:p>
           <a:p>
-            <a:pPr indent="0" marL="0">
+            <a:pPr marL="0" indent="0">
               <a:lnSpc>
                 <a:spcPct val="160000"/>
               </a:lnSpc>
@@ -10188,7 +9971,7 @@
             <a:endParaRPr lang="en-US" sz="1200" dirty="0"/>
           </a:p>
           <a:p>
-            <a:pPr indent="0" marL="0">
+            <a:pPr marL="0" indent="0">
               <a:lnSpc>
                 <a:spcPct val="160000"/>
               </a:lnSpc>
@@ -10199,9 +9982,9 @@
                 <a:solidFill>
                   <a:srgbClr val="34495E"/>
                 </a:solidFill>
-                <a:latin typeface="Arial" pitchFamily="34" charset="0"/>
-                <a:ea typeface="Arial" pitchFamily="34" charset="-122"/>
-                <a:cs typeface="Arial" pitchFamily="34" charset="-120"/>
+                <a:latin typeface="Arial" panose="020B0604020202020204" pitchFamily="34" charset="0"/>
+                <a:ea typeface="Arial" panose="020B0604020202020204" pitchFamily="34" charset="-122"/>
+                <a:cs typeface="Arial" panose="020B0604020202020204" pitchFamily="34" charset="-120"/>
               </a:rPr>
               <a:t>4. 老BUG再现——因为文档没有同步修改</a:t>
             </a:r>
@@ -10224,13 +10007,12 @@
             <a:avLst/>
           </a:prstGeom>
           <a:noFill/>
-          <a:ln/>
-        </p:spPr>
-        <p:txBody>
-          <a:bodyPr wrap="square" rtlCol="0" anchor="ctr"/>
-          <a:lstStyle/>
-          <a:p>
-            <a:pPr indent="0" marL="0">
+        </p:spPr>
+        <p:txBody>
+          <a:bodyPr wrap="square" rtlCol="0" anchor="ctr"/>
+          <a:lstStyle/>
+          <a:p>
+            <a:pPr marL="0" indent="0">
               <a:buNone/>
             </a:pPr>
             <a:r>
@@ -10238,9 +10020,9 @@
                 <a:solidFill>
                   <a:srgbClr val="E74C3C"/>
                 </a:solidFill>
-                <a:latin typeface="Arial" pitchFamily="34" charset="0"/>
-                <a:ea typeface="Arial" pitchFamily="34" charset="-122"/>
-                <a:cs typeface="Arial" pitchFamily="34" charset="-120"/>
+                <a:latin typeface="Arial" panose="020B0604020202020204" pitchFamily="34" charset="0"/>
+                <a:ea typeface="Arial" panose="020B0604020202020204" pitchFamily="34" charset="-122"/>
+                <a:cs typeface="Arial" panose="020B0604020202020204" pitchFamily="34" charset="-120"/>
               </a:rPr>
               <a:t>这不是代码的问题，是文档的问题。</a:t>
             </a:r>
@@ -10290,7 +10072,6 @@
           <a:solidFill>
             <a:srgbClr val="27AE60"/>
           </a:solidFill>
-          <a:ln/>
         </p:spPr>
       </p:sp>
       <p:sp>
@@ -10308,13 +10089,12 @@
             <a:avLst/>
           </a:prstGeom>
           <a:noFill/>
-          <a:ln/>
-        </p:spPr>
-        <p:txBody>
-          <a:bodyPr wrap="square" rtlCol="0" anchor="ctr"/>
-          <a:lstStyle/>
-          <a:p>
-            <a:pPr indent="0" marL="0">
+        </p:spPr>
+        <p:txBody>
+          <a:bodyPr wrap="square" rtlCol="0" anchor="ctr"/>
+          <a:lstStyle/>
+          <a:p>
+            <a:pPr marL="0" indent="0">
               <a:buNone/>
             </a:pPr>
             <a:r>
@@ -10322,9 +10102,9 @@
                 <a:solidFill>
                   <a:srgbClr val="27AE60"/>
                 </a:solidFill>
-                <a:latin typeface="Arial" pitchFamily="34" charset="0"/>
-                <a:ea typeface="Arial" pitchFamily="34" charset="-122"/>
-                <a:cs typeface="Arial" pitchFamily="34" charset="-120"/>
+                <a:latin typeface="Arial" panose="020B0604020202020204" pitchFamily="34" charset="0"/>
+                <a:ea typeface="Arial" panose="020B0604020202020204" pitchFamily="34" charset="-122"/>
+                <a:cs typeface="Arial" panose="020B0604020202020204" pitchFamily="34" charset="-120"/>
               </a:rPr>
               <a:t>After：文档先行</a:t>
             </a:r>
@@ -10347,13 +10127,12 @@
             <a:avLst/>
           </a:prstGeom>
           <a:noFill/>
-          <a:ln/>
         </p:spPr>
         <p:txBody>
           <a:bodyPr wrap="square" rtlCol="0" anchor="t"/>
           <a:lstStyle/>
           <a:p>
-            <a:pPr indent="0" marL="0">
+            <a:pPr marL="0" indent="0">
               <a:lnSpc>
                 <a:spcPct val="160000"/>
               </a:lnSpc>
@@ -10364,16 +10143,16 @@
                 <a:solidFill>
                   <a:srgbClr val="34495E"/>
                 </a:solidFill>
-                <a:latin typeface="Arial" pitchFamily="34" charset="0"/>
-                <a:ea typeface="Arial" pitchFamily="34" charset="-122"/>
-                <a:cs typeface="Arial" pitchFamily="34" charset="-120"/>
+                <a:latin typeface="Arial" panose="020B0604020202020204" pitchFamily="34" charset="0"/>
+                <a:ea typeface="Arial" panose="020B0604020202020204" pitchFamily="34" charset="-122"/>
+                <a:cs typeface="Arial" panose="020B0604020202020204" pitchFamily="34" charset="-120"/>
               </a:rPr>
               <a:t>1. 拿到需求 → 先修改文档</a:t>
             </a:r>
             <a:endParaRPr lang="en-US" sz="1200" dirty="0"/>
           </a:p>
           <a:p>
-            <a:pPr indent="0" marL="0">
+            <a:pPr marL="0" indent="0">
               <a:lnSpc>
                 <a:spcPct val="160000"/>
               </a:lnSpc>
@@ -10382,7 +10161,7 @@
             <a:endParaRPr lang="en-US" sz="1200" dirty="0"/>
           </a:p>
           <a:p>
-            <a:pPr indent="0" marL="0">
+            <a:pPr marL="0" indent="0">
               <a:lnSpc>
                 <a:spcPct val="160000"/>
               </a:lnSpc>
@@ -10393,16 +10172,16 @@
                 <a:solidFill>
                   <a:srgbClr val="34495E"/>
                 </a:solidFill>
-                <a:latin typeface="Arial" pitchFamily="34" charset="0"/>
-                <a:ea typeface="Arial" pitchFamily="34" charset="-122"/>
-                <a:cs typeface="Arial" pitchFamily="34" charset="-120"/>
+                <a:latin typeface="Arial" panose="020B0604020202020204" pitchFamily="34" charset="0"/>
+                <a:ea typeface="Arial" panose="020B0604020202020204" pitchFamily="34" charset="-122"/>
+                <a:cs typeface="Arial" panose="020B0604020202020204" pitchFamily="34" charset="-120"/>
               </a:rPr>
               <a:t>2. 让AI按新文档生成代码</a:t>
             </a:r>
             <a:endParaRPr lang="en-US" sz="1200" dirty="0"/>
           </a:p>
           <a:p>
-            <a:pPr indent="0" marL="0">
+            <a:pPr marL="0" indent="0">
               <a:lnSpc>
                 <a:spcPct val="160000"/>
               </a:lnSpc>
@@ -10411,7 +10190,7 @@
             <a:endParaRPr lang="en-US" sz="1200" dirty="0"/>
           </a:p>
           <a:p>
-            <a:pPr indent="0" marL="0">
+            <a:pPr marL="0" indent="0">
               <a:lnSpc>
                 <a:spcPct val="160000"/>
               </a:lnSpc>
@@ -10422,16 +10201,16 @@
                 <a:solidFill>
                   <a:srgbClr val="34495E"/>
                 </a:solidFill>
-                <a:latin typeface="Arial" pitchFamily="34" charset="0"/>
-                <a:ea typeface="Arial" pitchFamily="34" charset="-122"/>
-                <a:cs typeface="Arial" pitchFamily="34" charset="-120"/>
+                <a:latin typeface="Arial" panose="020B0604020202020204" pitchFamily="34" charset="0"/>
+                <a:ea typeface="Arial" panose="020B0604020202020204" pitchFamily="34" charset="-122"/>
+                <a:cs typeface="Arial" panose="020B0604020202020204" pitchFamily="34" charset="-120"/>
               </a:rPr>
               <a:t>3. Review → 发现语义偏差</a:t>
             </a:r>
             <a:endParaRPr lang="en-US" sz="1200" dirty="0"/>
           </a:p>
           <a:p>
-            <a:pPr indent="0" marL="0">
+            <a:pPr marL="0" indent="0">
               <a:lnSpc>
                 <a:spcPct val="160000"/>
               </a:lnSpc>
@@ -10440,7 +10219,7 @@
             <a:endParaRPr lang="en-US" sz="1200" dirty="0"/>
           </a:p>
           <a:p>
-            <a:pPr indent="0" marL="0">
+            <a:pPr marL="0" indent="0">
               <a:lnSpc>
                 <a:spcPct val="160000"/>
               </a:lnSpc>
@@ -10451,16 +10230,16 @@
                 <a:solidFill>
                   <a:srgbClr val="34495E"/>
                 </a:solidFill>
-                <a:latin typeface="Arial" pitchFamily="34" charset="0"/>
-                <a:ea typeface="Arial" pitchFamily="34" charset="-122"/>
-                <a:cs typeface="Arial" pitchFamily="34" charset="-120"/>
+                <a:latin typeface="Arial" panose="020B0604020202020204" pitchFamily="34" charset="0"/>
+                <a:ea typeface="Arial" panose="020B0604020202020204" pitchFamily="34" charset="-122"/>
+                <a:cs typeface="Arial" panose="020B0604020202020204" pitchFamily="34" charset="-120"/>
               </a:rPr>
               <a:t>4. 回头修改文档描述 → 再生成</a:t>
             </a:r>
             <a:endParaRPr lang="en-US" sz="1200" dirty="0"/>
           </a:p>
           <a:p>
-            <a:pPr indent="0" marL="0">
+            <a:pPr marL="0" indent="0">
               <a:lnSpc>
                 <a:spcPct val="160000"/>
               </a:lnSpc>
@@ -10469,7 +10248,7 @@
             <a:endParaRPr lang="en-US" sz="1200" dirty="0"/>
           </a:p>
           <a:p>
-            <a:pPr indent="0" marL="0">
+            <a:pPr marL="0" indent="0">
               <a:lnSpc>
                 <a:spcPct val="160000"/>
               </a:lnSpc>
@@ -10480,9 +10259,9 @@
                 <a:solidFill>
                   <a:srgbClr val="34495E"/>
                 </a:solidFill>
-                <a:latin typeface="Arial" pitchFamily="34" charset="0"/>
-                <a:ea typeface="Arial" pitchFamily="34" charset="-122"/>
-                <a:cs typeface="Arial" pitchFamily="34" charset="-120"/>
+                <a:latin typeface="Arial" panose="020B0604020202020204" pitchFamily="34" charset="0"/>
+                <a:ea typeface="Arial" panose="020B0604020202020204" pitchFamily="34" charset="-122"/>
+                <a:cs typeface="Arial" panose="020B0604020202020204" pitchFamily="34" charset="-120"/>
               </a:rPr>
               <a:t>5. 代码变更是文档变更的“编译结果”</a:t>
             </a:r>
@@ -10507,7 +10286,6 @@
           <a:solidFill>
             <a:srgbClr val="E67E22"/>
           </a:solidFill>
-          <a:ln/>
         </p:spPr>
       </p:sp>
       <p:sp>
@@ -10525,13 +10303,12 @@
             <a:avLst/>
           </a:prstGeom>
           <a:noFill/>
-          <a:ln/>
-        </p:spPr>
-        <p:txBody>
-          <a:bodyPr wrap="square" rtlCol="0" anchor="ctr"/>
-          <a:lstStyle/>
-          <a:p>
-            <a:pPr algn="ctr" indent="0" marL="0">
+        </p:spPr>
+        <p:txBody>
+          <a:bodyPr wrap="square" rtlCol="0" anchor="ctr"/>
+          <a:lstStyle/>
+          <a:p>
+            <a:pPr marL="0" indent="0" algn="ctr">
               <a:buNone/>
             </a:pPr>
             <a:r>
@@ -10539,9 +10316,9 @@
                 <a:solidFill>
                   <a:srgbClr val="FFFFFF"/>
                 </a:solidFill>
-                <a:latin typeface="Arial" pitchFamily="34" charset="0"/>
-                <a:ea typeface="Arial" pitchFamily="34" charset="-122"/>
-                <a:cs typeface="Arial" pitchFamily="34" charset="-120"/>
+                <a:latin typeface="Arial" panose="020B0604020202020204" pitchFamily="34" charset="0"/>
+                <a:ea typeface="Arial" panose="020B0604020202020204" pitchFamily="34" charset="-122"/>
+                <a:cs typeface="Arial" panose="020B0604020202020204" pitchFamily="34" charset="-120"/>
               </a:rPr>
               <a:t>顿悟</a:t>
             </a:r>
@@ -10589,13 +10366,12 @@
             <a:avLst/>
           </a:prstGeom>
           <a:noFill/>
-          <a:ln/>
-        </p:spPr>
-        <p:txBody>
-          <a:bodyPr wrap="square" rtlCol="0" anchor="ctr"/>
-          <a:lstStyle/>
-          <a:p>
-            <a:pPr algn="ctr" indent="0" marL="0">
+        </p:spPr>
+        <p:txBody>
+          <a:bodyPr wrap="square" rtlCol="0" anchor="ctr"/>
+          <a:lstStyle/>
+          <a:p>
+            <a:pPr marL="0" indent="0" algn="ctr">
               <a:buNone/>
             </a:pPr>
             <a:r>
@@ -10603,9 +10379,9 @@
                 <a:solidFill>
                   <a:srgbClr val="1A5276"/>
                 </a:solidFill>
-                <a:latin typeface="Arial" pitchFamily="34" charset="0"/>
-                <a:ea typeface="Arial" pitchFamily="34" charset="-122"/>
-                <a:cs typeface="Arial" pitchFamily="34" charset="-120"/>
+                <a:latin typeface="Arial" panose="020B0604020202020204" pitchFamily="34" charset="0"/>
+                <a:ea typeface="Arial" panose="020B0604020202020204" pitchFamily="34" charset="-122"/>
+                <a:cs typeface="Arial" panose="020B0604020202020204" pitchFamily="34" charset="-120"/>
               </a:rPr>
               <a:t>文档不是说明书，文档是源代码。代码变更只是文档变更的编译结果。</a:t>
             </a:r>
@@ -10628,13 +10404,12 @@
             <a:avLst/>
           </a:prstGeom>
           <a:noFill/>
-          <a:ln/>
-        </p:spPr>
-        <p:txBody>
-          <a:bodyPr wrap="square" rtlCol="0" anchor="ctr"/>
-          <a:lstStyle/>
-          <a:p>
-            <a:pPr algn="r" indent="0" marL="0">
+        </p:spPr>
+        <p:txBody>
+          <a:bodyPr wrap="square" rtlCol="0" anchor="ctr"/>
+          <a:lstStyle/>
+          <a:p>
+            <a:pPr marL="0" indent="0" algn="r">
               <a:buNone/>
             </a:pPr>
             <a:r>
@@ -10642,9 +10417,9 @@
                 <a:solidFill>
                   <a:srgbClr val="7F8C8D"/>
                 </a:solidFill>
-                <a:latin typeface="Arial" pitchFamily="34" charset="0"/>
-                <a:ea typeface="Arial" pitchFamily="34" charset="-122"/>
-                <a:cs typeface="Arial" pitchFamily="34" charset="-120"/>
+                <a:latin typeface="Arial" panose="020B0604020202020204" pitchFamily="34" charset="0"/>
+                <a:ea typeface="Arial" panose="020B0604020202020204" pitchFamily="34" charset="-122"/>
+                <a:cs typeface="Arial" panose="020B0604020202020204" pitchFamily="34" charset="-120"/>
               </a:rPr>
               <a:t>▸ 接下来：基于这个认知，我们形成了闭环方法</a:t>
             </a:r>
@@ -10667,13 +10442,12 @@
             <a:avLst/>
           </a:prstGeom>
           <a:noFill/>
-          <a:ln/>
-        </p:spPr>
-        <p:txBody>
-          <a:bodyPr wrap="square" rtlCol="0" anchor="ctr"/>
-          <a:lstStyle/>
-          <a:p>
-            <a:pPr algn="l" indent="0" marL="0">
+        </p:spPr>
+        <p:txBody>
+          <a:bodyPr wrap="square" rtlCol="0" anchor="ctr"/>
+          <a:lstStyle/>
+          <a:p>
+            <a:pPr marL="0" indent="0" algn="l">
               <a:buNone/>
             </a:pPr>
             <a:r>
@@ -10681,9 +10455,9 @@
                 <a:solidFill>
                   <a:srgbClr val="4A90E2"/>
                 </a:solidFill>
-                <a:latin typeface="Arial" pitchFamily="34" charset="0"/>
-                <a:ea typeface="Arial" pitchFamily="34" charset="-122"/>
-                <a:cs typeface="Arial" pitchFamily="34" charset="-120"/>
+                <a:latin typeface="Arial" panose="020B0604020202020204" pitchFamily="34" charset="0"/>
+                <a:ea typeface="Arial" panose="020B0604020202020204" pitchFamily="34" charset="-122"/>
+                <a:cs typeface="Arial" panose="020B0604020202020204" pitchFamily="34" charset="-120"/>
               </a:rPr>
               <a:t>→</a:t>
             </a:r>
@@ -10701,12 +10475,13 @@
 
 <file path=ppt/slides/slide7.xml><?xml version="1.0" encoding="utf-8"?>
 <p:sld xmlns:a="http://schemas.openxmlformats.org/drawingml/2006/main" xmlns:r="http://schemas.openxmlformats.org/officeDocument/2006/relationships" xmlns:p="http://schemas.openxmlformats.org/presentationml/2006/main">
-  <p:cSld name="Slide 7">
+  <p:cSld>
     <p:bg>
       <p:bgPr>
         <a:solidFill>
           <a:srgbClr val="FFFFFF"/>
         </a:solidFill>
+        <a:effectLst/>
       </p:bgPr>
     </p:bg>
     <p:spTree>
@@ -10740,7 +10515,6 @@
           <a:solidFill>
             <a:srgbClr val="4A90E2"/>
           </a:solidFill>
-          <a:ln/>
         </p:spPr>
       </p:sp>
       <p:sp>
@@ -10758,13 +10532,12 @@
             <a:avLst/>
           </a:prstGeom>
           <a:noFill/>
-          <a:ln/>
-        </p:spPr>
-        <p:txBody>
-          <a:bodyPr wrap="square" rtlCol="0" anchor="ctr"/>
-          <a:lstStyle/>
-          <a:p>
-            <a:pPr indent="0" marL="0">
+        </p:spPr>
+        <p:txBody>
+          <a:bodyPr wrap="square" rtlCol="0" anchor="ctr"/>
+          <a:lstStyle/>
+          <a:p>
+            <a:pPr marL="0" indent="0">
               <a:buNone/>
             </a:pPr>
             <a:r>
@@ -10772,9 +10545,9 @@
                 <a:solidFill>
                   <a:srgbClr val="2C3E50"/>
                 </a:solidFill>
-                <a:latin typeface="Arial" pitchFamily="34" charset="0"/>
-                <a:ea typeface="Arial" pitchFamily="34" charset="-122"/>
-                <a:cs typeface="Arial" pitchFamily="34" charset="-120"/>
+                <a:latin typeface="Arial" panose="020B0604020202020204" pitchFamily="34" charset="0"/>
+                <a:ea typeface="Arial" panose="020B0604020202020204" pitchFamily="34" charset="-122"/>
+                <a:cs typeface="Arial" panose="020B0604020202020204" pitchFamily="34" charset="-120"/>
               </a:rPr>
               <a:t>文档驱动闭环</a:t>
             </a:r>
@@ -10797,13 +10570,12 @@
             <a:avLst/>
           </a:prstGeom>
           <a:noFill/>
-          <a:ln/>
-        </p:spPr>
-        <p:txBody>
-          <a:bodyPr wrap="square" rtlCol="0" anchor="ctr"/>
-          <a:lstStyle/>
-          <a:p>
-            <a:pPr algn="r" indent="0" marL="0">
+        </p:spPr>
+        <p:txBody>
+          <a:bodyPr wrap="square" rtlCol="0" anchor="ctr"/>
+          <a:lstStyle/>
+          <a:p>
+            <a:pPr marL="0" indent="0" algn="r">
               <a:buNone/>
             </a:pPr>
             <a:r>
@@ -10811,9 +10583,9 @@
                 <a:solidFill>
                   <a:srgbClr val="7F8C8D"/>
                 </a:solidFill>
-                <a:latin typeface="Arial" pitchFamily="34" charset="0"/>
-                <a:ea typeface="Arial" pitchFamily="34" charset="-122"/>
-                <a:cs typeface="Arial" pitchFamily="34" charset="-120"/>
+                <a:latin typeface="Arial" panose="020B0604020202020204" pitchFamily="34" charset="0"/>
+                <a:ea typeface="Arial" panose="020B0604020202020204" pitchFamily="34" charset="-122"/>
+                <a:cs typeface="Arial" panose="020B0604020202020204" pitchFamily="34" charset="-120"/>
               </a:rPr>
               <a:t>以文档为中心的迭代闭环</a:t>
             </a:r>
@@ -10838,7 +10610,6 @@
           <a:solidFill>
             <a:srgbClr val="4A90E2"/>
           </a:solidFill>
-          <a:ln/>
         </p:spPr>
       </p:sp>
       <p:sp>
@@ -10858,7 +10629,6 @@
           <a:solidFill>
             <a:srgbClr val="4A90E2"/>
           </a:solidFill>
-          <a:ln/>
         </p:spPr>
       </p:sp>
       <p:sp>
@@ -10876,13 +10646,12 @@
             <a:avLst/>
           </a:prstGeom>
           <a:noFill/>
-          <a:ln/>
-        </p:spPr>
-        <p:txBody>
-          <a:bodyPr wrap="square" rtlCol="0" anchor="ctr"/>
-          <a:lstStyle/>
-          <a:p>
-            <a:pPr algn="ctr" indent="0" marL="0">
+        </p:spPr>
+        <p:txBody>
+          <a:bodyPr wrap="square" rtlCol="0" anchor="ctr"/>
+          <a:lstStyle/>
+          <a:p>
+            <a:pPr marL="0" indent="0" algn="ctr">
               <a:buNone/>
             </a:pPr>
             <a:r>
@@ -10890,9 +10659,9 @@
                 <a:solidFill>
                   <a:srgbClr val="FFFFFF"/>
                 </a:solidFill>
-                <a:latin typeface="Arial" pitchFamily="34" charset="0"/>
-                <a:ea typeface="Arial" pitchFamily="34" charset="-122"/>
-                <a:cs typeface="Arial" pitchFamily="34" charset="-120"/>
+                <a:latin typeface="Arial" panose="020B0604020202020204" pitchFamily="34" charset="0"/>
+                <a:ea typeface="Arial" panose="020B0604020202020204" pitchFamily="34" charset="-122"/>
+                <a:cs typeface="Arial" panose="020B0604020202020204" pitchFamily="34" charset="-120"/>
               </a:rPr>
               <a:t>文档</a:t>
             </a:r>
@@ -10915,13 +10684,12 @@
             <a:avLst/>
           </a:prstGeom>
           <a:noFill/>
-          <a:ln/>
-        </p:spPr>
-        <p:txBody>
-          <a:bodyPr wrap="square" rtlCol="0" anchor="ctr"/>
-          <a:lstStyle/>
-          <a:p>
-            <a:pPr algn="ctr" indent="0" marL="0">
+        </p:spPr>
+        <p:txBody>
+          <a:bodyPr wrap="square" rtlCol="0" anchor="ctr"/>
+          <a:lstStyle/>
+          <a:p>
+            <a:pPr marL="0" indent="0" algn="ctr">
               <a:buNone/>
             </a:pPr>
             <a:r>
@@ -10929,9 +10697,9 @@
                 <a:solidFill>
                   <a:srgbClr val="7F8C8D"/>
                 </a:solidFill>
-                <a:latin typeface="Arial" pitchFamily="34" charset="0"/>
-                <a:ea typeface="Arial" pitchFamily="34" charset="-122"/>
-                <a:cs typeface="Arial" pitchFamily="34" charset="-120"/>
+                <a:latin typeface="Arial" panose="020B0604020202020204" pitchFamily="34" charset="0"/>
+                <a:ea typeface="Arial" panose="020B0604020202020204" pitchFamily="34" charset="-122"/>
+                <a:cs typeface="Arial" panose="020B0604020202020204" pitchFamily="34" charset="-120"/>
               </a:rPr>
               <a:t>（由AI扮演五大角色编写）</a:t>
             </a:r>
@@ -10956,7 +10724,6 @@
           <a:solidFill>
             <a:srgbClr val="E67E22"/>
           </a:solidFill>
-          <a:ln/>
         </p:spPr>
       </p:sp>
       <p:sp>
@@ -10974,13 +10741,12 @@
             <a:avLst/>
           </a:prstGeom>
           <a:noFill/>
-          <a:ln/>
-        </p:spPr>
-        <p:txBody>
-          <a:bodyPr wrap="square" rtlCol="0" anchor="ctr"/>
-          <a:lstStyle/>
-          <a:p>
-            <a:pPr algn="ctr" indent="0" marL="0">
+        </p:spPr>
+        <p:txBody>
+          <a:bodyPr wrap="square" rtlCol="0" anchor="ctr"/>
+          <a:lstStyle/>
+          <a:p>
+            <a:pPr marL="0" indent="0" algn="ctr">
               <a:buNone/>
             </a:pPr>
             <a:r>
@@ -10988,9 +10754,9 @@
                 <a:solidFill>
                   <a:srgbClr val="FFFFFF"/>
                 </a:solidFill>
-                <a:latin typeface="Arial" pitchFamily="34" charset="0"/>
-                <a:ea typeface="Arial" pitchFamily="34" charset="-122"/>
-                <a:cs typeface="Arial" pitchFamily="34" charset="-120"/>
+                <a:latin typeface="Arial" panose="020B0604020202020204" pitchFamily="34" charset="0"/>
+                <a:ea typeface="Arial" panose="020B0604020202020204" pitchFamily="34" charset="-122"/>
+                <a:cs typeface="Arial" panose="020B0604020202020204" pitchFamily="34" charset="-120"/>
               </a:rPr>
               <a:t>修改文档</a:t>
             </a:r>
@@ -11015,7 +10781,6 @@
           <a:solidFill>
             <a:srgbClr val="27AE60"/>
           </a:solidFill>
-          <a:ln/>
         </p:spPr>
       </p:sp>
       <p:sp>
@@ -11033,13 +10798,12 @@
             <a:avLst/>
           </a:prstGeom>
           <a:noFill/>
-          <a:ln/>
-        </p:spPr>
-        <p:txBody>
-          <a:bodyPr wrap="square" rtlCol="0" anchor="ctr"/>
-          <a:lstStyle/>
-          <a:p>
-            <a:pPr algn="ctr" indent="0" marL="0">
+        </p:spPr>
+        <p:txBody>
+          <a:bodyPr wrap="square" rtlCol="0" anchor="ctr"/>
+          <a:lstStyle/>
+          <a:p>
+            <a:pPr marL="0" indent="0" algn="ctr">
               <a:buNone/>
             </a:pPr>
             <a:r>
@@ -11047,9 +10811,9 @@
                 <a:solidFill>
                   <a:srgbClr val="FFFFFF"/>
                 </a:solidFill>
-                <a:latin typeface="Arial" pitchFamily="34" charset="0"/>
-                <a:ea typeface="Arial" pitchFamily="34" charset="-122"/>
-                <a:cs typeface="Arial" pitchFamily="34" charset="-120"/>
+                <a:latin typeface="Arial" panose="020B0604020202020204" pitchFamily="34" charset="0"/>
+                <a:ea typeface="Arial" panose="020B0604020202020204" pitchFamily="34" charset="-122"/>
+                <a:cs typeface="Arial" panose="020B0604020202020204" pitchFamily="34" charset="-120"/>
               </a:rPr>
               <a:t>AI生成代码</a:t>
             </a:r>
@@ -11074,7 +10838,6 @@
           <a:solidFill>
             <a:srgbClr val="1A5276"/>
           </a:solidFill>
-          <a:ln/>
         </p:spPr>
       </p:sp>
       <p:sp>
@@ -11092,13 +10855,12 @@
             <a:avLst/>
           </a:prstGeom>
           <a:noFill/>
-          <a:ln/>
-        </p:spPr>
-        <p:txBody>
-          <a:bodyPr wrap="square" rtlCol="0" anchor="ctr"/>
-          <a:lstStyle/>
-          <a:p>
-            <a:pPr algn="ctr" indent="0" marL="0">
+        </p:spPr>
+        <p:txBody>
+          <a:bodyPr wrap="square" rtlCol="0" anchor="ctr"/>
+          <a:lstStyle/>
+          <a:p>
+            <a:pPr marL="0" indent="0" algn="ctr">
               <a:buNone/>
             </a:pPr>
             <a:r>
@@ -11106,9 +10868,9 @@
                 <a:solidFill>
                   <a:srgbClr val="FFFFFF"/>
                 </a:solidFill>
-                <a:latin typeface="Arial" pitchFamily="34" charset="0"/>
-                <a:ea typeface="Arial" pitchFamily="34" charset="-122"/>
-                <a:cs typeface="Arial" pitchFamily="34" charset="-120"/>
+                <a:latin typeface="Arial" panose="020B0604020202020204" pitchFamily="34" charset="0"/>
+                <a:ea typeface="Arial" panose="020B0604020202020204" pitchFamily="34" charset="-122"/>
+                <a:cs typeface="Arial" panose="020B0604020202020204" pitchFamily="34" charset="-120"/>
               </a:rPr>
               <a:t>代码Review</a:t>
             </a:r>
@@ -11133,7 +10895,6 @@
           <a:solidFill>
             <a:srgbClr val="E74C3C"/>
           </a:solidFill>
-          <a:ln/>
         </p:spPr>
       </p:sp>
       <p:sp>
@@ -11151,13 +10912,12 @@
             <a:avLst/>
           </a:prstGeom>
           <a:noFill/>
-          <a:ln/>
-        </p:spPr>
-        <p:txBody>
-          <a:bodyPr wrap="square" rtlCol="0" anchor="ctr"/>
-          <a:lstStyle/>
-          <a:p>
-            <a:pPr algn="ctr" indent="0" marL="0">
+        </p:spPr>
+        <p:txBody>
+          <a:bodyPr wrap="square" rtlCol="0" anchor="ctr"/>
+          <a:lstStyle/>
+          <a:p>
+            <a:pPr marL="0" indent="0" algn="ctr">
               <a:buNone/>
             </a:pPr>
             <a:r>
@@ -11165,9 +10925,9 @@
                 <a:solidFill>
                   <a:srgbClr val="FFFFFF"/>
                 </a:solidFill>
-                <a:latin typeface="Arial" pitchFamily="34" charset="0"/>
-                <a:ea typeface="Arial" pitchFamily="34" charset="-122"/>
-                <a:cs typeface="Arial" pitchFamily="34" charset="-120"/>
+                <a:latin typeface="Arial" panose="020B0604020202020204" pitchFamily="34" charset="0"/>
+                <a:ea typeface="Arial" panose="020B0604020202020204" pitchFamily="34" charset="-122"/>
+                <a:cs typeface="Arial" panose="020B0604020202020204" pitchFamily="34" charset="-120"/>
               </a:rPr>
               <a:t>发现问题</a:t>
             </a:r>
@@ -11190,13 +10950,12 @@
             <a:avLst/>
           </a:prstGeom>
           <a:noFill/>
-          <a:ln/>
-        </p:spPr>
-        <p:txBody>
-          <a:bodyPr wrap="square" rtlCol="0" anchor="ctr"/>
-          <a:lstStyle/>
-          <a:p>
-            <a:pPr algn="ctr" indent="0" marL="0">
+        </p:spPr>
+        <p:txBody>
+          <a:bodyPr wrap="square" rtlCol="0" anchor="ctr"/>
+          <a:lstStyle/>
+          <a:p>
+            <a:pPr marL="0" indent="0" algn="ctr">
               <a:buNone/>
             </a:pPr>
             <a:r>
@@ -11204,9 +10963,9 @@
                 <a:solidFill>
                   <a:srgbClr val="4A90E2"/>
                 </a:solidFill>
-                <a:latin typeface="Arial" pitchFamily="34" charset="0"/>
-                <a:ea typeface="Arial" pitchFamily="34" charset="-122"/>
-                <a:cs typeface="Arial" pitchFamily="34" charset="-120"/>
+                <a:latin typeface="Arial" panose="020B0604020202020204" pitchFamily="34" charset="0"/>
+                <a:ea typeface="Arial" panose="020B0604020202020204" pitchFamily="34" charset="-122"/>
+                <a:cs typeface="Arial" panose="020B0604020202020204" pitchFamily="34" charset="-120"/>
               </a:rPr>
               <a:t>▶</a:t>
             </a:r>
@@ -11229,13 +10988,12 @@
             <a:avLst/>
           </a:prstGeom>
           <a:noFill/>
-          <a:ln/>
-        </p:spPr>
-        <p:txBody>
-          <a:bodyPr wrap="square" rtlCol="0" anchor="ctr"/>
-          <a:lstStyle/>
-          <a:p>
-            <a:pPr algn="ctr" indent="0" marL="0">
+        </p:spPr>
+        <p:txBody>
+          <a:bodyPr wrap="square" rtlCol="0" anchor="ctr"/>
+          <a:lstStyle/>
+          <a:p>
+            <a:pPr marL="0" indent="0" algn="ctr">
               <a:buNone/>
             </a:pPr>
             <a:r>
@@ -11243,9 +11001,9 @@
                 <a:solidFill>
                   <a:srgbClr val="4A90E2"/>
                 </a:solidFill>
-                <a:latin typeface="Arial" pitchFamily="34" charset="0"/>
-                <a:ea typeface="Arial" pitchFamily="34" charset="-122"/>
-                <a:cs typeface="Arial" pitchFamily="34" charset="-120"/>
+                <a:latin typeface="Arial" panose="020B0604020202020204" pitchFamily="34" charset="0"/>
+                <a:ea typeface="Arial" panose="020B0604020202020204" pitchFamily="34" charset="-122"/>
+                <a:cs typeface="Arial" panose="020B0604020202020204" pitchFamily="34" charset="-120"/>
               </a:rPr>
               <a:t>▼</a:t>
             </a:r>
@@ -11268,13 +11026,12 @@
             <a:avLst/>
           </a:prstGeom>
           <a:noFill/>
-          <a:ln/>
-        </p:spPr>
-        <p:txBody>
-          <a:bodyPr wrap="square" rtlCol="0" anchor="ctr"/>
-          <a:lstStyle/>
-          <a:p>
-            <a:pPr algn="ctr" indent="0" marL="0">
+        </p:spPr>
+        <p:txBody>
+          <a:bodyPr wrap="square" rtlCol="0" anchor="ctr"/>
+          <a:lstStyle/>
+          <a:p>
+            <a:pPr marL="0" indent="0" algn="ctr">
               <a:buNone/>
             </a:pPr>
             <a:r>
@@ -11282,9 +11039,9 @@
                 <a:solidFill>
                   <a:srgbClr val="4A90E2"/>
                 </a:solidFill>
-                <a:latin typeface="Arial" pitchFamily="34" charset="0"/>
-                <a:ea typeface="Arial" pitchFamily="34" charset="-122"/>
-                <a:cs typeface="Arial" pitchFamily="34" charset="-120"/>
+                <a:latin typeface="Arial" panose="020B0604020202020204" pitchFamily="34" charset="0"/>
+                <a:ea typeface="Arial" panose="020B0604020202020204" pitchFamily="34" charset="-122"/>
+                <a:cs typeface="Arial" panose="020B0604020202020204" pitchFamily="34" charset="-120"/>
               </a:rPr>
               <a:t>◀</a:t>
             </a:r>
@@ -11307,13 +11064,12 @@
             <a:avLst/>
           </a:prstGeom>
           <a:noFill/>
-          <a:ln/>
-        </p:spPr>
-        <p:txBody>
-          <a:bodyPr wrap="square" rtlCol="0" anchor="ctr"/>
-          <a:lstStyle/>
-          <a:p>
-            <a:pPr algn="ctr" indent="0" marL="0">
+        </p:spPr>
+        <p:txBody>
+          <a:bodyPr wrap="square" rtlCol="0" anchor="ctr"/>
+          <a:lstStyle/>
+          <a:p>
+            <a:pPr marL="0" indent="0" algn="ctr">
               <a:buNone/>
             </a:pPr>
             <a:r>
@@ -11321,9 +11077,9 @@
                 <a:solidFill>
                   <a:srgbClr val="4A90E2"/>
                 </a:solidFill>
-                <a:latin typeface="Arial" pitchFamily="34" charset="0"/>
-                <a:ea typeface="Arial" pitchFamily="34" charset="-122"/>
-                <a:cs typeface="Arial" pitchFamily="34" charset="-120"/>
+                <a:latin typeface="Arial" panose="020B0604020202020204" pitchFamily="34" charset="0"/>
+                <a:ea typeface="Arial" panose="020B0604020202020204" pitchFamily="34" charset="-122"/>
+                <a:cs typeface="Arial" panose="020B0604020202020204" pitchFamily="34" charset="-120"/>
               </a:rPr>
               <a:t>▲</a:t>
             </a:r>
@@ -11346,13 +11102,12 @@
             <a:avLst/>
           </a:prstGeom>
           <a:noFill/>
-          <a:ln/>
-        </p:spPr>
-        <p:txBody>
-          <a:bodyPr wrap="square" rtlCol="0" anchor="ctr"/>
-          <a:lstStyle/>
-          <a:p>
-            <a:pPr indent="0" marL="0">
+        </p:spPr>
+        <p:txBody>
+          <a:bodyPr wrap="square" rtlCol="0" anchor="ctr"/>
+          <a:lstStyle/>
+          <a:p>
+            <a:pPr marL="0" indent="0">
               <a:buNone/>
             </a:pPr>
             <a:r>
@@ -11360,9 +11115,9 @@
                 <a:solidFill>
                   <a:srgbClr val="E74C3C"/>
                 </a:solidFill>
-                <a:latin typeface="Arial" pitchFamily="34" charset="0"/>
-                <a:ea typeface="Arial" pitchFamily="34" charset="-122"/>
-                <a:cs typeface="Arial" pitchFamily="34" charset="-120"/>
+                <a:latin typeface="Arial" panose="020B0604020202020204" pitchFamily="34" charset="0"/>
+                <a:ea typeface="Arial" panose="020B0604020202020204" pitchFamily="34" charset="-122"/>
+                <a:cs typeface="Arial" panose="020B0604020202020204" pitchFamily="34" charset="-120"/>
               </a:rPr>
               <a:t>失败比例 &gt; 成功比例：每次成功调教背后有3-4次失败描述尝试</a:t>
             </a:r>
@@ -11387,7 +11142,6 @@
           <a:solidFill>
             <a:srgbClr val="D5D8DC"/>
           </a:solidFill>
-          <a:ln/>
         </p:spPr>
       </p:sp>
       <p:sp>
@@ -11407,7 +11161,6 @@
           <a:solidFill>
             <a:srgbClr val="4A90E2"/>
           </a:solidFill>
-          <a:ln/>
         </p:spPr>
       </p:sp>
       <p:sp>
@@ -11425,13 +11178,12 @@
             <a:avLst/>
           </a:prstGeom>
           <a:noFill/>
-          <a:ln/>
-        </p:spPr>
-        <p:txBody>
-          <a:bodyPr wrap="square" rtlCol="0" anchor="ctr"/>
-          <a:lstStyle/>
-          <a:p>
-            <a:pPr algn="ctr" indent="0" marL="0">
+        </p:spPr>
+        <p:txBody>
+          <a:bodyPr wrap="square" rtlCol="0" anchor="ctr"/>
+          <a:lstStyle/>
+          <a:p>
+            <a:pPr marL="0" indent="0" algn="ctr">
               <a:buNone/>
             </a:pPr>
             <a:r>
@@ -11439,9 +11191,9 @@
                 <a:solidFill>
                   <a:srgbClr val="FFFFFF"/>
                 </a:solidFill>
-                <a:latin typeface="Arial" pitchFamily="34" charset="0"/>
-                <a:ea typeface="Arial" pitchFamily="34" charset="-122"/>
-                <a:cs typeface="Arial" pitchFamily="34" charset="-120"/>
+                <a:latin typeface="Arial" panose="020B0604020202020204" pitchFamily="34" charset="0"/>
+                <a:ea typeface="Arial" panose="020B0604020202020204" pitchFamily="34" charset="-122"/>
+                <a:cs typeface="Arial" panose="020B0604020202020204" pitchFamily="34" charset="-120"/>
               </a:rPr>
               <a:t>01</a:t>
             </a:r>
@@ -11464,13 +11216,12 @@
             <a:avLst/>
           </a:prstGeom>
           <a:noFill/>
-          <a:ln/>
-        </p:spPr>
-        <p:txBody>
-          <a:bodyPr wrap="square" rtlCol="0" anchor="ctr"/>
-          <a:lstStyle/>
-          <a:p>
-            <a:pPr indent="0" marL="0">
+        </p:spPr>
+        <p:txBody>
+          <a:bodyPr wrap="square" rtlCol="0" anchor="ctr"/>
+          <a:lstStyle/>
+          <a:p>
+            <a:pPr marL="0" indent="0">
               <a:buNone/>
             </a:pPr>
             <a:r>
@@ -11478,9 +11229,9 @@
                 <a:solidFill>
                   <a:srgbClr val="2C3E50"/>
                 </a:solidFill>
-                <a:latin typeface="Arial" pitchFamily="34" charset="0"/>
-                <a:ea typeface="Arial" pitchFamily="34" charset="-122"/>
-                <a:cs typeface="Arial" pitchFamily="34" charset="-120"/>
+                <a:latin typeface="Arial" panose="020B0604020202020204" pitchFamily="34" charset="0"/>
+                <a:ea typeface="Arial" panose="020B0604020202020204" pitchFamily="34" charset="-122"/>
+                <a:cs typeface="Arial" panose="020B0604020202020204" pitchFamily="34" charset="-120"/>
               </a:rPr>
               <a:t>文档先行</a:t>
             </a:r>
@@ -11503,13 +11254,12 @@
             <a:avLst/>
           </a:prstGeom>
           <a:noFill/>
-          <a:ln/>
         </p:spPr>
         <p:txBody>
           <a:bodyPr wrap="square" rtlCol="0" anchor="t"/>
           <a:lstStyle/>
           <a:p>
-            <a:pPr indent="0" marL="0">
+            <a:pPr marL="0" indent="0">
               <a:lnSpc>
                 <a:spcPct val="130000"/>
               </a:lnSpc>
@@ -11520,9 +11270,9 @@
                 <a:solidFill>
                   <a:srgbClr val="34495E"/>
                 </a:solidFill>
-                <a:latin typeface="Arial" pitchFamily="34" charset="0"/>
-                <a:ea typeface="Arial" pitchFamily="34" charset="-122"/>
-                <a:cs typeface="Arial" pitchFamily="34" charset="-120"/>
+                <a:latin typeface="Arial" panose="020B0604020202020204" pitchFamily="34" charset="0"/>
+                <a:ea typeface="Arial" panose="020B0604020202020204" pitchFamily="34" charset="-122"/>
+                <a:cs typeface="Arial" panose="020B0604020202020204" pitchFamily="34" charset="-120"/>
               </a:rPr>
               <a:t>先改文档再改代码。文档是“调教参数”，代码是输出。</a:t>
             </a:r>
@@ -11547,7 +11297,6 @@
           <a:solidFill>
             <a:srgbClr val="4A90E2"/>
           </a:solidFill>
-          <a:ln/>
         </p:spPr>
       </p:sp>
       <p:sp>
@@ -11565,13 +11314,12 @@
             <a:avLst/>
           </a:prstGeom>
           <a:noFill/>
-          <a:ln/>
-        </p:spPr>
-        <p:txBody>
-          <a:bodyPr wrap="square" rtlCol="0" anchor="ctr"/>
-          <a:lstStyle/>
-          <a:p>
-            <a:pPr algn="ctr" indent="0" marL="0">
+        </p:spPr>
+        <p:txBody>
+          <a:bodyPr wrap="square" rtlCol="0" anchor="ctr"/>
+          <a:lstStyle/>
+          <a:p>
+            <a:pPr marL="0" indent="0" algn="ctr">
               <a:buNone/>
             </a:pPr>
             <a:r>
@@ -11579,9 +11327,9 @@
                 <a:solidFill>
                   <a:srgbClr val="FFFFFF"/>
                 </a:solidFill>
-                <a:latin typeface="Arial" pitchFamily="34" charset="0"/>
-                <a:ea typeface="Arial" pitchFamily="34" charset="-122"/>
-                <a:cs typeface="Arial" pitchFamily="34" charset="-120"/>
+                <a:latin typeface="Arial" panose="020B0604020202020204" pitchFamily="34" charset="0"/>
+                <a:ea typeface="Arial" panose="020B0604020202020204" pitchFamily="34" charset="-122"/>
+                <a:cs typeface="Arial" panose="020B0604020202020204" pitchFamily="34" charset="-120"/>
               </a:rPr>
               <a:t>02</a:t>
             </a:r>
@@ -11604,13 +11352,12 @@
             <a:avLst/>
           </a:prstGeom>
           <a:noFill/>
-          <a:ln/>
-        </p:spPr>
-        <p:txBody>
-          <a:bodyPr wrap="square" rtlCol="0" anchor="ctr"/>
-          <a:lstStyle/>
-          <a:p>
-            <a:pPr indent="0" marL="0">
+        </p:spPr>
+        <p:txBody>
+          <a:bodyPr wrap="square" rtlCol="0" anchor="ctr"/>
+          <a:lstStyle/>
+          <a:p>
+            <a:pPr marL="0" indent="0">
               <a:buNone/>
             </a:pPr>
             <a:r>
@@ -11618,9 +11365,9 @@
                 <a:solidFill>
                   <a:srgbClr val="2C3E50"/>
                 </a:solidFill>
-                <a:latin typeface="Arial" pitchFamily="34" charset="0"/>
-                <a:ea typeface="Arial" pitchFamily="34" charset="-122"/>
-                <a:cs typeface="Arial" pitchFamily="34" charset="-120"/>
+                <a:latin typeface="Arial" panose="020B0604020202020204" pitchFamily="34" charset="0"/>
+                <a:ea typeface="Arial" panose="020B0604020202020204" pitchFamily="34" charset="-122"/>
+                <a:cs typeface="Arial" panose="020B0604020202020204" pitchFamily="34" charset="-120"/>
               </a:rPr>
               <a:t>增量变更</a:t>
             </a:r>
@@ -11643,13 +11390,12 @@
             <a:avLst/>
           </a:prstGeom>
           <a:noFill/>
-          <a:ln/>
         </p:spPr>
         <p:txBody>
           <a:bodyPr wrap="square" rtlCol="0" anchor="t"/>
           <a:lstStyle/>
           <a:p>
-            <a:pPr indent="0" marL="0">
+            <a:pPr marL="0" indent="0">
               <a:lnSpc>
                 <a:spcPct val="130000"/>
               </a:lnSpc>
@@ -11660,9 +11406,9 @@
                 <a:solidFill>
                   <a:srgbClr val="34495E"/>
                 </a:solidFill>
-                <a:latin typeface="Arial" pitchFamily="34" charset="0"/>
-                <a:ea typeface="Arial" pitchFamily="34" charset="-122"/>
-                <a:cs typeface="Arial" pitchFamily="34" charset="-120"/>
+                <a:latin typeface="Arial" panose="020B0604020202020204" pitchFamily="34" charset="0"/>
+                <a:ea typeface="Arial" panose="020B0604020202020204" pitchFamily="34" charset="-122"/>
+                <a:cs typeface="Arial" panose="020B0604020202020204" pitchFamily="34" charset="-120"/>
               </a:rPr>
               <a:t>改一处生成一处，不全量覆盖。</a:t>
             </a:r>
@@ -11687,7 +11433,6 @@
           <a:solidFill>
             <a:srgbClr val="4A90E2"/>
           </a:solidFill>
-          <a:ln/>
         </p:spPr>
       </p:sp>
       <p:sp>
@@ -11705,13 +11450,12 @@
             <a:avLst/>
           </a:prstGeom>
           <a:noFill/>
-          <a:ln/>
-        </p:spPr>
-        <p:txBody>
-          <a:bodyPr wrap="square" rtlCol="0" anchor="ctr"/>
-          <a:lstStyle/>
-          <a:p>
-            <a:pPr algn="ctr" indent="0" marL="0">
+        </p:spPr>
+        <p:txBody>
+          <a:bodyPr wrap="square" rtlCol="0" anchor="ctr"/>
+          <a:lstStyle/>
+          <a:p>
+            <a:pPr marL="0" indent="0" algn="ctr">
               <a:buNone/>
             </a:pPr>
             <a:r>
@@ -11719,9 +11463,9 @@
                 <a:solidFill>
                   <a:srgbClr val="FFFFFF"/>
                 </a:solidFill>
-                <a:latin typeface="Arial" pitchFamily="34" charset="0"/>
-                <a:ea typeface="Arial" pitchFamily="34" charset="-122"/>
-                <a:cs typeface="Arial" pitchFamily="34" charset="-120"/>
+                <a:latin typeface="Arial" panose="020B0604020202020204" pitchFamily="34" charset="0"/>
+                <a:ea typeface="Arial" panose="020B0604020202020204" pitchFamily="34" charset="-122"/>
+                <a:cs typeface="Arial" panose="020B0604020202020204" pitchFamily="34" charset="-120"/>
               </a:rPr>
               <a:t>03</a:t>
             </a:r>
@@ -11744,13 +11488,12 @@
             <a:avLst/>
           </a:prstGeom>
           <a:noFill/>
-          <a:ln/>
-        </p:spPr>
-        <p:txBody>
-          <a:bodyPr wrap="square" rtlCol="0" anchor="ctr"/>
-          <a:lstStyle/>
-          <a:p>
-            <a:pPr indent="0" marL="0">
+        </p:spPr>
+        <p:txBody>
+          <a:bodyPr wrap="square" rtlCol="0" anchor="ctr"/>
+          <a:lstStyle/>
+          <a:p>
+            <a:pPr marL="0" indent="0">
               <a:buNone/>
             </a:pPr>
             <a:r>
@@ -11758,9 +11501,9 @@
                 <a:solidFill>
                   <a:srgbClr val="2C3E50"/>
                 </a:solidFill>
-                <a:latin typeface="Arial" pitchFamily="34" charset="0"/>
-                <a:ea typeface="Arial" pitchFamily="34" charset="-122"/>
-                <a:cs typeface="Arial" pitchFamily="34" charset="-120"/>
+                <a:latin typeface="Arial" panose="020B0604020202020204" pitchFamily="34" charset="0"/>
+                <a:ea typeface="Arial" panose="020B0604020202020204" pitchFamily="34" charset="-122"/>
+                <a:cs typeface="Arial" panose="020B0604020202020204" pitchFamily="34" charset="-120"/>
               </a:rPr>
               <a:t>不改旧代码</a:t>
             </a:r>
@@ -11783,13 +11526,12 @@
             <a:avLst/>
           </a:prstGeom>
           <a:noFill/>
-          <a:ln/>
         </p:spPr>
         <p:txBody>
           <a:bodyPr wrap="square" rtlCol="0" anchor="t"/>
           <a:lstStyle/>
           <a:p>
-            <a:pPr indent="0" marL="0">
+            <a:pPr marL="0" indent="0">
               <a:lnSpc>
                 <a:spcPct val="130000"/>
               </a:lnSpc>
@@ -11800,9 +11542,9 @@
                 <a:solidFill>
                   <a:srgbClr val="34495E"/>
                 </a:solidFill>
-                <a:latin typeface="Arial" pitchFamily="34" charset="0"/>
-                <a:ea typeface="Arial" pitchFamily="34" charset="-122"/>
-                <a:cs typeface="Arial" pitchFamily="34" charset="-120"/>
+                <a:latin typeface="Arial" panose="020B0604020202020204" pitchFamily="34" charset="0"/>
+                <a:ea typeface="Arial" panose="020B0604020202020204" pitchFamily="34" charset="-122"/>
+                <a:cs typeface="Arial" panose="020B0604020202020204" pitchFamily="34" charset="-120"/>
               </a:rPr>
               <a:t>已调好的逻辑不动，只通过改文档触发新生成。</a:t>
             </a:r>
@@ -11827,7 +11569,6 @@
           <a:solidFill>
             <a:srgbClr val="4A90E2"/>
           </a:solidFill>
-          <a:ln/>
         </p:spPr>
       </p:sp>
       <p:sp>
@@ -11845,13 +11586,12 @@
             <a:avLst/>
           </a:prstGeom>
           <a:noFill/>
-          <a:ln/>
-        </p:spPr>
-        <p:txBody>
-          <a:bodyPr wrap="square" rtlCol="0" anchor="ctr"/>
-          <a:lstStyle/>
-          <a:p>
-            <a:pPr algn="ctr" indent="0" marL="0">
+        </p:spPr>
+        <p:txBody>
+          <a:bodyPr wrap="square" rtlCol="0" anchor="ctr"/>
+          <a:lstStyle/>
+          <a:p>
+            <a:pPr marL="0" indent="0" algn="ctr">
               <a:buNone/>
             </a:pPr>
             <a:r>
@@ -11859,9 +11599,9 @@
                 <a:solidFill>
                   <a:srgbClr val="FFFFFF"/>
                 </a:solidFill>
-                <a:latin typeface="Arial" pitchFamily="34" charset="0"/>
-                <a:ea typeface="Arial" pitchFamily="34" charset="-122"/>
-                <a:cs typeface="Arial" pitchFamily="34" charset="-120"/>
+                <a:latin typeface="Arial" panose="020B0604020202020204" pitchFamily="34" charset="0"/>
+                <a:ea typeface="Arial" panose="020B0604020202020204" pitchFamily="34" charset="-122"/>
+                <a:cs typeface="Arial" panose="020B0604020202020204" pitchFamily="34" charset="-120"/>
               </a:rPr>
               <a:t>04</a:t>
             </a:r>
@@ -11884,13 +11624,12 @@
             <a:avLst/>
           </a:prstGeom>
           <a:noFill/>
-          <a:ln/>
-        </p:spPr>
-        <p:txBody>
-          <a:bodyPr wrap="square" rtlCol="0" anchor="ctr"/>
-          <a:lstStyle/>
-          <a:p>
-            <a:pPr indent="0" marL="0">
+        </p:spPr>
+        <p:txBody>
+          <a:bodyPr wrap="square" rtlCol="0" anchor="ctr"/>
+          <a:lstStyle/>
+          <a:p>
+            <a:pPr marL="0" indent="0">
               <a:buNone/>
             </a:pPr>
             <a:r>
@@ -11898,9 +11637,9 @@
                 <a:solidFill>
                   <a:srgbClr val="2C3E50"/>
                 </a:solidFill>
-                <a:latin typeface="Arial" pitchFamily="34" charset="0"/>
-                <a:ea typeface="Arial" pitchFamily="34" charset="-122"/>
-                <a:cs typeface="Arial" pitchFamily="34" charset="-120"/>
+                <a:latin typeface="Arial" panose="020B0604020202020204" pitchFamily="34" charset="0"/>
+                <a:ea typeface="Arial" panose="020B0604020202020204" pitchFamily="34" charset="-122"/>
+                <a:cs typeface="Arial" panose="020B0604020202020204" pitchFamily="34" charset="-120"/>
               </a:rPr>
               <a:t>记录变更</a:t>
             </a:r>
@@ -11923,13 +11662,12 @@
             <a:avLst/>
           </a:prstGeom>
           <a:noFill/>
-          <a:ln/>
         </p:spPr>
         <p:txBody>
           <a:bodyPr wrap="square" rtlCol="0" anchor="t"/>
           <a:lstStyle/>
           <a:p>
-            <a:pPr indent="0" marL="0">
+            <a:pPr marL="0" indent="0">
               <a:lnSpc>
                 <a:spcPct val="130000"/>
               </a:lnSpc>
@@ -11940,9 +11678,9 @@
                 <a:solidFill>
                   <a:srgbClr val="34495E"/>
                 </a:solidFill>
-                <a:latin typeface="Arial" pitchFamily="34" charset="0"/>
-                <a:ea typeface="Arial" pitchFamily="34" charset="-122"/>
-                <a:cs typeface="Arial" pitchFamily="34" charset="-120"/>
+                <a:latin typeface="Arial" panose="020B0604020202020204" pitchFamily="34" charset="0"/>
+                <a:ea typeface="Arial" panose="020B0604020202020204" pitchFamily="34" charset="-122"/>
+                <a:cs typeface="Arial" panose="020B0604020202020204" pitchFamily="34" charset="-120"/>
               </a:rPr>
               <a:t>每次调教记录：改了啥→为什么→结果。</a:t>
             </a:r>
@@ -11967,7 +11705,6 @@
           <a:solidFill>
             <a:srgbClr val="4A90E2"/>
           </a:solidFill>
-          <a:ln/>
         </p:spPr>
       </p:sp>
       <p:sp>
@@ -11985,13 +11722,12 @@
             <a:avLst/>
           </a:prstGeom>
           <a:noFill/>
-          <a:ln/>
-        </p:spPr>
-        <p:txBody>
-          <a:bodyPr wrap="square" rtlCol="0" anchor="ctr"/>
-          <a:lstStyle/>
-          <a:p>
-            <a:pPr algn="ctr" indent="0" marL="0">
+        </p:spPr>
+        <p:txBody>
+          <a:bodyPr wrap="square" rtlCol="0" anchor="ctr"/>
+          <a:lstStyle/>
+          <a:p>
+            <a:pPr marL="0" indent="0" algn="ctr">
               <a:buNone/>
             </a:pPr>
             <a:r>
@@ -11999,9 +11735,9 @@
                 <a:solidFill>
                   <a:srgbClr val="FFFFFF"/>
                 </a:solidFill>
-                <a:latin typeface="Arial" pitchFamily="34" charset="0"/>
-                <a:ea typeface="Arial" pitchFamily="34" charset="-122"/>
-                <a:cs typeface="Arial" pitchFamily="34" charset="-120"/>
+                <a:latin typeface="Arial" panose="020B0604020202020204" pitchFamily="34" charset="0"/>
+                <a:ea typeface="Arial" panose="020B0604020202020204" pitchFamily="34" charset="-122"/>
+                <a:cs typeface="Arial" panose="020B0604020202020204" pitchFamily="34" charset="-120"/>
               </a:rPr>
               <a:t>05</a:t>
             </a:r>
@@ -12024,13 +11760,12 @@
             <a:avLst/>
           </a:prstGeom>
           <a:noFill/>
-          <a:ln/>
-        </p:spPr>
-        <p:txBody>
-          <a:bodyPr wrap="square" rtlCol="0" anchor="ctr"/>
-          <a:lstStyle/>
-          <a:p>
-            <a:pPr indent="0" marL="0">
+        </p:spPr>
+        <p:txBody>
+          <a:bodyPr wrap="square" rtlCol="0" anchor="ctr"/>
+          <a:lstStyle/>
+          <a:p>
+            <a:pPr marL="0" indent="0">
               <a:buNone/>
             </a:pPr>
             <a:r>
@@ -12038,9 +11773,9 @@
                 <a:solidFill>
                   <a:srgbClr val="2C3E50"/>
                 </a:solidFill>
-                <a:latin typeface="Arial" pitchFamily="34" charset="0"/>
-                <a:ea typeface="Arial" pitchFamily="34" charset="-122"/>
-                <a:cs typeface="Arial" pitchFamily="34" charset="-120"/>
+                <a:latin typeface="Arial" panose="020B0604020202020204" pitchFamily="34" charset="0"/>
+                <a:ea typeface="Arial" panose="020B0604020202020204" pitchFamily="34" charset="-122"/>
+                <a:cs typeface="Arial" panose="020B0604020202020204" pitchFamily="34" charset="-120"/>
               </a:rPr>
               <a:t>同步更新</a:t>
             </a:r>
@@ -12063,13 +11798,12 @@
             <a:avLst/>
           </a:prstGeom>
           <a:noFill/>
-          <a:ln/>
         </p:spPr>
         <p:txBody>
           <a:bodyPr wrap="square" rtlCol="0" anchor="t"/>
           <a:lstStyle/>
           <a:p>
-            <a:pPr indent="0" marL="0">
+            <a:pPr marL="0" indent="0">
               <a:lnSpc>
                 <a:spcPct val="130000"/>
               </a:lnSpc>
@@ -12080,9 +11814,9 @@
                 <a:solidFill>
                   <a:srgbClr val="34495E"/>
                 </a:solidFill>
-                <a:latin typeface="Arial" pitchFamily="34" charset="0"/>
-                <a:ea typeface="Arial" pitchFamily="34" charset="-122"/>
-                <a:cs typeface="Arial" pitchFamily="34" charset="-120"/>
+                <a:latin typeface="Arial" panose="020B0604020202020204" pitchFamily="34" charset="0"/>
+                <a:ea typeface="Arial" panose="020B0604020202020204" pitchFamily="34" charset="-122"/>
+                <a:cs typeface="Arial" panose="020B0604020202020204" pitchFamily="34" charset="-120"/>
               </a:rPr>
               <a:t>调教中沉淀的规则即时写回文档。</a:t>
             </a:r>
@@ -12130,13 +11864,12 @@
             <a:avLst/>
           </a:prstGeom>
           <a:noFill/>
-          <a:ln/>
-        </p:spPr>
-        <p:txBody>
-          <a:bodyPr wrap="square" rtlCol="0" anchor="ctr"/>
-          <a:lstStyle/>
-          <a:p>
-            <a:pPr algn="ctr" indent="0" marL="0">
+        </p:spPr>
+        <p:txBody>
+          <a:bodyPr wrap="square" rtlCol="0" anchor="ctr"/>
+          <a:lstStyle/>
+          <a:p>
+            <a:pPr marL="0" indent="0" algn="ctr">
               <a:buNone/>
             </a:pPr>
             <a:r>
@@ -12144,9 +11877,9 @@
                 <a:solidFill>
                   <a:srgbClr val="4A90E2"/>
                 </a:solidFill>
-                <a:latin typeface="Arial" pitchFamily="34" charset="0"/>
-                <a:ea typeface="Arial" pitchFamily="34" charset="-122"/>
-                <a:cs typeface="Arial" pitchFamily="34" charset="-120"/>
+                <a:latin typeface="Arial" panose="020B0604020202020204" pitchFamily="34" charset="0"/>
+                <a:ea typeface="Arial" panose="020B0604020202020204" pitchFamily="34" charset="-122"/>
+                <a:cs typeface="Arial" panose="020B0604020202020204" pitchFamily="34" charset="-120"/>
               </a:rPr>
               <a:t>以前我是编码者，现在我是调教师</a:t>
             </a:r>
@@ -12171,7 +11904,6 @@
           <a:solidFill>
             <a:srgbClr val="F5F5F5"/>
           </a:solidFill>
-          <a:ln/>
         </p:spPr>
       </p:sp>
       <p:sp>
@@ -12189,13 +11921,12 @@
             <a:avLst/>
           </a:prstGeom>
           <a:noFill/>
-          <a:ln/>
-        </p:spPr>
-        <p:txBody>
-          <a:bodyPr wrap="square" rtlCol="0" anchor="ctr"/>
-          <a:lstStyle/>
-          <a:p>
-            <a:pPr indent="0" marL="0">
+        </p:spPr>
+        <p:txBody>
+          <a:bodyPr wrap="square" rtlCol="0" anchor="ctr"/>
+          <a:lstStyle/>
+          <a:p>
+            <a:pPr marL="0" indent="0">
               <a:buNone/>
             </a:pPr>
             <a:r>
@@ -12203,9 +11934,9 @@
                 <a:solidFill>
                   <a:srgbClr val="7F8C8D"/>
                 </a:solidFill>
-                <a:latin typeface="Courier New" pitchFamily="34" charset="0"/>
-                <a:ea typeface="Courier New" pitchFamily="34" charset="-122"/>
-                <a:cs typeface="Courier New" pitchFamily="34" charset="-120"/>
+                <a:latin typeface="Courier New" panose="02070309020205020404" pitchFamily="34" charset="0"/>
+                <a:ea typeface="Courier New" panose="02070309020205020404" pitchFamily="34" charset="-122"/>
+                <a:cs typeface="Courier New" panose="02070309020205020404" pitchFamily="34" charset="-120"/>
               </a:rPr>
               <a:t>调教日志节选：[2026-04-25] 需求F-TRANS-003 | 交易金额方向符号 | 文档从“支出存正数”改为“支出存负数(amount.negate())” | AI代码立即正确</a:t>
             </a:r>
@@ -12228,13 +11959,12 @@
             <a:avLst/>
           </a:prstGeom>
           <a:noFill/>
-          <a:ln/>
-        </p:spPr>
-        <p:txBody>
-          <a:bodyPr wrap="square" rtlCol="0" anchor="ctr"/>
-          <a:lstStyle/>
-          <a:p>
-            <a:pPr algn="r" indent="0" marL="0">
+        </p:spPr>
+        <p:txBody>
+          <a:bodyPr wrap="square" rtlCol="0" anchor="ctr"/>
+          <a:lstStyle/>
+          <a:p>
+            <a:pPr marL="0" indent="0" algn="r">
               <a:buNone/>
             </a:pPr>
             <a:r>
@@ -12242,9 +11972,9 @@
                 <a:solidFill>
                   <a:srgbClr val="7F8C8D"/>
                 </a:solidFill>
-                <a:latin typeface="Arial" pitchFamily="34" charset="0"/>
-                <a:ea typeface="Arial" pitchFamily="34" charset="-122"/>
-                <a:cs typeface="Arial" pitchFamily="34" charset="-120"/>
+                <a:latin typeface="Arial" panose="020B0604020202020204" pitchFamily="34" charset="0"/>
+                <a:ea typeface="Arial" panose="020B0604020202020204" pitchFamily="34" charset="-122"/>
+                <a:cs typeface="Arial" panose="020B0604020202020204" pitchFamily="34" charset="-120"/>
               </a:rPr>
               <a:t>▸ 接下来：新方法与传统的本质差异</a:t>
             </a:r>
@@ -12267,13 +11997,12 @@
             <a:avLst/>
           </a:prstGeom>
           <a:noFill/>
-          <a:ln/>
-        </p:spPr>
-        <p:txBody>
-          <a:bodyPr wrap="square" rtlCol="0" anchor="ctr"/>
-          <a:lstStyle/>
-          <a:p>
-            <a:pPr algn="l" indent="0" marL="0">
+        </p:spPr>
+        <p:txBody>
+          <a:bodyPr wrap="square" rtlCol="0" anchor="ctr"/>
+          <a:lstStyle/>
+          <a:p>
+            <a:pPr marL="0" indent="0" algn="l">
               <a:buNone/>
             </a:pPr>
             <a:r>
@@ -12281,9 +12010,9 @@
                 <a:solidFill>
                   <a:srgbClr val="4A90E2"/>
                 </a:solidFill>
-                <a:latin typeface="Arial" pitchFamily="34" charset="0"/>
-                <a:ea typeface="Arial" pitchFamily="34" charset="-122"/>
-                <a:cs typeface="Arial" pitchFamily="34" charset="-120"/>
+                <a:latin typeface="Arial" panose="020B0604020202020204" pitchFamily="34" charset="0"/>
+                <a:ea typeface="Arial" panose="020B0604020202020204" pitchFamily="34" charset="-122"/>
+                <a:cs typeface="Arial" panose="020B0604020202020204" pitchFamily="34" charset="-120"/>
               </a:rPr>
               <a:t>→</a:t>
             </a:r>
@@ -12301,12 +12030,13 @@
 
 <file path=ppt/slides/slide8.xml><?xml version="1.0" encoding="utf-8"?>
 <p:sld xmlns:a="http://schemas.openxmlformats.org/drawingml/2006/main" xmlns:r="http://schemas.openxmlformats.org/officeDocument/2006/relationships" xmlns:p="http://schemas.openxmlformats.org/presentationml/2006/main">
-  <p:cSld name="Slide 8">
+  <p:cSld>
     <p:bg>
       <p:bgPr>
         <a:solidFill>
           <a:srgbClr val="FFFFFF"/>
         </a:solidFill>
+        <a:effectLst/>
       </p:bgPr>
     </p:bg>
     <p:spTree>
@@ -12340,7 +12070,6 @@
           <a:solidFill>
             <a:srgbClr val="4A90E2"/>
           </a:solidFill>
-          <a:ln/>
         </p:spPr>
       </p:sp>
       <p:sp>
@@ -12358,13 +12087,12 @@
             <a:avLst/>
           </a:prstGeom>
           <a:noFill/>
-          <a:ln/>
-        </p:spPr>
-        <p:txBody>
-          <a:bodyPr wrap="square" rtlCol="0" anchor="ctr"/>
-          <a:lstStyle/>
-          <a:p>
-            <a:pPr indent="0" marL="0">
+        </p:spPr>
+        <p:txBody>
+          <a:bodyPr wrap="square" rtlCol="0" anchor="ctr"/>
+          <a:lstStyle/>
+          <a:p>
+            <a:pPr marL="0" indent="0">
               <a:buNone/>
             </a:pPr>
             <a:r>
@@ -12372,9 +12100,9 @@
                 <a:solidFill>
                   <a:srgbClr val="2C3E50"/>
                 </a:solidFill>
-                <a:latin typeface="Arial" pitchFamily="34" charset="0"/>
-                <a:ea typeface="Arial" pitchFamily="34" charset="-122"/>
-                <a:cs typeface="Arial" pitchFamily="34" charset="-120"/>
+                <a:latin typeface="Arial" panose="020B0604020202020204" pitchFamily="34" charset="0"/>
+                <a:ea typeface="Arial" panose="020B0604020202020204" pitchFamily="34" charset="-122"/>
+                <a:cs typeface="Arial" panose="020B0604020202020204" pitchFamily="34" charset="-120"/>
               </a:rPr>
               <a:t>研发范式对比</a:t>
             </a:r>
@@ -12397,13 +12125,12 @@
             <a:avLst/>
           </a:prstGeom>
           <a:noFill/>
-          <a:ln/>
-        </p:spPr>
-        <p:txBody>
-          <a:bodyPr wrap="square" rtlCol="0" anchor="ctr"/>
-          <a:lstStyle/>
-          <a:p>
-            <a:pPr algn="r" indent="0" marL="0">
+        </p:spPr>
+        <p:txBody>
+          <a:bodyPr wrap="square" rtlCol="0" anchor="ctr"/>
+          <a:lstStyle/>
+          <a:p>
+            <a:pPr marL="0" indent="0" algn="r">
               <a:buNone/>
             </a:pPr>
             <a:r>
@@ -12411,9 +12138,9 @@
                 <a:solidFill>
                   <a:srgbClr val="7F8C8D"/>
                 </a:solidFill>
-                <a:latin typeface="Arial" pitchFamily="34" charset="0"/>
-                <a:ea typeface="Arial" pitchFamily="34" charset="-122"/>
-                <a:cs typeface="Arial" pitchFamily="34" charset="-120"/>
+                <a:latin typeface="Arial" panose="020B0604020202020204" pitchFamily="34" charset="0"/>
+                <a:ea typeface="Arial" panose="020B0604020202020204" pitchFamily="34" charset="-122"/>
+                <a:cs typeface="Arial" panose="020B0604020202020204" pitchFamily="34" charset="-120"/>
               </a:rPr>
               <a:t>传统研发与AI原生研发的本质差异</a:t>
             </a:r>
@@ -12438,7 +12165,6 @@
           <a:solidFill>
             <a:srgbClr val="4A90E2"/>
           </a:solidFill>
-          <a:ln/>
         </p:spPr>
       </p:sp>
       <p:sp>
@@ -12458,7 +12184,6 @@
           <a:solidFill>
             <a:srgbClr val="2C3E50"/>
           </a:solidFill>
-          <a:ln/>
         </p:spPr>
       </p:sp>
       <p:sp>
@@ -12476,13 +12201,12 @@
             <a:avLst/>
           </a:prstGeom>
           <a:noFill/>
-          <a:ln/>
-        </p:spPr>
-        <p:txBody>
-          <a:bodyPr wrap="square" rtlCol="0" anchor="ctr"/>
-          <a:lstStyle/>
-          <a:p>
-            <a:pPr algn="ctr" indent="0" marL="0">
+        </p:spPr>
+        <p:txBody>
+          <a:bodyPr wrap="square" rtlCol="0" anchor="ctr"/>
+          <a:lstStyle/>
+          <a:p>
+            <a:pPr marL="0" indent="0" algn="ctr">
               <a:buNone/>
             </a:pPr>
             <a:r>
@@ -12490,9 +12214,9 @@
                 <a:solidFill>
                   <a:srgbClr val="FFFFFF"/>
                 </a:solidFill>
-                <a:latin typeface="Arial" pitchFamily="34" charset="0"/>
-                <a:ea typeface="Arial" pitchFamily="34" charset="-122"/>
-                <a:cs typeface="Arial" pitchFamily="34" charset="-120"/>
+                <a:latin typeface="Arial" panose="020B0604020202020204" pitchFamily="34" charset="0"/>
+                <a:ea typeface="Arial" panose="020B0604020202020204" pitchFamily="34" charset="-122"/>
+                <a:cs typeface="Arial" panose="020B0604020202020204" pitchFamily="34" charset="-120"/>
               </a:rPr>
               <a:t>维度</a:t>
             </a:r>
@@ -12517,7 +12241,6 @@
           <a:solidFill>
             <a:srgbClr val="95A5A6"/>
           </a:solidFill>
-          <a:ln/>
         </p:spPr>
       </p:sp>
       <p:sp>
@@ -12535,13 +12258,12 @@
             <a:avLst/>
           </a:prstGeom>
           <a:noFill/>
-          <a:ln/>
-        </p:spPr>
-        <p:txBody>
-          <a:bodyPr wrap="square" rtlCol="0" anchor="ctr"/>
-          <a:lstStyle/>
-          <a:p>
-            <a:pPr algn="ctr" indent="0" marL="0">
+        </p:spPr>
+        <p:txBody>
+          <a:bodyPr wrap="square" rtlCol="0" anchor="ctr"/>
+          <a:lstStyle/>
+          <a:p>
+            <a:pPr marL="0" indent="0" algn="ctr">
               <a:buNone/>
             </a:pPr>
             <a:r>
@@ -12549,9 +12271,9 @@
                 <a:solidFill>
                   <a:srgbClr val="FFFFFF"/>
                 </a:solidFill>
-                <a:latin typeface="Arial" pitchFamily="34" charset="0"/>
-                <a:ea typeface="Arial" pitchFamily="34" charset="-122"/>
-                <a:cs typeface="Arial" pitchFamily="34" charset="-120"/>
+                <a:latin typeface="Arial" panose="020B0604020202020204" pitchFamily="34" charset="0"/>
+                <a:ea typeface="Arial" panose="020B0604020202020204" pitchFamily="34" charset="-122"/>
+                <a:cs typeface="Arial" panose="020B0604020202020204" pitchFamily="34" charset="-120"/>
               </a:rPr>
               <a:t>传统研发</a:t>
             </a:r>
@@ -12576,7 +12298,6 @@
           <a:solidFill>
             <a:srgbClr val="4A90E2"/>
           </a:solidFill>
-          <a:ln/>
         </p:spPr>
       </p:sp>
       <p:sp>
@@ -12594,13 +12315,12 @@
             <a:avLst/>
           </a:prstGeom>
           <a:noFill/>
-          <a:ln/>
-        </p:spPr>
-        <p:txBody>
-          <a:bodyPr wrap="square" rtlCol="0" anchor="ctr"/>
-          <a:lstStyle/>
-          <a:p>
-            <a:pPr algn="ctr" indent="0" marL="0">
+        </p:spPr>
+        <p:txBody>
+          <a:bodyPr wrap="square" rtlCol="0" anchor="ctr"/>
+          <a:lstStyle/>
+          <a:p>
+            <a:pPr marL="0" indent="0" algn="ctr">
               <a:buNone/>
             </a:pPr>
             <a:r>
@@ -12608,9 +12328,9 @@
                 <a:solidFill>
                   <a:srgbClr val="FFFFFF"/>
                 </a:solidFill>
-                <a:latin typeface="Arial" pitchFamily="34" charset="0"/>
-                <a:ea typeface="Arial" pitchFamily="34" charset="-122"/>
-                <a:cs typeface="Arial" pitchFamily="34" charset="-120"/>
+                <a:latin typeface="Arial" panose="020B0604020202020204" pitchFamily="34" charset="0"/>
+                <a:ea typeface="Arial" panose="020B0604020202020204" pitchFamily="34" charset="-122"/>
+                <a:cs typeface="Arial" panose="020B0604020202020204" pitchFamily="34" charset="-120"/>
               </a:rPr>
               <a:t>AI原生研发</a:t>
             </a:r>
@@ -12658,13 +12378,12 @@
             <a:avLst/>
           </a:prstGeom>
           <a:noFill/>
-          <a:ln/>
-        </p:spPr>
-        <p:txBody>
-          <a:bodyPr wrap="square" rtlCol="0" anchor="ctr"/>
-          <a:lstStyle/>
-          <a:p>
-            <a:pPr algn="ctr" indent="0" marL="0">
+        </p:spPr>
+        <p:txBody>
+          <a:bodyPr wrap="square" rtlCol="0" anchor="ctr"/>
+          <a:lstStyle/>
+          <a:p>
+            <a:pPr marL="0" indent="0" algn="ctr">
               <a:buNone/>
             </a:pPr>
             <a:r>
@@ -12672,9 +12391,9 @@
                 <a:solidFill>
                   <a:srgbClr val="2C3E50"/>
                 </a:solidFill>
-                <a:latin typeface="Arial" pitchFamily="34" charset="0"/>
-                <a:ea typeface="Arial" pitchFamily="34" charset="-122"/>
-                <a:cs typeface="Arial" pitchFamily="34" charset="-120"/>
+                <a:latin typeface="Arial" panose="020B0604020202020204" pitchFamily="34" charset="0"/>
+                <a:ea typeface="Arial" panose="020B0604020202020204" pitchFamily="34" charset="-122"/>
+                <a:cs typeface="Arial" panose="020B0604020202020204" pitchFamily="34" charset="-120"/>
               </a:rPr>
               <a:t>核心产物</a:t>
             </a:r>
@@ -12722,13 +12441,12 @@
             <a:avLst/>
           </a:prstGeom>
           <a:noFill/>
-          <a:ln/>
-        </p:spPr>
-        <p:txBody>
-          <a:bodyPr wrap="square" rtlCol="0" anchor="ctr"/>
-          <a:lstStyle/>
-          <a:p>
-            <a:pPr algn="ctr" indent="0" marL="0">
+        </p:spPr>
+        <p:txBody>
+          <a:bodyPr wrap="square" rtlCol="0" anchor="ctr"/>
+          <a:lstStyle/>
+          <a:p>
+            <a:pPr marL="0" indent="0" algn="ctr">
               <a:buNone/>
             </a:pPr>
             <a:r>
@@ -12736,9 +12454,9 @@
                 <a:solidFill>
                   <a:srgbClr val="34495E"/>
                 </a:solidFill>
-                <a:latin typeface="Arial" pitchFamily="34" charset="0"/>
-                <a:ea typeface="Arial" pitchFamily="34" charset="-122"/>
-                <a:cs typeface="Arial" pitchFamily="34" charset="-120"/>
+                <a:latin typeface="Arial" panose="020B0604020202020204" pitchFamily="34" charset="0"/>
+                <a:ea typeface="Arial" panose="020B0604020202020204" pitchFamily="34" charset="-122"/>
+                <a:cs typeface="Arial" panose="020B0604020202020204" pitchFamily="34" charset="-120"/>
               </a:rPr>
               <a:t>代码</a:t>
             </a:r>
@@ -12786,13 +12504,12 @@
             <a:avLst/>
           </a:prstGeom>
           <a:noFill/>
-          <a:ln/>
-        </p:spPr>
-        <p:txBody>
-          <a:bodyPr wrap="square" rtlCol="0" anchor="ctr"/>
-          <a:lstStyle/>
-          <a:p>
-            <a:pPr algn="ctr" indent="0" marL="0">
+        </p:spPr>
+        <p:txBody>
+          <a:bodyPr wrap="square" rtlCol="0" anchor="ctr"/>
+          <a:lstStyle/>
+          <a:p>
+            <a:pPr marL="0" indent="0" algn="ctr">
               <a:buNone/>
             </a:pPr>
             <a:r>
@@ -12800,9 +12517,9 @@
                 <a:solidFill>
                   <a:srgbClr val="34495E"/>
                 </a:solidFill>
-                <a:latin typeface="Arial" pitchFamily="34" charset="0"/>
-                <a:ea typeface="Arial" pitchFamily="34" charset="-122"/>
-                <a:cs typeface="Arial" pitchFamily="34" charset="-120"/>
+                <a:latin typeface="Arial" panose="020B0604020202020204" pitchFamily="34" charset="0"/>
+                <a:ea typeface="Arial" panose="020B0604020202020204" pitchFamily="34" charset="-122"/>
+                <a:cs typeface="Arial" panose="020B0604020202020204" pitchFamily="34" charset="-120"/>
               </a:rPr>
               <a:t>文档（代码是编译结果）</a:t>
             </a:r>
@@ -12850,13 +12567,12 @@
             <a:avLst/>
           </a:prstGeom>
           <a:noFill/>
-          <a:ln/>
-        </p:spPr>
-        <p:txBody>
-          <a:bodyPr wrap="square" rtlCol="0" anchor="ctr"/>
-          <a:lstStyle/>
-          <a:p>
-            <a:pPr algn="ctr" indent="0" marL="0">
+        </p:spPr>
+        <p:txBody>
+          <a:bodyPr wrap="square" rtlCol="0" anchor="ctr"/>
+          <a:lstStyle/>
+          <a:p>
+            <a:pPr marL="0" indent="0" algn="ctr">
               <a:buNone/>
             </a:pPr>
             <a:r>
@@ -12864,9 +12580,9 @@
                 <a:solidFill>
                   <a:srgbClr val="2C3E50"/>
                 </a:solidFill>
-                <a:latin typeface="Arial" pitchFamily="34" charset="0"/>
-                <a:ea typeface="Arial" pitchFamily="34" charset="-122"/>
-                <a:cs typeface="Arial" pitchFamily="34" charset="-120"/>
+                <a:latin typeface="Arial" panose="020B0604020202020204" pitchFamily="34" charset="0"/>
+                <a:ea typeface="Arial" panose="020B0604020202020204" pitchFamily="34" charset="-122"/>
+                <a:cs typeface="Arial" panose="020B0604020202020204" pitchFamily="34" charset="-120"/>
               </a:rPr>
               <a:t>人的角色</a:t>
             </a:r>
@@ -12914,13 +12630,12 @@
             <a:avLst/>
           </a:prstGeom>
           <a:noFill/>
-          <a:ln/>
-        </p:spPr>
-        <p:txBody>
-          <a:bodyPr wrap="square" rtlCol="0" anchor="ctr"/>
-          <a:lstStyle/>
-          <a:p>
-            <a:pPr algn="ctr" indent="0" marL="0">
+        </p:spPr>
+        <p:txBody>
+          <a:bodyPr wrap="square" rtlCol="0" anchor="ctr"/>
+          <a:lstStyle/>
+          <a:p>
+            <a:pPr marL="0" indent="0" algn="ctr">
               <a:buNone/>
             </a:pPr>
             <a:r>
@@ -12928,9 +12643,9 @@
                 <a:solidFill>
                   <a:srgbClr val="34495E"/>
                 </a:solidFill>
-                <a:latin typeface="Arial" pitchFamily="34" charset="0"/>
-                <a:ea typeface="Arial" pitchFamily="34" charset="-122"/>
-                <a:cs typeface="Arial" pitchFamily="34" charset="-120"/>
+                <a:latin typeface="Arial" panose="020B0604020202020204" pitchFamily="34" charset="0"/>
+                <a:ea typeface="Arial" panose="020B0604020202020204" pitchFamily="34" charset="-122"/>
+                <a:cs typeface="Arial" panose="020B0604020202020204" pitchFamily="34" charset="-120"/>
               </a:rPr>
               <a:t>编码者</a:t>
             </a:r>
@@ -12978,13 +12693,12 @@
             <a:avLst/>
           </a:prstGeom>
           <a:noFill/>
-          <a:ln/>
-        </p:spPr>
-        <p:txBody>
-          <a:bodyPr wrap="square" rtlCol="0" anchor="ctr"/>
-          <a:lstStyle/>
-          <a:p>
-            <a:pPr algn="ctr" indent="0" marL="0">
+        </p:spPr>
+        <p:txBody>
+          <a:bodyPr wrap="square" rtlCol="0" anchor="ctr"/>
+          <a:lstStyle/>
+          <a:p>
+            <a:pPr marL="0" indent="0" algn="ctr">
               <a:buNone/>
             </a:pPr>
             <a:r>
@@ -12992,9 +12706,9 @@
                 <a:solidFill>
                   <a:srgbClr val="34495E"/>
                 </a:solidFill>
-                <a:latin typeface="Arial" pitchFamily="34" charset="0"/>
-                <a:ea typeface="Arial" pitchFamily="34" charset="-122"/>
-                <a:cs typeface="Arial" pitchFamily="34" charset="-120"/>
+                <a:latin typeface="Arial" panose="020B0604020202020204" pitchFamily="34" charset="0"/>
+                <a:ea typeface="Arial" panose="020B0604020202020204" pitchFamily="34" charset="-122"/>
+                <a:cs typeface="Arial" panose="020B0604020202020204" pitchFamily="34" charset="-120"/>
               </a:rPr>
               <a:t>规格工程师</a:t>
             </a:r>
@@ -13042,13 +12756,12 @@
             <a:avLst/>
           </a:prstGeom>
           <a:noFill/>
-          <a:ln/>
-        </p:spPr>
-        <p:txBody>
-          <a:bodyPr wrap="square" rtlCol="0" anchor="ctr"/>
-          <a:lstStyle/>
-          <a:p>
-            <a:pPr algn="ctr" indent="0" marL="0">
+        </p:spPr>
+        <p:txBody>
+          <a:bodyPr wrap="square" rtlCol="0" anchor="ctr"/>
+          <a:lstStyle/>
+          <a:p>
+            <a:pPr marL="0" indent="0" algn="ctr">
               <a:buNone/>
             </a:pPr>
             <a:r>
@@ -13056,9 +12769,9 @@
                 <a:solidFill>
                   <a:srgbClr val="2C3E50"/>
                 </a:solidFill>
-                <a:latin typeface="Arial" pitchFamily="34" charset="0"/>
-                <a:ea typeface="Arial" pitchFamily="34" charset="-122"/>
-                <a:cs typeface="Arial" pitchFamily="34" charset="-120"/>
+                <a:latin typeface="Arial" panose="020B0604020202020204" pitchFamily="34" charset="0"/>
+                <a:ea typeface="Arial" panose="020B0604020202020204" pitchFamily="34" charset="-122"/>
+                <a:cs typeface="Arial" panose="020B0604020202020204" pitchFamily="34" charset="-120"/>
               </a:rPr>
               <a:t>Debug对象</a:t>
             </a:r>
@@ -13106,13 +12819,12 @@
             <a:avLst/>
           </a:prstGeom>
           <a:noFill/>
-          <a:ln/>
-        </p:spPr>
-        <p:txBody>
-          <a:bodyPr wrap="square" rtlCol="0" anchor="ctr"/>
-          <a:lstStyle/>
-          <a:p>
-            <a:pPr algn="ctr" indent="0" marL="0">
+        </p:spPr>
+        <p:txBody>
+          <a:bodyPr wrap="square" rtlCol="0" anchor="ctr"/>
+          <a:lstStyle/>
+          <a:p>
+            <a:pPr marL="0" indent="0" algn="ctr">
               <a:buNone/>
             </a:pPr>
             <a:r>
@@ -13120,9 +12832,9 @@
                 <a:solidFill>
                   <a:srgbClr val="34495E"/>
                 </a:solidFill>
-                <a:latin typeface="Arial" pitchFamily="34" charset="0"/>
-                <a:ea typeface="Arial" pitchFamily="34" charset="-122"/>
-                <a:cs typeface="Arial" pitchFamily="34" charset="-120"/>
+                <a:latin typeface="Arial" panose="020B0604020202020204" pitchFamily="34" charset="0"/>
+                <a:ea typeface="Arial" panose="020B0604020202020204" pitchFamily="34" charset="-122"/>
+                <a:cs typeface="Arial" panose="020B0604020202020204" pitchFamily="34" charset="-120"/>
               </a:rPr>
               <a:t>语法错误 / 逻辑BUG</a:t>
             </a:r>
@@ -13170,13 +12882,12 @@
             <a:avLst/>
           </a:prstGeom>
           <a:noFill/>
-          <a:ln/>
-        </p:spPr>
-        <p:txBody>
-          <a:bodyPr wrap="square" rtlCol="0" anchor="ctr"/>
-          <a:lstStyle/>
-          <a:p>
-            <a:pPr algn="ctr" indent="0" marL="0">
+        </p:spPr>
+        <p:txBody>
+          <a:bodyPr wrap="square" rtlCol="0" anchor="ctr"/>
+          <a:lstStyle/>
+          <a:p>
+            <a:pPr marL="0" indent="0" algn="ctr">
               <a:buNone/>
             </a:pPr>
             <a:r>
@@ -13184,9 +12895,9 @@
                 <a:solidFill>
                   <a:srgbClr val="34495E"/>
                 </a:solidFill>
-                <a:latin typeface="Arial" pitchFamily="34" charset="0"/>
-                <a:ea typeface="Arial" pitchFamily="34" charset="-122"/>
-                <a:cs typeface="Arial" pitchFamily="34" charset="-120"/>
+                <a:latin typeface="Arial" panose="020B0604020202020204" pitchFamily="34" charset="0"/>
+                <a:ea typeface="Arial" panose="020B0604020202020204" pitchFamily="34" charset="-122"/>
+                <a:cs typeface="Arial" panose="020B0604020202020204" pitchFamily="34" charset="-120"/>
               </a:rPr>
               <a:t>语义歧义 / AI理解偏差</a:t>
             </a:r>
@@ -13234,13 +12945,12 @@
             <a:avLst/>
           </a:prstGeom>
           <a:noFill/>
-          <a:ln/>
-        </p:spPr>
-        <p:txBody>
-          <a:bodyPr wrap="square" rtlCol="0" anchor="ctr"/>
-          <a:lstStyle/>
-          <a:p>
-            <a:pPr algn="ctr" indent="0" marL="0">
+        </p:spPr>
+        <p:txBody>
+          <a:bodyPr wrap="square" rtlCol="0" anchor="ctr"/>
+          <a:lstStyle/>
+          <a:p>
+            <a:pPr marL="0" indent="0" algn="ctr">
               <a:buNone/>
             </a:pPr>
             <a:r>
@@ -13248,9 +12958,9 @@
                 <a:solidFill>
                   <a:srgbClr val="2C3E50"/>
                 </a:solidFill>
-                <a:latin typeface="Arial" pitchFamily="34" charset="0"/>
-                <a:ea typeface="Arial" pitchFamily="34" charset="-122"/>
-                <a:cs typeface="Arial" pitchFamily="34" charset="-120"/>
+                <a:latin typeface="Arial" panose="020B0604020202020204" pitchFamily="34" charset="0"/>
+                <a:ea typeface="Arial" panose="020B0604020202020204" pitchFamily="34" charset="-122"/>
+                <a:cs typeface="Arial" panose="020B0604020202020204" pitchFamily="34" charset="-120"/>
               </a:rPr>
               <a:t>变更方式</a:t>
             </a:r>
@@ -13298,13 +13008,12 @@
             <a:avLst/>
           </a:prstGeom>
           <a:noFill/>
-          <a:ln/>
-        </p:spPr>
-        <p:txBody>
-          <a:bodyPr wrap="square" rtlCol="0" anchor="ctr"/>
-          <a:lstStyle/>
-          <a:p>
-            <a:pPr algn="ctr" indent="0" marL="0">
+        </p:spPr>
+        <p:txBody>
+          <a:bodyPr wrap="square" rtlCol="0" anchor="ctr"/>
+          <a:lstStyle/>
+          <a:p>
+            <a:pPr marL="0" indent="0" algn="ctr">
               <a:buNone/>
             </a:pPr>
             <a:r>
@@ -13312,9 +13021,9 @@
                 <a:solidFill>
                   <a:srgbClr val="34495E"/>
                 </a:solidFill>
-                <a:latin typeface="Arial" pitchFamily="34" charset="0"/>
-                <a:ea typeface="Arial" pitchFamily="34" charset="-122"/>
-                <a:cs typeface="Arial" pitchFamily="34" charset="-120"/>
+                <a:latin typeface="Arial" panose="020B0604020202020204" pitchFamily="34" charset="0"/>
+                <a:ea typeface="Arial" panose="020B0604020202020204" pitchFamily="34" charset="-122"/>
+                <a:cs typeface="Arial" panose="020B0604020202020204" pitchFamily="34" charset="-120"/>
               </a:rPr>
               <a:t>改代码 → 补文档</a:t>
             </a:r>
@@ -13362,13 +13071,12 @@
             <a:avLst/>
           </a:prstGeom>
           <a:noFill/>
-          <a:ln/>
-        </p:spPr>
-        <p:txBody>
-          <a:bodyPr wrap="square" rtlCol="0" anchor="ctr"/>
-          <a:lstStyle/>
-          <a:p>
-            <a:pPr algn="ctr" indent="0" marL="0">
+        </p:spPr>
+        <p:txBody>
+          <a:bodyPr wrap="square" rtlCol="0" anchor="ctr"/>
+          <a:lstStyle/>
+          <a:p>
+            <a:pPr marL="0" indent="0" algn="ctr">
               <a:buNone/>
             </a:pPr>
             <a:r>
@@ -13376,9 +13084,9 @@
                 <a:solidFill>
                   <a:srgbClr val="34495E"/>
                 </a:solidFill>
-                <a:latin typeface="Arial" pitchFamily="34" charset="0"/>
-                <a:ea typeface="Arial" pitchFamily="34" charset="-122"/>
-                <a:cs typeface="Arial" pitchFamily="34" charset="-120"/>
+                <a:latin typeface="Arial" panose="020B0604020202020204" pitchFamily="34" charset="0"/>
+                <a:ea typeface="Arial" panose="020B0604020202020204" pitchFamily="34" charset="-122"/>
+                <a:cs typeface="Arial" panose="020B0604020202020204" pitchFamily="34" charset="-120"/>
               </a:rPr>
               <a:t>改文档 → 再生代码</a:t>
             </a:r>
@@ -13426,13 +13134,12 @@
             <a:avLst/>
           </a:prstGeom>
           <a:noFill/>
-          <a:ln/>
-        </p:spPr>
-        <p:txBody>
-          <a:bodyPr wrap="square" rtlCol="0" anchor="ctr"/>
-          <a:lstStyle/>
-          <a:p>
-            <a:pPr algn="ctr" indent="0" marL="0">
+        </p:spPr>
+        <p:txBody>
+          <a:bodyPr wrap="square" rtlCol="0" anchor="ctr"/>
+          <a:lstStyle/>
+          <a:p>
+            <a:pPr marL="0" indent="0" algn="ctr">
               <a:buNone/>
             </a:pPr>
             <a:r>
@@ -13440,9 +13147,9 @@
                 <a:solidFill>
                   <a:srgbClr val="2C3E50"/>
                 </a:solidFill>
-                <a:latin typeface="Arial" pitchFamily="34" charset="0"/>
-                <a:ea typeface="Arial" pitchFamily="34" charset="-122"/>
-                <a:cs typeface="Arial" pitchFamily="34" charset="-120"/>
+                <a:latin typeface="Arial" panose="020B0604020202020204" pitchFamily="34" charset="0"/>
+                <a:ea typeface="Arial" panose="020B0604020202020204" pitchFamily="34" charset="-122"/>
+                <a:cs typeface="Arial" panose="020B0604020202020204" pitchFamily="34" charset="-120"/>
               </a:rPr>
               <a:t>执行风险</a:t>
             </a:r>
@@ -13490,13 +13197,12 @@
             <a:avLst/>
           </a:prstGeom>
           <a:noFill/>
-          <a:ln/>
-        </p:spPr>
-        <p:txBody>
-          <a:bodyPr wrap="square" rtlCol="0" anchor="ctr"/>
-          <a:lstStyle/>
-          <a:p>
-            <a:pPr algn="ctr" indent="0" marL="0">
+        </p:spPr>
+        <p:txBody>
+          <a:bodyPr wrap="square" rtlCol="0" anchor="ctr"/>
+          <a:lstStyle/>
+          <a:p>
+            <a:pPr marL="0" indent="0" algn="ctr">
               <a:buNone/>
             </a:pPr>
             <a:r>
@@ -13504,9 +13210,9 @@
                 <a:solidFill>
                   <a:srgbClr val="E74C3C"/>
                 </a:solidFill>
-                <a:latin typeface="Arial" pitchFamily="34" charset="0"/>
-                <a:ea typeface="Arial" pitchFamily="34" charset="-122"/>
-                <a:cs typeface="Arial" pitchFamily="34" charset="-120"/>
+                <a:latin typeface="Arial" panose="020B0604020202020204" pitchFamily="34" charset="0"/>
+                <a:ea typeface="Arial" panose="020B0604020202020204" pitchFamily="34" charset="-122"/>
+                <a:cs typeface="Arial" panose="020B0604020202020204" pitchFamily="34" charset="-120"/>
               </a:rPr>
               <a:t>高（能不能跑通）</a:t>
             </a:r>
@@ -13554,13 +13260,12 @@
             <a:avLst/>
           </a:prstGeom>
           <a:noFill/>
-          <a:ln/>
-        </p:spPr>
-        <p:txBody>
-          <a:bodyPr wrap="square" rtlCol="0" anchor="ctr"/>
-          <a:lstStyle/>
-          <a:p>
-            <a:pPr algn="ctr" indent="0" marL="0">
+        </p:spPr>
+        <p:txBody>
+          <a:bodyPr wrap="square" rtlCol="0" anchor="ctr"/>
+          <a:lstStyle/>
+          <a:p>
+            <a:pPr marL="0" indent="0" algn="ctr">
               <a:buNone/>
             </a:pPr>
             <a:r>
@@ -13568,9 +13273,9 @@
                 <a:solidFill>
                   <a:srgbClr val="E67E22"/>
                 </a:solidFill>
-                <a:latin typeface="Arial" pitchFamily="34" charset="0"/>
-                <a:ea typeface="Arial" pitchFamily="34" charset="-122"/>
-                <a:cs typeface="Arial" pitchFamily="34" charset="-120"/>
+                <a:latin typeface="Arial" panose="020B0604020202020204" pitchFamily="34" charset="0"/>
+                <a:ea typeface="Arial" panose="020B0604020202020204" pitchFamily="34" charset="-122"/>
+                <a:cs typeface="Arial" panose="020B0604020202020204" pitchFamily="34" charset="-120"/>
               </a:rPr>
               <a:t>低（AI写的语法一定对）</a:t>
             </a:r>
@@ -13618,13 +13323,12 @@
             <a:avLst/>
           </a:prstGeom>
           <a:noFill/>
-          <a:ln/>
-        </p:spPr>
-        <p:txBody>
-          <a:bodyPr wrap="square" rtlCol="0" anchor="ctr"/>
-          <a:lstStyle/>
-          <a:p>
-            <a:pPr algn="ctr" indent="0" marL="0">
+        </p:spPr>
+        <p:txBody>
+          <a:bodyPr wrap="square" rtlCol="0" anchor="ctr"/>
+          <a:lstStyle/>
+          <a:p>
+            <a:pPr marL="0" indent="0" algn="ctr">
               <a:buNone/>
             </a:pPr>
             <a:r>
@@ -13632,9 +13336,9 @@
                 <a:solidFill>
                   <a:srgbClr val="2C3E50"/>
                 </a:solidFill>
-                <a:latin typeface="Arial" pitchFamily="34" charset="0"/>
-                <a:ea typeface="Arial" pitchFamily="34" charset="-122"/>
-                <a:cs typeface="Arial" pitchFamily="34" charset="-120"/>
+                <a:latin typeface="Arial" panose="020B0604020202020204" pitchFamily="34" charset="0"/>
+                <a:ea typeface="Arial" panose="020B0604020202020204" pitchFamily="34" charset="-122"/>
+                <a:cs typeface="Arial" panose="020B0604020202020204" pitchFamily="34" charset="-120"/>
               </a:rPr>
               <a:t>设计风险</a:t>
             </a:r>
@@ -13682,13 +13386,12 @@
             <a:avLst/>
           </a:prstGeom>
           <a:noFill/>
-          <a:ln/>
-        </p:spPr>
-        <p:txBody>
-          <a:bodyPr wrap="square" rtlCol="0" anchor="ctr"/>
-          <a:lstStyle/>
-          <a:p>
-            <a:pPr algn="ctr" indent="0" marL="0">
+        </p:spPr>
+        <p:txBody>
+          <a:bodyPr wrap="square" rtlCol="0" anchor="ctr"/>
+          <a:lstStyle/>
+          <a:p>
+            <a:pPr marL="0" indent="0" algn="ctr">
               <a:buNone/>
             </a:pPr>
             <a:r>
@@ -13696,9 +13399,9 @@
                 <a:solidFill>
                   <a:srgbClr val="E74C3C"/>
                 </a:solidFill>
-                <a:latin typeface="Arial" pitchFamily="34" charset="0"/>
-                <a:ea typeface="Arial" pitchFamily="34" charset="-122"/>
-                <a:cs typeface="Arial" pitchFamily="34" charset="-120"/>
+                <a:latin typeface="Arial" panose="020B0604020202020204" pitchFamily="34" charset="0"/>
+                <a:ea typeface="Arial" panose="020B0604020202020204" pitchFamily="34" charset="-122"/>
+                <a:cs typeface="Arial" panose="020B0604020202020204" pitchFamily="34" charset="-120"/>
               </a:rPr>
               <a:t>低（要做什么很清楚）</a:t>
             </a:r>
@@ -13746,13 +13449,12 @@
             <a:avLst/>
           </a:prstGeom>
           <a:noFill/>
-          <a:ln/>
-        </p:spPr>
-        <p:txBody>
-          <a:bodyPr wrap="square" rtlCol="0" anchor="ctr"/>
-          <a:lstStyle/>
-          <a:p>
-            <a:pPr algn="ctr" indent="0" marL="0">
+        </p:spPr>
+        <p:txBody>
+          <a:bodyPr wrap="square" rtlCol="0" anchor="ctr"/>
+          <a:lstStyle/>
+          <a:p>
+            <a:pPr marL="0" indent="0" algn="ctr">
               <a:buNone/>
             </a:pPr>
             <a:r>
@@ -13760,9 +13462,9 @@
                 <a:solidFill>
                   <a:srgbClr val="E67E22"/>
                 </a:solidFill>
-                <a:latin typeface="Arial" pitchFamily="34" charset="0"/>
-                <a:ea typeface="Arial" pitchFamily="34" charset="-122"/>
-                <a:cs typeface="Arial" pitchFamily="34" charset="-120"/>
+                <a:latin typeface="Arial" panose="020B0604020202020204" pitchFamily="34" charset="0"/>
+                <a:ea typeface="Arial" panose="020B0604020202020204" pitchFamily="34" charset="-122"/>
+                <a:cs typeface="Arial" panose="020B0604020202020204" pitchFamily="34" charset="-120"/>
               </a:rPr>
               <a:t>高（最难是精确告诉AI）</a:t>
             </a:r>
@@ -13787,7 +13489,6 @@
           <a:solidFill>
             <a:srgbClr val="D5D8DC"/>
           </a:solidFill>
-          <a:ln/>
         </p:spPr>
       </p:sp>
       <p:sp>
@@ -13805,13 +13506,12 @@
             <a:avLst/>
           </a:prstGeom>
           <a:noFill/>
-          <a:ln/>
-        </p:spPr>
-        <p:txBody>
-          <a:bodyPr wrap="square" rtlCol="0" anchor="ctr"/>
-          <a:lstStyle/>
-          <a:p>
-            <a:pPr algn="ctr" indent="0" marL="0">
+        </p:spPr>
+        <p:txBody>
+          <a:bodyPr wrap="square" rtlCol="0" anchor="ctr"/>
+          <a:lstStyle/>
+          <a:p>
+            <a:pPr marL="0" indent="0" algn="ctr">
               <a:buNone/>
             </a:pPr>
             <a:r>
@@ -13819,9 +13519,9 @@
                 <a:solidFill>
                   <a:srgbClr val="1A5276"/>
                 </a:solidFill>
-                <a:latin typeface="Arial" pitchFamily="34" charset="0"/>
-                <a:ea typeface="Arial" pitchFamily="34" charset="-122"/>
-                <a:cs typeface="Arial" pitchFamily="34" charset="-120"/>
+                <a:latin typeface="Arial" panose="020B0604020202020204" pitchFamily="34" charset="0"/>
+                <a:ea typeface="Arial" panose="020B0604020202020204" pitchFamily="34" charset="-122"/>
+                <a:cs typeface="Arial" panose="020B0604020202020204" pitchFamily="34" charset="-120"/>
               </a:rPr>
               <a:t>实证数据：AI代码生成率~90% · 7份专业文档全流程驱动 · 3个MCP-Skill覆盖核心场景——从“让AI写代码”到“让AI理解业务”，人的价值从编码速度转变为规格表达能力。</a:t>
             </a:r>
@@ -13844,13 +13544,12 @@
             <a:avLst/>
           </a:prstGeom>
           <a:noFill/>
-          <a:ln/>
-        </p:spPr>
-        <p:txBody>
-          <a:bodyPr wrap="square" rtlCol="0" anchor="ctr"/>
-          <a:lstStyle/>
-          <a:p>
-            <a:pPr algn="r" indent="0" marL="0">
+        </p:spPr>
+        <p:txBody>
+          <a:bodyPr wrap="square" rtlCol="0" anchor="ctr"/>
+          <a:lstStyle/>
+          <a:p>
+            <a:pPr marL="0" indent="0" algn="r">
               <a:buNone/>
             </a:pPr>
             <a:r>
@@ -13858,9 +13557,9 @@
                 <a:solidFill>
                   <a:srgbClr val="7F8C8D"/>
                 </a:solidFill>
-                <a:latin typeface="Arial" pitchFamily="34" charset="0"/>
-                <a:ea typeface="Arial" pitchFamily="34" charset="-122"/>
-                <a:cs typeface="Arial" pitchFamily="34" charset="-120"/>
+                <a:latin typeface="Arial" panose="020B0604020202020204" pitchFamily="34" charset="0"/>
+                <a:ea typeface="Arial" panose="020B0604020202020204" pitchFamily="34" charset="-122"/>
+                <a:cs typeface="Arial" panose="020B0604020202020204" pitchFamily="34" charset="-120"/>
               </a:rPr>
               <a:t>▸ 接下来：支撑这套方法的技术架构</a:t>
             </a:r>
@@ -13883,13 +13582,12 @@
             <a:avLst/>
           </a:prstGeom>
           <a:noFill/>
-          <a:ln/>
-        </p:spPr>
-        <p:txBody>
-          <a:bodyPr wrap="square" rtlCol="0" anchor="ctr"/>
-          <a:lstStyle/>
-          <a:p>
-            <a:pPr algn="l" indent="0" marL="0">
+        </p:spPr>
+        <p:txBody>
+          <a:bodyPr wrap="square" rtlCol="0" anchor="ctr"/>
+          <a:lstStyle/>
+          <a:p>
+            <a:pPr marL="0" indent="0" algn="l">
               <a:buNone/>
             </a:pPr>
             <a:r>
@@ -13897,9 +13595,9 @@
                 <a:solidFill>
                   <a:srgbClr val="4A90E2"/>
                 </a:solidFill>
-                <a:latin typeface="Arial" pitchFamily="34" charset="0"/>
-                <a:ea typeface="Arial" pitchFamily="34" charset="-122"/>
-                <a:cs typeface="Arial" pitchFamily="34" charset="-120"/>
+                <a:latin typeface="Arial" panose="020B0604020202020204" pitchFamily="34" charset="0"/>
+                <a:ea typeface="Arial" panose="020B0604020202020204" pitchFamily="34" charset="-122"/>
+                <a:cs typeface="Arial" panose="020B0604020202020204" pitchFamily="34" charset="-120"/>
               </a:rPr>
               <a:t>→</a:t>
             </a:r>
@@ -13917,12 +13615,13 @@
 
 <file path=ppt/slides/slide9.xml><?xml version="1.0" encoding="utf-8"?>
 <p:sld xmlns:a="http://schemas.openxmlformats.org/drawingml/2006/main" xmlns:r="http://schemas.openxmlformats.org/officeDocument/2006/relationships" xmlns:p="http://schemas.openxmlformats.org/presentationml/2006/main">
-  <p:cSld name="Slide 9">
+  <p:cSld>
     <p:bg>
       <p:bgPr>
         <a:solidFill>
           <a:srgbClr val="FFFFFF"/>
         </a:solidFill>
+        <a:effectLst/>
       </p:bgPr>
     </p:bg>
     <p:spTree>
@@ -13956,7 +13655,6 @@
           <a:solidFill>
             <a:srgbClr val="4A90E2"/>
           </a:solidFill>
-          <a:ln/>
         </p:spPr>
       </p:sp>
       <p:sp>
@@ -13974,13 +13672,12 @@
             <a:avLst/>
           </a:prstGeom>
           <a:noFill/>
-          <a:ln/>
-        </p:spPr>
-        <p:txBody>
-          <a:bodyPr wrap="square" rtlCol="0" anchor="ctr"/>
-          <a:lstStyle/>
-          <a:p>
-            <a:pPr indent="0" marL="0">
+        </p:spPr>
+        <p:txBody>
+          <a:bodyPr wrap="square" rtlCol="0" anchor="ctr"/>
+          <a:lstStyle/>
+          <a:p>
+            <a:pPr marL="0" indent="0">
               <a:buNone/>
             </a:pPr>
             <a:r>
@@ -13988,9 +13685,9 @@
                 <a:solidFill>
                   <a:srgbClr val="2C3E50"/>
                 </a:solidFill>
-                <a:latin typeface="Arial" pitchFamily="34" charset="0"/>
-                <a:ea typeface="Arial" pitchFamily="34" charset="-122"/>
-                <a:cs typeface="Arial" pitchFamily="34" charset="-120"/>
+                <a:latin typeface="Arial" panose="020B0604020202020204" pitchFamily="34" charset="0"/>
+                <a:ea typeface="Arial" panose="020B0604020202020204" pitchFamily="34" charset="-122"/>
+                <a:cs typeface="Arial" panose="020B0604020202020204" pitchFamily="34" charset="-120"/>
               </a:rPr>
               <a:t>技术框架</a:t>
             </a:r>
@@ -14013,13 +13710,12 @@
             <a:avLst/>
           </a:prstGeom>
           <a:noFill/>
-          <a:ln/>
-        </p:spPr>
-        <p:txBody>
-          <a:bodyPr wrap="square" rtlCol="0" anchor="ctr"/>
-          <a:lstStyle/>
-          <a:p>
-            <a:pPr algn="r" indent="0" marL="0">
+        </p:spPr>
+        <p:txBody>
+          <a:bodyPr wrap="square" rtlCol="0" anchor="ctr"/>
+          <a:lstStyle/>
+          <a:p>
+            <a:pPr marL="0" indent="0" algn="r">
               <a:buNone/>
             </a:pPr>
             <a:r>
@@ -14027,9 +13723,9 @@
                 <a:solidFill>
                   <a:srgbClr val="7F8C8D"/>
                 </a:solidFill>
-                <a:latin typeface="Arial" pitchFamily="34" charset="0"/>
-                <a:ea typeface="Arial" pitchFamily="34" charset="-122"/>
-                <a:cs typeface="Arial" pitchFamily="34" charset="-120"/>
+                <a:latin typeface="Arial" panose="020B0604020202020204" pitchFamily="34" charset="0"/>
+                <a:ea typeface="Arial" panose="020B0604020202020204" pitchFamily="34" charset="-122"/>
+                <a:cs typeface="Arial" panose="020B0604020202020204" pitchFamily="34" charset="-120"/>
               </a:rPr>
               <a:t>调教的技术基石</a:t>
             </a:r>
@@ -14054,7 +13750,6 @@
           <a:solidFill>
             <a:srgbClr val="4A90E2"/>
           </a:solidFill>
-          <a:ln/>
         </p:spPr>
       </p:sp>
       <p:sp>
@@ -14072,13 +13767,12 @@
             <a:avLst/>
           </a:prstGeom>
           <a:noFill/>
-          <a:ln/>
-        </p:spPr>
-        <p:txBody>
-          <a:bodyPr wrap="square" rtlCol="0" anchor="ctr"/>
-          <a:lstStyle/>
-          <a:p>
-            <a:pPr indent="0" marL="0">
+        </p:spPr>
+        <p:txBody>
+          <a:bodyPr wrap="square" rtlCol="0" anchor="ctr"/>
+          <a:lstStyle/>
+          <a:p>
+            <a:pPr marL="0" indent="0">
               <a:buNone/>
             </a:pPr>
             <a:r>
@@ -14086,9 +13780,9 @@
                 <a:solidFill>
                   <a:srgbClr val="2C3E50"/>
                 </a:solidFill>
-                <a:latin typeface="Arial" pitchFamily="34" charset="0"/>
-                <a:ea typeface="Arial" pitchFamily="34" charset="-122"/>
-                <a:cs typeface="Arial" pitchFamily="34" charset="-120"/>
+                <a:latin typeface="Arial" panose="020B0604020202020204" pitchFamily="34" charset="0"/>
+                <a:ea typeface="Arial" panose="020B0604020202020204" pitchFamily="34" charset="-122"/>
+                <a:cs typeface="Arial" panose="020B0604020202020204" pitchFamily="34" charset="-120"/>
               </a:rPr>
               <a:t>系统架构</a:t>
             </a:r>
@@ -14113,7 +13807,6 @@
           <a:solidFill>
             <a:srgbClr val="8E44AD"/>
           </a:solidFill>
-          <a:ln/>
         </p:spPr>
       </p:sp>
       <p:sp>
@@ -14131,13 +13824,12 @@
             <a:avLst/>
           </a:prstGeom>
           <a:noFill/>
-          <a:ln/>
-        </p:spPr>
-        <p:txBody>
-          <a:bodyPr wrap="square" rtlCol="0" anchor="ctr"/>
-          <a:lstStyle/>
-          <a:p>
-            <a:pPr indent="0" marL="0">
+        </p:spPr>
+        <p:txBody>
+          <a:bodyPr wrap="square" rtlCol="0" anchor="ctr"/>
+          <a:lstStyle/>
+          <a:p>
+            <a:pPr marL="0" indent="0">
               <a:buNone/>
             </a:pPr>
             <a:r>
@@ -14145,9 +13837,9 @@
                 <a:solidFill>
                   <a:srgbClr val="FFFFFF"/>
                 </a:solidFill>
-                <a:latin typeface="Arial" pitchFamily="34" charset="0"/>
-                <a:ea typeface="Arial" pitchFamily="34" charset="-122"/>
-                <a:cs typeface="Arial" pitchFamily="34" charset="-120"/>
+                <a:latin typeface="Arial" panose="020B0604020202020204" pitchFamily="34" charset="0"/>
+                <a:ea typeface="Arial" panose="020B0604020202020204" pitchFamily="34" charset="-122"/>
+                <a:cs typeface="Arial" panose="020B0604020202020204" pitchFamily="34" charset="-120"/>
               </a:rPr>
               <a:t>6 客户端</a:t>
             </a:r>
@@ -14170,13 +13862,12 @@
             <a:avLst/>
           </a:prstGeom>
           <a:noFill/>
-          <a:ln/>
-        </p:spPr>
-        <p:txBody>
-          <a:bodyPr wrap="square" rtlCol="0" anchor="ctr"/>
-          <a:lstStyle/>
-          <a:p>
-            <a:pPr indent="0" marL="0">
+        </p:spPr>
+        <p:txBody>
+          <a:bodyPr wrap="square" rtlCol="0" anchor="ctr"/>
+          <a:lstStyle/>
+          <a:p>
+            <a:pPr marL="0" indent="0">
               <a:buNone/>
             </a:pPr>
             <a:r>
@@ -14184,9 +13875,9 @@
                 <a:solidFill>
                   <a:srgbClr val="E8E8E8"/>
                 </a:solidFill>
-                <a:latin typeface="Arial" pitchFamily="34" charset="0"/>
-                <a:ea typeface="Arial" pitchFamily="34" charset="-122"/>
-                <a:cs typeface="Arial" pitchFamily="34" charset="-120"/>
+                <a:latin typeface="Arial" panose="020B0604020202020204" pitchFamily="34" charset="0"/>
+                <a:ea typeface="Arial" panose="020B0604020202020204" pitchFamily="34" charset="-122"/>
+                <a:cs typeface="Arial" panose="020B0604020202020204" pitchFamily="34" charset="-120"/>
               </a:rPr>
               <a:t>Vue 2 + Vant 2</a:t>
             </a:r>
@@ -14211,7 +13902,6 @@
           <a:solidFill>
             <a:srgbClr val="4A90E2"/>
           </a:solidFill>
-          <a:ln/>
         </p:spPr>
       </p:sp>
       <p:sp>
@@ -14229,13 +13919,12 @@
             <a:avLst/>
           </a:prstGeom>
           <a:noFill/>
-          <a:ln/>
-        </p:spPr>
-        <p:txBody>
-          <a:bodyPr wrap="square" rtlCol="0" anchor="ctr"/>
-          <a:lstStyle/>
-          <a:p>
-            <a:pPr indent="0" marL="0">
+        </p:spPr>
+        <p:txBody>
+          <a:bodyPr wrap="square" rtlCol="0" anchor="ctr"/>
+          <a:lstStyle/>
+          <a:p>
+            <a:pPr marL="0" indent="0">
               <a:buNone/>
             </a:pPr>
             <a:r>
@@ -14243,9 +13932,9 @@
                 <a:solidFill>
                   <a:srgbClr val="FFFFFF"/>
                 </a:solidFill>
-                <a:latin typeface="Arial" pitchFamily="34" charset="0"/>
-                <a:ea typeface="Arial" pitchFamily="34" charset="-122"/>
-                <a:cs typeface="Arial" pitchFamily="34" charset="-120"/>
+                <a:latin typeface="Arial" panose="020B0604020202020204" pitchFamily="34" charset="0"/>
+                <a:ea typeface="Arial" panose="020B0604020202020204" pitchFamily="34" charset="-122"/>
+                <a:cs typeface="Arial" panose="020B0604020202020204" pitchFamily="34" charset="-120"/>
               </a:rPr>
               <a:t>5 接入层</a:t>
             </a:r>
@@ -14268,13 +13957,12 @@
             <a:avLst/>
           </a:prstGeom>
           <a:noFill/>
-          <a:ln/>
-        </p:spPr>
-        <p:txBody>
-          <a:bodyPr wrap="square" rtlCol="0" anchor="ctr"/>
-          <a:lstStyle/>
-          <a:p>
-            <a:pPr indent="0" marL="0">
+        </p:spPr>
+        <p:txBody>
+          <a:bodyPr wrap="square" rtlCol="0" anchor="ctr"/>
+          <a:lstStyle/>
+          <a:p>
+            <a:pPr marL="0" indent="0">
               <a:buNone/>
             </a:pPr>
             <a:r>
@@ -14282,9 +13970,9 @@
                 <a:solidFill>
                   <a:srgbClr val="E8E8E8"/>
                 </a:solidFill>
-                <a:latin typeface="Arial" pitchFamily="34" charset="0"/>
-                <a:ea typeface="Arial" pitchFamily="34" charset="-122"/>
-                <a:cs typeface="Arial" pitchFamily="34" charset="-120"/>
+                <a:latin typeface="Arial" panose="020B0604020202020204" pitchFamily="34" charset="0"/>
+                <a:ea typeface="Arial" panose="020B0604020202020204" pitchFamily="34" charset="-122"/>
+                <a:cs typeface="Arial" panose="020B0604020202020204" pitchFamily="34" charset="-120"/>
               </a:rPr>
               <a:t>JWT统一校验</a:t>
             </a:r>
@@ -14309,7 +13997,6 @@
           <a:solidFill>
             <a:srgbClr val="E67E22"/>
           </a:solidFill>
-          <a:ln/>
         </p:spPr>
       </p:sp>
       <p:sp>
@@ -14327,13 +14014,12 @@
             <a:avLst/>
           </a:prstGeom>
           <a:noFill/>
-          <a:ln/>
-        </p:spPr>
-        <p:txBody>
-          <a:bodyPr wrap="square" rtlCol="0" anchor="ctr"/>
-          <a:lstStyle/>
-          <a:p>
-            <a:pPr indent="0" marL="0">
+        </p:spPr>
+        <p:txBody>
+          <a:bodyPr wrap="square" rtlCol="0" anchor="ctr"/>
+          <a:lstStyle/>
+          <a:p>
+            <a:pPr marL="0" indent="0">
               <a:buNone/>
             </a:pPr>
             <a:r>
@@ -14341,9 +14027,9 @@
                 <a:solidFill>
                   <a:srgbClr val="FFFFFF"/>
                 </a:solidFill>
-                <a:latin typeface="Arial" pitchFamily="34" charset="0"/>
-                <a:ea typeface="Arial" pitchFamily="34" charset="-122"/>
-                <a:cs typeface="Arial" pitchFamily="34" charset="-120"/>
+                <a:latin typeface="Arial" panose="020B0604020202020204" pitchFamily="34" charset="0"/>
+                <a:ea typeface="Arial" panose="020B0604020202020204" pitchFamily="34" charset="-122"/>
+                <a:cs typeface="Arial" panose="020B0604020202020204" pitchFamily="34" charset="-120"/>
               </a:rPr>
               <a:t>4 意图推理层</a:t>
             </a:r>
@@ -14366,13 +14052,12 @@
             <a:avLst/>
           </a:prstGeom>
           <a:noFill/>
-          <a:ln/>
-        </p:spPr>
-        <p:txBody>
-          <a:bodyPr wrap="square" rtlCol="0" anchor="ctr"/>
-          <a:lstStyle/>
-          <a:p>
-            <a:pPr indent="0" marL="0">
+        </p:spPr>
+        <p:txBody>
+          <a:bodyPr wrap="square" rtlCol="0" anchor="ctr"/>
+          <a:lstStyle/>
+          <a:p>
+            <a:pPr marL="0" indent="0">
               <a:buNone/>
             </a:pPr>
             <a:r>
@@ -14380,9 +14065,9 @@
                 <a:solidFill>
                   <a:srgbClr val="E8E8E8"/>
                 </a:solidFill>
-                <a:latin typeface="Arial" pitchFamily="34" charset="0"/>
-                <a:ea typeface="Arial" pitchFamily="34" charset="-122"/>
-                <a:cs typeface="Arial" pitchFamily="34" charset="-120"/>
+                <a:latin typeface="Arial" panose="020B0604020202020204" pitchFamily="34" charset="0"/>
+                <a:ea typeface="Arial" panose="020B0604020202020204" pitchFamily="34" charset="-122"/>
+                <a:cs typeface="Arial" panose="020B0604020202020204" pitchFamily="34" charset="-120"/>
               </a:rPr>
               <a:t>MCP-Skill引擎※</a:t>
             </a:r>
@@ -14407,7 +14092,6 @@
           <a:solidFill>
             <a:srgbClr val="27AE60"/>
           </a:solidFill>
-          <a:ln/>
         </p:spPr>
       </p:sp>
       <p:sp>
@@ -14425,13 +14109,12 @@
             <a:avLst/>
           </a:prstGeom>
           <a:noFill/>
-          <a:ln/>
-        </p:spPr>
-        <p:txBody>
-          <a:bodyPr wrap="square" rtlCol="0" anchor="ctr"/>
-          <a:lstStyle/>
-          <a:p>
-            <a:pPr indent="0" marL="0">
+        </p:spPr>
+        <p:txBody>
+          <a:bodyPr wrap="square" rtlCol="0" anchor="ctr"/>
+          <a:lstStyle/>
+          <a:p>
+            <a:pPr marL="0" indent="0">
               <a:buNone/>
             </a:pPr>
             <a:r>
@@ -14439,9 +14122,9 @@
                 <a:solidFill>
                   <a:srgbClr val="FFFFFF"/>
                 </a:solidFill>
-                <a:latin typeface="Arial" pitchFamily="34" charset="0"/>
-                <a:ea typeface="Arial" pitchFamily="34" charset="-122"/>
-                <a:cs typeface="Arial" pitchFamily="34" charset="-120"/>
+                <a:latin typeface="Arial" panose="020B0604020202020204" pitchFamily="34" charset="0"/>
+                <a:ea typeface="Arial" panose="020B0604020202020204" pitchFamily="34" charset="-122"/>
+                <a:cs typeface="Arial" panose="020B0604020202020204" pitchFamily="34" charset="-120"/>
               </a:rPr>
               <a:t>3 业务服务层</a:t>
             </a:r>
@@ -14464,13 +14147,12 @@
             <a:avLst/>
           </a:prstGeom>
           <a:noFill/>
-          <a:ln/>
-        </p:spPr>
-        <p:txBody>
-          <a:bodyPr wrap="square" rtlCol="0" anchor="ctr"/>
-          <a:lstStyle/>
-          <a:p>
-            <a:pPr indent="0" marL="0">
+        </p:spPr>
+        <p:txBody>
+          <a:bodyPr wrap="square" rtlCol="0" anchor="ctr"/>
+          <a:lstStyle/>
+          <a:p>
+            <a:pPr marL="0" indent="0">
               <a:buNone/>
             </a:pPr>
             <a:r>
@@ -14478,9 +14160,9 @@
                 <a:solidFill>
                   <a:srgbClr val="E8E8E8"/>
                 </a:solidFill>
-                <a:latin typeface="Arial" pitchFamily="34" charset="0"/>
-                <a:ea typeface="Arial" pitchFamily="34" charset="-122"/>
-                <a:cs typeface="Arial" pitchFamily="34" charset="-120"/>
+                <a:latin typeface="Arial" panose="020B0604020202020204" pitchFamily="34" charset="0"/>
+                <a:ea typeface="Arial" panose="020B0604020202020204" pitchFamily="34" charset="-122"/>
+                <a:cs typeface="Arial" panose="020B0604020202020204" pitchFamily="34" charset="-120"/>
               </a:rPr>
               <a:t>6大核心Service</a:t>
             </a:r>
@@ -14505,7 +14187,6 @@
           <a:solidFill>
             <a:srgbClr val="1A5276"/>
           </a:solidFill>
-          <a:ln/>
         </p:spPr>
       </p:sp>
       <p:sp>
@@ -14523,13 +14204,12 @@
             <a:avLst/>
           </a:prstGeom>
           <a:noFill/>
-          <a:ln/>
-        </p:spPr>
-        <p:txBody>
-          <a:bodyPr wrap="square" rtlCol="0" anchor="ctr"/>
-          <a:lstStyle/>
-          <a:p>
-            <a:pPr indent="0" marL="0">
+        </p:spPr>
+        <p:txBody>
+          <a:bodyPr wrap="square" rtlCol="0" anchor="ctr"/>
+          <a:lstStyle/>
+          <a:p>
+            <a:pPr marL="0" indent="0">
               <a:buNone/>
             </a:pPr>
             <a:r>
@@ -14537,9 +14217,9 @@
                 <a:solidFill>
                   <a:srgbClr val="FFFFFF"/>
                 </a:solidFill>
-                <a:latin typeface="Arial" pitchFamily="34" charset="0"/>
-                <a:ea typeface="Arial" pitchFamily="34" charset="-122"/>
-                <a:cs typeface="Arial" pitchFamily="34" charset="-120"/>
+                <a:latin typeface="Arial" panose="020B0604020202020204" pitchFamily="34" charset="0"/>
+                <a:ea typeface="Arial" panose="020B0604020202020204" pitchFamily="34" charset="-122"/>
+                <a:cs typeface="Arial" panose="020B0604020202020204" pitchFamily="34" charset="-120"/>
               </a:rPr>
               <a:t>2 数据持久层</a:t>
             </a:r>
@@ -14562,13 +14242,12 @@
             <a:avLst/>
           </a:prstGeom>
           <a:noFill/>
-          <a:ln/>
-        </p:spPr>
-        <p:txBody>
-          <a:bodyPr wrap="square" rtlCol="0" anchor="ctr"/>
-          <a:lstStyle/>
-          <a:p>
-            <a:pPr indent="0" marL="0">
+        </p:spPr>
+        <p:txBody>
+          <a:bodyPr wrap="square" rtlCol="0" anchor="ctr"/>
+          <a:lstStyle/>
+          <a:p>
+            <a:pPr marL="0" indent="0">
               <a:buNone/>
             </a:pPr>
             <a:r>
@@ -14576,9 +14255,9 @@
                 <a:solidFill>
                   <a:srgbClr val="E8E8E8"/>
                 </a:solidFill>
-                <a:latin typeface="Arial" pitchFamily="34" charset="0"/>
-                <a:ea typeface="Arial" pitchFamily="34" charset="-122"/>
-                <a:cs typeface="Arial" pitchFamily="34" charset="-120"/>
+                <a:latin typeface="Arial" panose="020B0604020202020204" pitchFamily="34" charset="0"/>
+                <a:ea typeface="Arial" panose="020B0604020202020204" pitchFamily="34" charset="-122"/>
+                <a:cs typeface="Arial" panose="020B0604020202020204" pitchFamily="34" charset="-120"/>
               </a:rPr>
               <a:t>MyBatis-Plus+MySQL加密</a:t>
             </a:r>
@@ -14603,7 +14282,6 @@
           <a:solidFill>
             <a:srgbClr val="2C3E50"/>
           </a:solidFill>
-          <a:ln/>
         </p:spPr>
       </p:sp>
       <p:sp>
@@ -14621,13 +14299,12 @@
             <a:avLst/>
           </a:prstGeom>
           <a:noFill/>
-          <a:ln/>
-        </p:spPr>
-        <p:txBody>
-          <a:bodyPr wrap="square" rtlCol="0" anchor="ctr"/>
-          <a:lstStyle/>
-          <a:p>
-            <a:pPr indent="0" marL="0">
+        </p:spPr>
+        <p:txBody>
+          <a:bodyPr wrap="square" rtlCol="0" anchor="ctr"/>
+          <a:lstStyle/>
+          <a:p>
+            <a:pPr marL="0" indent="0">
               <a:buNone/>
             </a:pPr>
             <a:r>
@@ -14635,9 +14312,9 @@
                 <a:solidFill>
                   <a:srgbClr val="FFFFFF"/>
                 </a:solidFill>
-                <a:latin typeface="Arial" pitchFamily="34" charset="0"/>
-                <a:ea typeface="Arial" pitchFamily="34" charset="-122"/>
-                <a:cs typeface="Arial" pitchFamily="34" charset="-120"/>
+                <a:latin typeface="Arial" panose="020B0604020202020204" pitchFamily="34" charset="0"/>
+                <a:ea typeface="Arial" panose="020B0604020202020204" pitchFamily="34" charset="-122"/>
+                <a:cs typeface="Arial" panose="020B0604020202020204" pitchFamily="34" charset="-120"/>
               </a:rPr>
               <a:t>1 基础设施</a:t>
             </a:r>
@@ -14660,13 +14337,12 @@
             <a:avLst/>
           </a:prstGeom>
           <a:noFill/>
-          <a:ln/>
-        </p:spPr>
-        <p:txBody>
-          <a:bodyPr wrap="square" rtlCol="0" anchor="ctr"/>
-          <a:lstStyle/>
-          <a:p>
-            <a:pPr indent="0" marL="0">
+        </p:spPr>
+        <p:txBody>
+          <a:bodyPr wrap="square" rtlCol="0" anchor="ctr"/>
+          <a:lstStyle/>
+          <a:p>
+            <a:pPr marL="0" indent="0">
               <a:buNone/>
             </a:pPr>
             <a:r>
@@ -14674,9 +14350,9 @@
                 <a:solidFill>
                   <a:srgbClr val="E8E8E8"/>
                 </a:solidFill>
-                <a:latin typeface="Arial" pitchFamily="34" charset="0"/>
-                <a:ea typeface="Arial" pitchFamily="34" charset="-122"/>
-                <a:cs typeface="Arial" pitchFamily="34" charset="-120"/>
+                <a:latin typeface="Arial" panose="020B0604020202020204" pitchFamily="34" charset="0"/>
+                <a:ea typeface="Arial" panose="020B0604020202020204" pitchFamily="34" charset="-122"/>
+                <a:cs typeface="Arial" panose="020B0604020202020204" pitchFamily="34" charset="-120"/>
               </a:rPr>
               <a:t>Docker容器化</a:t>
             </a:r>
@@ -14699,13 +14375,12 @@
             <a:avLst/>
           </a:prstGeom>
           <a:noFill/>
-          <a:ln/>
-        </p:spPr>
-        <p:txBody>
-          <a:bodyPr wrap="square" rtlCol="0" anchor="ctr"/>
-          <a:lstStyle/>
-          <a:p>
-            <a:pPr indent="0" marL="0">
+        </p:spPr>
+        <p:txBody>
+          <a:bodyPr wrap="square" rtlCol="0" anchor="ctr"/>
+          <a:lstStyle/>
+          <a:p>
+            <a:pPr marL="0" indent="0">
               <a:buNone/>
             </a:pPr>
             <a:r>
@@ -14713,9 +14388,9 @@
                 <a:solidFill>
                   <a:srgbClr val="2C3E50"/>
                 </a:solidFill>
-                <a:latin typeface="Arial" pitchFamily="34" charset="0"/>
-                <a:ea typeface="Arial" pitchFamily="34" charset="-122"/>
-                <a:cs typeface="Arial" pitchFamily="34" charset="-120"/>
+                <a:latin typeface="Arial" panose="020B0604020202020204" pitchFamily="34" charset="0"/>
+                <a:ea typeface="Arial" panose="020B0604020202020204" pitchFamily="34" charset="-122"/>
+                <a:cs typeface="Arial" panose="020B0604020202020204" pitchFamily="34" charset="-120"/>
               </a:rPr>
               <a:t>MCP-Skill核心特性</a:t>
             </a:r>
@@ -14738,13 +14413,12 @@
             <a:avLst/>
           </a:prstGeom>
           <a:noFill/>
-          <a:ln/>
-        </p:spPr>
-        <p:txBody>
-          <a:bodyPr wrap="square" rtlCol="0" anchor="ctr"/>
-          <a:lstStyle/>
-          <a:p>
-            <a:pPr indent="0" marL="0">
+        </p:spPr>
+        <p:txBody>
+          <a:bodyPr wrap="square" rtlCol="0" anchor="ctr"/>
+          <a:lstStyle/>
+          <a:p>
+            <a:pPr marL="0" indent="0">
               <a:buNone/>
             </a:pPr>
             <a:r>
@@ -14752,9 +14426,9 @@
                 <a:solidFill>
                   <a:srgbClr val="34495E"/>
                 </a:solidFill>
-                <a:latin typeface="Arial" pitchFamily="34" charset="0"/>
-                <a:ea typeface="Arial" pitchFamily="34" charset="-122"/>
-                <a:cs typeface="Arial" pitchFamily="34" charset="-120"/>
+                <a:latin typeface="Arial" panose="020B0604020202020204" pitchFamily="34" charset="0"/>
+                <a:ea typeface="Arial" panose="020B0604020202020204" pitchFamily="34" charset="-122"/>
+                <a:cs typeface="Arial" panose="020B0604020202020204" pitchFamily="34" charset="-120"/>
               </a:rPr>
               <a:t>① 标准化接口+ 动态注册</a:t>
             </a:r>
@@ -14777,13 +14451,12 @@
             <a:avLst/>
           </a:prstGeom>
           <a:noFill/>
-          <a:ln/>
-        </p:spPr>
-        <p:txBody>
-          <a:bodyPr wrap="square" rtlCol="0" anchor="ctr"/>
-          <a:lstStyle/>
-          <a:p>
-            <a:pPr indent="0" marL="0">
+        </p:spPr>
+        <p:txBody>
+          <a:bodyPr wrap="square" rtlCol="0" anchor="ctr"/>
+          <a:lstStyle/>
+          <a:p>
+            <a:pPr marL="0" indent="0">
               <a:buNone/>
             </a:pPr>
             <a:r>
@@ -14791,9 +14464,9 @@
                 <a:solidFill>
                   <a:srgbClr val="34495E"/>
                 </a:solidFill>
-                <a:latin typeface="Arial" pitchFamily="34" charset="0"/>
-                <a:ea typeface="Arial" pitchFamily="34" charset="-122"/>
-                <a:cs typeface="Arial" pitchFamily="34" charset="-120"/>
+                <a:latin typeface="Arial" panose="020B0604020202020204" pitchFamily="34" charset="0"/>
+                <a:ea typeface="Arial" panose="020B0604020202020204" pitchFamily="34" charset="-122"/>
+                <a:cs typeface="Arial" panose="020B0604020202020204" pitchFamily="34" charset="-120"/>
               </a:rPr>
               <a:t>② 安全分级：QUERY/执行两阶段</a:t>
             </a:r>
@@ -14816,13 +14489,12 @@
             <a:avLst/>
           </a:prstGeom>
           <a:noFill/>
-          <a:ln/>
-        </p:spPr>
-        <p:txBody>
-          <a:bodyPr wrap="square" rtlCol="0" anchor="ctr"/>
-          <a:lstStyle/>
-          <a:p>
-            <a:pPr indent="0" marL="0">
+        </p:spPr>
+        <p:txBody>
+          <a:bodyPr wrap="square" rtlCol="0" anchor="ctr"/>
+          <a:lstStyle/>
+          <a:p>
+            <a:pPr marL="0" indent="0">
               <a:buNone/>
             </a:pPr>
             <a:r>
@@ -14830,9 +14502,9 @@
                 <a:solidFill>
                   <a:srgbClr val="34495E"/>
                 </a:solidFill>
-                <a:latin typeface="Arial" pitchFamily="34" charset="0"/>
-                <a:ea typeface="Arial" pitchFamily="34" charset="-122"/>
-                <a:cs typeface="Arial" pitchFamily="34" charset="-120"/>
+                <a:latin typeface="Arial" panose="020B0604020202020204" pitchFamily="34" charset="0"/>
+                <a:ea typeface="Arial" panose="020B0604020202020204" pitchFamily="34" charset="-122"/>
+                <a:cs typeface="Arial" panose="020B0604020202020204" pitchFamily="34" charset="-120"/>
               </a:rPr>
               <a:t>③ 结构化返回：回复+数据+导航</a:t>
             </a:r>
@@ -14855,13 +14527,12 @@
             <a:avLst/>
           </a:prstGeom>
           <a:noFill/>
-          <a:ln/>
-        </p:spPr>
-        <p:txBody>
-          <a:bodyPr wrap="square" rtlCol="0" anchor="ctr"/>
-          <a:lstStyle/>
-          <a:p>
-            <a:pPr indent="0" marL="0">
+        </p:spPr>
+        <p:txBody>
+          <a:bodyPr wrap="square" rtlCol="0" anchor="ctr"/>
+          <a:lstStyle/>
+          <a:p>
+            <a:pPr marL="0" indent="0">
               <a:buNone/>
             </a:pPr>
             <a:r>
@@ -14869,9 +14540,9 @@
                 <a:solidFill>
                   <a:srgbClr val="34495E"/>
                 </a:solidFill>
-                <a:latin typeface="Arial" pitchFamily="34" charset="0"/>
-                <a:ea typeface="Arial" pitchFamily="34" charset="-122"/>
-                <a:cs typeface="Arial" pitchFamily="34" charset="-120"/>
+                <a:latin typeface="Arial" panose="020B0604020202020204" pitchFamily="34" charset="0"/>
+                <a:ea typeface="Arial" panose="020B0604020202020204" pitchFamily="34" charset="-122"/>
+                <a:cs typeface="Arial" panose="020B0604020202020204" pitchFamily="34" charset="-120"/>
               </a:rPr>
               <a:t>④ LLM无关设计：当前规则，未来可切LLM</a:t>
             </a:r>
@@ -14894,13 +14565,12 @@
             <a:avLst/>
           </a:prstGeom>
           <a:noFill/>
-          <a:ln/>
-        </p:spPr>
-        <p:txBody>
-          <a:bodyPr wrap="square" rtlCol="0" anchor="ctr"/>
-          <a:lstStyle/>
-          <a:p>
-            <a:pPr indent="0" marL="0">
+        </p:spPr>
+        <p:txBody>
+          <a:bodyPr wrap="square" rtlCol="0" anchor="ctr"/>
+          <a:lstStyle/>
+          <a:p>
+            <a:pPr marL="0" indent="0">
               <a:buNone/>
             </a:pPr>
             <a:r>
@@ -14908,9 +14578,9 @@
                 <a:solidFill>
                   <a:srgbClr val="2C3E50"/>
                 </a:solidFill>
-                <a:latin typeface="Arial" pitchFamily="34" charset="0"/>
-                <a:ea typeface="Arial" pitchFamily="34" charset="-122"/>
-                <a:cs typeface="Arial" pitchFamily="34" charset="-120"/>
+                <a:latin typeface="Arial" panose="020B0604020202020204" pitchFamily="34" charset="0"/>
+                <a:ea typeface="Arial" panose="020B0604020202020204" pitchFamily="34" charset="-122"/>
+                <a:cs typeface="Arial" panose="020B0604020202020204" pitchFamily="34" charset="-120"/>
               </a:rPr>
               <a:t>安全保护</a:t>
             </a:r>
@@ -14933,13 +14603,12 @@
             <a:avLst/>
           </a:prstGeom>
           <a:noFill/>
-          <a:ln/>
-        </p:spPr>
-        <p:txBody>
-          <a:bodyPr wrap="square" rtlCol="0" anchor="ctr"/>
-          <a:lstStyle/>
-          <a:p>
-            <a:pPr indent="0" marL="0">
+        </p:spPr>
+        <p:txBody>
+          <a:bodyPr wrap="square" rtlCol="0" anchor="ctr"/>
+          <a:lstStyle/>
+          <a:p>
+            <a:pPr marL="0" indent="0">
               <a:buNone/>
             </a:pPr>
             <a:r>
@@ -14947,9 +14616,9 @@
                 <a:solidFill>
                   <a:srgbClr val="34495E"/>
                 </a:solidFill>
-                <a:latin typeface="Arial" pitchFamily="34" charset="0"/>
-                <a:ea typeface="Arial" pitchFamily="34" charset="-122"/>
-                <a:cs typeface="Arial" pitchFamily="34" charset="-120"/>
+                <a:latin typeface="Arial" panose="020B0604020202020204" pitchFamily="34" charset="0"/>
+                <a:ea typeface="Arial" panose="020B0604020202020204" pitchFamily="34" charset="-122"/>
+                <a:cs typeface="Arial" panose="020B0604020202020204" pitchFamily="34" charset="-120"/>
               </a:rPr>
               <a:t>身份认证 | 数据加密(bcrypt+AES) | 防攻击(锁定+30s防重复) | AOP审计日志</a:t>
             </a:r>
@@ -14972,13 +14641,12 @@
             <a:avLst/>
           </a:prstGeom>
           <a:noFill/>
-          <a:ln/>
-        </p:spPr>
-        <p:txBody>
-          <a:bodyPr wrap="square" rtlCol="0" anchor="ctr"/>
-          <a:lstStyle/>
-          <a:p>
-            <a:pPr indent="0" marL="0">
+        </p:spPr>
+        <p:txBody>
+          <a:bodyPr wrap="square" rtlCol="0" anchor="ctr"/>
+          <a:lstStyle/>
+          <a:p>
+            <a:pPr marL="0" indent="0">
               <a:buNone/>
             </a:pPr>
             <a:r>
@@ -14986,9 +14654,9 @@
                 <a:solidFill>
                   <a:srgbClr val="2C3E50"/>
                 </a:solidFill>
-                <a:latin typeface="Arial" pitchFamily="34" charset="0"/>
-                <a:ea typeface="Arial" pitchFamily="34" charset="-122"/>
-                <a:cs typeface="Arial" pitchFamily="34" charset="-120"/>
+                <a:latin typeface="Arial" panose="020B0604020202020204" pitchFamily="34" charset="0"/>
+                <a:ea typeface="Arial" panose="020B0604020202020204" pitchFamily="34" charset="-122"/>
+                <a:cs typeface="Arial" panose="020B0604020202020204" pitchFamily="34" charset="-120"/>
               </a:rPr>
               <a:t>AI能力</a:t>
             </a:r>
@@ -15011,13 +14679,12 @@
             <a:avLst/>
           </a:prstGeom>
           <a:noFill/>
-          <a:ln/>
-        </p:spPr>
-        <p:txBody>
-          <a:bodyPr wrap="square" rtlCol="0" anchor="ctr"/>
-          <a:lstStyle/>
-          <a:p>
-            <a:pPr indent="0" marL="0">
+        </p:spPr>
+        <p:txBody>
+          <a:bodyPr wrap="square" rtlCol="0" anchor="ctr"/>
+          <a:lstStyle/>
+          <a:p>
+            <a:pPr marL="0" indent="0">
               <a:buNone/>
             </a:pPr>
             <a:r>
@@ -15025,9 +14692,9 @@
                 <a:solidFill>
                   <a:srgbClr val="34495E"/>
                 </a:solidFill>
-                <a:latin typeface="Arial" pitchFamily="34" charset="0"/>
-                <a:ea typeface="Arial" pitchFamily="34" charset="-122"/>
-                <a:cs typeface="Arial" pitchFamily="34" charset="-120"/>
+                <a:latin typeface="Arial" panose="020B0604020202020204" pitchFamily="34" charset="0"/>
+                <a:ea typeface="Arial" panose="020B0604020202020204" pitchFamily="34" charset="-122"/>
+                <a:cs typeface="Arial" panose="020B0604020202020204" pitchFamily="34" charset="-120"/>
               </a:rPr>
               <a:t>智能客服 | 消费分析(10类+月报) | AI洞察引擎</a:t>
             </a:r>
@@ -15050,13 +14717,12 @@
             <a:avLst/>
           </a:prstGeom>
           <a:noFill/>
-          <a:ln/>
-        </p:spPr>
-        <p:txBody>
-          <a:bodyPr wrap="square" rtlCol="0" anchor="ctr"/>
-          <a:lstStyle/>
-          <a:p>
-            <a:pPr indent="0" marL="0">
+        </p:spPr>
+        <p:txBody>
+          <a:bodyPr wrap="square" rtlCol="0" anchor="ctr"/>
+          <a:lstStyle/>
+          <a:p>
+            <a:pPr marL="0" indent="0">
               <a:buNone/>
             </a:pPr>
             <a:r>
@@ -15064,9 +14730,9 @@
                 <a:solidFill>
                   <a:srgbClr val="7F8C8D"/>
                 </a:solidFill>
-                <a:latin typeface="Arial" pitchFamily="34" charset="0"/>
-                <a:ea typeface="Arial" pitchFamily="34" charset="-122"/>
-                <a:cs typeface="Arial" pitchFamily="34" charset="-120"/>
+                <a:latin typeface="Arial" panose="020B0604020202020204" pitchFamily="34" charset="0"/>
+                <a:ea typeface="Arial" panose="020B0604020202020204" pitchFamily="34" charset="-122"/>
+                <a:cs typeface="Arial" panose="020B0604020202020204" pitchFamily="34" charset="-120"/>
               </a:rPr>
               <a:t>※ MCP-Skill=自研AI能力封装框架：意图推理与业务执行解耦</a:t>
             </a:r>
@@ -15091,7 +14757,6 @@
           <a:solidFill>
             <a:srgbClr val="EBF5FB"/>
           </a:solidFill>
-          <a:ln/>
         </p:spPr>
       </p:sp>
       <p:sp>
@@ -15109,13 +14774,12 @@
             <a:avLst/>
           </a:prstGeom>
           <a:noFill/>
-          <a:ln/>
-        </p:spPr>
-        <p:txBody>
-          <a:bodyPr wrap="square" rtlCol="0" anchor="ctr"/>
-          <a:lstStyle/>
-          <a:p>
-            <a:pPr algn="ctr" indent="0" marL="0">
+        </p:spPr>
+        <p:txBody>
+          <a:bodyPr wrap="square" rtlCol="0" anchor="ctr"/>
+          <a:lstStyle/>
+          <a:p>
+            <a:pPr marL="0" indent="0" algn="ctr">
               <a:buNone/>
             </a:pPr>
             <a:r>
@@ -15123,9 +14787,9 @@
                 <a:solidFill>
                   <a:srgbClr val="1A5276"/>
                 </a:solidFill>
-                <a:latin typeface="Arial" pitchFamily="34" charset="0"/>
-                <a:ea typeface="Arial" pitchFamily="34" charset="-122"/>
-                <a:cs typeface="Arial" pitchFamily="34" charset="-120"/>
+                <a:latin typeface="Arial" panose="020B0604020202020204" pitchFamily="34" charset="0"/>
+                <a:ea typeface="Arial" panose="020B0604020202020204" pitchFamily="34" charset="-122"/>
+                <a:cs typeface="Arial" panose="020B0604020202020204" pitchFamily="34" charset="-120"/>
               </a:rPr>
               <a:t>信任陷阱案例：交易金额方向符号——详见下一页“真实挑战”篇章</a:t>
             </a:r>
@@ -15148,13 +14812,12 @@
             <a:avLst/>
           </a:prstGeom>
           <a:noFill/>
-          <a:ln/>
-        </p:spPr>
-        <p:txBody>
-          <a:bodyPr wrap="square" rtlCol="0" anchor="ctr"/>
-          <a:lstStyle/>
-          <a:p>
-            <a:pPr algn="r" indent="0" marL="0">
+        </p:spPr>
+        <p:txBody>
+          <a:bodyPr wrap="square" rtlCol="0" anchor="ctr"/>
+          <a:lstStyle/>
+          <a:p>
+            <a:pPr marL="0" indent="0" algn="r">
               <a:buNone/>
             </a:pPr>
             <a:r>
@@ -15162,9 +14825,9 @@
                 <a:solidFill>
                   <a:srgbClr val="7F8C8D"/>
                 </a:solidFill>
-                <a:latin typeface="Arial" pitchFamily="34" charset="0"/>
-                <a:ea typeface="Arial" pitchFamily="34" charset="-122"/>
-                <a:cs typeface="Arial" pitchFamily="34" charset="-120"/>
+                <a:latin typeface="Arial" panose="020B0604020202020204" pitchFamily="34" charset="0"/>
+                <a:ea typeface="Arial" panose="020B0604020202020204" pitchFamily="34" charset="-122"/>
+                <a:cs typeface="Arial" panose="020B0604020202020204" pitchFamily="34" charset="-120"/>
               </a:rPr>
               <a:t>▸ 接下来：技术架构背后的真实挑战与应对</a:t>
             </a:r>
@@ -15187,13 +14850,12 @@
             <a:avLst/>
           </a:prstGeom>
           <a:noFill/>
-          <a:ln/>
-        </p:spPr>
-        <p:txBody>
-          <a:bodyPr wrap="square" rtlCol="0" anchor="ctr"/>
-          <a:lstStyle/>
-          <a:p>
-            <a:pPr algn="l" indent="0" marL="0">
+        </p:spPr>
+        <p:txBody>
+          <a:bodyPr wrap="square" rtlCol="0" anchor="ctr"/>
+          <a:lstStyle/>
+          <a:p>
+            <a:pPr marL="0" indent="0" algn="l">
               <a:buNone/>
             </a:pPr>
             <a:r>
@@ -15201,9 +14863,9 @@
                 <a:solidFill>
                   <a:srgbClr val="4A90E2"/>
                 </a:solidFill>
-                <a:latin typeface="Arial" pitchFamily="34" charset="0"/>
-                <a:ea typeface="Arial" pitchFamily="34" charset="-122"/>
-                <a:cs typeface="Arial" pitchFamily="34" charset="-120"/>
+                <a:latin typeface="Arial" panose="020B0604020202020204" pitchFamily="34" charset="0"/>
+                <a:ea typeface="Arial" panose="020B0604020202020204" pitchFamily="34" charset="-122"/>
+                <a:cs typeface="Arial" panose="020B0604020202020204" pitchFamily="34" charset="-120"/>
               </a:rPr>
               <a:t>→</a:t>
             </a:r>
@@ -15262,7 +14924,7 @@
     </a:clrScheme>
     <a:fontScheme name="Office">
       <a:majorFont>
-        <a:latin typeface="Calibri Light" panose="020F0302020204030204"/>
+        <a:latin typeface="Calibri Light"/>
         <a:ea typeface=""/>
         <a:cs typeface=""/>
         <a:font script="Jpan" typeface="游ゴシック Light"/>
@@ -15295,26 +14957,9 @@
         <a:font script="Viet" typeface="Times New Roman"/>
         <a:font script="Uigh" typeface="Microsoft Uighur"/>
         <a:font script="Geor" typeface="Sylfaen"/>
-        <a:font script="Armn" typeface="Arial"/>
-        <a:font script="Bugi" typeface="Leelawadee UI"/>
-        <a:font script="Bopo" typeface="Microsoft JhengHei"/>
-        <a:font script="Java" typeface="Javanese Text"/>
-        <a:font script="Lisu" typeface="Segoe UI"/>
-        <a:font script="Mymr" typeface="Myanmar Text"/>
-        <a:font script="Nkoo" typeface="Ebrima"/>
-        <a:font script="Olck" typeface="Nirmala UI"/>
-        <a:font script="Osma" typeface="Ebrima"/>
-        <a:font script="Phag" typeface="Phagspa"/>
-        <a:font script="Syrn" typeface="Estrangelo Edessa"/>
-        <a:font script="Syrj" typeface="Estrangelo Edessa"/>
-        <a:font script="Syre" typeface="Estrangelo Edessa"/>
-        <a:font script="Sora" typeface="Nirmala UI"/>
-        <a:font script="Tale" typeface="Microsoft Tai Le"/>
-        <a:font script="Talu" typeface="Microsoft New Tai Lue"/>
-        <a:font script="Tfng" typeface="Ebrima"/>
       </a:majorFont>
       <a:minorFont>
-        <a:latin typeface="Calibri" panose="020F0502020204030204"/>
+        <a:latin typeface="Calibri"/>
         <a:ea typeface=""/>
         <a:cs typeface=""/>
         <a:font script="Jpan" typeface="游ゴシック"/>
@@ -15347,23 +14992,6 @@
         <a:font script="Viet" typeface="Arial"/>
         <a:font script="Uigh" typeface="Microsoft Uighur"/>
         <a:font script="Geor" typeface="Sylfaen"/>
-        <a:font script="Armn" typeface="Arial"/>
-        <a:font script="Bugi" typeface="Leelawadee UI"/>
-        <a:font script="Bopo" typeface="Microsoft JhengHei"/>
-        <a:font script="Java" typeface="Javanese Text"/>
-        <a:font script="Lisu" typeface="Segoe UI"/>
-        <a:font script="Mymr" typeface="Myanmar Text"/>
-        <a:font script="Nkoo" typeface="Ebrima"/>
-        <a:font script="Olck" typeface="Nirmala UI"/>
-        <a:font script="Osma" typeface="Ebrima"/>
-        <a:font script="Phag" typeface="Phagspa"/>
-        <a:font script="Syrn" typeface="Estrangelo Edessa"/>
-        <a:font script="Syrj" typeface="Estrangelo Edessa"/>
-        <a:font script="Syre" typeface="Estrangelo Edessa"/>
-        <a:font script="Sora" typeface="Nirmala UI"/>
-        <a:font script="Tale" typeface="Microsoft Tai Le"/>
-        <a:font script="Talu" typeface="Microsoft New Tai Lue"/>
-        <a:font script="Tfng" typeface="Ebrima"/>
       </a:minorFont>
     </a:fontScheme>
     <a:fmtScheme name="Office">
@@ -15504,8 +15132,265 @@
       </a:bgFillStyleLst>
     </a:fmtScheme>
   </a:themeElements>
-  <a:objectDefaults/>
-  <a:extraClrSchemeLst/>
+  <a:extLst>
+    <a:ext uri="{05A4C25C-085E-4340-85A3-A5531E510DB2}">
+      <thm15:themeFamily xmlns:thm15="http://schemas.microsoft.com/office/thememl/2012/main" name="Office Theme" id="{62F939B6-93AF-4DB8-9C6B-D6C7DFDC589F}" vid="{4A3C46E8-61CC-4603-A589-7422A47A8E4A}"/>
+    </a:ext>
+  </a:extLst>
+</a:theme>
+</file>
+
+<file path=ppt/theme/theme2.xml><?xml version="1.0" encoding="utf-8"?>
+<a:theme xmlns:a="http://schemas.openxmlformats.org/drawingml/2006/main" name="Office Theme">
+  <a:themeElements>
+    <a:clrScheme name="Office">
+      <a:dk1>
+        <a:sysClr val="windowText" lastClr="000000"/>
+      </a:dk1>
+      <a:lt1>
+        <a:sysClr val="window" lastClr="FFFFFF"/>
+      </a:lt1>
+      <a:dk2>
+        <a:srgbClr val="44546A"/>
+      </a:dk2>
+      <a:lt2>
+        <a:srgbClr val="E7E6E6"/>
+      </a:lt2>
+      <a:accent1>
+        <a:srgbClr val="4472C4"/>
+      </a:accent1>
+      <a:accent2>
+        <a:srgbClr val="ED7D31"/>
+      </a:accent2>
+      <a:accent3>
+        <a:srgbClr val="A5A5A5"/>
+      </a:accent3>
+      <a:accent4>
+        <a:srgbClr val="FFC000"/>
+      </a:accent4>
+      <a:accent5>
+        <a:srgbClr val="5B9BD5"/>
+      </a:accent5>
+      <a:accent6>
+        <a:srgbClr val="70AD47"/>
+      </a:accent6>
+      <a:hlink>
+        <a:srgbClr val="0563C1"/>
+      </a:hlink>
+      <a:folHlink>
+        <a:srgbClr val="954F72"/>
+      </a:folHlink>
+    </a:clrScheme>
+    <a:fontScheme name="Office">
+      <a:majorFont>
+        <a:latin typeface="Calibri Light"/>
+        <a:ea typeface=""/>
+        <a:cs typeface=""/>
+        <a:font script="Jpan" typeface="游ゴシック Light"/>
+        <a:font script="Hang" typeface="맑은 고딕"/>
+        <a:font script="Hans" typeface="等线 Light"/>
+        <a:font script="Hant" typeface="新細明體"/>
+        <a:font script="Arab" typeface="Times New Roman"/>
+        <a:font script="Hebr" typeface="Times New Roman"/>
+        <a:font script="Thai" typeface="Angsana New"/>
+        <a:font script="Ethi" typeface="Nyala"/>
+        <a:font script="Beng" typeface="Vrinda"/>
+        <a:font script="Gujr" typeface="Shruti"/>
+        <a:font script="Khmr" typeface="MoolBoran"/>
+        <a:font script="Knda" typeface="Tunga"/>
+        <a:font script="Guru" typeface="Raavi"/>
+        <a:font script="Cans" typeface="Euphemia"/>
+        <a:font script="Cher" typeface="Plantagenet Cherokee"/>
+        <a:font script="Yiii" typeface="Microsoft Yi Baiti"/>
+        <a:font script="Tibt" typeface="Microsoft Himalaya"/>
+        <a:font script="Thaa" typeface="MV Boli"/>
+        <a:font script="Deva" typeface="Mangal"/>
+        <a:font script="Telu" typeface="Gautami"/>
+        <a:font script="Taml" typeface="Latha"/>
+        <a:font script="Syrc" typeface="Estrangelo Edessa"/>
+        <a:font script="Orya" typeface="Kalinga"/>
+        <a:font script="Mlym" typeface="Kartika"/>
+        <a:font script="Laoo" typeface="DokChampa"/>
+        <a:font script="Sinh" typeface="Iskoola Pota"/>
+        <a:font script="Mong" typeface="Mongolian Baiti"/>
+        <a:font script="Viet" typeface="Times New Roman"/>
+        <a:font script="Uigh" typeface="Microsoft Uighur"/>
+        <a:font script="Geor" typeface="Sylfaen"/>
+      </a:majorFont>
+      <a:minorFont>
+        <a:latin typeface="Calibri"/>
+        <a:ea typeface=""/>
+        <a:cs typeface=""/>
+        <a:font script="Jpan" typeface="游ゴシック"/>
+        <a:font script="Hang" typeface="맑은 고딕"/>
+        <a:font script="Hans" typeface="等线"/>
+        <a:font script="Hant" typeface="新細明體"/>
+        <a:font script="Arab" typeface="Arial"/>
+        <a:font script="Hebr" typeface="Arial"/>
+        <a:font script="Thai" typeface="Cordia New"/>
+        <a:font script="Ethi" typeface="Nyala"/>
+        <a:font script="Beng" typeface="Vrinda"/>
+        <a:font script="Gujr" typeface="Shruti"/>
+        <a:font script="Khmr" typeface="DaunPenh"/>
+        <a:font script="Knda" typeface="Tunga"/>
+        <a:font script="Guru" typeface="Raavi"/>
+        <a:font script="Cans" typeface="Euphemia"/>
+        <a:font script="Cher" typeface="Plantagenet Cherokee"/>
+        <a:font script="Yiii" typeface="Microsoft Yi Baiti"/>
+        <a:font script="Tibt" typeface="Microsoft Himalaya"/>
+        <a:font script="Thaa" typeface="MV Boli"/>
+        <a:font script="Deva" typeface="Mangal"/>
+        <a:font script="Telu" typeface="Gautami"/>
+        <a:font script="Taml" typeface="Latha"/>
+        <a:font script="Syrc" typeface="Estrangelo Edessa"/>
+        <a:font script="Orya" typeface="Kalinga"/>
+        <a:font script="Mlym" typeface="Kartika"/>
+        <a:font script="Laoo" typeface="DokChampa"/>
+        <a:font script="Sinh" typeface="Iskoola Pota"/>
+        <a:font script="Mong" typeface="Mongolian Baiti"/>
+        <a:font script="Viet" typeface="Arial"/>
+        <a:font script="Uigh" typeface="Microsoft Uighur"/>
+        <a:font script="Geor" typeface="Sylfaen"/>
+      </a:minorFont>
+    </a:fontScheme>
+    <a:fmtScheme name="Office">
+      <a:fillStyleLst>
+        <a:solidFill>
+          <a:schemeClr val="phClr"/>
+        </a:solidFill>
+        <a:gradFill rotWithShape="1">
+          <a:gsLst>
+            <a:gs pos="0">
+              <a:schemeClr val="phClr">
+                <a:lumMod val="110000"/>
+                <a:satMod val="105000"/>
+                <a:tint val="67000"/>
+              </a:schemeClr>
+            </a:gs>
+            <a:gs pos="50000">
+              <a:schemeClr val="phClr">
+                <a:lumMod val="105000"/>
+                <a:satMod val="103000"/>
+                <a:tint val="73000"/>
+              </a:schemeClr>
+            </a:gs>
+            <a:gs pos="100000">
+              <a:schemeClr val="phClr">
+                <a:lumMod val="105000"/>
+                <a:satMod val="109000"/>
+                <a:tint val="81000"/>
+              </a:schemeClr>
+            </a:gs>
+          </a:gsLst>
+          <a:lin ang="5400000" scaled="0"/>
+        </a:gradFill>
+        <a:gradFill rotWithShape="1">
+          <a:gsLst>
+            <a:gs pos="0">
+              <a:schemeClr val="phClr">
+                <a:satMod val="103000"/>
+                <a:lumMod val="102000"/>
+                <a:tint val="94000"/>
+              </a:schemeClr>
+            </a:gs>
+            <a:gs pos="50000">
+              <a:schemeClr val="phClr">
+                <a:satMod val="110000"/>
+                <a:lumMod val="100000"/>
+                <a:shade val="100000"/>
+              </a:schemeClr>
+            </a:gs>
+            <a:gs pos="100000">
+              <a:schemeClr val="phClr">
+                <a:lumMod val="99000"/>
+                <a:satMod val="120000"/>
+                <a:shade val="78000"/>
+              </a:schemeClr>
+            </a:gs>
+          </a:gsLst>
+          <a:lin ang="5400000" scaled="0"/>
+        </a:gradFill>
+      </a:fillStyleLst>
+      <a:lnStyleLst>
+        <a:ln w="6350" cap="flat" cmpd="sng" algn="ctr">
+          <a:solidFill>
+            <a:schemeClr val="phClr"/>
+          </a:solidFill>
+          <a:prstDash val="solid"/>
+          <a:miter lim="800000"/>
+        </a:ln>
+        <a:ln w="12700" cap="flat" cmpd="sng" algn="ctr">
+          <a:solidFill>
+            <a:schemeClr val="phClr"/>
+          </a:solidFill>
+          <a:prstDash val="solid"/>
+          <a:miter lim="800000"/>
+        </a:ln>
+        <a:ln w="19050" cap="flat" cmpd="sng" algn="ctr">
+          <a:solidFill>
+            <a:schemeClr val="phClr"/>
+          </a:solidFill>
+          <a:prstDash val="solid"/>
+          <a:miter lim="800000"/>
+        </a:ln>
+      </a:lnStyleLst>
+      <a:effectStyleLst>
+        <a:effectStyle>
+          <a:effectLst/>
+        </a:effectStyle>
+        <a:effectStyle>
+          <a:effectLst/>
+        </a:effectStyle>
+        <a:effectStyle>
+          <a:effectLst>
+            <a:outerShdw blurRad="57150" dist="19050" dir="5400000" algn="ctr" rotWithShape="0">
+              <a:srgbClr val="000000">
+                <a:alpha val="63000"/>
+              </a:srgbClr>
+            </a:outerShdw>
+          </a:effectLst>
+        </a:effectStyle>
+      </a:effectStyleLst>
+      <a:bgFillStyleLst>
+        <a:solidFill>
+          <a:schemeClr val="phClr"/>
+        </a:solidFill>
+        <a:solidFill>
+          <a:schemeClr val="phClr">
+            <a:tint val="95000"/>
+            <a:satMod val="170000"/>
+          </a:schemeClr>
+        </a:solidFill>
+        <a:gradFill rotWithShape="1">
+          <a:gsLst>
+            <a:gs pos="0">
+              <a:schemeClr val="phClr">
+                <a:tint val="93000"/>
+                <a:satMod val="150000"/>
+                <a:shade val="98000"/>
+                <a:lumMod val="102000"/>
+              </a:schemeClr>
+            </a:gs>
+            <a:gs pos="50000">
+              <a:schemeClr val="phClr">
+                <a:tint val="98000"/>
+                <a:satMod val="130000"/>
+                <a:shade val="90000"/>
+                <a:lumMod val="103000"/>
+              </a:schemeClr>
+            </a:gs>
+            <a:gs pos="100000">
+              <a:schemeClr val="phClr">
+                <a:shade val="63000"/>
+                <a:satMod val="120000"/>
+              </a:schemeClr>
+            </a:gs>
+          </a:gsLst>
+          <a:lin ang="5400000" scaled="0"/>
+        </a:gradFill>
+      </a:bgFillStyleLst>
+    </a:fmtScheme>
+  </a:themeElements>
   <a:extLst>
     <a:ext uri="{05A4C25C-085E-4340-85A3-A5531E510DB2}">
       <thm15:themeFamily xmlns:thm15="http://schemas.microsoft.com/office/thememl/2012/main" name="Office Theme" id="{62F939B6-93AF-4DB8-9C6B-D6C7DFDC589F}" vid="{4A3C46E8-61CC-4603-A589-7422A47A8E4A}"/>
